--- a/assets/investor-deck/Tecnotitan-Investor-Deck-ZH.pptx
+++ b/assets/investor-deck/Tecnotitan-Investor-Deck-ZH.pptx
@@ -2,24 +2,24 @@
 <file path=ppt/presentation.xml><?xml version="1.0" encoding="utf-8"?>
 <p:presentation xmlns:p="http://schemas.openxmlformats.org/presentationml/2006/main">
   <p:sldMasterIdLst>
-    <p:sldMasterId xmlns:r="http://schemas.openxmlformats.org/officeDocument/2006/relationships" id="2147483648" r:id="R769c91270c1c49db"/>
+    <p:sldMasterId xmlns:r="http://schemas.openxmlformats.org/officeDocument/2006/relationships" id="2147483648" r:id="R8c5c47d434d74c9e"/>
   </p:sldMasterIdLst>
   <p:notesMasterIdLst>
-    <p:notesMasterId xmlns:r="http://schemas.openxmlformats.org/officeDocument/2006/relationships" r:id="R1a86205aae654708"/>
+    <p:notesMasterId xmlns:r="http://schemas.openxmlformats.org/officeDocument/2006/relationships" r:id="Rf5fab816c1c146ee"/>
   </p:notesMasterIdLst>
   <p:sldIdLst>
-    <p:sldId xmlns:r="http://schemas.openxmlformats.org/officeDocument/2006/relationships" id="256" r:id="R64f91e538e9c4fe5"/>
-    <p:sldId xmlns:r="http://schemas.openxmlformats.org/officeDocument/2006/relationships" id="257" r:id="Rec4ecab6fa804276"/>
-    <p:sldId xmlns:r="http://schemas.openxmlformats.org/officeDocument/2006/relationships" id="258" r:id="Rbe863b94cb964f1c"/>
-    <p:sldId xmlns:r="http://schemas.openxmlformats.org/officeDocument/2006/relationships" id="259" r:id="Rd684df4a78494500"/>
-    <p:sldId xmlns:r="http://schemas.openxmlformats.org/officeDocument/2006/relationships" id="260" r:id="R0e9687c34a0b46dc"/>
-    <p:sldId xmlns:r="http://schemas.openxmlformats.org/officeDocument/2006/relationships" id="261" r:id="Rd7f839da03f54326"/>
-    <p:sldId xmlns:r="http://schemas.openxmlformats.org/officeDocument/2006/relationships" id="262" r:id="R8efe12bd6af547b3"/>
-    <p:sldId xmlns:r="http://schemas.openxmlformats.org/officeDocument/2006/relationships" id="263" r:id="Ref7f54586cf24553"/>
-    <p:sldId xmlns:r="http://schemas.openxmlformats.org/officeDocument/2006/relationships" id="264" r:id="R8ccbe356bf13454c"/>
-    <p:sldId xmlns:r="http://schemas.openxmlformats.org/officeDocument/2006/relationships" id="265" r:id="R7e769f8c3b66492c"/>
-    <p:sldId xmlns:r="http://schemas.openxmlformats.org/officeDocument/2006/relationships" id="266" r:id="R14f1a6af86444b9e"/>
-    <p:sldId xmlns:r="http://schemas.openxmlformats.org/officeDocument/2006/relationships" id="267" r:id="Rd2962029210b4720"/>
+    <p:sldId xmlns:r="http://schemas.openxmlformats.org/officeDocument/2006/relationships" id="256" r:id="R5eb8786656e146d8"/>
+    <p:sldId xmlns:r="http://schemas.openxmlformats.org/officeDocument/2006/relationships" id="257" r:id="R9596b89312a54ffe"/>
+    <p:sldId xmlns:r="http://schemas.openxmlformats.org/officeDocument/2006/relationships" id="258" r:id="R7df9f5caf9004a8e"/>
+    <p:sldId xmlns:r="http://schemas.openxmlformats.org/officeDocument/2006/relationships" id="259" r:id="Re895913e9053485a"/>
+    <p:sldId xmlns:r="http://schemas.openxmlformats.org/officeDocument/2006/relationships" id="260" r:id="R898ddcf65881475c"/>
+    <p:sldId xmlns:r="http://schemas.openxmlformats.org/officeDocument/2006/relationships" id="261" r:id="R5cd12e45a4ec4d6c"/>
+    <p:sldId xmlns:r="http://schemas.openxmlformats.org/officeDocument/2006/relationships" id="262" r:id="R58cb2ba1748a4352"/>
+    <p:sldId xmlns:r="http://schemas.openxmlformats.org/officeDocument/2006/relationships" id="263" r:id="R3cdbc4bc400840fa"/>
+    <p:sldId xmlns:r="http://schemas.openxmlformats.org/officeDocument/2006/relationships" id="264" r:id="Re71c2028bc05418d"/>
+    <p:sldId xmlns:r="http://schemas.openxmlformats.org/officeDocument/2006/relationships" id="265" r:id="R37c75e6bde7e4a23"/>
+    <p:sldId xmlns:r="http://schemas.openxmlformats.org/officeDocument/2006/relationships" id="266" r:id="R27bce12dd7b14099"/>
+    <p:sldId xmlns:r="http://schemas.openxmlformats.org/officeDocument/2006/relationships" id="267" r:id="Rf6a87fb185fc455a"/>
   </p:sldIdLst>
   <p:sldSz cx="12192000" cy="6858000"/>
   <p:notesSz cx="6858000" cy="9144000"/>
@@ -1292,7 +1292,7 @@
   </p:cSld>
   <p:clrMap bg1="lt1" tx1="dk1" bg2="lt2" tx2="dk2" accent1="accent1" accent2="accent2" accent3="accent3" accent4="accent4" accent5="accent5" accent6="accent6" hlink="hlink" folHlink="folHlink"/>
   <p:sldLayoutIdLst>
-    <p:sldLayoutId xmlns:r="http://schemas.openxmlformats.org/officeDocument/2006/relationships" id="2147483649" r:id="Rd02eeab806ae47d5"/>
+    <p:sldLayoutId xmlns:r="http://schemas.openxmlformats.org/officeDocument/2006/relationships" id="2147483649" r:id="R81f4918c28cc444b"/>
   </p:sldLayoutIdLst>
   <p:txStyles>
     <p:titleStyle>
@@ -1794,7 +1794,7 @@
           <p:nvPr/>
         </p:nvPicPr>
         <p:blipFill>
-          <a:blip xmlns:r="http://schemas.openxmlformats.org/officeDocument/2006/relationships" xmlns:a="http://schemas.openxmlformats.org/drawingml/2006/main" r:embed="R0e2750ebfb6f4bef"/>
+          <a:blip xmlns:r="http://schemas.openxmlformats.org/officeDocument/2006/relationships" xmlns:a="http://schemas.openxmlformats.org/drawingml/2006/main" r:embed="R9b8b3e2f0ff54cdc"/>
           <a:srcRect xmlns:a="http://schemas.openxmlformats.org/drawingml/2006/main" l="0" t="7813" r="0" b="7813"/>
           <a:stretch xmlns:a="http://schemas.openxmlformats.org/drawingml/2006/main">
             <a:fillRect l="0" t="0" r="0" b="0"/>
@@ -1815,7 +1815,7 @@
           <p:cNvPr id="2" name="">
             <a:extLst xmlns:a="http://schemas.openxmlformats.org/drawingml/2006/main">
               <a:ext uri="{FF2B5EF4-FFF2-40B4-BE49-F238E27FC236}">
-                <a16:creationId xmlns:a16="http://schemas.microsoft.com/office/drawing/2014/main" id="{8A83C527-D2E1-42F5-A0B3-6E45AAE7259E}"/>
+                <a16:creationId xmlns:a16="http://schemas.microsoft.com/office/drawing/2014/main" id="{CC764D2A-D6E3-4C77-B395-5B50F58D3632}"/>
               </a:ext>
             </a:extLst>
           </p:cNvPr>
@@ -1852,7 +1852,7 @@
           <p:cNvPr id="3" name="">
             <a:extLst xmlns:a="http://schemas.openxmlformats.org/drawingml/2006/main">
               <a:ext uri="{FF2B5EF4-FFF2-40B4-BE49-F238E27FC236}">
-                <a16:creationId xmlns:a16="http://schemas.microsoft.com/office/drawing/2014/main" id="{2D27ADD7-E79C-471B-A2DE-5EBE92B97580}"/>
+                <a16:creationId xmlns:a16="http://schemas.microsoft.com/office/drawing/2014/main" id="{AEB576D2-FB98-4F4B-A967-432BE14A139B}"/>
               </a:ext>
             </a:extLst>
           </p:cNvPr>
@@ -1889,7 +1889,7 @@
           <p:cNvPr id="4" name="">
             <a:extLst xmlns:a="http://schemas.openxmlformats.org/drawingml/2006/main">
               <a:ext uri="{FF2B5EF4-FFF2-40B4-BE49-F238E27FC236}">
-                <a16:creationId xmlns:a16="http://schemas.microsoft.com/office/drawing/2014/main" id="{F7064036-B68D-4991-8387-F6DB9A0E907D}"/>
+                <a16:creationId xmlns:a16="http://schemas.microsoft.com/office/drawing/2014/main" id="{63093148-58A7-45BA-A90F-985717F40B8B}"/>
               </a:ext>
             </a:extLst>
           </p:cNvPr>
@@ -1953,7 +1953,7 @@
           <p:cNvPr id="5" name="">
             <a:extLst xmlns:a="http://schemas.openxmlformats.org/drawingml/2006/main">
               <a:ext uri="{FF2B5EF4-FFF2-40B4-BE49-F238E27FC236}">
-                <a16:creationId xmlns:a16="http://schemas.microsoft.com/office/drawing/2014/main" id="{B34CA906-8D45-4E62-930A-051655513614}"/>
+                <a16:creationId xmlns:a16="http://schemas.microsoft.com/office/drawing/2014/main" id="{0B599094-FC40-4089-80F4-D4AAC2B70A21}"/>
               </a:ext>
             </a:extLst>
           </p:cNvPr>
@@ -2017,7 +2017,7 @@
           <p:cNvPr id="6" name="">
             <a:extLst xmlns:a="http://schemas.openxmlformats.org/drawingml/2006/main">
               <a:ext uri="{FF2B5EF4-FFF2-40B4-BE49-F238E27FC236}">
-                <a16:creationId xmlns:a16="http://schemas.microsoft.com/office/drawing/2014/main" id="{F3AAE3D9-4A2C-4F03-8C52-9250F7C760B5}"/>
+                <a16:creationId xmlns:a16="http://schemas.microsoft.com/office/drawing/2014/main" id="{A5BDF34A-2F8D-4734-99E7-975D720D6F06}"/>
               </a:ext>
             </a:extLst>
           </p:cNvPr>
@@ -2050,7 +2050,7 @@
           <p:cNvPr id="7" name="">
             <a:extLst xmlns:a="http://schemas.openxmlformats.org/drawingml/2006/main">
               <a:ext uri="{FF2B5EF4-FFF2-40B4-BE49-F238E27FC236}">
-                <a16:creationId xmlns:a16="http://schemas.microsoft.com/office/drawing/2014/main" id="{A37009E3-7814-4C85-B07A-41B3911975C8}"/>
+                <a16:creationId xmlns:a16="http://schemas.microsoft.com/office/drawing/2014/main" id="{6C2D5EFE-8641-4739-A0F9-138A86172C32}"/>
               </a:ext>
             </a:extLst>
           </p:cNvPr>
@@ -2114,7 +2114,7 @@
           <p:cNvPr id="8" name="">
             <a:extLst xmlns:a="http://schemas.openxmlformats.org/drawingml/2006/main">
               <a:ext uri="{FF2B5EF4-FFF2-40B4-BE49-F238E27FC236}">
-                <a16:creationId xmlns:a16="http://schemas.microsoft.com/office/drawing/2014/main" id="{FC6EB409-37C3-4BF8-BED0-9EF351DC4155}"/>
+                <a16:creationId xmlns:a16="http://schemas.microsoft.com/office/drawing/2014/main" id="{8628CB69-5D23-4243-8878-04794C953E41}"/>
               </a:ext>
             </a:extLst>
           </p:cNvPr>
@@ -2178,7 +2178,7 @@
           <p:cNvPr id="9" name="">
             <a:extLst xmlns:a="http://schemas.openxmlformats.org/drawingml/2006/main">
               <a:ext uri="{FF2B5EF4-FFF2-40B4-BE49-F238E27FC236}">
-                <a16:creationId xmlns:a16="http://schemas.microsoft.com/office/drawing/2014/main" id="{4F75D2EB-3499-478A-B61F-6A2B07BCEA1A}"/>
+                <a16:creationId xmlns:a16="http://schemas.microsoft.com/office/drawing/2014/main" id="{31A0329E-DC81-4F9A-A742-B89390A7FAF3}"/>
               </a:ext>
             </a:extLst>
           </p:cNvPr>
@@ -2213,7 +2213,7 @@
           <p:cNvPr id="10" name="">
             <a:extLst xmlns:a="http://schemas.openxmlformats.org/drawingml/2006/main">
               <a:ext uri="{FF2B5EF4-FFF2-40B4-BE49-F238E27FC236}">
-                <a16:creationId xmlns:a16="http://schemas.microsoft.com/office/drawing/2014/main" id="{5BB63470-762A-44AB-8EB7-1D28BF02D014}"/>
+                <a16:creationId xmlns:a16="http://schemas.microsoft.com/office/drawing/2014/main" id="{43E3961F-76F4-4432-9F63-25FF0282F2A3}"/>
               </a:ext>
             </a:extLst>
           </p:cNvPr>
@@ -2277,7 +2277,7 @@
           <p:cNvPr id="11" name="">
             <a:extLst xmlns:a="http://schemas.openxmlformats.org/drawingml/2006/main">
               <a:ext uri="{FF2B5EF4-FFF2-40B4-BE49-F238E27FC236}">
-                <a16:creationId xmlns:a16="http://schemas.microsoft.com/office/drawing/2014/main" id="{48F3CE3B-6B77-49F9-8D22-81A20BCAEC81}"/>
+                <a16:creationId xmlns:a16="http://schemas.microsoft.com/office/drawing/2014/main" id="{43694807-6502-42E3-A81D-259BFF6C27E8}"/>
               </a:ext>
             </a:extLst>
           </p:cNvPr>
@@ -2312,7 +2312,7 @@
           <p:cNvPr id="12" name="">
             <a:extLst xmlns:a="http://schemas.openxmlformats.org/drawingml/2006/main">
               <a:ext uri="{FF2B5EF4-FFF2-40B4-BE49-F238E27FC236}">
-                <a16:creationId xmlns:a16="http://schemas.microsoft.com/office/drawing/2014/main" id="{5EA10B83-B42B-4D99-A677-67D4DDE2A924}"/>
+                <a16:creationId xmlns:a16="http://schemas.microsoft.com/office/drawing/2014/main" id="{9A176064-22F0-4068-B3FC-2D719D80739E}"/>
               </a:ext>
             </a:extLst>
           </p:cNvPr>
@@ -2376,7 +2376,7 @@
           <p:cNvPr id="13" name="">
             <a:extLst xmlns:a="http://schemas.openxmlformats.org/drawingml/2006/main">
               <a:ext uri="{FF2B5EF4-FFF2-40B4-BE49-F238E27FC236}">
-                <a16:creationId xmlns:a16="http://schemas.microsoft.com/office/drawing/2014/main" id="{8E646AAB-75CA-4C79-A178-AE541A3E5CF2}"/>
+                <a16:creationId xmlns:a16="http://schemas.microsoft.com/office/drawing/2014/main" id="{CA654030-229A-492E-B2C2-875FD99E2C9D}"/>
               </a:ext>
             </a:extLst>
           </p:cNvPr>
@@ -2411,7 +2411,7 @@
           <p:cNvPr id="14" name="">
             <a:extLst xmlns:a="http://schemas.openxmlformats.org/drawingml/2006/main">
               <a:ext uri="{FF2B5EF4-FFF2-40B4-BE49-F238E27FC236}">
-                <a16:creationId xmlns:a16="http://schemas.microsoft.com/office/drawing/2014/main" id="{0CEA7F1D-33BA-4B01-A7E5-67BBD8D504C1}"/>
+                <a16:creationId xmlns:a16="http://schemas.microsoft.com/office/drawing/2014/main" id="{378C1912-B6F0-4D35-B1A0-58F310AE3104}"/>
               </a:ext>
             </a:extLst>
           </p:cNvPr>
@@ -2475,7 +2475,7 @@
           <p:cNvPr id="15" name="">
             <a:extLst xmlns:a="http://schemas.openxmlformats.org/drawingml/2006/main">
               <a:ext uri="{FF2B5EF4-FFF2-40B4-BE49-F238E27FC236}">
-                <a16:creationId xmlns:a16="http://schemas.microsoft.com/office/drawing/2014/main" id="{7BFAED6D-FCD3-4039-A802-67F3DA082CC1}"/>
+                <a16:creationId xmlns:a16="http://schemas.microsoft.com/office/drawing/2014/main" id="{36685C08-B4DA-492E-B0F4-B90D4F5F83A6}"/>
               </a:ext>
             </a:extLst>
           </p:cNvPr>
@@ -2539,7 +2539,7 @@
           <p:cNvPr id="16" name="">
             <a:extLst xmlns:a="http://schemas.openxmlformats.org/drawingml/2006/main">
               <a:ext uri="{FF2B5EF4-FFF2-40B4-BE49-F238E27FC236}">
-                <a16:creationId xmlns:a16="http://schemas.microsoft.com/office/drawing/2014/main" id="{10D296A2-207D-4768-8A7F-A2A7B9D71439}"/>
+                <a16:creationId xmlns:a16="http://schemas.microsoft.com/office/drawing/2014/main" id="{3AD3A142-137C-42A7-B562-4D6766CAC479}"/>
               </a:ext>
             </a:extLst>
           </p:cNvPr>
@@ -2574,7 +2574,7 @@
           <p:cNvPr id="17" name="">
             <a:extLst xmlns:a="http://schemas.openxmlformats.org/drawingml/2006/main">
               <a:ext uri="{FF2B5EF4-FFF2-40B4-BE49-F238E27FC236}">
-                <a16:creationId xmlns:a16="http://schemas.microsoft.com/office/drawing/2014/main" id="{08A03E8C-F926-4104-B84D-FD9744C79A83}"/>
+                <a16:creationId xmlns:a16="http://schemas.microsoft.com/office/drawing/2014/main" id="{3F83B0C8-04AF-49EC-A294-250993DC6AD3}"/>
               </a:ext>
             </a:extLst>
           </p:cNvPr>
@@ -2638,7 +2638,7 @@
           <p:cNvPr id="18" name="">
             <a:extLst xmlns:a="http://schemas.openxmlformats.org/drawingml/2006/main">
               <a:ext uri="{FF2B5EF4-FFF2-40B4-BE49-F238E27FC236}">
-                <a16:creationId xmlns:a16="http://schemas.microsoft.com/office/drawing/2014/main" id="{6180F677-34C5-49C2-9AFD-BFE5B2E3A856}"/>
+                <a16:creationId xmlns:a16="http://schemas.microsoft.com/office/drawing/2014/main" id="{E8338A50-E396-4BCC-89D2-614223634496}"/>
               </a:ext>
             </a:extLst>
           </p:cNvPr>
@@ -2702,7 +2702,7 @@
           <p:cNvPr id="19" name="">
             <a:extLst xmlns:a="http://schemas.openxmlformats.org/drawingml/2006/main">
               <a:ext uri="{FF2B5EF4-FFF2-40B4-BE49-F238E27FC236}">
-                <a16:creationId xmlns:a16="http://schemas.microsoft.com/office/drawing/2014/main" id="{FBC692A6-A99F-4CB0-8513-7D5DBA30D33E}"/>
+                <a16:creationId xmlns:a16="http://schemas.microsoft.com/office/drawing/2014/main" id="{31BCD30F-FC79-4A82-8FBF-DE9C271FD4DE}"/>
               </a:ext>
             </a:extLst>
           </p:cNvPr>
@@ -2737,7 +2737,7 @@
           <p:cNvPr id="20" name="">
             <a:extLst xmlns:a="http://schemas.openxmlformats.org/drawingml/2006/main">
               <a:ext uri="{FF2B5EF4-FFF2-40B4-BE49-F238E27FC236}">
-                <a16:creationId xmlns:a16="http://schemas.microsoft.com/office/drawing/2014/main" id="{8F78DF29-E20F-4C7B-B1D3-22DC9D24151F}"/>
+                <a16:creationId xmlns:a16="http://schemas.microsoft.com/office/drawing/2014/main" id="{C67AE603-437E-413E-AB5A-A8218CE153CD}"/>
               </a:ext>
             </a:extLst>
           </p:cNvPr>
@@ -2801,7 +2801,7 @@
           <p:cNvPr id="21" name="">
             <a:extLst xmlns:a="http://schemas.openxmlformats.org/drawingml/2006/main">
               <a:ext uri="{FF2B5EF4-FFF2-40B4-BE49-F238E27FC236}">
-                <a16:creationId xmlns:a16="http://schemas.microsoft.com/office/drawing/2014/main" id="{3EF3747E-A779-42F9-86DC-5DF9BCB775DC}"/>
+                <a16:creationId xmlns:a16="http://schemas.microsoft.com/office/drawing/2014/main" id="{044E0C37-5AE7-48F8-A296-0B24E9042C86}"/>
               </a:ext>
             </a:extLst>
           </p:cNvPr>
@@ -2865,7 +2865,7 @@
           <p:cNvPr id="22" name="">
             <a:extLst xmlns:a="http://schemas.openxmlformats.org/drawingml/2006/main">
               <a:ext uri="{FF2B5EF4-FFF2-40B4-BE49-F238E27FC236}">
-                <a16:creationId xmlns:a16="http://schemas.microsoft.com/office/drawing/2014/main" id="{4514D955-7BFC-44A6-8325-C18280F13629}"/>
+                <a16:creationId xmlns:a16="http://schemas.microsoft.com/office/drawing/2014/main" id="{417AEB66-CE51-415D-8826-A3A17B05C84A}"/>
               </a:ext>
             </a:extLst>
           </p:cNvPr>
@@ -2929,7 +2929,7 @@
           <p:cNvPr id="23" name="">
             <a:extLst xmlns:a="http://schemas.openxmlformats.org/drawingml/2006/main">
               <a:ext uri="{FF2B5EF4-FFF2-40B4-BE49-F238E27FC236}">
-                <a16:creationId xmlns:a16="http://schemas.microsoft.com/office/drawing/2014/main" id="{7148164E-5673-4077-BDC8-BF948041FC14}"/>
+                <a16:creationId xmlns:a16="http://schemas.microsoft.com/office/drawing/2014/main" id="{1729CF04-FFB9-4761-8732-E7F8CEA3E35C}"/>
               </a:ext>
             </a:extLst>
           </p:cNvPr>
@@ -2962,7 +2962,7 @@
           <p:cNvPr id="24" name="">
             <a:extLst xmlns:a="http://schemas.openxmlformats.org/drawingml/2006/main">
               <a:ext uri="{FF2B5EF4-FFF2-40B4-BE49-F238E27FC236}">
-                <a16:creationId xmlns:a16="http://schemas.microsoft.com/office/drawing/2014/main" id="{E7BF4D15-02E2-43A3-8A4B-E0E3CC2B6B88}"/>
+                <a16:creationId xmlns:a16="http://schemas.microsoft.com/office/drawing/2014/main" id="{E03211CD-C4B6-4462-B91C-82F1E8A5F80C}"/>
               </a:ext>
             </a:extLst>
           </p:cNvPr>
@@ -3026,7 +3026,7 @@
           <p:cNvPr id="25" name="">
             <a:extLst xmlns:a="http://schemas.openxmlformats.org/drawingml/2006/main">
               <a:ext uri="{FF2B5EF4-FFF2-40B4-BE49-F238E27FC236}">
-                <a16:creationId xmlns:a16="http://schemas.microsoft.com/office/drawing/2014/main" id="{EEB5178F-F598-4B0C-B66C-0D274769CB4D}"/>
+                <a16:creationId xmlns:a16="http://schemas.microsoft.com/office/drawing/2014/main" id="{3AD666F0-D224-407E-923F-85BF8DE6C36C}"/>
               </a:ext>
             </a:extLst>
           </p:cNvPr>
@@ -3088,7 +3088,7 @@
     </p:spTree>
     <p:extLst>
       <p:ext uri="{BB962C8B-B14F-4D97-AF65-F5344CB8AC3E}">
-        <p14:creationId xmlns:p14="http://schemas.microsoft.com/office/powerpoint/2010/main" val="682723808"/>
+        <p14:creationId xmlns:p14="http://schemas.microsoft.com/office/powerpoint/2010/main" val="1681968601"/>
       </p:ext>
     </p:extLst>
   </p:cSld>
@@ -3116,7 +3116,7 @@
           <p:nvPr/>
         </p:nvPicPr>
         <p:blipFill>
-          <a:blip xmlns:r="http://schemas.openxmlformats.org/officeDocument/2006/relationships" xmlns:a="http://schemas.openxmlformats.org/drawingml/2006/main" r:embed="R8ff208a7ffd444ab"/>
+          <a:blip xmlns:r="http://schemas.openxmlformats.org/officeDocument/2006/relationships" xmlns:a="http://schemas.openxmlformats.org/drawingml/2006/main" r:embed="R84b986a3009e40b5"/>
           <a:srcRect xmlns:a="http://schemas.openxmlformats.org/drawingml/2006/main" l="0" t="27" r="0" b="27"/>
           <a:stretch xmlns:a="http://schemas.openxmlformats.org/drawingml/2006/main">
             <a:fillRect l="0" t="0" r="0" b="0"/>
@@ -3137,7 +3137,7 @@
           <p:cNvPr id="2" name="">
             <a:extLst xmlns:a="http://schemas.openxmlformats.org/drawingml/2006/main">
               <a:ext uri="{FF2B5EF4-FFF2-40B4-BE49-F238E27FC236}">
-                <a16:creationId xmlns:a16="http://schemas.microsoft.com/office/drawing/2014/main" id="{CEAEDC8F-29C2-4D35-80E5-452B228740AA}"/>
+                <a16:creationId xmlns:a16="http://schemas.microsoft.com/office/drawing/2014/main" id="{09DE5A61-300C-414F-9C7A-42176A2FDF94}"/>
               </a:ext>
             </a:extLst>
           </p:cNvPr>
@@ -3174,7 +3174,7 @@
           <p:cNvPr id="3" name="">
             <a:extLst xmlns:a="http://schemas.openxmlformats.org/drawingml/2006/main">
               <a:ext uri="{FF2B5EF4-FFF2-40B4-BE49-F238E27FC236}">
-                <a16:creationId xmlns:a16="http://schemas.microsoft.com/office/drawing/2014/main" id="{A1B81206-A19E-474D-9BA3-882CAC6CF9AE}"/>
+                <a16:creationId xmlns:a16="http://schemas.microsoft.com/office/drawing/2014/main" id="{389BD18D-B784-4A7D-BD18-D5A76902268D}"/>
               </a:ext>
             </a:extLst>
           </p:cNvPr>
@@ -3211,7 +3211,7 @@
           <p:cNvPr id="4" name="">
             <a:extLst xmlns:a="http://schemas.openxmlformats.org/drawingml/2006/main">
               <a:ext uri="{FF2B5EF4-FFF2-40B4-BE49-F238E27FC236}">
-                <a16:creationId xmlns:a16="http://schemas.microsoft.com/office/drawing/2014/main" id="{71A12366-606C-4903-AB9B-F3210AAA4F2C}"/>
+                <a16:creationId xmlns:a16="http://schemas.microsoft.com/office/drawing/2014/main" id="{5CFD07EE-19F2-4ACE-BC0A-43BDA92A4804}"/>
               </a:ext>
             </a:extLst>
           </p:cNvPr>
@@ -3275,7 +3275,7 @@
           <p:cNvPr id="5" name="">
             <a:extLst xmlns:a="http://schemas.openxmlformats.org/drawingml/2006/main">
               <a:ext uri="{FF2B5EF4-FFF2-40B4-BE49-F238E27FC236}">
-                <a16:creationId xmlns:a16="http://schemas.microsoft.com/office/drawing/2014/main" id="{87BF3CF0-E9B1-4732-83D2-8BDCFFF745B0}"/>
+                <a16:creationId xmlns:a16="http://schemas.microsoft.com/office/drawing/2014/main" id="{D306A3D9-BB13-419A-9D3C-D49BEE65E6C2}"/>
               </a:ext>
             </a:extLst>
           </p:cNvPr>
@@ -3339,7 +3339,7 @@
           <p:cNvPr id="6" name="">
             <a:extLst xmlns:a="http://schemas.openxmlformats.org/drawingml/2006/main">
               <a:ext uri="{FF2B5EF4-FFF2-40B4-BE49-F238E27FC236}">
-                <a16:creationId xmlns:a16="http://schemas.microsoft.com/office/drawing/2014/main" id="{23141B7C-B373-4989-9094-E0A54F703D68}"/>
+                <a16:creationId xmlns:a16="http://schemas.microsoft.com/office/drawing/2014/main" id="{3DD1762E-117B-4E50-B306-434F052B3EC9}"/>
               </a:ext>
             </a:extLst>
           </p:cNvPr>
@@ -3403,7 +3403,7 @@
           <p:cNvPr id="7" name="">
             <a:extLst xmlns:a="http://schemas.openxmlformats.org/drawingml/2006/main">
               <a:ext uri="{FF2B5EF4-FFF2-40B4-BE49-F238E27FC236}">
-                <a16:creationId xmlns:a16="http://schemas.microsoft.com/office/drawing/2014/main" id="{3E1C3EE6-1F77-43D8-940E-BE19C808CCA5}"/>
+                <a16:creationId xmlns:a16="http://schemas.microsoft.com/office/drawing/2014/main" id="{7243A6AF-2FEF-4A53-B5F2-CC53FD6E6DBA}"/>
               </a:ext>
             </a:extLst>
           </p:cNvPr>
@@ -3438,7 +3438,7 @@
           <p:cNvPr id="8" name="">
             <a:extLst xmlns:a="http://schemas.openxmlformats.org/drawingml/2006/main">
               <a:ext uri="{FF2B5EF4-FFF2-40B4-BE49-F238E27FC236}">
-                <a16:creationId xmlns:a16="http://schemas.microsoft.com/office/drawing/2014/main" id="{C2D8D5F6-DF22-430F-AB7D-FBDC38F934A9}"/>
+                <a16:creationId xmlns:a16="http://schemas.microsoft.com/office/drawing/2014/main" id="{EC57C894-092B-4754-936B-B64ED9318CC5}"/>
               </a:ext>
             </a:extLst>
           </p:cNvPr>
@@ -3502,7 +3502,7 @@
           <p:cNvPr id="9" name="">
             <a:extLst xmlns:a="http://schemas.openxmlformats.org/drawingml/2006/main">
               <a:ext uri="{FF2B5EF4-FFF2-40B4-BE49-F238E27FC236}">
-                <a16:creationId xmlns:a16="http://schemas.microsoft.com/office/drawing/2014/main" id="{17A524BA-09D6-4163-8802-02CF2B4A441B}"/>
+                <a16:creationId xmlns:a16="http://schemas.microsoft.com/office/drawing/2014/main" id="{B3794B40-899F-4509-9EA4-3BC398701E6C}"/>
               </a:ext>
             </a:extLst>
           </p:cNvPr>
@@ -3537,7 +3537,7 @@
           <p:cNvPr id="10" name="">
             <a:extLst xmlns:a="http://schemas.openxmlformats.org/drawingml/2006/main">
               <a:ext uri="{FF2B5EF4-FFF2-40B4-BE49-F238E27FC236}">
-                <a16:creationId xmlns:a16="http://schemas.microsoft.com/office/drawing/2014/main" id="{88E1F082-5A7A-4D56-8228-C84289ABB6FB}"/>
+                <a16:creationId xmlns:a16="http://schemas.microsoft.com/office/drawing/2014/main" id="{822BCAB5-8C21-4798-93C2-217B0D7C1955}"/>
               </a:ext>
             </a:extLst>
           </p:cNvPr>
@@ -3601,7 +3601,7 @@
           <p:cNvPr id="11" name="">
             <a:extLst xmlns:a="http://schemas.openxmlformats.org/drawingml/2006/main">
               <a:ext uri="{FF2B5EF4-FFF2-40B4-BE49-F238E27FC236}">
-                <a16:creationId xmlns:a16="http://schemas.microsoft.com/office/drawing/2014/main" id="{308043F4-DF1C-4A1A-8C42-DB1BAEB488B9}"/>
+                <a16:creationId xmlns:a16="http://schemas.microsoft.com/office/drawing/2014/main" id="{D5F29665-B7F8-4728-983C-9B43BD530F3D}"/>
               </a:ext>
             </a:extLst>
           </p:cNvPr>
@@ -3636,7 +3636,7 @@
           <p:cNvPr id="12" name="">
             <a:extLst xmlns:a="http://schemas.openxmlformats.org/drawingml/2006/main">
               <a:ext uri="{FF2B5EF4-FFF2-40B4-BE49-F238E27FC236}">
-                <a16:creationId xmlns:a16="http://schemas.microsoft.com/office/drawing/2014/main" id="{37AB9120-0610-4FAA-AFCE-812AB87A61AD}"/>
+                <a16:creationId xmlns:a16="http://schemas.microsoft.com/office/drawing/2014/main" id="{5C8C4BA3-36CA-4B11-A15F-7AA4F136DB3A}"/>
               </a:ext>
             </a:extLst>
           </p:cNvPr>
@@ -3700,7 +3700,7 @@
           <p:cNvPr id="13" name="">
             <a:extLst xmlns:a="http://schemas.openxmlformats.org/drawingml/2006/main">
               <a:ext uri="{FF2B5EF4-FFF2-40B4-BE49-F238E27FC236}">
-                <a16:creationId xmlns:a16="http://schemas.microsoft.com/office/drawing/2014/main" id="{FC56D739-5E6F-44B8-B409-95A83AD32665}"/>
+                <a16:creationId xmlns:a16="http://schemas.microsoft.com/office/drawing/2014/main" id="{0F6522A7-76EB-457D-A6B9-F56A51F0DFE5}"/>
               </a:ext>
             </a:extLst>
           </p:cNvPr>
@@ -3735,7 +3735,7 @@
           <p:cNvPr id="14" name="">
             <a:extLst xmlns:a="http://schemas.openxmlformats.org/drawingml/2006/main">
               <a:ext uri="{FF2B5EF4-FFF2-40B4-BE49-F238E27FC236}">
-                <a16:creationId xmlns:a16="http://schemas.microsoft.com/office/drawing/2014/main" id="{D378BC65-C642-455C-A0D3-54C561A24FBA}"/>
+                <a16:creationId xmlns:a16="http://schemas.microsoft.com/office/drawing/2014/main" id="{46203CB1-E528-4BA3-BA91-E5D04940C564}"/>
               </a:ext>
             </a:extLst>
           </p:cNvPr>
@@ -3799,7 +3799,7 @@
           <p:cNvPr id="15" name="">
             <a:extLst xmlns:a="http://schemas.openxmlformats.org/drawingml/2006/main">
               <a:ext uri="{FF2B5EF4-FFF2-40B4-BE49-F238E27FC236}">
-                <a16:creationId xmlns:a16="http://schemas.microsoft.com/office/drawing/2014/main" id="{EA894437-0E92-4E9B-B061-FA72E99DECAA}"/>
+                <a16:creationId xmlns:a16="http://schemas.microsoft.com/office/drawing/2014/main" id="{DC97EFE3-3647-4A02-8355-8CBFA8ED4795}"/>
               </a:ext>
             </a:extLst>
           </p:cNvPr>
@@ -3863,7 +3863,7 @@
           <p:cNvPr id="16" name="">
             <a:extLst xmlns:a="http://schemas.openxmlformats.org/drawingml/2006/main">
               <a:ext uri="{FF2B5EF4-FFF2-40B4-BE49-F238E27FC236}">
-                <a16:creationId xmlns:a16="http://schemas.microsoft.com/office/drawing/2014/main" id="{2BAD0005-A496-4C2E-8D4E-3731B075BCFC}"/>
+                <a16:creationId xmlns:a16="http://schemas.microsoft.com/office/drawing/2014/main" id="{4C021091-E255-4365-882F-9C7AD3700A09}"/>
               </a:ext>
             </a:extLst>
           </p:cNvPr>
@@ -3927,7 +3927,7 @@
           <p:cNvPr id="17" name="">
             <a:extLst xmlns:a="http://schemas.openxmlformats.org/drawingml/2006/main">
               <a:ext uri="{FF2B5EF4-FFF2-40B4-BE49-F238E27FC236}">
-                <a16:creationId xmlns:a16="http://schemas.microsoft.com/office/drawing/2014/main" id="{3D896C10-5AA8-4999-A8F1-1B6449EAE926}"/>
+                <a16:creationId xmlns:a16="http://schemas.microsoft.com/office/drawing/2014/main" id="{30D8613A-1F07-41A4-BF5A-87314FC132FE}"/>
               </a:ext>
             </a:extLst>
           </p:cNvPr>
@@ -3960,7 +3960,7 @@
           <p:cNvPr id="18" name="">
             <a:extLst xmlns:a="http://schemas.openxmlformats.org/drawingml/2006/main">
               <a:ext uri="{FF2B5EF4-FFF2-40B4-BE49-F238E27FC236}">
-                <a16:creationId xmlns:a16="http://schemas.microsoft.com/office/drawing/2014/main" id="{7B1D7F01-3212-4CCE-942E-9A2031BD14DE}"/>
+                <a16:creationId xmlns:a16="http://schemas.microsoft.com/office/drawing/2014/main" id="{1CC8ABEB-9887-4CF8-AA7F-897C6A401A7D}"/>
               </a:ext>
             </a:extLst>
           </p:cNvPr>
@@ -4024,7 +4024,7 @@
           <p:cNvPr id="19" name="">
             <a:extLst xmlns:a="http://schemas.openxmlformats.org/drawingml/2006/main">
               <a:ext uri="{FF2B5EF4-FFF2-40B4-BE49-F238E27FC236}">
-                <a16:creationId xmlns:a16="http://schemas.microsoft.com/office/drawing/2014/main" id="{2951F2DF-5E28-436D-B2B3-26A0D3C687E0}"/>
+                <a16:creationId xmlns:a16="http://schemas.microsoft.com/office/drawing/2014/main" id="{A168C3B6-EA1D-4121-8FB6-19E3C9A87494}"/>
               </a:ext>
             </a:extLst>
           </p:cNvPr>
@@ -4086,7 +4086,7 @@
     </p:spTree>
     <p:extLst>
       <p:ext uri="{BB962C8B-B14F-4D97-AF65-F5344CB8AC3E}">
-        <p14:creationId xmlns:p14="http://schemas.microsoft.com/office/powerpoint/2010/main" val="45749458"/>
+        <p14:creationId xmlns:p14="http://schemas.microsoft.com/office/powerpoint/2010/main" val="811813494"/>
       </p:ext>
     </p:extLst>
   </p:cSld>
@@ -4114,7 +4114,7 @@
           <p:nvPr/>
         </p:nvPicPr>
         <p:blipFill>
-          <a:blip xmlns:r="http://schemas.openxmlformats.org/officeDocument/2006/relationships" xmlns:a="http://schemas.openxmlformats.org/drawingml/2006/main" r:embed="Rb0a72b2b93b24a6c"/>
+          <a:blip xmlns:r="http://schemas.openxmlformats.org/officeDocument/2006/relationships" xmlns:a="http://schemas.openxmlformats.org/drawingml/2006/main" r:embed="R6833d191f0594372"/>
           <a:srcRect xmlns:a="http://schemas.openxmlformats.org/drawingml/2006/main" l="0" t="27" r="0" b="27"/>
           <a:stretch xmlns:a="http://schemas.openxmlformats.org/drawingml/2006/main">
             <a:fillRect l="0" t="0" r="0" b="0"/>
@@ -4135,7 +4135,7 @@
           <p:cNvPr id="2" name="">
             <a:extLst xmlns:a="http://schemas.openxmlformats.org/drawingml/2006/main">
               <a:ext uri="{FF2B5EF4-FFF2-40B4-BE49-F238E27FC236}">
-                <a16:creationId xmlns:a16="http://schemas.microsoft.com/office/drawing/2014/main" id="{C6913BF8-63D3-4ACE-ACF3-C9A9B7929CD9}"/>
+                <a16:creationId xmlns:a16="http://schemas.microsoft.com/office/drawing/2014/main" id="{5992648B-4930-43F3-8E0E-06B7CF15AE7E}"/>
               </a:ext>
             </a:extLst>
           </p:cNvPr>
@@ -4172,7 +4172,7 @@
           <p:cNvPr id="3" name="">
             <a:extLst xmlns:a="http://schemas.openxmlformats.org/drawingml/2006/main">
               <a:ext uri="{FF2B5EF4-FFF2-40B4-BE49-F238E27FC236}">
-                <a16:creationId xmlns:a16="http://schemas.microsoft.com/office/drawing/2014/main" id="{4D6F4AEE-8202-4E26-A29F-528FEE38969E}"/>
+                <a16:creationId xmlns:a16="http://schemas.microsoft.com/office/drawing/2014/main" id="{72278044-5352-4FD2-BBBA-9F97CD9B5624}"/>
               </a:ext>
             </a:extLst>
           </p:cNvPr>
@@ -4209,7 +4209,7 @@
           <p:cNvPr id="4" name="">
             <a:extLst xmlns:a="http://schemas.openxmlformats.org/drawingml/2006/main">
               <a:ext uri="{FF2B5EF4-FFF2-40B4-BE49-F238E27FC236}">
-                <a16:creationId xmlns:a16="http://schemas.microsoft.com/office/drawing/2014/main" id="{063A246D-8934-4ED3-B6DE-6A44F7E3CA63}"/>
+                <a16:creationId xmlns:a16="http://schemas.microsoft.com/office/drawing/2014/main" id="{E58C232F-D8CA-4253-B786-4D4C3F9D5154}"/>
               </a:ext>
             </a:extLst>
           </p:cNvPr>
@@ -4273,7 +4273,7 @@
           <p:cNvPr id="5" name="">
             <a:extLst xmlns:a="http://schemas.openxmlformats.org/drawingml/2006/main">
               <a:ext uri="{FF2B5EF4-FFF2-40B4-BE49-F238E27FC236}">
-                <a16:creationId xmlns:a16="http://schemas.microsoft.com/office/drawing/2014/main" id="{9E8CE15A-3FFD-4467-BEDD-29DF13B890E0}"/>
+                <a16:creationId xmlns:a16="http://schemas.microsoft.com/office/drawing/2014/main" id="{1D96E4C4-76A9-422E-888D-88283419DF02}"/>
               </a:ext>
             </a:extLst>
           </p:cNvPr>
@@ -4337,7 +4337,7 @@
           <p:cNvPr id="6" name="">
             <a:extLst xmlns:a="http://schemas.openxmlformats.org/drawingml/2006/main">
               <a:ext uri="{FF2B5EF4-FFF2-40B4-BE49-F238E27FC236}">
-                <a16:creationId xmlns:a16="http://schemas.microsoft.com/office/drawing/2014/main" id="{1522760F-DE30-4923-AEE6-C65941C875DC}"/>
+                <a16:creationId xmlns:a16="http://schemas.microsoft.com/office/drawing/2014/main" id="{A7EEFA42-C170-4B85-A1C4-3F6D27705E68}"/>
               </a:ext>
             </a:extLst>
           </p:cNvPr>
@@ -4401,7 +4401,7 @@
           <p:cNvPr id="7" name="">
             <a:extLst xmlns:a="http://schemas.openxmlformats.org/drawingml/2006/main">
               <a:ext uri="{FF2B5EF4-FFF2-40B4-BE49-F238E27FC236}">
-                <a16:creationId xmlns:a16="http://schemas.microsoft.com/office/drawing/2014/main" id="{BF6364D5-24AA-46F5-A761-65C26951D94C}"/>
+                <a16:creationId xmlns:a16="http://schemas.microsoft.com/office/drawing/2014/main" id="{4344C310-EEE7-4A72-8AB6-CE0DB97FD802}"/>
               </a:ext>
             </a:extLst>
           </p:cNvPr>
@@ -4436,7 +4436,7 @@
           <p:cNvPr id="8" name="">
             <a:extLst xmlns:a="http://schemas.openxmlformats.org/drawingml/2006/main">
               <a:ext uri="{FF2B5EF4-FFF2-40B4-BE49-F238E27FC236}">
-                <a16:creationId xmlns:a16="http://schemas.microsoft.com/office/drawing/2014/main" id="{5F55F63D-6CD1-4A2F-9E19-3E98F210E75C}"/>
+                <a16:creationId xmlns:a16="http://schemas.microsoft.com/office/drawing/2014/main" id="{9DFECBE1-E59D-4AA8-B1AF-BD3DF139F81A}"/>
               </a:ext>
             </a:extLst>
           </p:cNvPr>
@@ -4500,7 +4500,7 @@
           <p:cNvPr id="9" name="">
             <a:extLst xmlns:a="http://schemas.openxmlformats.org/drawingml/2006/main">
               <a:ext uri="{FF2B5EF4-FFF2-40B4-BE49-F238E27FC236}">
-                <a16:creationId xmlns:a16="http://schemas.microsoft.com/office/drawing/2014/main" id="{08BB2D7F-7DC4-4D51-9767-E1418E7B2F73}"/>
+                <a16:creationId xmlns:a16="http://schemas.microsoft.com/office/drawing/2014/main" id="{B63C93CC-2BB3-4F2C-82BA-B9D0F88CE8B6}"/>
               </a:ext>
             </a:extLst>
           </p:cNvPr>
@@ -4564,7 +4564,7 @@
           <p:cNvPr id="10" name="">
             <a:extLst xmlns:a="http://schemas.openxmlformats.org/drawingml/2006/main">
               <a:ext uri="{FF2B5EF4-FFF2-40B4-BE49-F238E27FC236}">
-                <a16:creationId xmlns:a16="http://schemas.microsoft.com/office/drawing/2014/main" id="{87B425C9-B13F-408C-9186-3F4156755519}"/>
+                <a16:creationId xmlns:a16="http://schemas.microsoft.com/office/drawing/2014/main" id="{7D6F15C7-BB03-4088-B35D-1DFB9A170A7F}"/>
               </a:ext>
             </a:extLst>
           </p:cNvPr>
@@ -4597,7 +4597,7 @@
           <p:cNvPr id="11" name="">
             <a:extLst xmlns:a="http://schemas.openxmlformats.org/drawingml/2006/main">
               <a:ext uri="{FF2B5EF4-FFF2-40B4-BE49-F238E27FC236}">
-                <a16:creationId xmlns:a16="http://schemas.microsoft.com/office/drawing/2014/main" id="{083F3864-0E59-4A8D-8D69-77D4CB35629C}"/>
+                <a16:creationId xmlns:a16="http://schemas.microsoft.com/office/drawing/2014/main" id="{4F10F4C1-0C82-443B-93C9-E83C25BE80A5}"/>
               </a:ext>
             </a:extLst>
           </p:cNvPr>
@@ -4632,7 +4632,7 @@
           <p:cNvPr id="12" name="">
             <a:extLst xmlns:a="http://schemas.openxmlformats.org/drawingml/2006/main">
               <a:ext uri="{FF2B5EF4-FFF2-40B4-BE49-F238E27FC236}">
-                <a16:creationId xmlns:a16="http://schemas.microsoft.com/office/drawing/2014/main" id="{B4D4052B-8C4A-4066-B19A-6EE74D425C2A}"/>
+                <a16:creationId xmlns:a16="http://schemas.microsoft.com/office/drawing/2014/main" id="{2EBA5AD9-EAFC-4ED8-80A4-B82B49B2E1B9}"/>
               </a:ext>
             </a:extLst>
           </p:cNvPr>
@@ -4696,7 +4696,7 @@
           <p:cNvPr id="13" name="">
             <a:extLst xmlns:a="http://schemas.openxmlformats.org/drawingml/2006/main">
               <a:ext uri="{FF2B5EF4-FFF2-40B4-BE49-F238E27FC236}">
-                <a16:creationId xmlns:a16="http://schemas.microsoft.com/office/drawing/2014/main" id="{344A217C-E331-4AAC-96CE-41133B976A63}"/>
+                <a16:creationId xmlns:a16="http://schemas.microsoft.com/office/drawing/2014/main" id="{FD8F34F7-0BD7-484A-AD62-6E0B2FC2F97F}"/>
               </a:ext>
             </a:extLst>
           </p:cNvPr>
@@ -4760,7 +4760,7 @@
           <p:cNvPr id="14" name="">
             <a:extLst xmlns:a="http://schemas.openxmlformats.org/drawingml/2006/main">
               <a:ext uri="{FF2B5EF4-FFF2-40B4-BE49-F238E27FC236}">
-                <a16:creationId xmlns:a16="http://schemas.microsoft.com/office/drawing/2014/main" id="{D93413C1-DF73-4300-B9E5-9BACFE09B12A}"/>
+                <a16:creationId xmlns:a16="http://schemas.microsoft.com/office/drawing/2014/main" id="{61EDCEF5-FC7B-447F-ABAC-DB78845F3A7B}"/>
               </a:ext>
             </a:extLst>
           </p:cNvPr>
@@ -4793,7 +4793,7 @@
           <p:cNvPr id="15" name="">
             <a:extLst xmlns:a="http://schemas.openxmlformats.org/drawingml/2006/main">
               <a:ext uri="{FF2B5EF4-FFF2-40B4-BE49-F238E27FC236}">
-                <a16:creationId xmlns:a16="http://schemas.microsoft.com/office/drawing/2014/main" id="{33D105BF-6719-4C5C-A93B-4CD618549CDD}"/>
+                <a16:creationId xmlns:a16="http://schemas.microsoft.com/office/drawing/2014/main" id="{C29C6717-34F4-4C33-8F6C-2C240DEDF3F5}"/>
               </a:ext>
             </a:extLst>
           </p:cNvPr>
@@ -4828,7 +4828,7 @@
           <p:cNvPr id="16" name="">
             <a:extLst xmlns:a="http://schemas.openxmlformats.org/drawingml/2006/main">
               <a:ext uri="{FF2B5EF4-FFF2-40B4-BE49-F238E27FC236}">
-                <a16:creationId xmlns:a16="http://schemas.microsoft.com/office/drawing/2014/main" id="{492052B4-F11B-4038-822F-C1C5E142945E}"/>
+                <a16:creationId xmlns:a16="http://schemas.microsoft.com/office/drawing/2014/main" id="{1E88B56F-ED45-4C70-9110-48DCB96943FB}"/>
               </a:ext>
             </a:extLst>
           </p:cNvPr>
@@ -4892,7 +4892,7 @@
           <p:cNvPr id="17" name="">
             <a:extLst xmlns:a="http://schemas.openxmlformats.org/drawingml/2006/main">
               <a:ext uri="{FF2B5EF4-FFF2-40B4-BE49-F238E27FC236}">
-                <a16:creationId xmlns:a16="http://schemas.microsoft.com/office/drawing/2014/main" id="{D09CDF2F-4CCE-4622-9ACB-50D3989984D9}"/>
+                <a16:creationId xmlns:a16="http://schemas.microsoft.com/office/drawing/2014/main" id="{B0A5B9FF-92A5-4A3B-B16D-C3DAD7B66BA0}"/>
               </a:ext>
             </a:extLst>
           </p:cNvPr>
@@ -4956,7 +4956,7 @@
           <p:cNvPr id="18" name="">
             <a:extLst xmlns:a="http://schemas.openxmlformats.org/drawingml/2006/main">
               <a:ext uri="{FF2B5EF4-FFF2-40B4-BE49-F238E27FC236}">
-                <a16:creationId xmlns:a16="http://schemas.microsoft.com/office/drawing/2014/main" id="{8054EF8E-592B-45FD-B7E9-F5E9FBDE053C}"/>
+                <a16:creationId xmlns:a16="http://schemas.microsoft.com/office/drawing/2014/main" id="{3D94CE53-79F8-4A15-A896-AF36AD41D085}"/>
               </a:ext>
             </a:extLst>
           </p:cNvPr>
@@ -5020,7 +5020,7 @@
           <p:cNvPr id="19" name="">
             <a:extLst xmlns:a="http://schemas.openxmlformats.org/drawingml/2006/main">
               <a:ext uri="{FF2B5EF4-FFF2-40B4-BE49-F238E27FC236}">
-                <a16:creationId xmlns:a16="http://schemas.microsoft.com/office/drawing/2014/main" id="{7BB31854-CDEF-47B2-8360-CC6364758D23}"/>
+                <a16:creationId xmlns:a16="http://schemas.microsoft.com/office/drawing/2014/main" id="{3A04CB49-020A-4774-BC4E-19A922808F06}"/>
               </a:ext>
             </a:extLst>
           </p:cNvPr>
@@ -5053,7 +5053,7 @@
           <p:cNvPr id="20" name="">
             <a:extLst xmlns:a="http://schemas.openxmlformats.org/drawingml/2006/main">
               <a:ext uri="{FF2B5EF4-FFF2-40B4-BE49-F238E27FC236}">
-                <a16:creationId xmlns:a16="http://schemas.microsoft.com/office/drawing/2014/main" id="{BB53B051-8545-4945-B2A3-84DB8F997FC3}"/>
+                <a16:creationId xmlns:a16="http://schemas.microsoft.com/office/drawing/2014/main" id="{31269143-D299-4318-A16B-8A79A765A65B}"/>
               </a:ext>
             </a:extLst>
           </p:cNvPr>
@@ -5117,7 +5117,7 @@
           <p:cNvPr id="21" name="">
             <a:extLst xmlns:a="http://schemas.openxmlformats.org/drawingml/2006/main">
               <a:ext uri="{FF2B5EF4-FFF2-40B4-BE49-F238E27FC236}">
-                <a16:creationId xmlns:a16="http://schemas.microsoft.com/office/drawing/2014/main" id="{CF25B40A-49DE-454C-B7D8-083D6B555B77}"/>
+                <a16:creationId xmlns:a16="http://schemas.microsoft.com/office/drawing/2014/main" id="{27CD11E8-431B-4BF4-98A7-893EB030F20A}"/>
               </a:ext>
             </a:extLst>
           </p:cNvPr>
@@ -5179,7 +5179,7 @@
     </p:spTree>
     <p:extLst>
       <p:ext uri="{BB962C8B-B14F-4D97-AF65-F5344CB8AC3E}">
-        <p14:creationId xmlns:p14="http://schemas.microsoft.com/office/powerpoint/2010/main" val="710843588"/>
+        <p14:creationId xmlns:p14="http://schemas.microsoft.com/office/powerpoint/2010/main" val="1866163119"/>
       </p:ext>
     </p:extLst>
   </p:cSld>
@@ -5207,7 +5207,7 @@
           <p:nvPr/>
         </p:nvPicPr>
         <p:blipFill>
-          <a:blip xmlns:r="http://schemas.openxmlformats.org/officeDocument/2006/relationships" xmlns:a="http://schemas.openxmlformats.org/drawingml/2006/main" r:embed="R4476c69f15e74e6d"/>
+          <a:blip xmlns:r="http://schemas.openxmlformats.org/officeDocument/2006/relationships" xmlns:a="http://schemas.openxmlformats.org/drawingml/2006/main" r:embed="Rbe3faf78a6704fac"/>
           <a:srcRect xmlns:a="http://schemas.openxmlformats.org/drawingml/2006/main" l="0" t="27" r="0" b="27"/>
           <a:stretch xmlns:a="http://schemas.openxmlformats.org/drawingml/2006/main">
             <a:fillRect l="0" t="0" r="0" b="0"/>
@@ -5228,7 +5228,7 @@
           <p:cNvPr id="2" name="">
             <a:extLst xmlns:a="http://schemas.openxmlformats.org/drawingml/2006/main">
               <a:ext uri="{FF2B5EF4-FFF2-40B4-BE49-F238E27FC236}">
-                <a16:creationId xmlns:a16="http://schemas.microsoft.com/office/drawing/2014/main" id="{48665CD1-D5A9-4109-A15F-8D72F255E879}"/>
+                <a16:creationId xmlns:a16="http://schemas.microsoft.com/office/drawing/2014/main" id="{A1585C32-DAA8-4104-A571-6ED34EA52A05}"/>
               </a:ext>
             </a:extLst>
           </p:cNvPr>
@@ -5265,7 +5265,7 @@
           <p:cNvPr id="3" name="">
             <a:extLst xmlns:a="http://schemas.openxmlformats.org/drawingml/2006/main">
               <a:ext uri="{FF2B5EF4-FFF2-40B4-BE49-F238E27FC236}">
-                <a16:creationId xmlns:a16="http://schemas.microsoft.com/office/drawing/2014/main" id="{C2698F99-815B-407F-9835-FA015A7784A8}"/>
+                <a16:creationId xmlns:a16="http://schemas.microsoft.com/office/drawing/2014/main" id="{02AD9C62-764F-441C-94AE-C9A167751906}"/>
               </a:ext>
             </a:extLst>
           </p:cNvPr>
@@ -5302,7 +5302,7 @@
           <p:cNvPr id="4" name="">
             <a:extLst xmlns:a="http://schemas.openxmlformats.org/drawingml/2006/main">
               <a:ext uri="{FF2B5EF4-FFF2-40B4-BE49-F238E27FC236}">
-                <a16:creationId xmlns:a16="http://schemas.microsoft.com/office/drawing/2014/main" id="{B4CF842B-6444-4A40-A25D-9E22C943C47C}"/>
+                <a16:creationId xmlns:a16="http://schemas.microsoft.com/office/drawing/2014/main" id="{1075B96E-9EE2-4FE7-9B45-D8794CAB1DA5}"/>
               </a:ext>
             </a:extLst>
           </p:cNvPr>
@@ -5366,7 +5366,7 @@
           <p:cNvPr id="5" name="">
             <a:extLst xmlns:a="http://schemas.openxmlformats.org/drawingml/2006/main">
               <a:ext uri="{FF2B5EF4-FFF2-40B4-BE49-F238E27FC236}">
-                <a16:creationId xmlns:a16="http://schemas.microsoft.com/office/drawing/2014/main" id="{35643904-25D1-4B11-BADB-845A1334E320}"/>
+                <a16:creationId xmlns:a16="http://schemas.microsoft.com/office/drawing/2014/main" id="{6A5D76A7-6C18-42FA-A83C-B9983C5DFEB8}"/>
               </a:ext>
             </a:extLst>
           </p:cNvPr>
@@ -5430,7 +5430,7 @@
           <p:cNvPr id="6" name="">
             <a:extLst xmlns:a="http://schemas.openxmlformats.org/drawingml/2006/main">
               <a:ext uri="{FF2B5EF4-FFF2-40B4-BE49-F238E27FC236}">
-                <a16:creationId xmlns:a16="http://schemas.microsoft.com/office/drawing/2014/main" id="{BA493552-A45D-4066-A64A-B1BFFE69BB87}"/>
+                <a16:creationId xmlns:a16="http://schemas.microsoft.com/office/drawing/2014/main" id="{7CAE36D6-651B-41F4-8F83-1C8B25B9A92B}"/>
               </a:ext>
             </a:extLst>
           </p:cNvPr>
@@ -5494,7 +5494,7 @@
           <p:cNvPr id="7" name="">
             <a:extLst xmlns:a="http://schemas.openxmlformats.org/drawingml/2006/main">
               <a:ext uri="{FF2B5EF4-FFF2-40B4-BE49-F238E27FC236}">
-                <a16:creationId xmlns:a16="http://schemas.microsoft.com/office/drawing/2014/main" id="{35EBB401-0D62-4327-A93D-3817C14ABDBD}"/>
+                <a16:creationId xmlns:a16="http://schemas.microsoft.com/office/drawing/2014/main" id="{3096151D-F6A8-4929-BEE2-B2DF7FEA62B7}"/>
               </a:ext>
             </a:extLst>
           </p:cNvPr>
@@ -5529,7 +5529,7 @@
           <p:cNvPr id="8" name="">
             <a:extLst xmlns:a="http://schemas.openxmlformats.org/drawingml/2006/main">
               <a:ext uri="{FF2B5EF4-FFF2-40B4-BE49-F238E27FC236}">
-                <a16:creationId xmlns:a16="http://schemas.microsoft.com/office/drawing/2014/main" id="{7B4C8DDB-4A94-498F-BE3C-63C5B508C0A4}"/>
+                <a16:creationId xmlns:a16="http://schemas.microsoft.com/office/drawing/2014/main" id="{8843C8AD-D3B8-45F5-89EB-BC2573607132}"/>
               </a:ext>
             </a:extLst>
           </p:cNvPr>
@@ -5593,7 +5593,7 @@
           <p:cNvPr id="9" name="">
             <a:extLst xmlns:a="http://schemas.openxmlformats.org/drawingml/2006/main">
               <a:ext uri="{FF2B5EF4-FFF2-40B4-BE49-F238E27FC236}">
-                <a16:creationId xmlns:a16="http://schemas.microsoft.com/office/drawing/2014/main" id="{420FC45F-EC04-4CAD-A09F-1F598508DA95}"/>
+                <a16:creationId xmlns:a16="http://schemas.microsoft.com/office/drawing/2014/main" id="{80E5C674-E893-449C-A139-3B2A61EA6FDD}"/>
               </a:ext>
             </a:extLst>
           </p:cNvPr>
@@ -5657,7 +5657,7 @@
           <p:cNvPr id="10" name="">
             <a:extLst xmlns:a="http://schemas.openxmlformats.org/drawingml/2006/main">
               <a:ext uri="{FF2B5EF4-FFF2-40B4-BE49-F238E27FC236}">
-                <a16:creationId xmlns:a16="http://schemas.microsoft.com/office/drawing/2014/main" id="{7B536A24-A397-49CC-9A00-113BB3FD2342}"/>
+                <a16:creationId xmlns:a16="http://schemas.microsoft.com/office/drawing/2014/main" id="{C83BF38A-1CF8-4F29-B08D-FD741E025A6E}"/>
               </a:ext>
             </a:extLst>
           </p:cNvPr>
@@ -5692,7 +5692,7 @@
           <p:cNvPr id="11" name="">
             <a:extLst xmlns:a="http://schemas.openxmlformats.org/drawingml/2006/main">
               <a:ext uri="{FF2B5EF4-FFF2-40B4-BE49-F238E27FC236}">
-                <a16:creationId xmlns:a16="http://schemas.microsoft.com/office/drawing/2014/main" id="{021468AB-D3E1-4690-9A25-E2D0C97B3B3F}"/>
+                <a16:creationId xmlns:a16="http://schemas.microsoft.com/office/drawing/2014/main" id="{A7B00F52-A72A-4569-9BE6-1713A89F6DEF}"/>
               </a:ext>
             </a:extLst>
           </p:cNvPr>
@@ -5756,7 +5756,7 @@
           <p:cNvPr id="12" name="">
             <a:extLst xmlns:a="http://schemas.openxmlformats.org/drawingml/2006/main">
               <a:ext uri="{FF2B5EF4-FFF2-40B4-BE49-F238E27FC236}">
-                <a16:creationId xmlns:a16="http://schemas.microsoft.com/office/drawing/2014/main" id="{9A378C63-9231-4F88-8250-D34EE199DF4D}"/>
+                <a16:creationId xmlns:a16="http://schemas.microsoft.com/office/drawing/2014/main" id="{AC2F0E2D-ED08-4DAA-8258-699DF4C59EDE}"/>
               </a:ext>
             </a:extLst>
           </p:cNvPr>
@@ -5820,7 +5820,7 @@
           <p:cNvPr id="13" name="">
             <a:extLst xmlns:a="http://schemas.openxmlformats.org/drawingml/2006/main">
               <a:ext uri="{FF2B5EF4-FFF2-40B4-BE49-F238E27FC236}">
-                <a16:creationId xmlns:a16="http://schemas.microsoft.com/office/drawing/2014/main" id="{1139C918-78AA-48F0-9D52-1BC1ECEC417B}"/>
+                <a16:creationId xmlns:a16="http://schemas.microsoft.com/office/drawing/2014/main" id="{7B4BEBEA-0034-4B65-BAB8-8EB46E109092}"/>
               </a:ext>
             </a:extLst>
           </p:cNvPr>
@@ -5855,7 +5855,7 @@
           <p:cNvPr id="14" name="">
             <a:extLst xmlns:a="http://schemas.openxmlformats.org/drawingml/2006/main">
               <a:ext uri="{FF2B5EF4-FFF2-40B4-BE49-F238E27FC236}">
-                <a16:creationId xmlns:a16="http://schemas.microsoft.com/office/drawing/2014/main" id="{15472E5A-21E6-4319-B6C4-46837116BF7F}"/>
+                <a16:creationId xmlns:a16="http://schemas.microsoft.com/office/drawing/2014/main" id="{94374183-5C3F-4ECD-8C24-57E184BBDA14}"/>
               </a:ext>
             </a:extLst>
           </p:cNvPr>
@@ -5919,7 +5919,7 @@
           <p:cNvPr id="15" name="">
             <a:extLst xmlns:a="http://schemas.openxmlformats.org/drawingml/2006/main">
               <a:ext uri="{FF2B5EF4-FFF2-40B4-BE49-F238E27FC236}">
-                <a16:creationId xmlns:a16="http://schemas.microsoft.com/office/drawing/2014/main" id="{98704DC6-8C65-4CED-8A0B-74790E5175C7}"/>
+                <a16:creationId xmlns:a16="http://schemas.microsoft.com/office/drawing/2014/main" id="{4E645C83-FB02-4038-A64A-A70C8EC02E66}"/>
               </a:ext>
             </a:extLst>
           </p:cNvPr>
@@ -5983,7 +5983,7 @@
           <p:cNvPr id="16" name="">
             <a:extLst xmlns:a="http://schemas.openxmlformats.org/drawingml/2006/main">
               <a:ext uri="{FF2B5EF4-FFF2-40B4-BE49-F238E27FC236}">
-                <a16:creationId xmlns:a16="http://schemas.microsoft.com/office/drawing/2014/main" id="{F0C7A0D5-B447-43BE-B1A0-B5720A48CE9A}"/>
+                <a16:creationId xmlns:a16="http://schemas.microsoft.com/office/drawing/2014/main" id="{735435C8-7666-472F-BDDC-46FE50E0E322}"/>
               </a:ext>
             </a:extLst>
           </p:cNvPr>
@@ -6018,7 +6018,7 @@
           <p:cNvPr id="17" name="">
             <a:extLst xmlns:a="http://schemas.openxmlformats.org/drawingml/2006/main">
               <a:ext uri="{FF2B5EF4-FFF2-40B4-BE49-F238E27FC236}">
-                <a16:creationId xmlns:a16="http://schemas.microsoft.com/office/drawing/2014/main" id="{BF01C758-4A4C-473D-9B9B-81F2C13CA085}"/>
+                <a16:creationId xmlns:a16="http://schemas.microsoft.com/office/drawing/2014/main" id="{A3864F9D-FEEE-49A9-8930-86767ADC13D1}"/>
               </a:ext>
             </a:extLst>
           </p:cNvPr>
@@ -6082,7 +6082,7 @@
           <p:cNvPr id="18" name="">
             <a:extLst xmlns:a="http://schemas.openxmlformats.org/drawingml/2006/main">
               <a:ext uri="{FF2B5EF4-FFF2-40B4-BE49-F238E27FC236}">
-                <a16:creationId xmlns:a16="http://schemas.microsoft.com/office/drawing/2014/main" id="{C2C20451-7587-4370-BD33-7B77800DC38C}"/>
+                <a16:creationId xmlns:a16="http://schemas.microsoft.com/office/drawing/2014/main" id="{26911091-D540-4023-9E7C-E73EC83DDE1B}"/>
               </a:ext>
             </a:extLst>
           </p:cNvPr>
@@ -6146,7 +6146,7 @@
           <p:cNvPr id="19" name="">
             <a:extLst xmlns:a="http://schemas.openxmlformats.org/drawingml/2006/main">
               <a:ext uri="{FF2B5EF4-FFF2-40B4-BE49-F238E27FC236}">
-                <a16:creationId xmlns:a16="http://schemas.microsoft.com/office/drawing/2014/main" id="{48C1A505-51BE-4765-B6B6-B2F7E776C4A2}"/>
+                <a16:creationId xmlns:a16="http://schemas.microsoft.com/office/drawing/2014/main" id="{5A1AD85B-693E-469D-93EE-8A78A658E081}"/>
               </a:ext>
             </a:extLst>
           </p:cNvPr>
@@ -6181,7 +6181,7 @@
           <p:cNvPr id="20" name="">
             <a:extLst xmlns:a="http://schemas.openxmlformats.org/drawingml/2006/main">
               <a:ext uri="{FF2B5EF4-FFF2-40B4-BE49-F238E27FC236}">
-                <a16:creationId xmlns:a16="http://schemas.microsoft.com/office/drawing/2014/main" id="{0A0A761B-7D5C-416A-B9BD-B4D701E8DC40}"/>
+                <a16:creationId xmlns:a16="http://schemas.microsoft.com/office/drawing/2014/main" id="{578E31BB-6649-495A-B0B9-923FA70CC1E0}"/>
               </a:ext>
             </a:extLst>
           </p:cNvPr>
@@ -6245,7 +6245,7 @@
           <p:cNvPr id="21" name="">
             <a:extLst xmlns:a="http://schemas.openxmlformats.org/drawingml/2006/main">
               <a:ext uri="{FF2B5EF4-FFF2-40B4-BE49-F238E27FC236}">
-                <a16:creationId xmlns:a16="http://schemas.microsoft.com/office/drawing/2014/main" id="{5A0E64A6-ECC1-422B-8D7C-E6B8BF9C2B1E}"/>
+                <a16:creationId xmlns:a16="http://schemas.microsoft.com/office/drawing/2014/main" id="{601B306B-239F-44BE-BB8C-C156E8F62A9B}"/>
               </a:ext>
             </a:extLst>
           </p:cNvPr>
@@ -6309,7 +6309,7 @@
           <p:cNvPr id="22" name="">
             <a:extLst xmlns:a="http://schemas.openxmlformats.org/drawingml/2006/main">
               <a:ext uri="{FF2B5EF4-FFF2-40B4-BE49-F238E27FC236}">
-                <a16:creationId xmlns:a16="http://schemas.microsoft.com/office/drawing/2014/main" id="{B38783E7-AA0C-4712-85E5-DEB738DF6B77}"/>
+                <a16:creationId xmlns:a16="http://schemas.microsoft.com/office/drawing/2014/main" id="{E549BD04-A873-4043-A52B-3BDD0CAA7E96}"/>
               </a:ext>
             </a:extLst>
           </p:cNvPr>
@@ -6342,7 +6342,7 @@
           <p:cNvPr id="23" name="">
             <a:extLst xmlns:a="http://schemas.openxmlformats.org/drawingml/2006/main">
               <a:ext uri="{FF2B5EF4-FFF2-40B4-BE49-F238E27FC236}">
-                <a16:creationId xmlns:a16="http://schemas.microsoft.com/office/drawing/2014/main" id="{60D076C6-7400-4D54-9180-4B840CA8A56F}"/>
+                <a16:creationId xmlns:a16="http://schemas.microsoft.com/office/drawing/2014/main" id="{43F1A2FC-DC9E-47AE-931F-864AF61FB4FB}"/>
               </a:ext>
             </a:extLst>
           </p:cNvPr>
@@ -6406,7 +6406,7 @@
           <p:cNvPr id="24" name="">
             <a:extLst xmlns:a="http://schemas.openxmlformats.org/drawingml/2006/main">
               <a:ext uri="{FF2B5EF4-FFF2-40B4-BE49-F238E27FC236}">
-                <a16:creationId xmlns:a16="http://schemas.microsoft.com/office/drawing/2014/main" id="{4F6A753D-041E-4519-A2EA-AC08D04E6C8B}"/>
+                <a16:creationId xmlns:a16="http://schemas.microsoft.com/office/drawing/2014/main" id="{79D0A2BC-BF87-4661-A762-68DE378BFD1F}"/>
               </a:ext>
             </a:extLst>
           </p:cNvPr>
@@ -6468,7 +6468,7 @@
     </p:spTree>
     <p:extLst>
       <p:ext uri="{BB962C8B-B14F-4D97-AF65-F5344CB8AC3E}">
-        <p14:creationId xmlns:p14="http://schemas.microsoft.com/office/powerpoint/2010/main" val="393765759"/>
+        <p14:creationId xmlns:p14="http://schemas.microsoft.com/office/powerpoint/2010/main" val="1883928413"/>
       </p:ext>
     </p:extLst>
   </p:cSld>
@@ -6496,7 +6496,7 @@
           <p:nvPr/>
         </p:nvPicPr>
         <p:blipFill>
-          <a:blip xmlns:r="http://schemas.openxmlformats.org/officeDocument/2006/relationships" xmlns:a="http://schemas.openxmlformats.org/drawingml/2006/main" r:embed="R4f12de87b28c494e"/>
+          <a:blip xmlns:r="http://schemas.openxmlformats.org/officeDocument/2006/relationships" xmlns:a="http://schemas.openxmlformats.org/drawingml/2006/main" r:embed="R02a96a14739b4f6e"/>
           <a:srcRect xmlns:a="http://schemas.openxmlformats.org/drawingml/2006/main" l="0" t="27" r="0" b="27"/>
           <a:stretch xmlns:a="http://schemas.openxmlformats.org/drawingml/2006/main">
             <a:fillRect l="0" t="0" r="0" b="0"/>
@@ -6517,7 +6517,7 @@
           <p:cNvPr id="2" name="">
             <a:extLst xmlns:a="http://schemas.openxmlformats.org/drawingml/2006/main">
               <a:ext uri="{FF2B5EF4-FFF2-40B4-BE49-F238E27FC236}">
-                <a16:creationId xmlns:a16="http://schemas.microsoft.com/office/drawing/2014/main" id="{D8DAA2FB-712D-4D59-A9D0-47DE789726BD}"/>
+                <a16:creationId xmlns:a16="http://schemas.microsoft.com/office/drawing/2014/main" id="{BF4E9A67-4E71-491E-A329-BF068116D36A}"/>
               </a:ext>
             </a:extLst>
           </p:cNvPr>
@@ -6554,7 +6554,7 @@
           <p:cNvPr id="3" name="">
             <a:extLst xmlns:a="http://schemas.openxmlformats.org/drawingml/2006/main">
               <a:ext uri="{FF2B5EF4-FFF2-40B4-BE49-F238E27FC236}">
-                <a16:creationId xmlns:a16="http://schemas.microsoft.com/office/drawing/2014/main" id="{949380BD-A6EB-40E6-9332-36E72653537E}"/>
+                <a16:creationId xmlns:a16="http://schemas.microsoft.com/office/drawing/2014/main" id="{49AFD256-30B5-44E5-AE8D-21FF6061F6ED}"/>
               </a:ext>
             </a:extLst>
           </p:cNvPr>
@@ -6591,7 +6591,7 @@
           <p:cNvPr id="4" name="">
             <a:extLst xmlns:a="http://schemas.openxmlformats.org/drawingml/2006/main">
               <a:ext uri="{FF2B5EF4-FFF2-40B4-BE49-F238E27FC236}">
-                <a16:creationId xmlns:a16="http://schemas.microsoft.com/office/drawing/2014/main" id="{0FCAE578-E10C-4917-A391-505FB3C29CFB}"/>
+                <a16:creationId xmlns:a16="http://schemas.microsoft.com/office/drawing/2014/main" id="{CCD0F022-DF92-48D7-806C-A783A9B7A24C}"/>
               </a:ext>
             </a:extLst>
           </p:cNvPr>
@@ -6655,7 +6655,7 @@
           <p:cNvPr id="5" name="">
             <a:extLst xmlns:a="http://schemas.openxmlformats.org/drawingml/2006/main">
               <a:ext uri="{FF2B5EF4-FFF2-40B4-BE49-F238E27FC236}">
-                <a16:creationId xmlns:a16="http://schemas.microsoft.com/office/drawing/2014/main" id="{C74794EE-C2AC-485C-9D55-14AE2E44337D}"/>
+                <a16:creationId xmlns:a16="http://schemas.microsoft.com/office/drawing/2014/main" id="{378225C3-8465-4BC0-A83B-A1288789E48A}"/>
               </a:ext>
             </a:extLst>
           </p:cNvPr>
@@ -6719,7 +6719,7 @@
           <p:cNvPr id="6" name="">
             <a:extLst xmlns:a="http://schemas.openxmlformats.org/drawingml/2006/main">
               <a:ext uri="{FF2B5EF4-FFF2-40B4-BE49-F238E27FC236}">
-                <a16:creationId xmlns:a16="http://schemas.microsoft.com/office/drawing/2014/main" id="{D70720D7-A324-4AF8-9DFB-66D9EFCEFFB5}"/>
+                <a16:creationId xmlns:a16="http://schemas.microsoft.com/office/drawing/2014/main" id="{741A18BC-026E-4CE1-86D4-E7CFEA2C59E1}"/>
               </a:ext>
             </a:extLst>
           </p:cNvPr>
@@ -6783,7 +6783,7 @@
           <p:cNvPr id="7" name="">
             <a:extLst xmlns:a="http://schemas.openxmlformats.org/drawingml/2006/main">
               <a:ext uri="{FF2B5EF4-FFF2-40B4-BE49-F238E27FC236}">
-                <a16:creationId xmlns:a16="http://schemas.microsoft.com/office/drawing/2014/main" id="{3EF6081D-0A59-464D-9FC4-7DB7872892EF}"/>
+                <a16:creationId xmlns:a16="http://schemas.microsoft.com/office/drawing/2014/main" id="{7E3559C8-388D-46C6-BAE6-B99872CBAC6D}"/>
               </a:ext>
             </a:extLst>
           </p:cNvPr>
@@ -6818,7 +6818,7 @@
           <p:cNvPr id="8" name="">
             <a:extLst xmlns:a="http://schemas.openxmlformats.org/drawingml/2006/main">
               <a:ext uri="{FF2B5EF4-FFF2-40B4-BE49-F238E27FC236}">
-                <a16:creationId xmlns:a16="http://schemas.microsoft.com/office/drawing/2014/main" id="{F7676364-F1F3-4F71-AD9B-9CE34F22CF2B}"/>
+                <a16:creationId xmlns:a16="http://schemas.microsoft.com/office/drawing/2014/main" id="{63573A56-BDAF-4363-AD92-7B16DAF8DA8E}"/>
               </a:ext>
             </a:extLst>
           </p:cNvPr>
@@ -6882,7 +6882,7 @@
           <p:cNvPr id="9" name="">
             <a:extLst xmlns:a="http://schemas.openxmlformats.org/drawingml/2006/main">
               <a:ext uri="{FF2B5EF4-FFF2-40B4-BE49-F238E27FC236}">
-                <a16:creationId xmlns:a16="http://schemas.microsoft.com/office/drawing/2014/main" id="{7AFDCC2F-A7E4-4556-8274-76970F5436EE}"/>
+                <a16:creationId xmlns:a16="http://schemas.microsoft.com/office/drawing/2014/main" id="{E7726C9D-3559-44BE-A606-B51987974148}"/>
               </a:ext>
             </a:extLst>
           </p:cNvPr>
@@ -6946,7 +6946,7 @@
           <p:cNvPr id="10" name="">
             <a:extLst xmlns:a="http://schemas.openxmlformats.org/drawingml/2006/main">
               <a:ext uri="{FF2B5EF4-FFF2-40B4-BE49-F238E27FC236}">
-                <a16:creationId xmlns:a16="http://schemas.microsoft.com/office/drawing/2014/main" id="{F7BC33CA-4866-401C-BB5C-CE30581B31F1}"/>
+                <a16:creationId xmlns:a16="http://schemas.microsoft.com/office/drawing/2014/main" id="{3EDA95DD-A9C1-4EE0-A582-A9DA24C40299}"/>
               </a:ext>
             </a:extLst>
           </p:cNvPr>
@@ -6979,7 +6979,7 @@
           <p:cNvPr id="11" name="">
             <a:extLst xmlns:a="http://schemas.openxmlformats.org/drawingml/2006/main">
               <a:ext uri="{FF2B5EF4-FFF2-40B4-BE49-F238E27FC236}">
-                <a16:creationId xmlns:a16="http://schemas.microsoft.com/office/drawing/2014/main" id="{7F2FEC05-A6CF-481B-A981-91ED75026944}"/>
+                <a16:creationId xmlns:a16="http://schemas.microsoft.com/office/drawing/2014/main" id="{32561FFD-CED7-4DC8-8570-E7A27A970238}"/>
               </a:ext>
             </a:extLst>
           </p:cNvPr>
@@ -7014,7 +7014,7 @@
           <p:cNvPr id="12" name="">
             <a:extLst xmlns:a="http://schemas.openxmlformats.org/drawingml/2006/main">
               <a:ext uri="{FF2B5EF4-FFF2-40B4-BE49-F238E27FC236}">
-                <a16:creationId xmlns:a16="http://schemas.microsoft.com/office/drawing/2014/main" id="{54DB72D3-5416-41B8-B41B-14CBFC2F1F43}"/>
+                <a16:creationId xmlns:a16="http://schemas.microsoft.com/office/drawing/2014/main" id="{234F0130-A618-441B-98EA-AA34AE48E4D6}"/>
               </a:ext>
             </a:extLst>
           </p:cNvPr>
@@ -7078,7 +7078,7 @@
           <p:cNvPr id="13" name="">
             <a:extLst xmlns:a="http://schemas.openxmlformats.org/drawingml/2006/main">
               <a:ext uri="{FF2B5EF4-FFF2-40B4-BE49-F238E27FC236}">
-                <a16:creationId xmlns:a16="http://schemas.microsoft.com/office/drawing/2014/main" id="{9600CF6B-D74F-495E-A4EB-BC4470EB16C5}"/>
+                <a16:creationId xmlns:a16="http://schemas.microsoft.com/office/drawing/2014/main" id="{60D61568-B054-46FA-989C-29092A72CB3D}"/>
               </a:ext>
             </a:extLst>
           </p:cNvPr>
@@ -7142,7 +7142,7 @@
           <p:cNvPr id="14" name="">
             <a:extLst xmlns:a="http://schemas.openxmlformats.org/drawingml/2006/main">
               <a:ext uri="{FF2B5EF4-FFF2-40B4-BE49-F238E27FC236}">
-                <a16:creationId xmlns:a16="http://schemas.microsoft.com/office/drawing/2014/main" id="{E2AA0DDB-FD05-4AE8-B6E7-728D5EF28BD2}"/>
+                <a16:creationId xmlns:a16="http://schemas.microsoft.com/office/drawing/2014/main" id="{082CFA4F-A50F-4738-AD8F-3D1EEC17E1C4}"/>
               </a:ext>
             </a:extLst>
           </p:cNvPr>
@@ -7175,7 +7175,7 @@
           <p:cNvPr id="15" name="">
             <a:extLst xmlns:a="http://schemas.openxmlformats.org/drawingml/2006/main">
               <a:ext uri="{FF2B5EF4-FFF2-40B4-BE49-F238E27FC236}">
-                <a16:creationId xmlns:a16="http://schemas.microsoft.com/office/drawing/2014/main" id="{4DAA8B2B-6115-492D-A238-9AF7503C03EE}"/>
+                <a16:creationId xmlns:a16="http://schemas.microsoft.com/office/drawing/2014/main" id="{03F81A94-DEF8-41E4-B96B-8B638A8ED645}"/>
               </a:ext>
             </a:extLst>
           </p:cNvPr>
@@ -7210,7 +7210,7 @@
           <p:cNvPr id="16" name="">
             <a:extLst xmlns:a="http://schemas.openxmlformats.org/drawingml/2006/main">
               <a:ext uri="{FF2B5EF4-FFF2-40B4-BE49-F238E27FC236}">
-                <a16:creationId xmlns:a16="http://schemas.microsoft.com/office/drawing/2014/main" id="{80E410F9-ADAA-414C-ABFF-22199C97F540}"/>
+                <a16:creationId xmlns:a16="http://schemas.microsoft.com/office/drawing/2014/main" id="{F8CA525F-17DD-45B0-A692-4AEA8E8B1328}"/>
               </a:ext>
             </a:extLst>
           </p:cNvPr>
@@ -7274,7 +7274,7 @@
           <p:cNvPr id="17" name="">
             <a:extLst xmlns:a="http://schemas.openxmlformats.org/drawingml/2006/main">
               <a:ext uri="{FF2B5EF4-FFF2-40B4-BE49-F238E27FC236}">
-                <a16:creationId xmlns:a16="http://schemas.microsoft.com/office/drawing/2014/main" id="{9DB651BE-1465-4CA0-98E1-FD869B14C2E8}"/>
+                <a16:creationId xmlns:a16="http://schemas.microsoft.com/office/drawing/2014/main" id="{91D40333-F1A9-4213-9B85-74826963DF0E}"/>
               </a:ext>
             </a:extLst>
           </p:cNvPr>
@@ -7338,7 +7338,7 @@
           <p:cNvPr id="18" name="">
             <a:extLst xmlns:a="http://schemas.openxmlformats.org/drawingml/2006/main">
               <a:ext uri="{FF2B5EF4-FFF2-40B4-BE49-F238E27FC236}">
-                <a16:creationId xmlns:a16="http://schemas.microsoft.com/office/drawing/2014/main" id="{83AC3653-C69C-448B-9316-FC393423AF7B}"/>
+                <a16:creationId xmlns:a16="http://schemas.microsoft.com/office/drawing/2014/main" id="{E5BA4EAF-BFB3-4C48-9461-825DE6BC387D}"/>
               </a:ext>
             </a:extLst>
           </p:cNvPr>
@@ -7402,7 +7402,7 @@
           <p:cNvPr id="19" name="">
             <a:extLst xmlns:a="http://schemas.openxmlformats.org/drawingml/2006/main">
               <a:ext uri="{FF2B5EF4-FFF2-40B4-BE49-F238E27FC236}">
-                <a16:creationId xmlns:a16="http://schemas.microsoft.com/office/drawing/2014/main" id="{759EC2C1-17B7-4143-97EB-E326FE69C0B8}"/>
+                <a16:creationId xmlns:a16="http://schemas.microsoft.com/office/drawing/2014/main" id="{E7DA91B0-8CE0-4ECF-B57B-17165B4EAB6A}"/>
               </a:ext>
             </a:extLst>
           </p:cNvPr>
@@ -7435,7 +7435,7 @@
           <p:cNvPr id="20" name="">
             <a:extLst xmlns:a="http://schemas.openxmlformats.org/drawingml/2006/main">
               <a:ext uri="{FF2B5EF4-FFF2-40B4-BE49-F238E27FC236}">
-                <a16:creationId xmlns:a16="http://schemas.microsoft.com/office/drawing/2014/main" id="{743EA0E1-348F-4D19-B144-994EFA723465}"/>
+                <a16:creationId xmlns:a16="http://schemas.microsoft.com/office/drawing/2014/main" id="{52DCF72B-7A2A-4CE8-86FF-56868075D335}"/>
               </a:ext>
             </a:extLst>
           </p:cNvPr>
@@ -7499,7 +7499,7 @@
           <p:cNvPr id="21" name="">
             <a:extLst xmlns:a="http://schemas.openxmlformats.org/drawingml/2006/main">
               <a:ext uri="{FF2B5EF4-FFF2-40B4-BE49-F238E27FC236}">
-                <a16:creationId xmlns:a16="http://schemas.microsoft.com/office/drawing/2014/main" id="{EC02417D-367D-4692-B530-5D4D9314C646}"/>
+                <a16:creationId xmlns:a16="http://schemas.microsoft.com/office/drawing/2014/main" id="{3B3AC6A3-42DD-4676-B3E2-BEB0AADEA556}"/>
               </a:ext>
             </a:extLst>
           </p:cNvPr>
@@ -7561,7 +7561,7 @@
     </p:spTree>
     <p:extLst>
       <p:ext uri="{BB962C8B-B14F-4D97-AF65-F5344CB8AC3E}">
-        <p14:creationId xmlns:p14="http://schemas.microsoft.com/office/powerpoint/2010/main" val="1672844871"/>
+        <p14:creationId xmlns:p14="http://schemas.microsoft.com/office/powerpoint/2010/main" val="468822055"/>
       </p:ext>
     </p:extLst>
   </p:cSld>
@@ -7589,7 +7589,7 @@
           <p:nvPr/>
         </p:nvPicPr>
         <p:blipFill>
-          <a:blip xmlns:r="http://schemas.openxmlformats.org/officeDocument/2006/relationships" xmlns:a="http://schemas.openxmlformats.org/drawingml/2006/main" r:embed="Rdcede73868d549c2"/>
+          <a:blip xmlns:r="http://schemas.openxmlformats.org/officeDocument/2006/relationships" xmlns:a="http://schemas.openxmlformats.org/drawingml/2006/main" r:embed="Rcc46ad17ef1c48be"/>
           <a:srcRect xmlns:a="http://schemas.openxmlformats.org/drawingml/2006/main" l="0" t="27" r="0" b="27"/>
           <a:stretch xmlns:a="http://schemas.openxmlformats.org/drawingml/2006/main">
             <a:fillRect l="0" t="0" r="0" b="0"/>
@@ -7610,7 +7610,7 @@
           <p:cNvPr id="2" name="">
             <a:extLst xmlns:a="http://schemas.openxmlformats.org/drawingml/2006/main">
               <a:ext uri="{FF2B5EF4-FFF2-40B4-BE49-F238E27FC236}">
-                <a16:creationId xmlns:a16="http://schemas.microsoft.com/office/drawing/2014/main" id="{1507D17D-5797-4C30-95B1-976B66F5786D}"/>
+                <a16:creationId xmlns:a16="http://schemas.microsoft.com/office/drawing/2014/main" id="{6D83F3E7-A53D-44E1-8B4D-648BA5FBBF9E}"/>
               </a:ext>
             </a:extLst>
           </p:cNvPr>
@@ -7647,7 +7647,7 @@
           <p:cNvPr id="3" name="">
             <a:extLst xmlns:a="http://schemas.openxmlformats.org/drawingml/2006/main">
               <a:ext uri="{FF2B5EF4-FFF2-40B4-BE49-F238E27FC236}">
-                <a16:creationId xmlns:a16="http://schemas.microsoft.com/office/drawing/2014/main" id="{209A9A5E-5C21-4A27-891A-682059CA2923}"/>
+                <a16:creationId xmlns:a16="http://schemas.microsoft.com/office/drawing/2014/main" id="{B44BA814-082E-4755-BFBA-9A841072BED9}"/>
               </a:ext>
             </a:extLst>
           </p:cNvPr>
@@ -7684,7 +7684,7 @@
           <p:cNvPr id="4" name="">
             <a:extLst xmlns:a="http://schemas.openxmlformats.org/drawingml/2006/main">
               <a:ext uri="{FF2B5EF4-FFF2-40B4-BE49-F238E27FC236}">
-                <a16:creationId xmlns:a16="http://schemas.microsoft.com/office/drawing/2014/main" id="{99BBFF75-F082-4550-8A9E-DFF96AF747EB}"/>
+                <a16:creationId xmlns:a16="http://schemas.microsoft.com/office/drawing/2014/main" id="{C534649E-E014-4FC4-9F02-2541E54D8AEE}"/>
               </a:ext>
             </a:extLst>
           </p:cNvPr>
@@ -7748,7 +7748,7 @@
           <p:cNvPr id="5" name="">
             <a:extLst xmlns:a="http://schemas.openxmlformats.org/drawingml/2006/main">
               <a:ext uri="{FF2B5EF4-FFF2-40B4-BE49-F238E27FC236}">
-                <a16:creationId xmlns:a16="http://schemas.microsoft.com/office/drawing/2014/main" id="{04427E66-09F6-48AC-B972-F3654EA2185E}"/>
+                <a16:creationId xmlns:a16="http://schemas.microsoft.com/office/drawing/2014/main" id="{B3E499AD-6D95-4144-9CD7-31E77D43122D}"/>
               </a:ext>
             </a:extLst>
           </p:cNvPr>
@@ -7812,7 +7812,7 @@
           <p:cNvPr id="6" name="">
             <a:extLst xmlns:a="http://schemas.openxmlformats.org/drawingml/2006/main">
               <a:ext uri="{FF2B5EF4-FFF2-40B4-BE49-F238E27FC236}">
-                <a16:creationId xmlns:a16="http://schemas.microsoft.com/office/drawing/2014/main" id="{EAA17E48-3F0F-4EFB-A554-F95151C2BFA2}"/>
+                <a16:creationId xmlns:a16="http://schemas.microsoft.com/office/drawing/2014/main" id="{4055EA8F-CACD-4530-9620-8E2007BB6D8B}"/>
               </a:ext>
             </a:extLst>
           </p:cNvPr>
@@ -7876,7 +7876,7 @@
           <p:cNvPr id="7" name="">
             <a:extLst xmlns:a="http://schemas.openxmlformats.org/drawingml/2006/main">
               <a:ext uri="{FF2B5EF4-FFF2-40B4-BE49-F238E27FC236}">
-                <a16:creationId xmlns:a16="http://schemas.microsoft.com/office/drawing/2014/main" id="{A7C55060-EB3A-4C7D-88DC-CCAB43B2460D}"/>
+                <a16:creationId xmlns:a16="http://schemas.microsoft.com/office/drawing/2014/main" id="{22CF626C-2D90-4420-9F91-CFD877915130}"/>
               </a:ext>
             </a:extLst>
           </p:cNvPr>
@@ -7911,7 +7911,7 @@
           <p:cNvPr id="8" name="">
             <a:extLst xmlns:a="http://schemas.openxmlformats.org/drawingml/2006/main">
               <a:ext uri="{FF2B5EF4-FFF2-40B4-BE49-F238E27FC236}">
-                <a16:creationId xmlns:a16="http://schemas.microsoft.com/office/drawing/2014/main" id="{E1EFA3DA-49DD-4DC6-983E-6708A8523D5D}"/>
+                <a16:creationId xmlns:a16="http://schemas.microsoft.com/office/drawing/2014/main" id="{E0FE0079-6578-45D0-B0AB-3A585055473F}"/>
               </a:ext>
             </a:extLst>
           </p:cNvPr>
@@ -7975,7 +7975,7 @@
           <p:cNvPr id="9" name="">
             <a:extLst xmlns:a="http://schemas.openxmlformats.org/drawingml/2006/main">
               <a:ext uri="{FF2B5EF4-FFF2-40B4-BE49-F238E27FC236}">
-                <a16:creationId xmlns:a16="http://schemas.microsoft.com/office/drawing/2014/main" id="{CCB5FEE5-0588-4C00-A6B2-E30ABA0C0B11}"/>
+                <a16:creationId xmlns:a16="http://schemas.microsoft.com/office/drawing/2014/main" id="{AA3C8596-5F05-4FE5-A31E-1DCCB8CDEABE}"/>
               </a:ext>
             </a:extLst>
           </p:cNvPr>
@@ -8039,7 +8039,7 @@
           <p:cNvPr id="10" name="">
             <a:extLst xmlns:a="http://schemas.openxmlformats.org/drawingml/2006/main">
               <a:ext uri="{FF2B5EF4-FFF2-40B4-BE49-F238E27FC236}">
-                <a16:creationId xmlns:a16="http://schemas.microsoft.com/office/drawing/2014/main" id="{8E0E88E5-5B9E-4789-8156-06232F25BFFF}"/>
+                <a16:creationId xmlns:a16="http://schemas.microsoft.com/office/drawing/2014/main" id="{C71E9771-D393-4111-B316-E11A6D87FE62}"/>
               </a:ext>
             </a:extLst>
           </p:cNvPr>
@@ -8074,7 +8074,7 @@
           <p:cNvPr id="11" name="">
             <a:extLst xmlns:a="http://schemas.openxmlformats.org/drawingml/2006/main">
               <a:ext uri="{FF2B5EF4-FFF2-40B4-BE49-F238E27FC236}">
-                <a16:creationId xmlns:a16="http://schemas.microsoft.com/office/drawing/2014/main" id="{519286B6-4DDA-43EC-8003-416726ABF7A1}"/>
+                <a16:creationId xmlns:a16="http://schemas.microsoft.com/office/drawing/2014/main" id="{629F31EE-6369-4F83-9320-38DA4A91862A}"/>
               </a:ext>
             </a:extLst>
           </p:cNvPr>
@@ -8138,7 +8138,7 @@
           <p:cNvPr id="12" name="">
             <a:extLst xmlns:a="http://schemas.openxmlformats.org/drawingml/2006/main">
               <a:ext uri="{FF2B5EF4-FFF2-40B4-BE49-F238E27FC236}">
-                <a16:creationId xmlns:a16="http://schemas.microsoft.com/office/drawing/2014/main" id="{9A7FF8D2-FFDC-4C30-85DB-F218180366F8}"/>
+                <a16:creationId xmlns:a16="http://schemas.microsoft.com/office/drawing/2014/main" id="{F99CB238-D2AA-4128-A087-D7747C25D588}"/>
               </a:ext>
             </a:extLst>
           </p:cNvPr>
@@ -8202,7 +8202,7 @@
           <p:cNvPr id="13" name="">
             <a:extLst xmlns:a="http://schemas.openxmlformats.org/drawingml/2006/main">
               <a:ext uri="{FF2B5EF4-FFF2-40B4-BE49-F238E27FC236}">
-                <a16:creationId xmlns:a16="http://schemas.microsoft.com/office/drawing/2014/main" id="{DC1FC05B-B5C0-4DA0-8E66-BE29C46FF7AF}"/>
+                <a16:creationId xmlns:a16="http://schemas.microsoft.com/office/drawing/2014/main" id="{5AAE83ED-25BA-4908-BC7B-3027B53C7159}"/>
               </a:ext>
             </a:extLst>
           </p:cNvPr>
@@ -8237,7 +8237,7 @@
           <p:cNvPr id="14" name="">
             <a:extLst xmlns:a="http://schemas.openxmlformats.org/drawingml/2006/main">
               <a:ext uri="{FF2B5EF4-FFF2-40B4-BE49-F238E27FC236}">
-                <a16:creationId xmlns:a16="http://schemas.microsoft.com/office/drawing/2014/main" id="{D97B2A38-C187-4792-8161-54A0BE6CA2EF}"/>
+                <a16:creationId xmlns:a16="http://schemas.microsoft.com/office/drawing/2014/main" id="{70CDFA1C-CF77-47DB-B7A4-55B487749FCD}"/>
               </a:ext>
             </a:extLst>
           </p:cNvPr>
@@ -8301,7 +8301,7 @@
           <p:cNvPr id="15" name="">
             <a:extLst xmlns:a="http://schemas.openxmlformats.org/drawingml/2006/main">
               <a:ext uri="{FF2B5EF4-FFF2-40B4-BE49-F238E27FC236}">
-                <a16:creationId xmlns:a16="http://schemas.microsoft.com/office/drawing/2014/main" id="{DB5990F8-E791-476E-AE71-53CAA7B34E9E}"/>
+                <a16:creationId xmlns:a16="http://schemas.microsoft.com/office/drawing/2014/main" id="{73EC9C4E-63AE-4792-AE84-303EC98D2B8C}"/>
               </a:ext>
             </a:extLst>
           </p:cNvPr>
@@ -8365,7 +8365,7 @@
           <p:cNvPr id="16" name="">
             <a:extLst xmlns:a="http://schemas.openxmlformats.org/drawingml/2006/main">
               <a:ext uri="{FF2B5EF4-FFF2-40B4-BE49-F238E27FC236}">
-                <a16:creationId xmlns:a16="http://schemas.microsoft.com/office/drawing/2014/main" id="{6E995FAA-62CF-48DC-AAC0-9B4EAC5B44F8}"/>
+                <a16:creationId xmlns:a16="http://schemas.microsoft.com/office/drawing/2014/main" id="{91A8C674-B0C5-4BAB-95B6-4669B84099D6}"/>
               </a:ext>
             </a:extLst>
           </p:cNvPr>
@@ -8400,7 +8400,7 @@
           <p:cNvPr id="17" name="">
             <a:extLst xmlns:a="http://schemas.openxmlformats.org/drawingml/2006/main">
               <a:ext uri="{FF2B5EF4-FFF2-40B4-BE49-F238E27FC236}">
-                <a16:creationId xmlns:a16="http://schemas.microsoft.com/office/drawing/2014/main" id="{BE5032A6-E191-4483-91FC-3642742469B9}"/>
+                <a16:creationId xmlns:a16="http://schemas.microsoft.com/office/drawing/2014/main" id="{6A213A15-F52F-42E1-B3BA-81BE23773513}"/>
               </a:ext>
             </a:extLst>
           </p:cNvPr>
@@ -8464,7 +8464,7 @@
           <p:cNvPr id="18" name="">
             <a:extLst xmlns:a="http://schemas.openxmlformats.org/drawingml/2006/main">
               <a:ext uri="{FF2B5EF4-FFF2-40B4-BE49-F238E27FC236}">
-                <a16:creationId xmlns:a16="http://schemas.microsoft.com/office/drawing/2014/main" id="{240F3978-3E54-4A2F-AEC4-DF9F663DF70A}"/>
+                <a16:creationId xmlns:a16="http://schemas.microsoft.com/office/drawing/2014/main" id="{C7CBC78D-6227-401C-AEB7-780DCBB29849}"/>
               </a:ext>
             </a:extLst>
           </p:cNvPr>
@@ -8528,7 +8528,7 @@
           <p:cNvPr id="19" name="">
             <a:extLst xmlns:a="http://schemas.openxmlformats.org/drawingml/2006/main">
               <a:ext uri="{FF2B5EF4-FFF2-40B4-BE49-F238E27FC236}">
-                <a16:creationId xmlns:a16="http://schemas.microsoft.com/office/drawing/2014/main" id="{6E5F85A0-4A28-4F5A-B080-F9C0C864E040}"/>
+                <a16:creationId xmlns:a16="http://schemas.microsoft.com/office/drawing/2014/main" id="{C13890FF-D84F-4A8C-9CE5-9EC317F74F62}"/>
               </a:ext>
             </a:extLst>
           </p:cNvPr>
@@ -8592,7 +8592,7 @@
           <p:cNvPr id="20" name="">
             <a:extLst xmlns:a="http://schemas.openxmlformats.org/drawingml/2006/main">
               <a:ext uri="{FF2B5EF4-FFF2-40B4-BE49-F238E27FC236}">
-                <a16:creationId xmlns:a16="http://schemas.microsoft.com/office/drawing/2014/main" id="{E5101273-8D5D-43B6-8933-33EB51EFBDA4}"/>
+                <a16:creationId xmlns:a16="http://schemas.microsoft.com/office/drawing/2014/main" id="{B3B04D0E-7781-4D03-9870-3DE18A8205F0}"/>
               </a:ext>
             </a:extLst>
           </p:cNvPr>
@@ -8625,7 +8625,7 @@
           <p:cNvPr id="21" name="">
             <a:extLst xmlns:a="http://schemas.openxmlformats.org/drawingml/2006/main">
               <a:ext uri="{FF2B5EF4-FFF2-40B4-BE49-F238E27FC236}">
-                <a16:creationId xmlns:a16="http://schemas.microsoft.com/office/drawing/2014/main" id="{66D1E1AC-E244-4A2D-B0FB-096268A46237}"/>
+                <a16:creationId xmlns:a16="http://schemas.microsoft.com/office/drawing/2014/main" id="{9509DC06-C5E6-4422-913E-2A83EE0C8774}"/>
               </a:ext>
             </a:extLst>
           </p:cNvPr>
@@ -8658,7 +8658,7 @@
           <p:cNvPr id="22" name="">
             <a:extLst xmlns:a="http://schemas.openxmlformats.org/drawingml/2006/main">
               <a:ext uri="{FF2B5EF4-FFF2-40B4-BE49-F238E27FC236}">
-                <a16:creationId xmlns:a16="http://schemas.microsoft.com/office/drawing/2014/main" id="{D854F512-9845-4E50-8F46-8ACE1DB6C773}"/>
+                <a16:creationId xmlns:a16="http://schemas.microsoft.com/office/drawing/2014/main" id="{8CFDE55C-5DF2-48BA-917D-036B0D919C94}"/>
               </a:ext>
             </a:extLst>
           </p:cNvPr>
@@ -8722,7 +8722,7 @@
           <p:cNvPr id="23" name="">
             <a:extLst xmlns:a="http://schemas.openxmlformats.org/drawingml/2006/main">
               <a:ext uri="{FF2B5EF4-FFF2-40B4-BE49-F238E27FC236}">
-                <a16:creationId xmlns:a16="http://schemas.microsoft.com/office/drawing/2014/main" id="{E44C8613-A7F9-4962-8C8C-36C3A7360DB8}"/>
+                <a16:creationId xmlns:a16="http://schemas.microsoft.com/office/drawing/2014/main" id="{BF677AA6-79DE-4293-BDDF-0FF91B5CA489}"/>
               </a:ext>
             </a:extLst>
           </p:cNvPr>
@@ -8755,7 +8755,7 @@
           <p:cNvPr id="24" name="">
             <a:extLst xmlns:a="http://schemas.openxmlformats.org/drawingml/2006/main">
               <a:ext uri="{FF2B5EF4-FFF2-40B4-BE49-F238E27FC236}">
-                <a16:creationId xmlns:a16="http://schemas.microsoft.com/office/drawing/2014/main" id="{440CC275-C8A4-4AEB-95BF-7690BD60AFEB}"/>
+                <a16:creationId xmlns:a16="http://schemas.microsoft.com/office/drawing/2014/main" id="{E8D66326-A3AA-40BB-86F8-C77BEC71D6B8}"/>
               </a:ext>
             </a:extLst>
           </p:cNvPr>
@@ -8788,7 +8788,7 @@
           <p:cNvPr id="25" name="">
             <a:extLst xmlns:a="http://schemas.openxmlformats.org/drawingml/2006/main">
               <a:ext uri="{FF2B5EF4-FFF2-40B4-BE49-F238E27FC236}">
-                <a16:creationId xmlns:a16="http://schemas.microsoft.com/office/drawing/2014/main" id="{261F3AAE-9234-4EC7-8294-3BAAE47E424E}"/>
+                <a16:creationId xmlns:a16="http://schemas.microsoft.com/office/drawing/2014/main" id="{8D362D8F-6995-4521-B487-E740999D587A}"/>
               </a:ext>
             </a:extLst>
           </p:cNvPr>
@@ -8852,7 +8852,7 @@
           <p:cNvPr id="26" name="">
             <a:extLst xmlns:a="http://schemas.openxmlformats.org/drawingml/2006/main">
               <a:ext uri="{FF2B5EF4-FFF2-40B4-BE49-F238E27FC236}">
-                <a16:creationId xmlns:a16="http://schemas.microsoft.com/office/drawing/2014/main" id="{7D1227C7-1C7F-41B6-BDA1-A68FA01F0A42}"/>
+                <a16:creationId xmlns:a16="http://schemas.microsoft.com/office/drawing/2014/main" id="{832983DD-23C8-4461-AB9B-C73C6B77451C}"/>
               </a:ext>
             </a:extLst>
           </p:cNvPr>
@@ -8885,7 +8885,7 @@
           <p:cNvPr id="27" name="">
             <a:extLst xmlns:a="http://schemas.openxmlformats.org/drawingml/2006/main">
               <a:ext uri="{FF2B5EF4-FFF2-40B4-BE49-F238E27FC236}">
-                <a16:creationId xmlns:a16="http://schemas.microsoft.com/office/drawing/2014/main" id="{0B598E84-C30C-4675-A761-10B9C6BA8EEC}"/>
+                <a16:creationId xmlns:a16="http://schemas.microsoft.com/office/drawing/2014/main" id="{9EE03CF5-75CC-4CC6-844F-BAFDBBD531FA}"/>
               </a:ext>
             </a:extLst>
           </p:cNvPr>
@@ -8918,7 +8918,7 @@
           <p:cNvPr id="28" name="">
             <a:extLst xmlns:a="http://schemas.openxmlformats.org/drawingml/2006/main">
               <a:ext uri="{FF2B5EF4-FFF2-40B4-BE49-F238E27FC236}">
-                <a16:creationId xmlns:a16="http://schemas.microsoft.com/office/drawing/2014/main" id="{0C3CB4CB-5A54-4A52-A77C-83B7BC1C2D0E}"/>
+                <a16:creationId xmlns:a16="http://schemas.microsoft.com/office/drawing/2014/main" id="{3BFB7BAA-51F5-4A9E-890F-1DF61EB51093}"/>
               </a:ext>
             </a:extLst>
           </p:cNvPr>
@@ -8982,7 +8982,7 @@
           <p:cNvPr id="29" name="">
             <a:extLst xmlns:a="http://schemas.openxmlformats.org/drawingml/2006/main">
               <a:ext uri="{FF2B5EF4-FFF2-40B4-BE49-F238E27FC236}">
-                <a16:creationId xmlns:a16="http://schemas.microsoft.com/office/drawing/2014/main" id="{3153E6E5-7267-4F05-A1D0-76A0CC43B48F}"/>
+                <a16:creationId xmlns:a16="http://schemas.microsoft.com/office/drawing/2014/main" id="{4109C4DD-3D49-4E2F-9577-197A91425708}"/>
               </a:ext>
             </a:extLst>
           </p:cNvPr>
@@ -9015,7 +9015,7 @@
           <p:cNvPr id="30" name="">
             <a:extLst xmlns:a="http://schemas.openxmlformats.org/drawingml/2006/main">
               <a:ext uri="{FF2B5EF4-FFF2-40B4-BE49-F238E27FC236}">
-                <a16:creationId xmlns:a16="http://schemas.microsoft.com/office/drawing/2014/main" id="{1E8C65F5-F1F0-4D4B-9975-6EB8F0F5CF3E}"/>
+                <a16:creationId xmlns:a16="http://schemas.microsoft.com/office/drawing/2014/main" id="{EEE448F0-5FA8-4623-ABC9-19040344E34C}"/>
               </a:ext>
             </a:extLst>
           </p:cNvPr>
@@ -9079,7 +9079,7 @@
           <p:cNvPr id="31" name="">
             <a:extLst xmlns:a="http://schemas.openxmlformats.org/drawingml/2006/main">
               <a:ext uri="{FF2B5EF4-FFF2-40B4-BE49-F238E27FC236}">
-                <a16:creationId xmlns:a16="http://schemas.microsoft.com/office/drawing/2014/main" id="{9BFE7F41-C098-4986-A2C6-AF736C1B2463}"/>
+                <a16:creationId xmlns:a16="http://schemas.microsoft.com/office/drawing/2014/main" id="{AD6ED152-A882-4151-9E63-7D729A8B5599}"/>
               </a:ext>
             </a:extLst>
           </p:cNvPr>
@@ -9141,7 +9141,7 @@
     </p:spTree>
     <p:extLst>
       <p:ext uri="{BB962C8B-B14F-4D97-AF65-F5344CB8AC3E}">
-        <p14:creationId xmlns:p14="http://schemas.microsoft.com/office/powerpoint/2010/main" val="210480015"/>
+        <p14:creationId xmlns:p14="http://schemas.microsoft.com/office/powerpoint/2010/main" val="474468551"/>
       </p:ext>
     </p:extLst>
   </p:cSld>
@@ -9169,7 +9169,7 @@
           <p:nvPr/>
         </p:nvPicPr>
         <p:blipFill>
-          <a:blip xmlns:r="http://schemas.openxmlformats.org/officeDocument/2006/relationships" xmlns:a="http://schemas.openxmlformats.org/drawingml/2006/main" r:embed="Re02ee9c367084d84"/>
+          <a:blip xmlns:r="http://schemas.openxmlformats.org/officeDocument/2006/relationships" xmlns:a="http://schemas.openxmlformats.org/drawingml/2006/main" r:embed="R00976aee9e944d98"/>
           <a:srcRect xmlns:a="http://schemas.openxmlformats.org/drawingml/2006/main" l="0" t="7813" r="0" b="7813"/>
           <a:stretch xmlns:a="http://schemas.openxmlformats.org/drawingml/2006/main">
             <a:fillRect l="0" t="0" r="0" b="0"/>
@@ -9190,7 +9190,7 @@
           <p:cNvPr id="2" name="">
             <a:extLst xmlns:a="http://schemas.openxmlformats.org/drawingml/2006/main">
               <a:ext uri="{FF2B5EF4-FFF2-40B4-BE49-F238E27FC236}">
-                <a16:creationId xmlns:a16="http://schemas.microsoft.com/office/drawing/2014/main" id="{BE1851B7-6323-448F-BAA3-31F6EE23E3F9}"/>
+                <a16:creationId xmlns:a16="http://schemas.microsoft.com/office/drawing/2014/main" id="{3202F8D8-C97E-4067-B22F-AB58496E92DE}"/>
               </a:ext>
             </a:extLst>
           </p:cNvPr>
@@ -9227,7 +9227,7 @@
           <p:cNvPr id="3" name="">
             <a:extLst xmlns:a="http://schemas.openxmlformats.org/drawingml/2006/main">
               <a:ext uri="{FF2B5EF4-FFF2-40B4-BE49-F238E27FC236}">
-                <a16:creationId xmlns:a16="http://schemas.microsoft.com/office/drawing/2014/main" id="{4BA679D8-C3A5-412D-85A3-2F43D749C861}"/>
+                <a16:creationId xmlns:a16="http://schemas.microsoft.com/office/drawing/2014/main" id="{71D132BD-57DE-4FA4-8083-EB25D1D3D21B}"/>
               </a:ext>
             </a:extLst>
           </p:cNvPr>
@@ -9264,7 +9264,7 @@
           <p:cNvPr id="4" name="">
             <a:extLst xmlns:a="http://schemas.openxmlformats.org/drawingml/2006/main">
               <a:ext uri="{FF2B5EF4-FFF2-40B4-BE49-F238E27FC236}">
-                <a16:creationId xmlns:a16="http://schemas.microsoft.com/office/drawing/2014/main" id="{A1AC82F8-CBBD-4749-B449-164A5CFA6BA8}"/>
+                <a16:creationId xmlns:a16="http://schemas.microsoft.com/office/drawing/2014/main" id="{A37A91AE-A3EE-469B-80C2-5865626F6976}"/>
               </a:ext>
             </a:extLst>
           </p:cNvPr>
@@ -9328,7 +9328,7 @@
           <p:cNvPr id="5" name="">
             <a:extLst xmlns:a="http://schemas.openxmlformats.org/drawingml/2006/main">
               <a:ext uri="{FF2B5EF4-FFF2-40B4-BE49-F238E27FC236}">
-                <a16:creationId xmlns:a16="http://schemas.microsoft.com/office/drawing/2014/main" id="{3B488452-22CA-45B9-84B1-25DD011E2846}"/>
+                <a16:creationId xmlns:a16="http://schemas.microsoft.com/office/drawing/2014/main" id="{04D8BCF4-2256-4634-869E-170D2C684850}"/>
               </a:ext>
             </a:extLst>
           </p:cNvPr>
@@ -9392,7 +9392,7 @@
           <p:cNvPr id="6" name="">
             <a:extLst xmlns:a="http://schemas.openxmlformats.org/drawingml/2006/main">
               <a:ext uri="{FF2B5EF4-FFF2-40B4-BE49-F238E27FC236}">
-                <a16:creationId xmlns:a16="http://schemas.microsoft.com/office/drawing/2014/main" id="{876CFDA2-29CB-4534-83F5-3BA262B1BA6D}"/>
+                <a16:creationId xmlns:a16="http://schemas.microsoft.com/office/drawing/2014/main" id="{AA5EB832-407A-4AC0-9B1A-0A9B3C4431E9}"/>
               </a:ext>
             </a:extLst>
           </p:cNvPr>
@@ -9456,7 +9456,7 @@
           <p:cNvPr id="7" name="">
             <a:extLst xmlns:a="http://schemas.openxmlformats.org/drawingml/2006/main">
               <a:ext uri="{FF2B5EF4-FFF2-40B4-BE49-F238E27FC236}">
-                <a16:creationId xmlns:a16="http://schemas.microsoft.com/office/drawing/2014/main" id="{F535DCD2-2D8C-45C2-8708-952646C5B7A3}"/>
+                <a16:creationId xmlns:a16="http://schemas.microsoft.com/office/drawing/2014/main" id="{99664391-4266-4B9B-A8E6-6A181D1BE39C}"/>
               </a:ext>
             </a:extLst>
           </p:cNvPr>
@@ -9491,7 +9491,7 @@
           <p:cNvPr id="8" name="">
             <a:extLst xmlns:a="http://schemas.openxmlformats.org/drawingml/2006/main">
               <a:ext uri="{FF2B5EF4-FFF2-40B4-BE49-F238E27FC236}">
-                <a16:creationId xmlns:a16="http://schemas.microsoft.com/office/drawing/2014/main" id="{D7D7484E-8788-47A2-93B4-C36D9303F415}"/>
+                <a16:creationId xmlns:a16="http://schemas.microsoft.com/office/drawing/2014/main" id="{9BB366D8-E52A-4AD9-81F1-17599E40DB3D}"/>
               </a:ext>
             </a:extLst>
           </p:cNvPr>
@@ -9555,7 +9555,7 @@
           <p:cNvPr id="9" name="">
             <a:extLst xmlns:a="http://schemas.openxmlformats.org/drawingml/2006/main">
               <a:ext uri="{FF2B5EF4-FFF2-40B4-BE49-F238E27FC236}">
-                <a16:creationId xmlns:a16="http://schemas.microsoft.com/office/drawing/2014/main" id="{5D1735BC-E38E-4A6A-9286-C990845885A9}"/>
+                <a16:creationId xmlns:a16="http://schemas.microsoft.com/office/drawing/2014/main" id="{B3A38F80-EFBA-4FAA-8658-4CCB721ECBE3}"/>
               </a:ext>
             </a:extLst>
           </p:cNvPr>
@@ -9619,7 +9619,7 @@
           <p:cNvPr id="10" name="">
             <a:extLst xmlns:a="http://schemas.openxmlformats.org/drawingml/2006/main">
               <a:ext uri="{FF2B5EF4-FFF2-40B4-BE49-F238E27FC236}">
-                <a16:creationId xmlns:a16="http://schemas.microsoft.com/office/drawing/2014/main" id="{9D52B766-D617-48BA-9E45-6633D5761C10}"/>
+                <a16:creationId xmlns:a16="http://schemas.microsoft.com/office/drawing/2014/main" id="{48B5EB0F-6BE1-4BC4-A58B-6180D7985867}"/>
               </a:ext>
             </a:extLst>
           </p:cNvPr>
@@ -9652,7 +9652,7 @@
           <p:cNvPr id="11" name="">
             <a:extLst xmlns:a="http://schemas.openxmlformats.org/drawingml/2006/main">
               <a:ext uri="{FF2B5EF4-FFF2-40B4-BE49-F238E27FC236}">
-                <a16:creationId xmlns:a16="http://schemas.microsoft.com/office/drawing/2014/main" id="{C609BC1D-5749-4E29-BE5B-B11F7F8AEFED}"/>
+                <a16:creationId xmlns:a16="http://schemas.microsoft.com/office/drawing/2014/main" id="{336EC82A-A13A-4C23-9BED-9581F86976E0}"/>
               </a:ext>
             </a:extLst>
           </p:cNvPr>
@@ -9687,7 +9687,7 @@
           <p:cNvPr id="12" name="">
             <a:extLst xmlns:a="http://schemas.openxmlformats.org/drawingml/2006/main">
               <a:ext uri="{FF2B5EF4-FFF2-40B4-BE49-F238E27FC236}">
-                <a16:creationId xmlns:a16="http://schemas.microsoft.com/office/drawing/2014/main" id="{A07B199A-2FFD-4225-8E9B-44EEFE04090B}"/>
+                <a16:creationId xmlns:a16="http://schemas.microsoft.com/office/drawing/2014/main" id="{9DDC05F8-C9C7-4D30-8B59-94C35A1696FE}"/>
               </a:ext>
             </a:extLst>
           </p:cNvPr>
@@ -9751,7 +9751,7 @@
           <p:cNvPr id="13" name="">
             <a:extLst xmlns:a="http://schemas.openxmlformats.org/drawingml/2006/main">
               <a:ext uri="{FF2B5EF4-FFF2-40B4-BE49-F238E27FC236}">
-                <a16:creationId xmlns:a16="http://schemas.microsoft.com/office/drawing/2014/main" id="{E7DB808C-2C30-44F9-A5A2-0381FDC9BD19}"/>
+                <a16:creationId xmlns:a16="http://schemas.microsoft.com/office/drawing/2014/main" id="{B50E603E-D8FA-4BA4-A2BD-EF3D6CDF8EEF}"/>
               </a:ext>
             </a:extLst>
           </p:cNvPr>
@@ -9815,7 +9815,7 @@
           <p:cNvPr id="14" name="">
             <a:extLst xmlns:a="http://schemas.openxmlformats.org/drawingml/2006/main">
               <a:ext uri="{FF2B5EF4-FFF2-40B4-BE49-F238E27FC236}">
-                <a16:creationId xmlns:a16="http://schemas.microsoft.com/office/drawing/2014/main" id="{D9A927E8-675A-4AC7-813E-8A546FCE5A13}"/>
+                <a16:creationId xmlns:a16="http://schemas.microsoft.com/office/drawing/2014/main" id="{C9E9D1DB-6202-4885-BEFE-112317C7600B}"/>
               </a:ext>
             </a:extLst>
           </p:cNvPr>
@@ -9848,7 +9848,7 @@
           <p:cNvPr id="15" name="">
             <a:extLst xmlns:a="http://schemas.openxmlformats.org/drawingml/2006/main">
               <a:ext uri="{FF2B5EF4-FFF2-40B4-BE49-F238E27FC236}">
-                <a16:creationId xmlns:a16="http://schemas.microsoft.com/office/drawing/2014/main" id="{205B8692-62E3-4156-ADA6-C0B15E7F4B23}"/>
+                <a16:creationId xmlns:a16="http://schemas.microsoft.com/office/drawing/2014/main" id="{4BC7802C-8F77-4234-8E7E-2F1376720475}"/>
               </a:ext>
             </a:extLst>
           </p:cNvPr>
@@ -9883,7 +9883,7 @@
           <p:cNvPr id="16" name="">
             <a:extLst xmlns:a="http://schemas.openxmlformats.org/drawingml/2006/main">
               <a:ext uri="{FF2B5EF4-FFF2-40B4-BE49-F238E27FC236}">
-                <a16:creationId xmlns:a16="http://schemas.microsoft.com/office/drawing/2014/main" id="{762B8C98-FE2D-4730-ACEB-386CF4E247F4}"/>
+                <a16:creationId xmlns:a16="http://schemas.microsoft.com/office/drawing/2014/main" id="{0D644EF4-6E40-4FCA-881F-E3D331ADFDC5}"/>
               </a:ext>
             </a:extLst>
           </p:cNvPr>
@@ -9947,7 +9947,7 @@
           <p:cNvPr id="17" name="">
             <a:extLst xmlns:a="http://schemas.openxmlformats.org/drawingml/2006/main">
               <a:ext uri="{FF2B5EF4-FFF2-40B4-BE49-F238E27FC236}">
-                <a16:creationId xmlns:a16="http://schemas.microsoft.com/office/drawing/2014/main" id="{B581F314-EA59-4E63-A0C6-1C706CDF935B}"/>
+                <a16:creationId xmlns:a16="http://schemas.microsoft.com/office/drawing/2014/main" id="{49B21BAD-221D-4048-ACB2-0E0F7511F9E5}"/>
               </a:ext>
             </a:extLst>
           </p:cNvPr>
@@ -10011,7 +10011,7 @@
           <p:cNvPr id="18" name="">
             <a:extLst xmlns:a="http://schemas.openxmlformats.org/drawingml/2006/main">
               <a:ext uri="{FF2B5EF4-FFF2-40B4-BE49-F238E27FC236}">
-                <a16:creationId xmlns:a16="http://schemas.microsoft.com/office/drawing/2014/main" id="{2F763585-B496-4B38-A80A-6F2CE53A98D0}"/>
+                <a16:creationId xmlns:a16="http://schemas.microsoft.com/office/drawing/2014/main" id="{E49190D1-0A55-41CB-AEF6-D6F2CF19ED4E}"/>
               </a:ext>
             </a:extLst>
           </p:cNvPr>
@@ -10044,7 +10044,7 @@
           <p:cNvPr id="19" name="">
             <a:extLst xmlns:a="http://schemas.openxmlformats.org/drawingml/2006/main">
               <a:ext uri="{FF2B5EF4-FFF2-40B4-BE49-F238E27FC236}">
-                <a16:creationId xmlns:a16="http://schemas.microsoft.com/office/drawing/2014/main" id="{7483674F-83AA-4991-A587-EB8D857DB869}"/>
+                <a16:creationId xmlns:a16="http://schemas.microsoft.com/office/drawing/2014/main" id="{05A1BD54-4F86-4C06-BFA9-4D69CC2E483B}"/>
               </a:ext>
             </a:extLst>
           </p:cNvPr>
@@ -10079,7 +10079,7 @@
           <p:cNvPr id="20" name="">
             <a:extLst xmlns:a="http://schemas.openxmlformats.org/drawingml/2006/main">
               <a:ext uri="{FF2B5EF4-FFF2-40B4-BE49-F238E27FC236}">
-                <a16:creationId xmlns:a16="http://schemas.microsoft.com/office/drawing/2014/main" id="{F3EBF757-CB71-4FC8-8E99-BE92CCBAB1D5}"/>
+                <a16:creationId xmlns:a16="http://schemas.microsoft.com/office/drawing/2014/main" id="{BFD1A300-DE85-4F2A-B7AF-56765A315FC3}"/>
               </a:ext>
             </a:extLst>
           </p:cNvPr>
@@ -10143,7 +10143,7 @@
           <p:cNvPr id="21" name="">
             <a:extLst xmlns:a="http://schemas.openxmlformats.org/drawingml/2006/main">
               <a:ext uri="{FF2B5EF4-FFF2-40B4-BE49-F238E27FC236}">
-                <a16:creationId xmlns:a16="http://schemas.microsoft.com/office/drawing/2014/main" id="{B11FCF45-1ABC-4EF9-8737-0DE94CCA08F0}"/>
+                <a16:creationId xmlns:a16="http://schemas.microsoft.com/office/drawing/2014/main" id="{DB0117F8-7E65-46D3-A569-D4EAE1AB6414}"/>
               </a:ext>
             </a:extLst>
           </p:cNvPr>
@@ -10207,7 +10207,7 @@
           <p:cNvPr id="22" name="">
             <a:extLst xmlns:a="http://schemas.openxmlformats.org/drawingml/2006/main">
               <a:ext uri="{FF2B5EF4-FFF2-40B4-BE49-F238E27FC236}">
-                <a16:creationId xmlns:a16="http://schemas.microsoft.com/office/drawing/2014/main" id="{70A62C39-3DF3-4C18-B5D8-B9A3CC948A5E}"/>
+                <a16:creationId xmlns:a16="http://schemas.microsoft.com/office/drawing/2014/main" id="{517C848A-2AF2-4439-B8FD-7325BB5B965D}"/>
               </a:ext>
             </a:extLst>
           </p:cNvPr>
@@ -10271,7 +10271,7 @@
           <p:cNvPr id="23" name="">
             <a:extLst xmlns:a="http://schemas.openxmlformats.org/drawingml/2006/main">
               <a:ext uri="{FF2B5EF4-FFF2-40B4-BE49-F238E27FC236}">
-                <a16:creationId xmlns:a16="http://schemas.microsoft.com/office/drawing/2014/main" id="{156117AD-9EA7-4407-8636-138804EA3763}"/>
+                <a16:creationId xmlns:a16="http://schemas.microsoft.com/office/drawing/2014/main" id="{0B909933-92A8-4557-92AE-C6CEC920F73C}"/>
               </a:ext>
             </a:extLst>
           </p:cNvPr>
@@ -10335,7 +10335,7 @@
           <p:cNvPr id="24" name="">
             <a:extLst xmlns:a="http://schemas.openxmlformats.org/drawingml/2006/main">
               <a:ext uri="{FF2B5EF4-FFF2-40B4-BE49-F238E27FC236}">
-                <a16:creationId xmlns:a16="http://schemas.microsoft.com/office/drawing/2014/main" id="{B58A943A-B048-46A4-9BC1-74ED896D9B63}"/>
+                <a16:creationId xmlns:a16="http://schemas.microsoft.com/office/drawing/2014/main" id="{6A775A63-37B3-4C7B-AF2E-496D339605C3}"/>
               </a:ext>
             </a:extLst>
           </p:cNvPr>
@@ -10368,7 +10368,7 @@
           <p:cNvPr id="25" name="">
             <a:extLst xmlns:a="http://schemas.openxmlformats.org/drawingml/2006/main">
               <a:ext uri="{FF2B5EF4-FFF2-40B4-BE49-F238E27FC236}">
-                <a16:creationId xmlns:a16="http://schemas.microsoft.com/office/drawing/2014/main" id="{95305A62-2818-4AEB-8F5D-CBFB53D88CEA}"/>
+                <a16:creationId xmlns:a16="http://schemas.microsoft.com/office/drawing/2014/main" id="{A3F537F9-4C02-4AD4-B0C0-82A3BE8EED57}"/>
               </a:ext>
             </a:extLst>
           </p:cNvPr>
@@ -10432,7 +10432,7 @@
           <p:cNvPr id="26" name="">
             <a:extLst xmlns:a="http://schemas.openxmlformats.org/drawingml/2006/main">
               <a:ext uri="{FF2B5EF4-FFF2-40B4-BE49-F238E27FC236}">
-                <a16:creationId xmlns:a16="http://schemas.microsoft.com/office/drawing/2014/main" id="{15ED40CB-C6DB-4450-9C01-99585545EE28}"/>
+                <a16:creationId xmlns:a16="http://schemas.microsoft.com/office/drawing/2014/main" id="{EB9C805A-FC05-48FD-BDE8-EB5255823191}"/>
               </a:ext>
             </a:extLst>
           </p:cNvPr>
@@ -10494,7 +10494,7 @@
     </p:spTree>
     <p:extLst>
       <p:ext uri="{BB962C8B-B14F-4D97-AF65-F5344CB8AC3E}">
-        <p14:creationId xmlns:p14="http://schemas.microsoft.com/office/powerpoint/2010/main" val="1240259917"/>
+        <p14:creationId xmlns:p14="http://schemas.microsoft.com/office/powerpoint/2010/main" val="770465108"/>
       </p:ext>
     </p:extLst>
   </p:cSld>
@@ -10522,7 +10522,7 @@
           <p:nvPr/>
         </p:nvPicPr>
         <p:blipFill>
-          <a:blip xmlns:r="http://schemas.openxmlformats.org/officeDocument/2006/relationships" xmlns:a="http://schemas.openxmlformats.org/drawingml/2006/main" r:embed="R9f995acafdfd4f11"/>
+          <a:blip xmlns:r="http://schemas.openxmlformats.org/officeDocument/2006/relationships" xmlns:a="http://schemas.openxmlformats.org/drawingml/2006/main" r:embed="Rfe15539d40a244de"/>
           <a:srcRect xmlns:a="http://schemas.openxmlformats.org/drawingml/2006/main" l="0" t="7813" r="0" b="7813"/>
           <a:stretch xmlns:a="http://schemas.openxmlformats.org/drawingml/2006/main">
             <a:fillRect l="0" t="0" r="0" b="0"/>
@@ -10543,7 +10543,7 @@
           <p:cNvPr id="2" name="">
             <a:extLst xmlns:a="http://schemas.openxmlformats.org/drawingml/2006/main">
               <a:ext uri="{FF2B5EF4-FFF2-40B4-BE49-F238E27FC236}">
-                <a16:creationId xmlns:a16="http://schemas.microsoft.com/office/drawing/2014/main" id="{98947598-39D8-4199-9CAB-8C63FA569ECF}"/>
+                <a16:creationId xmlns:a16="http://schemas.microsoft.com/office/drawing/2014/main" id="{82D02393-3B5D-4AE6-9836-BF0E2A2997D3}"/>
               </a:ext>
             </a:extLst>
           </p:cNvPr>
@@ -10580,7 +10580,7 @@
           <p:cNvPr id="3" name="">
             <a:extLst xmlns:a="http://schemas.openxmlformats.org/drawingml/2006/main">
               <a:ext uri="{FF2B5EF4-FFF2-40B4-BE49-F238E27FC236}">
-                <a16:creationId xmlns:a16="http://schemas.microsoft.com/office/drawing/2014/main" id="{C67324CF-6163-4B07-B445-E42966743F59}"/>
+                <a16:creationId xmlns:a16="http://schemas.microsoft.com/office/drawing/2014/main" id="{5DA9CF9F-03F2-46A4-9F5C-498AF9D7546C}"/>
               </a:ext>
             </a:extLst>
           </p:cNvPr>
@@ -10617,7 +10617,7 @@
           <p:cNvPr id="4" name="">
             <a:extLst xmlns:a="http://schemas.openxmlformats.org/drawingml/2006/main">
               <a:ext uri="{FF2B5EF4-FFF2-40B4-BE49-F238E27FC236}">
-                <a16:creationId xmlns:a16="http://schemas.microsoft.com/office/drawing/2014/main" id="{733751BA-ABC0-4F5C-B448-C023B1D344AD}"/>
+                <a16:creationId xmlns:a16="http://schemas.microsoft.com/office/drawing/2014/main" id="{3471139A-C325-4E80-A893-345827DE7573}"/>
               </a:ext>
             </a:extLst>
           </p:cNvPr>
@@ -10681,7 +10681,7 @@
           <p:cNvPr id="5" name="">
             <a:extLst xmlns:a="http://schemas.openxmlformats.org/drawingml/2006/main">
               <a:ext uri="{FF2B5EF4-FFF2-40B4-BE49-F238E27FC236}">
-                <a16:creationId xmlns:a16="http://schemas.microsoft.com/office/drawing/2014/main" id="{F1360069-97D8-4C6F-8E80-9A1FC03EDFAB}"/>
+                <a16:creationId xmlns:a16="http://schemas.microsoft.com/office/drawing/2014/main" id="{52B2FE01-3608-42AB-BFEC-C62A88F3E15E}"/>
               </a:ext>
             </a:extLst>
           </p:cNvPr>
@@ -10745,7 +10745,7 @@
           <p:cNvPr id="6" name="">
             <a:extLst xmlns:a="http://schemas.openxmlformats.org/drawingml/2006/main">
               <a:ext uri="{FF2B5EF4-FFF2-40B4-BE49-F238E27FC236}">
-                <a16:creationId xmlns:a16="http://schemas.microsoft.com/office/drawing/2014/main" id="{F298FD24-F934-402E-B430-66B3451F4517}"/>
+                <a16:creationId xmlns:a16="http://schemas.microsoft.com/office/drawing/2014/main" id="{C3ED975D-1057-454A-91C5-FED1244CF44F}"/>
               </a:ext>
             </a:extLst>
           </p:cNvPr>
@@ -10809,7 +10809,7 @@
           <p:cNvPr id="7" name="">
             <a:extLst xmlns:a="http://schemas.openxmlformats.org/drawingml/2006/main">
               <a:ext uri="{FF2B5EF4-FFF2-40B4-BE49-F238E27FC236}">
-                <a16:creationId xmlns:a16="http://schemas.microsoft.com/office/drawing/2014/main" id="{975F64EE-24A8-4191-8E2A-0E0730C2DD58}"/>
+                <a16:creationId xmlns:a16="http://schemas.microsoft.com/office/drawing/2014/main" id="{020D02A4-9E7C-40CB-96CA-CEC6AA8A2528}"/>
               </a:ext>
             </a:extLst>
           </p:cNvPr>
@@ -10844,7 +10844,7 @@
           <p:cNvPr id="8" name="">
             <a:extLst xmlns:a="http://schemas.openxmlformats.org/drawingml/2006/main">
               <a:ext uri="{FF2B5EF4-FFF2-40B4-BE49-F238E27FC236}">
-                <a16:creationId xmlns:a16="http://schemas.microsoft.com/office/drawing/2014/main" id="{2DEFAA02-0EB3-46A1-BC69-94D6BB64D35B}"/>
+                <a16:creationId xmlns:a16="http://schemas.microsoft.com/office/drawing/2014/main" id="{B68289F4-EEDC-45FC-BEAD-B9E9DF8DAA1A}"/>
               </a:ext>
             </a:extLst>
           </p:cNvPr>
@@ -10908,7 +10908,7 @@
           <p:cNvPr id="9" name="">
             <a:extLst xmlns:a="http://schemas.openxmlformats.org/drawingml/2006/main">
               <a:ext uri="{FF2B5EF4-FFF2-40B4-BE49-F238E27FC236}">
-                <a16:creationId xmlns:a16="http://schemas.microsoft.com/office/drawing/2014/main" id="{CFEB53C1-A511-4FBD-BC32-FD7325F93FA0}"/>
+                <a16:creationId xmlns:a16="http://schemas.microsoft.com/office/drawing/2014/main" id="{40F2D0CA-2A6C-463C-8361-E1E7A98EBB76}"/>
               </a:ext>
             </a:extLst>
           </p:cNvPr>
@@ -10943,7 +10943,7 @@
           <p:cNvPr id="10" name="">
             <a:extLst xmlns:a="http://schemas.openxmlformats.org/drawingml/2006/main">
               <a:ext uri="{FF2B5EF4-FFF2-40B4-BE49-F238E27FC236}">
-                <a16:creationId xmlns:a16="http://schemas.microsoft.com/office/drawing/2014/main" id="{D5BEFCD7-3897-4850-B868-6A9E58400F86}"/>
+                <a16:creationId xmlns:a16="http://schemas.microsoft.com/office/drawing/2014/main" id="{28A12FB9-6E1A-43F8-9111-C641468A0EFD}"/>
               </a:ext>
             </a:extLst>
           </p:cNvPr>
@@ -11007,7 +11007,7 @@
           <p:cNvPr id="11" name="">
             <a:extLst xmlns:a="http://schemas.openxmlformats.org/drawingml/2006/main">
               <a:ext uri="{FF2B5EF4-FFF2-40B4-BE49-F238E27FC236}">
-                <a16:creationId xmlns:a16="http://schemas.microsoft.com/office/drawing/2014/main" id="{FB249541-5C99-4F79-9528-AB71F4361BC3}"/>
+                <a16:creationId xmlns:a16="http://schemas.microsoft.com/office/drawing/2014/main" id="{6A91E77F-84AD-44F9-AA5B-71C2E332582C}"/>
               </a:ext>
             </a:extLst>
           </p:cNvPr>
@@ -11042,7 +11042,7 @@
           <p:cNvPr id="12" name="">
             <a:extLst xmlns:a="http://schemas.openxmlformats.org/drawingml/2006/main">
               <a:ext uri="{FF2B5EF4-FFF2-40B4-BE49-F238E27FC236}">
-                <a16:creationId xmlns:a16="http://schemas.microsoft.com/office/drawing/2014/main" id="{1BFB4CD9-FC4A-40AB-8518-23F2498428EE}"/>
+                <a16:creationId xmlns:a16="http://schemas.microsoft.com/office/drawing/2014/main" id="{343A88CE-7BC9-4985-AE49-1293928E7DB2}"/>
               </a:ext>
             </a:extLst>
           </p:cNvPr>
@@ -11106,7 +11106,7 @@
           <p:cNvPr id="13" name="">
             <a:extLst xmlns:a="http://schemas.openxmlformats.org/drawingml/2006/main">
               <a:ext uri="{FF2B5EF4-FFF2-40B4-BE49-F238E27FC236}">
-                <a16:creationId xmlns:a16="http://schemas.microsoft.com/office/drawing/2014/main" id="{2839FC2D-E673-4C31-BB8A-A055FFCD258D}"/>
+                <a16:creationId xmlns:a16="http://schemas.microsoft.com/office/drawing/2014/main" id="{EFE7F984-1470-4151-843B-F566B25A377B}"/>
               </a:ext>
             </a:extLst>
           </p:cNvPr>
@@ -11141,7 +11141,7 @@
           <p:cNvPr id="14" name="">
             <a:extLst xmlns:a="http://schemas.openxmlformats.org/drawingml/2006/main">
               <a:ext uri="{FF2B5EF4-FFF2-40B4-BE49-F238E27FC236}">
-                <a16:creationId xmlns:a16="http://schemas.microsoft.com/office/drawing/2014/main" id="{42F862AF-2C6E-481A-A491-EF156AB5A924}"/>
+                <a16:creationId xmlns:a16="http://schemas.microsoft.com/office/drawing/2014/main" id="{BBDB52CD-E914-4D8B-92E3-5C389E9FE853}"/>
               </a:ext>
             </a:extLst>
           </p:cNvPr>
@@ -11205,7 +11205,7 @@
           <p:cNvPr id="15" name="">
             <a:extLst xmlns:a="http://schemas.openxmlformats.org/drawingml/2006/main">
               <a:ext uri="{FF2B5EF4-FFF2-40B4-BE49-F238E27FC236}">
-                <a16:creationId xmlns:a16="http://schemas.microsoft.com/office/drawing/2014/main" id="{EB9962BB-E0C4-4123-9EED-BF6875BDD546}"/>
+                <a16:creationId xmlns:a16="http://schemas.microsoft.com/office/drawing/2014/main" id="{5BB34903-E3B1-48DB-8D0E-F624000C7D24}"/>
               </a:ext>
             </a:extLst>
           </p:cNvPr>
@@ -11240,7 +11240,7 @@
           <p:cNvPr id="16" name="">
             <a:extLst xmlns:a="http://schemas.openxmlformats.org/drawingml/2006/main">
               <a:ext uri="{FF2B5EF4-FFF2-40B4-BE49-F238E27FC236}">
-                <a16:creationId xmlns:a16="http://schemas.microsoft.com/office/drawing/2014/main" id="{873B5FA6-E7FF-4D3A-94F3-F25B9CB80EB6}"/>
+                <a16:creationId xmlns:a16="http://schemas.microsoft.com/office/drawing/2014/main" id="{C39A8198-6FAB-4C69-98D3-353FE74A53C0}"/>
               </a:ext>
             </a:extLst>
           </p:cNvPr>
@@ -11304,7 +11304,7 @@
           <p:cNvPr id="17" name="">
             <a:extLst xmlns:a="http://schemas.openxmlformats.org/drawingml/2006/main">
               <a:ext uri="{FF2B5EF4-FFF2-40B4-BE49-F238E27FC236}">
-                <a16:creationId xmlns:a16="http://schemas.microsoft.com/office/drawing/2014/main" id="{B1BB7FFA-4D1D-4628-A11C-60EC473016A1}"/>
+                <a16:creationId xmlns:a16="http://schemas.microsoft.com/office/drawing/2014/main" id="{0A0AD93D-5D99-46B4-A8B8-62517BC484F1}"/>
               </a:ext>
             </a:extLst>
           </p:cNvPr>
@@ -11339,7 +11339,7 @@
           <p:cNvPr id="18" name="">
             <a:extLst xmlns:a="http://schemas.openxmlformats.org/drawingml/2006/main">
               <a:ext uri="{FF2B5EF4-FFF2-40B4-BE49-F238E27FC236}">
-                <a16:creationId xmlns:a16="http://schemas.microsoft.com/office/drawing/2014/main" id="{EC989005-924A-4F70-96E5-D9183340066A}"/>
+                <a16:creationId xmlns:a16="http://schemas.microsoft.com/office/drawing/2014/main" id="{E02EF24D-F2E7-4BFD-9114-54F31E5E1409}"/>
               </a:ext>
             </a:extLst>
           </p:cNvPr>
@@ -11403,7 +11403,7 @@
           <p:cNvPr id="19" name="">
             <a:extLst xmlns:a="http://schemas.openxmlformats.org/drawingml/2006/main">
               <a:ext uri="{FF2B5EF4-FFF2-40B4-BE49-F238E27FC236}">
-                <a16:creationId xmlns:a16="http://schemas.microsoft.com/office/drawing/2014/main" id="{90080EC6-A849-4FC7-BEA2-B82E92B64C2F}"/>
+                <a16:creationId xmlns:a16="http://schemas.microsoft.com/office/drawing/2014/main" id="{A7795AFF-5B51-43A3-8AD2-6C3EB846B0C8}"/>
               </a:ext>
             </a:extLst>
           </p:cNvPr>
@@ -11467,7 +11467,7 @@
           <p:cNvPr id="20" name="">
             <a:extLst xmlns:a="http://schemas.openxmlformats.org/drawingml/2006/main">
               <a:ext uri="{FF2B5EF4-FFF2-40B4-BE49-F238E27FC236}">
-                <a16:creationId xmlns:a16="http://schemas.microsoft.com/office/drawing/2014/main" id="{CA274577-C9CA-4420-B92D-CA6E1E716926}"/>
+                <a16:creationId xmlns:a16="http://schemas.microsoft.com/office/drawing/2014/main" id="{1E2BB3C2-0413-4F29-B3BE-2C2AD630AFB3}"/>
               </a:ext>
             </a:extLst>
           </p:cNvPr>
@@ -11500,7 +11500,7 @@
           <p:cNvPr id="21" name="">
             <a:extLst xmlns:a="http://schemas.openxmlformats.org/drawingml/2006/main">
               <a:ext uri="{FF2B5EF4-FFF2-40B4-BE49-F238E27FC236}">
-                <a16:creationId xmlns:a16="http://schemas.microsoft.com/office/drawing/2014/main" id="{1EE0C925-62F6-477B-831C-F06D125C3E62}"/>
+                <a16:creationId xmlns:a16="http://schemas.microsoft.com/office/drawing/2014/main" id="{BF00351C-BF7B-4A55-AA79-947C17A70BAB}"/>
               </a:ext>
             </a:extLst>
           </p:cNvPr>
@@ -11564,7 +11564,7 @@
           <p:cNvPr id="22" name="">
             <a:extLst xmlns:a="http://schemas.openxmlformats.org/drawingml/2006/main">
               <a:ext uri="{FF2B5EF4-FFF2-40B4-BE49-F238E27FC236}">
-                <a16:creationId xmlns:a16="http://schemas.microsoft.com/office/drawing/2014/main" id="{CCFC057D-FD68-4251-A079-39449B361ABE}"/>
+                <a16:creationId xmlns:a16="http://schemas.microsoft.com/office/drawing/2014/main" id="{6A941424-752C-497D-89EC-952A06A10571}"/>
               </a:ext>
             </a:extLst>
           </p:cNvPr>
@@ -11626,7 +11626,7 @@
     </p:spTree>
     <p:extLst>
       <p:ext uri="{BB962C8B-B14F-4D97-AF65-F5344CB8AC3E}">
-        <p14:creationId xmlns:p14="http://schemas.microsoft.com/office/powerpoint/2010/main" val="413479355"/>
+        <p14:creationId xmlns:p14="http://schemas.microsoft.com/office/powerpoint/2010/main" val="960102672"/>
       </p:ext>
     </p:extLst>
   </p:cSld>
@@ -11654,7 +11654,7 @@
           <p:nvPr/>
         </p:nvPicPr>
         <p:blipFill>
-          <a:blip xmlns:r="http://schemas.openxmlformats.org/officeDocument/2006/relationships" xmlns:a="http://schemas.openxmlformats.org/drawingml/2006/main" r:embed="Rcc1978d07b984552"/>
+          <a:blip xmlns:r="http://schemas.openxmlformats.org/officeDocument/2006/relationships" xmlns:a="http://schemas.openxmlformats.org/drawingml/2006/main" r:embed="Re45dddc6a0fb4feb"/>
           <a:srcRect xmlns:a="http://schemas.openxmlformats.org/drawingml/2006/main" l="0" t="27" r="0" b="27"/>
           <a:stretch xmlns:a="http://schemas.openxmlformats.org/drawingml/2006/main">
             <a:fillRect l="0" t="0" r="0" b="0"/>
@@ -11675,7 +11675,7 @@
           <p:cNvPr id="2" name="">
             <a:extLst xmlns:a="http://schemas.openxmlformats.org/drawingml/2006/main">
               <a:ext uri="{FF2B5EF4-FFF2-40B4-BE49-F238E27FC236}">
-                <a16:creationId xmlns:a16="http://schemas.microsoft.com/office/drawing/2014/main" id="{E7F35DC6-6D7D-498D-9E75-7051226EEC60}"/>
+                <a16:creationId xmlns:a16="http://schemas.microsoft.com/office/drawing/2014/main" id="{F52CB1C6-9E73-4AA5-888E-CCECF61C5817}"/>
               </a:ext>
             </a:extLst>
           </p:cNvPr>
@@ -11712,7 +11712,7 @@
           <p:cNvPr id="3" name="">
             <a:extLst xmlns:a="http://schemas.openxmlformats.org/drawingml/2006/main">
               <a:ext uri="{FF2B5EF4-FFF2-40B4-BE49-F238E27FC236}">
-                <a16:creationId xmlns:a16="http://schemas.microsoft.com/office/drawing/2014/main" id="{FAA9370D-696E-4A5C-A85E-D155CFCCAE08}"/>
+                <a16:creationId xmlns:a16="http://schemas.microsoft.com/office/drawing/2014/main" id="{7565AE01-00C9-4735-87F0-D3829AFD1199}"/>
               </a:ext>
             </a:extLst>
           </p:cNvPr>
@@ -11749,7 +11749,7 @@
           <p:cNvPr id="4" name="">
             <a:extLst xmlns:a="http://schemas.openxmlformats.org/drawingml/2006/main">
               <a:ext uri="{FF2B5EF4-FFF2-40B4-BE49-F238E27FC236}">
-                <a16:creationId xmlns:a16="http://schemas.microsoft.com/office/drawing/2014/main" id="{ACE63AE6-0391-40AF-9698-2E5162B56C28}"/>
+                <a16:creationId xmlns:a16="http://schemas.microsoft.com/office/drawing/2014/main" id="{4EA1902B-596C-4305-B9CA-AE1B79CFD68F}"/>
               </a:ext>
             </a:extLst>
           </p:cNvPr>
@@ -11813,7 +11813,7 @@
           <p:cNvPr id="5" name="">
             <a:extLst xmlns:a="http://schemas.openxmlformats.org/drawingml/2006/main">
               <a:ext uri="{FF2B5EF4-FFF2-40B4-BE49-F238E27FC236}">
-                <a16:creationId xmlns:a16="http://schemas.microsoft.com/office/drawing/2014/main" id="{3D33F082-2F57-4BDF-9722-5FC2C7D5537B}"/>
+                <a16:creationId xmlns:a16="http://schemas.microsoft.com/office/drawing/2014/main" id="{8F2CB12D-6DA2-406D-BFEC-5CD594EAD928}"/>
               </a:ext>
             </a:extLst>
           </p:cNvPr>
@@ -11877,7 +11877,7 @@
           <p:cNvPr id="6" name="">
             <a:extLst xmlns:a="http://schemas.openxmlformats.org/drawingml/2006/main">
               <a:ext uri="{FF2B5EF4-FFF2-40B4-BE49-F238E27FC236}">
-                <a16:creationId xmlns:a16="http://schemas.microsoft.com/office/drawing/2014/main" id="{5A245CCF-EE7D-4355-BC7C-43A28A32A566}"/>
+                <a16:creationId xmlns:a16="http://schemas.microsoft.com/office/drawing/2014/main" id="{979233C0-2C37-4736-AD81-694201E302CD}"/>
               </a:ext>
             </a:extLst>
           </p:cNvPr>
@@ -11941,7 +11941,7 @@
           <p:cNvPr id="7" name="">
             <a:extLst xmlns:a="http://schemas.openxmlformats.org/drawingml/2006/main">
               <a:ext uri="{FF2B5EF4-FFF2-40B4-BE49-F238E27FC236}">
-                <a16:creationId xmlns:a16="http://schemas.microsoft.com/office/drawing/2014/main" id="{29B610A7-2777-48B0-9773-3E44551A1862}"/>
+                <a16:creationId xmlns:a16="http://schemas.microsoft.com/office/drawing/2014/main" id="{FCA8966A-88F0-4E3E-BF60-0B0619FA8291}"/>
               </a:ext>
             </a:extLst>
           </p:cNvPr>
@@ -11976,7 +11976,7 @@
           <p:cNvPr id="8" name="">
             <a:extLst xmlns:a="http://schemas.openxmlformats.org/drawingml/2006/main">
               <a:ext uri="{FF2B5EF4-FFF2-40B4-BE49-F238E27FC236}">
-                <a16:creationId xmlns:a16="http://schemas.microsoft.com/office/drawing/2014/main" id="{03D9FB90-CD95-4980-B4EE-B9BC3835E2B3}"/>
+                <a16:creationId xmlns:a16="http://schemas.microsoft.com/office/drawing/2014/main" id="{993E0B1D-C5E3-45A6-9CD1-C41A056E31B4}"/>
               </a:ext>
             </a:extLst>
           </p:cNvPr>
@@ -12040,7 +12040,7 @@
           <p:cNvPr id="9" name="">
             <a:extLst xmlns:a="http://schemas.openxmlformats.org/drawingml/2006/main">
               <a:ext uri="{FF2B5EF4-FFF2-40B4-BE49-F238E27FC236}">
-                <a16:creationId xmlns:a16="http://schemas.microsoft.com/office/drawing/2014/main" id="{165F7B47-85A9-4E5D-8FE9-554158D6DA7D}"/>
+                <a16:creationId xmlns:a16="http://schemas.microsoft.com/office/drawing/2014/main" id="{899604DA-8F34-4F56-A9F4-D6790D0B5835}"/>
               </a:ext>
             </a:extLst>
           </p:cNvPr>
@@ -12104,7 +12104,7 @@
           <p:cNvPr id="10" name="">
             <a:extLst xmlns:a="http://schemas.openxmlformats.org/drawingml/2006/main">
               <a:ext uri="{FF2B5EF4-FFF2-40B4-BE49-F238E27FC236}">
-                <a16:creationId xmlns:a16="http://schemas.microsoft.com/office/drawing/2014/main" id="{89A70F80-3521-4F1F-8CFB-C4D0B4C7246A}"/>
+                <a16:creationId xmlns:a16="http://schemas.microsoft.com/office/drawing/2014/main" id="{3B2820C1-EDA5-4050-A518-C38DBD6B52D6}"/>
               </a:ext>
             </a:extLst>
           </p:cNvPr>
@@ -12137,7 +12137,7 @@
           <p:cNvPr id="11" name="">
             <a:extLst xmlns:a="http://schemas.openxmlformats.org/drawingml/2006/main">
               <a:ext uri="{FF2B5EF4-FFF2-40B4-BE49-F238E27FC236}">
-                <a16:creationId xmlns:a16="http://schemas.microsoft.com/office/drawing/2014/main" id="{269D427B-ED1F-4FB3-8927-F314E94486BC}"/>
+                <a16:creationId xmlns:a16="http://schemas.microsoft.com/office/drawing/2014/main" id="{93786B24-70E4-462F-8BBB-C7B83868EE73}"/>
               </a:ext>
             </a:extLst>
           </p:cNvPr>
@@ -12172,7 +12172,7 @@
           <p:cNvPr id="12" name="">
             <a:extLst xmlns:a="http://schemas.openxmlformats.org/drawingml/2006/main">
               <a:ext uri="{FF2B5EF4-FFF2-40B4-BE49-F238E27FC236}">
-                <a16:creationId xmlns:a16="http://schemas.microsoft.com/office/drawing/2014/main" id="{1E3980E5-1727-4B18-A26C-F7512679108E}"/>
+                <a16:creationId xmlns:a16="http://schemas.microsoft.com/office/drawing/2014/main" id="{65C0D269-5AD9-47C9-8337-29366003D570}"/>
               </a:ext>
             </a:extLst>
           </p:cNvPr>
@@ -12236,7 +12236,7 @@
           <p:cNvPr id="13" name="">
             <a:extLst xmlns:a="http://schemas.openxmlformats.org/drawingml/2006/main">
               <a:ext uri="{FF2B5EF4-FFF2-40B4-BE49-F238E27FC236}">
-                <a16:creationId xmlns:a16="http://schemas.microsoft.com/office/drawing/2014/main" id="{8B1B5A4A-58EF-446A-A5ED-28AEE9EF1D48}"/>
+                <a16:creationId xmlns:a16="http://schemas.microsoft.com/office/drawing/2014/main" id="{07F0180D-152F-4DFA-AAFB-88DBA40908B7}"/>
               </a:ext>
             </a:extLst>
           </p:cNvPr>
@@ -12300,7 +12300,7 @@
           <p:cNvPr id="14" name="">
             <a:extLst xmlns:a="http://schemas.openxmlformats.org/drawingml/2006/main">
               <a:ext uri="{FF2B5EF4-FFF2-40B4-BE49-F238E27FC236}">
-                <a16:creationId xmlns:a16="http://schemas.microsoft.com/office/drawing/2014/main" id="{FF0D58A5-642C-4D26-BE5F-3538B27016CA}"/>
+                <a16:creationId xmlns:a16="http://schemas.microsoft.com/office/drawing/2014/main" id="{10FA502A-8B2C-4770-AA6F-E01961389A6B}"/>
               </a:ext>
             </a:extLst>
           </p:cNvPr>
@@ -12333,7 +12333,7 @@
           <p:cNvPr id="15" name="">
             <a:extLst xmlns:a="http://schemas.openxmlformats.org/drawingml/2006/main">
               <a:ext uri="{FF2B5EF4-FFF2-40B4-BE49-F238E27FC236}">
-                <a16:creationId xmlns:a16="http://schemas.microsoft.com/office/drawing/2014/main" id="{0C566326-9950-4DB2-AD6B-B8A3517D7187}"/>
+                <a16:creationId xmlns:a16="http://schemas.microsoft.com/office/drawing/2014/main" id="{B2849BED-F7C4-43E5-9814-81FAF45D9978}"/>
               </a:ext>
             </a:extLst>
           </p:cNvPr>
@@ -12368,7 +12368,7 @@
           <p:cNvPr id="16" name="">
             <a:extLst xmlns:a="http://schemas.openxmlformats.org/drawingml/2006/main">
               <a:ext uri="{FF2B5EF4-FFF2-40B4-BE49-F238E27FC236}">
-                <a16:creationId xmlns:a16="http://schemas.microsoft.com/office/drawing/2014/main" id="{2E735E66-070B-48AE-90D7-98EA12815E5D}"/>
+                <a16:creationId xmlns:a16="http://schemas.microsoft.com/office/drawing/2014/main" id="{868AFDA4-191C-4718-A9E9-C21E8442F26C}"/>
               </a:ext>
             </a:extLst>
           </p:cNvPr>
@@ -12432,7 +12432,7 @@
           <p:cNvPr id="17" name="">
             <a:extLst xmlns:a="http://schemas.openxmlformats.org/drawingml/2006/main">
               <a:ext uri="{FF2B5EF4-FFF2-40B4-BE49-F238E27FC236}">
-                <a16:creationId xmlns:a16="http://schemas.microsoft.com/office/drawing/2014/main" id="{8C402925-18DA-4046-816B-A02630F363EF}"/>
+                <a16:creationId xmlns:a16="http://schemas.microsoft.com/office/drawing/2014/main" id="{78B77EB7-72A6-48B7-BBA7-CD37232E4E54}"/>
               </a:ext>
             </a:extLst>
           </p:cNvPr>
@@ -12496,7 +12496,7 @@
           <p:cNvPr id="18" name="">
             <a:extLst xmlns:a="http://schemas.openxmlformats.org/drawingml/2006/main">
               <a:ext uri="{FF2B5EF4-FFF2-40B4-BE49-F238E27FC236}">
-                <a16:creationId xmlns:a16="http://schemas.microsoft.com/office/drawing/2014/main" id="{C0FB5E25-75E0-43C6-95C5-FAB05296C493}"/>
+                <a16:creationId xmlns:a16="http://schemas.microsoft.com/office/drawing/2014/main" id="{99D1BB70-EB5D-4734-AB91-2743617A09A0}"/>
               </a:ext>
             </a:extLst>
           </p:cNvPr>
@@ -12529,7 +12529,7 @@
           <p:cNvPr id="19" name="">
             <a:extLst xmlns:a="http://schemas.openxmlformats.org/drawingml/2006/main">
               <a:ext uri="{FF2B5EF4-FFF2-40B4-BE49-F238E27FC236}">
-                <a16:creationId xmlns:a16="http://schemas.microsoft.com/office/drawing/2014/main" id="{66764C65-915A-4329-AE84-909F362BCD71}"/>
+                <a16:creationId xmlns:a16="http://schemas.microsoft.com/office/drawing/2014/main" id="{8C7386F9-97ED-4335-B3BC-A8D553F273DB}"/>
               </a:ext>
             </a:extLst>
           </p:cNvPr>
@@ -12564,7 +12564,7 @@
           <p:cNvPr id="20" name="">
             <a:extLst xmlns:a="http://schemas.openxmlformats.org/drawingml/2006/main">
               <a:ext uri="{FF2B5EF4-FFF2-40B4-BE49-F238E27FC236}">
-                <a16:creationId xmlns:a16="http://schemas.microsoft.com/office/drawing/2014/main" id="{DC72F913-3D23-422D-B3CC-7F70428007D3}"/>
+                <a16:creationId xmlns:a16="http://schemas.microsoft.com/office/drawing/2014/main" id="{D9DA1BC0-44B5-4BF8-9A5D-0BC65AADC39C}"/>
               </a:ext>
             </a:extLst>
           </p:cNvPr>
@@ -12628,7 +12628,7 @@
           <p:cNvPr id="21" name="">
             <a:extLst xmlns:a="http://schemas.openxmlformats.org/drawingml/2006/main">
               <a:ext uri="{FF2B5EF4-FFF2-40B4-BE49-F238E27FC236}">
-                <a16:creationId xmlns:a16="http://schemas.microsoft.com/office/drawing/2014/main" id="{A7F9F05C-DC4F-4DA1-9E40-229EE00416D7}"/>
+                <a16:creationId xmlns:a16="http://schemas.microsoft.com/office/drawing/2014/main" id="{697A86C5-305E-464F-BE0F-636456365285}"/>
               </a:ext>
             </a:extLst>
           </p:cNvPr>
@@ -12692,7 +12692,7 @@
           <p:cNvPr id="22" name="">
             <a:extLst xmlns:a="http://schemas.openxmlformats.org/drawingml/2006/main">
               <a:ext uri="{FF2B5EF4-FFF2-40B4-BE49-F238E27FC236}">
-                <a16:creationId xmlns:a16="http://schemas.microsoft.com/office/drawing/2014/main" id="{71E5E11D-D020-4AEA-B5CD-4D9E15ECCF14}"/>
+                <a16:creationId xmlns:a16="http://schemas.microsoft.com/office/drawing/2014/main" id="{28E3C9B1-BC6F-4124-8F9C-D432FE78FAD6}"/>
               </a:ext>
             </a:extLst>
           </p:cNvPr>
@@ -12756,7 +12756,7 @@
           <p:cNvPr id="23" name="">
             <a:extLst xmlns:a="http://schemas.openxmlformats.org/drawingml/2006/main">
               <a:ext uri="{FF2B5EF4-FFF2-40B4-BE49-F238E27FC236}">
-                <a16:creationId xmlns:a16="http://schemas.microsoft.com/office/drawing/2014/main" id="{E4133B99-B0D3-4958-A560-8052CA736889}"/>
+                <a16:creationId xmlns:a16="http://schemas.microsoft.com/office/drawing/2014/main" id="{EA00DA88-F72F-4946-BF92-0D214BE6B9CD}"/>
               </a:ext>
             </a:extLst>
           </p:cNvPr>
@@ -12820,7 +12820,7 @@
           <p:cNvPr id="24" name="">
             <a:extLst xmlns:a="http://schemas.openxmlformats.org/drawingml/2006/main">
               <a:ext uri="{FF2B5EF4-FFF2-40B4-BE49-F238E27FC236}">
-                <a16:creationId xmlns:a16="http://schemas.microsoft.com/office/drawing/2014/main" id="{6DB5B176-EF4F-4929-8CDB-2201F7DAA03C}"/>
+                <a16:creationId xmlns:a16="http://schemas.microsoft.com/office/drawing/2014/main" id="{0B1F58D3-2949-42F7-A9D4-34806DF66CCC}"/>
               </a:ext>
             </a:extLst>
           </p:cNvPr>
@@ -12853,7 +12853,7 @@
           <p:cNvPr id="25" name="">
             <a:extLst xmlns:a="http://schemas.openxmlformats.org/drawingml/2006/main">
               <a:ext uri="{FF2B5EF4-FFF2-40B4-BE49-F238E27FC236}">
-                <a16:creationId xmlns:a16="http://schemas.microsoft.com/office/drawing/2014/main" id="{A644184D-492D-4483-809B-66AB0E04F3F5}"/>
+                <a16:creationId xmlns:a16="http://schemas.microsoft.com/office/drawing/2014/main" id="{5FB1102C-D63D-46DC-A128-EE5E1FDA69C4}"/>
               </a:ext>
             </a:extLst>
           </p:cNvPr>
@@ -12917,7 +12917,7 @@
           <p:cNvPr id="26" name="">
             <a:extLst xmlns:a="http://schemas.openxmlformats.org/drawingml/2006/main">
               <a:ext uri="{FF2B5EF4-FFF2-40B4-BE49-F238E27FC236}">
-                <a16:creationId xmlns:a16="http://schemas.microsoft.com/office/drawing/2014/main" id="{CBB499EB-0690-4B4A-9E7B-60DA7C72DCAF}"/>
+                <a16:creationId xmlns:a16="http://schemas.microsoft.com/office/drawing/2014/main" id="{D60DCF34-6D0B-474E-98EA-D5BABBC6CD8E}"/>
               </a:ext>
             </a:extLst>
           </p:cNvPr>
@@ -12979,7 +12979,7 @@
     </p:spTree>
     <p:extLst>
       <p:ext uri="{BB962C8B-B14F-4D97-AF65-F5344CB8AC3E}">
-        <p14:creationId xmlns:p14="http://schemas.microsoft.com/office/powerpoint/2010/main" val="447186327"/>
+        <p14:creationId xmlns:p14="http://schemas.microsoft.com/office/powerpoint/2010/main" val="298765322"/>
       </p:ext>
     </p:extLst>
   </p:cSld>
@@ -13007,7 +13007,7 @@
           <p:nvPr/>
         </p:nvPicPr>
         <p:blipFill>
-          <a:blip xmlns:r="http://schemas.openxmlformats.org/officeDocument/2006/relationships" xmlns:a="http://schemas.openxmlformats.org/drawingml/2006/main" r:embed="Rdcea8b2213f24798"/>
+          <a:blip xmlns:r="http://schemas.openxmlformats.org/officeDocument/2006/relationships" xmlns:a="http://schemas.openxmlformats.org/drawingml/2006/main" r:embed="R32ab13b23dc34d43"/>
           <a:srcRect xmlns:a="http://schemas.openxmlformats.org/drawingml/2006/main" l="0" t="27" r="0" b="27"/>
           <a:stretch xmlns:a="http://schemas.openxmlformats.org/drawingml/2006/main">
             <a:fillRect l="0" t="0" r="0" b="0"/>
@@ -13028,7 +13028,7 @@
           <p:cNvPr id="2" name="">
             <a:extLst xmlns:a="http://schemas.openxmlformats.org/drawingml/2006/main">
               <a:ext uri="{FF2B5EF4-FFF2-40B4-BE49-F238E27FC236}">
-                <a16:creationId xmlns:a16="http://schemas.microsoft.com/office/drawing/2014/main" id="{A95632DB-614C-4E8B-8304-4ED7A4B3851F}"/>
+                <a16:creationId xmlns:a16="http://schemas.microsoft.com/office/drawing/2014/main" id="{6847B571-2D1C-4F36-9793-48FF55183643}"/>
               </a:ext>
             </a:extLst>
           </p:cNvPr>
@@ -13065,7 +13065,7 @@
           <p:cNvPr id="3" name="">
             <a:extLst xmlns:a="http://schemas.openxmlformats.org/drawingml/2006/main">
               <a:ext uri="{FF2B5EF4-FFF2-40B4-BE49-F238E27FC236}">
-                <a16:creationId xmlns:a16="http://schemas.microsoft.com/office/drawing/2014/main" id="{D7CC89BA-D1B1-48BF-B8FB-6BD5148A4B2E}"/>
+                <a16:creationId xmlns:a16="http://schemas.microsoft.com/office/drawing/2014/main" id="{65B03620-C009-4C24-BAE5-3DB5F56447D6}"/>
               </a:ext>
             </a:extLst>
           </p:cNvPr>
@@ -13102,7 +13102,7 @@
           <p:cNvPr id="4" name="">
             <a:extLst xmlns:a="http://schemas.openxmlformats.org/drawingml/2006/main">
               <a:ext uri="{FF2B5EF4-FFF2-40B4-BE49-F238E27FC236}">
-                <a16:creationId xmlns:a16="http://schemas.microsoft.com/office/drawing/2014/main" id="{68C3E910-6273-4646-A4A8-1D5084D10EA1}"/>
+                <a16:creationId xmlns:a16="http://schemas.microsoft.com/office/drawing/2014/main" id="{F103F9BE-96C1-4426-BE16-163BDD56314C}"/>
               </a:ext>
             </a:extLst>
           </p:cNvPr>
@@ -13166,7 +13166,7 @@
           <p:cNvPr id="5" name="">
             <a:extLst xmlns:a="http://schemas.openxmlformats.org/drawingml/2006/main">
               <a:ext uri="{FF2B5EF4-FFF2-40B4-BE49-F238E27FC236}">
-                <a16:creationId xmlns:a16="http://schemas.microsoft.com/office/drawing/2014/main" id="{9E0F85EB-0829-41F1-BC3B-FE9B7D30D626}"/>
+                <a16:creationId xmlns:a16="http://schemas.microsoft.com/office/drawing/2014/main" id="{987D70A6-2EA7-4FBB-9A6D-E9B5AE5E1687}"/>
               </a:ext>
             </a:extLst>
           </p:cNvPr>
@@ -13230,7 +13230,7 @@
           <p:cNvPr id="6" name="">
             <a:extLst xmlns:a="http://schemas.openxmlformats.org/drawingml/2006/main">
               <a:ext uri="{FF2B5EF4-FFF2-40B4-BE49-F238E27FC236}">
-                <a16:creationId xmlns:a16="http://schemas.microsoft.com/office/drawing/2014/main" id="{9542ECC7-2094-4AA3-80D9-989B3EA2DFC4}"/>
+                <a16:creationId xmlns:a16="http://schemas.microsoft.com/office/drawing/2014/main" id="{A2F5EC2A-3B41-45FD-92BF-366AAD06E1F8}"/>
               </a:ext>
             </a:extLst>
           </p:cNvPr>
@@ -13294,19 +13294,19 @@
           <p:cNvPr id="7" name="">
             <a:extLst xmlns:a="http://schemas.openxmlformats.org/drawingml/2006/main">
               <a:ext uri="{FF2B5EF4-FFF2-40B4-BE49-F238E27FC236}">
-                <a16:creationId xmlns:a16="http://schemas.microsoft.com/office/drawing/2014/main" id="{7EF022F0-714D-4799-838A-74BE0A269B46}"/>
-              </a:ext>
-            </a:extLst>
-          </p:cNvPr>
-          <p:cNvSpPr>
-            <a:spLocks xmlns:a="http://schemas.openxmlformats.org/drawingml/2006/main" noGrp="1"/>
-          </p:cNvSpPr>
-          <p:nvPr/>
-        </p:nvSpPr>
-        <p:spPr>
-          <a:xfrm xmlns:a="http://schemas.openxmlformats.org/drawingml/2006/main">
-            <a:off x="4705350" y="3505200"/>
-            <a:ext cx="2247900" cy="990600"/>
+                <a16:creationId xmlns:a16="http://schemas.microsoft.com/office/drawing/2014/main" id="{C048BF90-414D-4044-8D52-D7136BE19BC7}"/>
+              </a:ext>
+            </a:extLst>
+          </p:cNvPr>
+          <p:cNvSpPr>
+            <a:spLocks xmlns:a="http://schemas.openxmlformats.org/drawingml/2006/main" noGrp="1"/>
+          </p:cNvSpPr>
+          <p:nvPr/>
+        </p:nvSpPr>
+        <p:spPr>
+          <a:xfrm xmlns:a="http://schemas.openxmlformats.org/drawingml/2006/main">
+            <a:off x="4514850" y="3371850"/>
+            <a:ext cx="3143250" cy="876300"/>
           </a:xfrm>
           <a:prstGeom xmlns:a="http://schemas.openxmlformats.org/drawingml/2006/main" prst="rect">
             <a:avLst/>
@@ -13316,7 +13316,7 @@
               <a:alpha val="93333"/>
             </a:srgbClr>
           </a:solidFill>
-          <a:ln xmlns:a="http://schemas.openxmlformats.org/drawingml/2006/main" w="9525">
+          <a:ln xmlns:a="http://schemas.openxmlformats.org/drawingml/2006/main" w="19050">
             <a:solidFill>
               <a:srgbClr val="55E6FF"/>
             </a:solidFill>
@@ -13329,19 +13329,19 @@
           <p:cNvPr id="8" name="">
             <a:extLst xmlns:a="http://schemas.openxmlformats.org/drawingml/2006/main">
               <a:ext uri="{FF2B5EF4-FFF2-40B4-BE49-F238E27FC236}">
-                <a16:creationId xmlns:a16="http://schemas.microsoft.com/office/drawing/2014/main" id="{CEFA1C33-830D-4776-BBF6-56914E8F8D1B}"/>
-              </a:ext>
-            </a:extLst>
-          </p:cNvPr>
-          <p:cNvSpPr>
-            <a:spLocks xmlns:a="http://schemas.openxmlformats.org/drawingml/2006/main" noGrp="1"/>
-          </p:cNvSpPr>
-          <p:nvPr/>
-        </p:nvSpPr>
-        <p:spPr>
-          <a:xfrm xmlns:a="http://schemas.openxmlformats.org/drawingml/2006/main">
-            <a:off x="4991100" y="3676650"/>
-            <a:ext cx="1676400" cy="647700"/>
+                <a16:creationId xmlns:a16="http://schemas.microsoft.com/office/drawing/2014/main" id="{6BE9DB6D-53A7-4C73-B400-A4DF8578D5DF}"/>
+              </a:ext>
+            </a:extLst>
+          </p:cNvPr>
+          <p:cNvSpPr>
+            <a:spLocks xmlns:a="http://schemas.openxmlformats.org/drawingml/2006/main" noGrp="1"/>
+          </p:cNvSpPr>
+          <p:nvPr/>
+        </p:nvSpPr>
+        <p:spPr>
+          <a:xfrm xmlns:a="http://schemas.openxmlformats.org/drawingml/2006/main">
+            <a:off x="4953000" y="3581400"/>
+            <a:ext cx="2266950" cy="514350"/>
           </a:xfrm>
           <a:prstGeom xmlns:a="http://schemas.openxmlformats.org/drawingml/2006/main" prst="rect">
             <a:avLst/>
@@ -13365,7 +13365,7 @@
           <a:lstStyle xmlns:a="http://schemas.openxmlformats.org/drawingml/2006/main"/>
           <a:p xmlns:a="http://schemas.openxmlformats.org/drawingml/2006/main">
             <a:pPr algn="ctr">
-              <a:defRPr sz="1650" b="1">
+              <a:defRPr sz="1800" b="1">
                 <a:solidFill>
                   <a:srgbClr val="EAF8FF"/>
                 </a:solidFill>
@@ -13375,7 +13375,7 @@
               </a:defRPr>
             </a:pPr>
             <a:r>
-              <a:rPr sz="1650" b="1">
+              <a:rPr sz="1800" b="1">
                 <a:solidFill>
                   <a:srgbClr val="EAF8FF"/>
                 </a:solidFill>
@@ -13388,7 +13388,7 @@
           </a:p>
           <a:p xmlns:a="http://schemas.openxmlformats.org/drawingml/2006/main">
             <a:pPr algn="ctr">
-              <a:defRPr sz="1650" b="1">
+              <a:defRPr sz="1800" b="1">
                 <a:solidFill>
                   <a:srgbClr val="EAF8FF"/>
                 </a:solidFill>
@@ -13398,7 +13398,7 @@
               </a:defRPr>
             </a:pPr>
             <a:r>
-              <a:rPr sz="1650" b="1">
+              <a:rPr sz="1800" b="1">
                 <a:solidFill>
                   <a:srgbClr val="EAF8FF"/>
                 </a:solidFill>
@@ -13416,19 +13416,83 @@
           <p:cNvPr id="9" name="">
             <a:extLst xmlns:a="http://schemas.openxmlformats.org/drawingml/2006/main">
               <a:ext uri="{FF2B5EF4-FFF2-40B4-BE49-F238E27FC236}">
-                <a16:creationId xmlns:a16="http://schemas.microsoft.com/office/drawing/2014/main" id="{CD84A83C-1F89-4003-8C63-E2BE8B08D273}"/>
-              </a:ext>
-            </a:extLst>
-          </p:cNvPr>
-          <p:cNvSpPr>
-            <a:spLocks xmlns:a="http://schemas.openxmlformats.org/drawingml/2006/main" noGrp="1"/>
-          </p:cNvSpPr>
-          <p:nvPr/>
-        </p:nvSpPr>
-        <p:spPr>
-          <a:xfrm xmlns:a="http://schemas.openxmlformats.org/drawingml/2006/main">
-            <a:off x="4781550" y="2133600"/>
-            <a:ext cx="2095500" cy="647700"/>
+                <a16:creationId xmlns:a16="http://schemas.microsoft.com/office/drawing/2014/main" id="{F17C74CB-25D2-471D-93B8-1CD6618AF7C4}"/>
+              </a:ext>
+            </a:extLst>
+          </p:cNvPr>
+          <p:cNvSpPr>
+            <a:spLocks xmlns:a="http://schemas.openxmlformats.org/drawingml/2006/main" noGrp="1"/>
+          </p:cNvSpPr>
+          <p:nvPr/>
+        </p:nvSpPr>
+        <p:spPr>
+          <a:xfrm xmlns:a="http://schemas.openxmlformats.org/drawingml/2006/main">
+            <a:off x="4171950" y="4457700"/>
+            <a:ext cx="3848100" cy="228600"/>
+          </a:xfrm>
+          <a:prstGeom xmlns:a="http://schemas.openxmlformats.org/drawingml/2006/main" prst="rect">
+            <a:avLst/>
+          </a:prstGeom>
+          <a:solidFill xmlns:a="http://schemas.openxmlformats.org/drawingml/2006/main">
+            <a:srgbClr val="000000">
+              <a:alpha val="0"/>
+            </a:srgbClr>
+          </a:solidFill>
+          <a:ln xmlns:a="http://schemas.openxmlformats.org/drawingml/2006/main" w="0">
+            <a:solidFill>
+              <a:srgbClr val="000000">
+                <a:alpha val="0"/>
+              </a:srgbClr>
+            </a:solidFill>
+            <a:prstDash val="solid"/>
+          </a:ln>
+        </p:spPr>
+        <p:txBody>
+          <a:bodyPr xmlns:a="http://schemas.openxmlformats.org/drawingml/2006/main" lIns="0" tIns="0" rIns="0" bIns="0" anchor="t"/>
+          <a:lstStyle xmlns:a="http://schemas.openxmlformats.org/drawingml/2006/main"/>
+          <a:p xmlns:a="http://schemas.openxmlformats.org/drawingml/2006/main">
+            <a:pPr algn="ctr">
+              <a:defRPr sz="1125" b="1">
+                <a:solidFill>
+                  <a:srgbClr val="55E6FF"/>
+                </a:solidFill>
+                <a:latin typeface="Aptos"/>
+                <a:ea typeface="Aptos"/>
+                <a:cs typeface="Aptos"/>
+              </a:defRPr>
+            </a:pPr>
+            <a:r>
+              <a:rPr sz="1125" b="1">
+                <a:solidFill>
+                  <a:srgbClr val="55E6FF"/>
+                </a:solidFill>
+                <a:latin typeface="Aptos"/>
+                <a:ea typeface="Aptos"/>
+                <a:cs typeface="Aptos"/>
+              </a:rPr>
+              <a:t>Shared IP, data and reusable playbooks</a:t>
+            </a:r>
+          </a:p>
+        </p:txBody>
+      </p:sp>
+      <p:sp>
+        <p:nvSpPr>
+          <p:cNvPr id="10" name="">
+            <a:extLst xmlns:a="http://schemas.openxmlformats.org/drawingml/2006/main">
+              <a:ext uri="{FF2B5EF4-FFF2-40B4-BE49-F238E27FC236}">
+                <a16:creationId xmlns:a16="http://schemas.microsoft.com/office/drawing/2014/main" id="{6E05543A-2D09-4239-85BD-CA4721B93928}"/>
+              </a:ext>
+            </a:extLst>
+          </p:cNvPr>
+          <p:cNvSpPr>
+            <a:spLocks xmlns:a="http://schemas.openxmlformats.org/drawingml/2006/main" noGrp="1"/>
+          </p:cNvSpPr>
+          <p:nvPr/>
+        </p:nvSpPr>
+        <p:spPr>
+          <a:xfrm xmlns:a="http://schemas.openxmlformats.org/drawingml/2006/main">
+            <a:off x="723900" y="5143500"/>
+            <a:ext cx="2038350" cy="723900"/>
           </a:xfrm>
           <a:prstGeom xmlns:a="http://schemas.openxmlformats.org/drawingml/2006/main" prst="rect">
             <a:avLst/>
@@ -13448,22 +13512,22 @@
       </p:sp>
       <p:sp>
         <p:nvSpPr>
-          <p:cNvPr id="10" name="">
-            <a:extLst xmlns:a="http://schemas.openxmlformats.org/drawingml/2006/main">
-              <a:ext uri="{FF2B5EF4-FFF2-40B4-BE49-F238E27FC236}">
-                <a16:creationId xmlns:a16="http://schemas.microsoft.com/office/drawing/2014/main" id="{CB7F0340-B0D7-4AF2-A2C5-94EB2AFE5F39}"/>
-              </a:ext>
-            </a:extLst>
-          </p:cNvPr>
-          <p:cNvSpPr>
-            <a:spLocks xmlns:a="http://schemas.openxmlformats.org/drawingml/2006/main" noGrp="1"/>
-          </p:cNvSpPr>
-          <p:nvPr/>
-        </p:nvSpPr>
-        <p:spPr>
-          <a:xfrm xmlns:a="http://schemas.openxmlformats.org/drawingml/2006/main">
-            <a:off x="4953000" y="2305050"/>
-            <a:ext cx="1752600" cy="247650"/>
+          <p:cNvPr id="11" name="">
+            <a:extLst xmlns:a="http://schemas.openxmlformats.org/drawingml/2006/main">
+              <a:ext uri="{FF2B5EF4-FFF2-40B4-BE49-F238E27FC236}">
+                <a16:creationId xmlns:a16="http://schemas.microsoft.com/office/drawing/2014/main" id="{CB7BC243-5C64-432B-BBFD-278F0502FF9B}"/>
+              </a:ext>
+            </a:extLst>
+          </p:cNvPr>
+          <p:cNvSpPr>
+            <a:spLocks xmlns:a="http://schemas.openxmlformats.org/drawingml/2006/main" noGrp="1"/>
+          </p:cNvSpPr>
+          <p:nvPr/>
+        </p:nvSpPr>
+        <p:spPr>
+          <a:xfrm xmlns:a="http://schemas.openxmlformats.org/drawingml/2006/main">
+            <a:off x="857250" y="5353050"/>
+            <a:ext cx="1771650" cy="266700"/>
           </a:xfrm>
           <a:prstGeom xmlns:a="http://schemas.openxmlformats.org/drawingml/2006/main" prst="rect">
             <a:avLst/>
@@ -13512,22 +13576,22 @@
       </p:sp>
       <p:sp>
         <p:nvSpPr>
-          <p:cNvPr id="11" name="">
-            <a:extLst xmlns:a="http://schemas.openxmlformats.org/drawingml/2006/main">
-              <a:ext uri="{FF2B5EF4-FFF2-40B4-BE49-F238E27FC236}">
-                <a16:creationId xmlns:a16="http://schemas.microsoft.com/office/drawing/2014/main" id="{ACFF9EA5-1BBD-48EA-9C03-F801CAC9AEEF}"/>
-              </a:ext>
-            </a:extLst>
-          </p:cNvPr>
-          <p:cNvSpPr>
-            <a:spLocks xmlns:a="http://schemas.openxmlformats.org/drawingml/2006/main" noGrp="1"/>
-          </p:cNvSpPr>
-          <p:nvPr/>
-        </p:nvSpPr>
-        <p:spPr>
-          <a:xfrm xmlns:a="http://schemas.openxmlformats.org/drawingml/2006/main">
-            <a:off x="5829300" y="2457450"/>
-            <a:ext cx="19050" cy="19050"/>
+          <p:cNvPr id="12" name="">
+            <a:extLst xmlns:a="http://schemas.openxmlformats.org/drawingml/2006/main">
+              <a:ext uri="{FF2B5EF4-FFF2-40B4-BE49-F238E27FC236}">
+                <a16:creationId xmlns:a16="http://schemas.microsoft.com/office/drawing/2014/main" id="{9BBE62B3-5E0F-44EB-B775-322AE0E88FA5}"/>
+              </a:ext>
+            </a:extLst>
+          </p:cNvPr>
+          <p:cNvSpPr>
+            <a:spLocks xmlns:a="http://schemas.openxmlformats.org/drawingml/2006/main" noGrp="1"/>
+          </p:cNvSpPr>
+          <p:nvPr/>
+        </p:nvSpPr>
+        <p:spPr>
+          <a:xfrm xmlns:a="http://schemas.openxmlformats.org/drawingml/2006/main">
+            <a:off x="1733550" y="4762500"/>
+            <a:ext cx="19050" cy="381000"/>
           </a:xfrm>
           <a:prstGeom xmlns:a="http://schemas.openxmlformats.org/drawingml/2006/main" prst="rect">
             <a:avLst/>
@@ -13545,22 +13609,22 @@
       </p:sp>
       <p:sp>
         <p:nvSpPr>
-          <p:cNvPr id="12" name="">
-            <a:extLst xmlns:a="http://schemas.openxmlformats.org/drawingml/2006/main">
-              <a:ext uri="{FF2B5EF4-FFF2-40B4-BE49-F238E27FC236}">
-                <a16:creationId xmlns:a16="http://schemas.microsoft.com/office/drawing/2014/main" id="{6AC666D3-31F0-4A12-BF09-29548AC984C8}"/>
-              </a:ext>
-            </a:extLst>
-          </p:cNvPr>
-          <p:cNvSpPr>
-            <a:spLocks xmlns:a="http://schemas.openxmlformats.org/drawingml/2006/main" noGrp="1"/>
-          </p:cNvSpPr>
-          <p:nvPr/>
-        </p:nvSpPr>
-        <p:spPr>
-          <a:xfrm xmlns:a="http://schemas.openxmlformats.org/drawingml/2006/main">
-            <a:off x="7879664" y="3199821"/>
-            <a:ext cx="2095500" cy="647700"/>
+          <p:cNvPr id="13" name="">
+            <a:extLst xmlns:a="http://schemas.openxmlformats.org/drawingml/2006/main">
+              <a:ext uri="{FF2B5EF4-FFF2-40B4-BE49-F238E27FC236}">
+                <a16:creationId xmlns:a16="http://schemas.microsoft.com/office/drawing/2014/main" id="{E408E9FD-9790-4D75-9881-F5FFF69DC597}"/>
+              </a:ext>
+            </a:extLst>
+          </p:cNvPr>
+          <p:cNvSpPr>
+            <a:spLocks xmlns:a="http://schemas.openxmlformats.org/drawingml/2006/main" noGrp="1"/>
+          </p:cNvSpPr>
+          <p:nvPr/>
+        </p:nvSpPr>
+        <p:spPr>
+          <a:xfrm xmlns:a="http://schemas.openxmlformats.org/drawingml/2006/main">
+            <a:off x="2895600" y="5143500"/>
+            <a:ext cx="2038350" cy="723900"/>
           </a:xfrm>
           <a:prstGeom xmlns:a="http://schemas.openxmlformats.org/drawingml/2006/main" prst="rect">
             <a:avLst/>
@@ -13580,22 +13644,22 @@
       </p:sp>
       <p:sp>
         <p:nvSpPr>
-          <p:cNvPr id="13" name="">
-            <a:extLst xmlns:a="http://schemas.openxmlformats.org/drawingml/2006/main">
-              <a:ext uri="{FF2B5EF4-FFF2-40B4-BE49-F238E27FC236}">
-                <a16:creationId xmlns:a16="http://schemas.microsoft.com/office/drawing/2014/main" id="{B7A4AA7D-4ECA-49B3-8C6A-3A3803631BE5}"/>
-              </a:ext>
-            </a:extLst>
-          </p:cNvPr>
-          <p:cNvSpPr>
-            <a:spLocks xmlns:a="http://schemas.openxmlformats.org/drawingml/2006/main" noGrp="1"/>
-          </p:cNvSpPr>
-          <p:nvPr/>
-        </p:nvSpPr>
-        <p:spPr>
-          <a:xfrm xmlns:a="http://schemas.openxmlformats.org/drawingml/2006/main">
-            <a:off x="8051114" y="3371271"/>
-            <a:ext cx="1752600" cy="247650"/>
+          <p:cNvPr id="14" name="">
+            <a:extLst xmlns:a="http://schemas.openxmlformats.org/drawingml/2006/main">
+              <a:ext uri="{FF2B5EF4-FFF2-40B4-BE49-F238E27FC236}">
+                <a16:creationId xmlns:a16="http://schemas.microsoft.com/office/drawing/2014/main" id="{C8A4C12F-F87E-4AB9-8D0C-ADD4555108EB}"/>
+              </a:ext>
+            </a:extLst>
+          </p:cNvPr>
+          <p:cNvSpPr>
+            <a:spLocks xmlns:a="http://schemas.openxmlformats.org/drawingml/2006/main" noGrp="1"/>
+          </p:cNvSpPr>
+          <p:nvPr/>
+        </p:nvSpPr>
+        <p:spPr>
+          <a:xfrm xmlns:a="http://schemas.openxmlformats.org/drawingml/2006/main">
+            <a:off x="3028950" y="5353050"/>
+            <a:ext cx="1771650" cy="266700"/>
           </a:xfrm>
           <a:prstGeom xmlns:a="http://schemas.openxmlformats.org/drawingml/2006/main" prst="rect">
             <a:avLst/>
@@ -13644,22 +13708,22 @@
       </p:sp>
       <p:sp>
         <p:nvSpPr>
-          <p:cNvPr id="14" name="">
-            <a:extLst xmlns:a="http://schemas.openxmlformats.org/drawingml/2006/main">
-              <a:ext uri="{FF2B5EF4-FFF2-40B4-BE49-F238E27FC236}">
-                <a16:creationId xmlns:a16="http://schemas.microsoft.com/office/drawing/2014/main" id="{5D064768-6B1A-465A-9D29-8612B27C89DE}"/>
-              </a:ext>
-            </a:extLst>
-          </p:cNvPr>
-          <p:cNvSpPr>
-            <a:spLocks xmlns:a="http://schemas.openxmlformats.org/drawingml/2006/main" noGrp="1"/>
-          </p:cNvSpPr>
-          <p:nvPr/>
-        </p:nvSpPr>
-        <p:spPr>
-          <a:xfrm xmlns:a="http://schemas.openxmlformats.org/drawingml/2006/main">
-            <a:off x="5829300" y="3523671"/>
-            <a:ext cx="3098114" cy="19050"/>
+          <p:cNvPr id="15" name="">
+            <a:extLst xmlns:a="http://schemas.openxmlformats.org/drawingml/2006/main">
+              <a:ext uri="{FF2B5EF4-FFF2-40B4-BE49-F238E27FC236}">
+                <a16:creationId xmlns:a16="http://schemas.microsoft.com/office/drawing/2014/main" id="{26770352-1AF1-41D6-8955-5A126C8379B5}"/>
+              </a:ext>
+            </a:extLst>
+          </p:cNvPr>
+          <p:cNvSpPr>
+            <a:spLocks xmlns:a="http://schemas.openxmlformats.org/drawingml/2006/main" noGrp="1"/>
+          </p:cNvSpPr>
+          <p:nvPr/>
+        </p:nvSpPr>
+        <p:spPr>
+          <a:xfrm xmlns:a="http://schemas.openxmlformats.org/drawingml/2006/main">
+            <a:off x="3905250" y="4762500"/>
+            <a:ext cx="19050" cy="381000"/>
           </a:xfrm>
           <a:prstGeom xmlns:a="http://schemas.openxmlformats.org/drawingml/2006/main" prst="rect">
             <a:avLst/>
@@ -13677,22 +13741,22 @@
       </p:sp>
       <p:sp>
         <p:nvSpPr>
-          <p:cNvPr id="15" name="">
-            <a:extLst xmlns:a="http://schemas.openxmlformats.org/drawingml/2006/main">
-              <a:ext uri="{FF2B5EF4-FFF2-40B4-BE49-F238E27FC236}">
-                <a16:creationId xmlns:a16="http://schemas.microsoft.com/office/drawing/2014/main" id="{E11B42BF-D232-4731-A0ED-185F2303AB99}"/>
-              </a:ext>
-            </a:extLst>
-          </p:cNvPr>
-          <p:cNvSpPr>
-            <a:spLocks xmlns:a="http://schemas.openxmlformats.org/drawingml/2006/main" noGrp="1"/>
-          </p:cNvSpPr>
-          <p:nvPr/>
-        </p:nvSpPr>
-        <p:spPr>
-          <a:xfrm xmlns:a="http://schemas.openxmlformats.org/drawingml/2006/main">
-            <a:off x="6696290" y="4925004"/>
-            <a:ext cx="2095500" cy="647700"/>
+          <p:cNvPr id="16" name="">
+            <a:extLst xmlns:a="http://schemas.openxmlformats.org/drawingml/2006/main">
+              <a:ext uri="{FF2B5EF4-FFF2-40B4-BE49-F238E27FC236}">
+                <a16:creationId xmlns:a16="http://schemas.microsoft.com/office/drawing/2014/main" id="{6A321B44-40FB-48E8-8643-50DAF36EAD18}"/>
+              </a:ext>
+            </a:extLst>
+          </p:cNvPr>
+          <p:cNvSpPr>
+            <a:spLocks xmlns:a="http://schemas.openxmlformats.org/drawingml/2006/main" noGrp="1"/>
+          </p:cNvSpPr>
+          <p:nvPr/>
+        </p:nvSpPr>
+        <p:spPr>
+          <a:xfrm xmlns:a="http://schemas.openxmlformats.org/drawingml/2006/main">
+            <a:off x="5067300" y="5143500"/>
+            <a:ext cx="2038350" cy="723900"/>
           </a:xfrm>
           <a:prstGeom xmlns:a="http://schemas.openxmlformats.org/drawingml/2006/main" prst="rect">
             <a:avLst/>
@@ -13712,22 +13776,22 @@
       </p:sp>
       <p:sp>
         <p:nvSpPr>
-          <p:cNvPr id="16" name="">
-            <a:extLst xmlns:a="http://schemas.openxmlformats.org/drawingml/2006/main">
-              <a:ext uri="{FF2B5EF4-FFF2-40B4-BE49-F238E27FC236}">
-                <a16:creationId xmlns:a16="http://schemas.microsoft.com/office/drawing/2014/main" id="{861F05B3-DD4C-4E58-86DC-6B5D4CB7691A}"/>
-              </a:ext>
-            </a:extLst>
-          </p:cNvPr>
-          <p:cNvSpPr>
-            <a:spLocks xmlns:a="http://schemas.openxmlformats.org/drawingml/2006/main" noGrp="1"/>
-          </p:cNvSpPr>
-          <p:nvPr/>
-        </p:nvSpPr>
-        <p:spPr>
-          <a:xfrm xmlns:a="http://schemas.openxmlformats.org/drawingml/2006/main">
-            <a:off x="6867740" y="5096454"/>
-            <a:ext cx="1752600" cy="247650"/>
+          <p:cNvPr id="17" name="">
+            <a:extLst xmlns:a="http://schemas.openxmlformats.org/drawingml/2006/main">
+              <a:ext uri="{FF2B5EF4-FFF2-40B4-BE49-F238E27FC236}">
+                <a16:creationId xmlns:a16="http://schemas.microsoft.com/office/drawing/2014/main" id="{BC109D90-7C7B-4C16-A529-FCE47096BB50}"/>
+              </a:ext>
+            </a:extLst>
+          </p:cNvPr>
+          <p:cNvSpPr>
+            <a:spLocks xmlns:a="http://schemas.openxmlformats.org/drawingml/2006/main" noGrp="1"/>
+          </p:cNvSpPr>
+          <p:nvPr/>
+        </p:nvSpPr>
+        <p:spPr>
+          <a:xfrm xmlns:a="http://schemas.openxmlformats.org/drawingml/2006/main">
+            <a:off x="5200650" y="5353050"/>
+            <a:ext cx="1771650" cy="266700"/>
           </a:xfrm>
           <a:prstGeom xmlns:a="http://schemas.openxmlformats.org/drawingml/2006/main" prst="rect">
             <a:avLst/>
@@ -13776,22 +13840,22 @@
       </p:sp>
       <p:sp>
         <p:nvSpPr>
-          <p:cNvPr id="17" name="">
-            <a:extLst xmlns:a="http://schemas.openxmlformats.org/drawingml/2006/main">
-              <a:ext uri="{FF2B5EF4-FFF2-40B4-BE49-F238E27FC236}">
-                <a16:creationId xmlns:a16="http://schemas.microsoft.com/office/drawing/2014/main" id="{45F20FED-9411-4155-A4C1-DF55AFEEC059}"/>
-              </a:ext>
-            </a:extLst>
-          </p:cNvPr>
-          <p:cNvSpPr>
-            <a:spLocks xmlns:a="http://schemas.openxmlformats.org/drawingml/2006/main" noGrp="1"/>
-          </p:cNvSpPr>
-          <p:nvPr/>
-        </p:nvSpPr>
-        <p:spPr>
-          <a:xfrm xmlns:a="http://schemas.openxmlformats.org/drawingml/2006/main">
-            <a:off x="5829300" y="4000500"/>
-            <a:ext cx="1914740" cy="19050"/>
+          <p:cNvPr id="18" name="">
+            <a:extLst xmlns:a="http://schemas.openxmlformats.org/drawingml/2006/main">
+              <a:ext uri="{FF2B5EF4-FFF2-40B4-BE49-F238E27FC236}">
+                <a16:creationId xmlns:a16="http://schemas.microsoft.com/office/drawing/2014/main" id="{7D88DB34-D1D4-425C-B858-E49E57E471C2}"/>
+              </a:ext>
+            </a:extLst>
+          </p:cNvPr>
+          <p:cNvSpPr>
+            <a:spLocks xmlns:a="http://schemas.openxmlformats.org/drawingml/2006/main" noGrp="1"/>
+          </p:cNvSpPr>
+          <p:nvPr/>
+        </p:nvSpPr>
+        <p:spPr>
+          <a:xfrm xmlns:a="http://schemas.openxmlformats.org/drawingml/2006/main">
+            <a:off x="6076950" y="4762500"/>
+            <a:ext cx="19050" cy="381000"/>
           </a:xfrm>
           <a:prstGeom xmlns:a="http://schemas.openxmlformats.org/drawingml/2006/main" prst="rect">
             <a:avLst/>
@@ -13809,22 +13873,22 @@
       </p:sp>
       <p:sp>
         <p:nvSpPr>
-          <p:cNvPr id="18" name="">
-            <a:extLst xmlns:a="http://schemas.openxmlformats.org/drawingml/2006/main">
-              <a:ext uri="{FF2B5EF4-FFF2-40B4-BE49-F238E27FC236}">
-                <a16:creationId xmlns:a16="http://schemas.microsoft.com/office/drawing/2014/main" id="{A2342BCD-3782-4A87-B131-97CD4B327A53}"/>
-              </a:ext>
-            </a:extLst>
-          </p:cNvPr>
-          <p:cNvSpPr>
-            <a:spLocks xmlns:a="http://schemas.openxmlformats.org/drawingml/2006/main" noGrp="1"/>
-          </p:cNvSpPr>
-          <p:nvPr/>
-        </p:nvSpPr>
-        <p:spPr>
-          <a:xfrm xmlns:a="http://schemas.openxmlformats.org/drawingml/2006/main">
-            <a:off x="2866810" y="4925004"/>
-            <a:ext cx="2095500" cy="647700"/>
+          <p:cNvPr id="19" name="">
+            <a:extLst xmlns:a="http://schemas.openxmlformats.org/drawingml/2006/main">
+              <a:ext uri="{FF2B5EF4-FFF2-40B4-BE49-F238E27FC236}">
+                <a16:creationId xmlns:a16="http://schemas.microsoft.com/office/drawing/2014/main" id="{A3D2399E-8215-4C01-A3D2-6C5081410D0F}"/>
+              </a:ext>
+            </a:extLst>
+          </p:cNvPr>
+          <p:cNvSpPr>
+            <a:spLocks xmlns:a="http://schemas.openxmlformats.org/drawingml/2006/main" noGrp="1"/>
+          </p:cNvSpPr>
+          <p:nvPr/>
+        </p:nvSpPr>
+        <p:spPr>
+          <a:xfrm xmlns:a="http://schemas.openxmlformats.org/drawingml/2006/main">
+            <a:off x="7239000" y="5143500"/>
+            <a:ext cx="2038350" cy="723900"/>
           </a:xfrm>
           <a:prstGeom xmlns:a="http://schemas.openxmlformats.org/drawingml/2006/main" prst="rect">
             <a:avLst/>
@@ -13844,22 +13908,22 @@
       </p:sp>
       <p:sp>
         <p:nvSpPr>
-          <p:cNvPr id="19" name="">
-            <a:extLst xmlns:a="http://schemas.openxmlformats.org/drawingml/2006/main">
-              <a:ext uri="{FF2B5EF4-FFF2-40B4-BE49-F238E27FC236}">
-                <a16:creationId xmlns:a16="http://schemas.microsoft.com/office/drawing/2014/main" id="{86B2C458-7A8F-4691-9F4A-9F459FCEE9A3}"/>
-              </a:ext>
-            </a:extLst>
-          </p:cNvPr>
-          <p:cNvSpPr>
-            <a:spLocks xmlns:a="http://schemas.openxmlformats.org/drawingml/2006/main" noGrp="1"/>
-          </p:cNvSpPr>
-          <p:nvPr/>
-        </p:nvSpPr>
-        <p:spPr>
-          <a:xfrm xmlns:a="http://schemas.openxmlformats.org/drawingml/2006/main">
-            <a:off x="3038260" y="5096454"/>
-            <a:ext cx="1752600" cy="247650"/>
+          <p:cNvPr id="20" name="">
+            <a:extLst xmlns:a="http://schemas.openxmlformats.org/drawingml/2006/main">
+              <a:ext uri="{FF2B5EF4-FFF2-40B4-BE49-F238E27FC236}">
+                <a16:creationId xmlns:a16="http://schemas.microsoft.com/office/drawing/2014/main" id="{FEE6477E-283A-4283-8473-C6CF828666D4}"/>
+              </a:ext>
+            </a:extLst>
+          </p:cNvPr>
+          <p:cNvSpPr>
+            <a:spLocks xmlns:a="http://schemas.openxmlformats.org/drawingml/2006/main" noGrp="1"/>
+          </p:cNvSpPr>
+          <p:nvPr/>
+        </p:nvSpPr>
+        <p:spPr>
+          <a:xfrm xmlns:a="http://schemas.openxmlformats.org/drawingml/2006/main">
+            <a:off x="7372350" y="5353050"/>
+            <a:ext cx="1771650" cy="266700"/>
           </a:xfrm>
           <a:prstGeom xmlns:a="http://schemas.openxmlformats.org/drawingml/2006/main" prst="rect">
             <a:avLst/>
@@ -13908,22 +13972,22 @@
       </p:sp>
       <p:sp>
         <p:nvSpPr>
-          <p:cNvPr id="20" name="">
-            <a:extLst xmlns:a="http://schemas.openxmlformats.org/drawingml/2006/main">
-              <a:ext uri="{FF2B5EF4-FFF2-40B4-BE49-F238E27FC236}">
-                <a16:creationId xmlns:a16="http://schemas.microsoft.com/office/drawing/2014/main" id="{829A5A1F-1B84-49D5-8E92-E04DFE0251AF}"/>
-              </a:ext>
-            </a:extLst>
-          </p:cNvPr>
-          <p:cNvSpPr>
-            <a:spLocks xmlns:a="http://schemas.openxmlformats.org/drawingml/2006/main" noGrp="1"/>
-          </p:cNvSpPr>
-          <p:nvPr/>
-        </p:nvSpPr>
-        <p:spPr>
-          <a:xfrm xmlns:a="http://schemas.openxmlformats.org/drawingml/2006/main">
-            <a:off x="3914560" y="4000500"/>
-            <a:ext cx="1914740" cy="19050"/>
+          <p:cNvPr id="21" name="">
+            <a:extLst xmlns:a="http://schemas.openxmlformats.org/drawingml/2006/main">
+              <a:ext uri="{FF2B5EF4-FFF2-40B4-BE49-F238E27FC236}">
+                <a16:creationId xmlns:a16="http://schemas.microsoft.com/office/drawing/2014/main" id="{59B68694-C1F6-4A71-8BF9-51A009A58469}"/>
+              </a:ext>
+            </a:extLst>
+          </p:cNvPr>
+          <p:cNvSpPr>
+            <a:spLocks xmlns:a="http://schemas.openxmlformats.org/drawingml/2006/main" noGrp="1"/>
+          </p:cNvSpPr>
+          <p:nvPr/>
+        </p:nvSpPr>
+        <p:spPr>
+          <a:xfrm xmlns:a="http://schemas.openxmlformats.org/drawingml/2006/main">
+            <a:off x="8248650" y="4762500"/>
+            <a:ext cx="19050" cy="381000"/>
           </a:xfrm>
           <a:prstGeom xmlns:a="http://schemas.openxmlformats.org/drawingml/2006/main" prst="rect">
             <a:avLst/>
@@ -13941,22 +14005,22 @@
       </p:sp>
       <p:sp>
         <p:nvSpPr>
-          <p:cNvPr id="21" name="">
-            <a:extLst xmlns:a="http://schemas.openxmlformats.org/drawingml/2006/main">
-              <a:ext uri="{FF2B5EF4-FFF2-40B4-BE49-F238E27FC236}">
-                <a16:creationId xmlns:a16="http://schemas.microsoft.com/office/drawing/2014/main" id="{3BBCD4AA-90CB-49B2-948A-AE56DEF8939E}"/>
-              </a:ext>
-            </a:extLst>
-          </p:cNvPr>
-          <p:cNvSpPr>
-            <a:spLocks xmlns:a="http://schemas.openxmlformats.org/drawingml/2006/main" noGrp="1"/>
-          </p:cNvSpPr>
-          <p:nvPr/>
-        </p:nvSpPr>
-        <p:spPr>
-          <a:xfrm xmlns:a="http://schemas.openxmlformats.org/drawingml/2006/main">
-            <a:off x="1683436" y="3199821"/>
-            <a:ext cx="2095500" cy="647700"/>
+          <p:cNvPr id="22" name="">
+            <a:extLst xmlns:a="http://schemas.openxmlformats.org/drawingml/2006/main">
+              <a:ext uri="{FF2B5EF4-FFF2-40B4-BE49-F238E27FC236}">
+                <a16:creationId xmlns:a16="http://schemas.microsoft.com/office/drawing/2014/main" id="{A3E2BE0D-CF48-4D4E-B8E2-2255AC5759B1}"/>
+              </a:ext>
+            </a:extLst>
+          </p:cNvPr>
+          <p:cNvSpPr>
+            <a:spLocks xmlns:a="http://schemas.openxmlformats.org/drawingml/2006/main" noGrp="1"/>
+          </p:cNvSpPr>
+          <p:nvPr/>
+        </p:nvSpPr>
+        <p:spPr>
+          <a:xfrm xmlns:a="http://schemas.openxmlformats.org/drawingml/2006/main">
+            <a:off x="9410700" y="5143500"/>
+            <a:ext cx="2038350" cy="723900"/>
           </a:xfrm>
           <a:prstGeom xmlns:a="http://schemas.openxmlformats.org/drawingml/2006/main" prst="rect">
             <a:avLst/>
@@ -13976,22 +14040,22 @@
       </p:sp>
       <p:sp>
         <p:nvSpPr>
-          <p:cNvPr id="22" name="">
-            <a:extLst xmlns:a="http://schemas.openxmlformats.org/drawingml/2006/main">
-              <a:ext uri="{FF2B5EF4-FFF2-40B4-BE49-F238E27FC236}">
-                <a16:creationId xmlns:a16="http://schemas.microsoft.com/office/drawing/2014/main" id="{C6A17296-7F80-45FB-AEA9-813F3C54E955}"/>
-              </a:ext>
-            </a:extLst>
-          </p:cNvPr>
-          <p:cNvSpPr>
-            <a:spLocks xmlns:a="http://schemas.openxmlformats.org/drawingml/2006/main" noGrp="1"/>
-          </p:cNvSpPr>
-          <p:nvPr/>
-        </p:nvSpPr>
-        <p:spPr>
-          <a:xfrm xmlns:a="http://schemas.openxmlformats.org/drawingml/2006/main">
-            <a:off x="1854886" y="3371271"/>
-            <a:ext cx="1752600" cy="247650"/>
+          <p:cNvPr id="23" name="">
+            <a:extLst xmlns:a="http://schemas.openxmlformats.org/drawingml/2006/main">
+              <a:ext uri="{FF2B5EF4-FFF2-40B4-BE49-F238E27FC236}">
+                <a16:creationId xmlns:a16="http://schemas.microsoft.com/office/drawing/2014/main" id="{11CED9D2-CA2B-41D5-8E76-94FB78DF83B2}"/>
+              </a:ext>
+            </a:extLst>
+          </p:cNvPr>
+          <p:cNvSpPr>
+            <a:spLocks xmlns:a="http://schemas.openxmlformats.org/drawingml/2006/main" noGrp="1"/>
+          </p:cNvSpPr>
+          <p:nvPr/>
+        </p:nvSpPr>
+        <p:spPr>
+          <a:xfrm xmlns:a="http://schemas.openxmlformats.org/drawingml/2006/main">
+            <a:off x="9544050" y="5353050"/>
+            <a:ext cx="1771650" cy="266700"/>
           </a:xfrm>
           <a:prstGeom xmlns:a="http://schemas.openxmlformats.org/drawingml/2006/main" prst="rect">
             <a:avLst/>
@@ -14040,22 +14104,22 @@
       </p:sp>
       <p:sp>
         <p:nvSpPr>
-          <p:cNvPr id="23" name="">
-            <a:extLst xmlns:a="http://schemas.openxmlformats.org/drawingml/2006/main">
-              <a:ext uri="{FF2B5EF4-FFF2-40B4-BE49-F238E27FC236}">
-                <a16:creationId xmlns:a16="http://schemas.microsoft.com/office/drawing/2014/main" id="{8208A585-9346-4B06-AAB8-D323EE01835F}"/>
-              </a:ext>
-            </a:extLst>
-          </p:cNvPr>
-          <p:cNvSpPr>
-            <a:spLocks xmlns:a="http://schemas.openxmlformats.org/drawingml/2006/main" noGrp="1"/>
-          </p:cNvSpPr>
-          <p:nvPr/>
-        </p:nvSpPr>
-        <p:spPr>
-          <a:xfrm xmlns:a="http://schemas.openxmlformats.org/drawingml/2006/main">
-            <a:off x="2731186" y="3523671"/>
-            <a:ext cx="3098114" cy="19050"/>
+          <p:cNvPr id="24" name="">
+            <a:extLst xmlns:a="http://schemas.openxmlformats.org/drawingml/2006/main">
+              <a:ext uri="{FF2B5EF4-FFF2-40B4-BE49-F238E27FC236}">
+                <a16:creationId xmlns:a16="http://schemas.microsoft.com/office/drawing/2014/main" id="{038EA601-0A2E-4C5D-AF84-E3878843DD99}"/>
+              </a:ext>
+            </a:extLst>
+          </p:cNvPr>
+          <p:cNvSpPr>
+            <a:spLocks xmlns:a="http://schemas.openxmlformats.org/drawingml/2006/main" noGrp="1"/>
+          </p:cNvSpPr>
+          <p:nvPr/>
+        </p:nvSpPr>
+        <p:spPr>
+          <a:xfrm xmlns:a="http://schemas.openxmlformats.org/drawingml/2006/main">
+            <a:off x="10420350" y="4762500"/>
+            <a:ext cx="19050" cy="381000"/>
           </a:xfrm>
           <a:prstGeom xmlns:a="http://schemas.openxmlformats.org/drawingml/2006/main" prst="rect">
             <a:avLst/>
@@ -14073,10 +14137,43 @@
       </p:sp>
       <p:sp>
         <p:nvSpPr>
-          <p:cNvPr id="24" name="">
-            <a:extLst xmlns:a="http://schemas.openxmlformats.org/drawingml/2006/main">
-              <a:ext uri="{FF2B5EF4-FFF2-40B4-BE49-F238E27FC236}">
-                <a16:creationId xmlns:a16="http://schemas.microsoft.com/office/drawing/2014/main" id="{8FE4E621-EF4F-4B2C-94F5-428BFCE8D7DC}"/>
+          <p:cNvPr id="25" name="">
+            <a:extLst xmlns:a="http://schemas.openxmlformats.org/drawingml/2006/main">
+              <a:ext uri="{FF2B5EF4-FFF2-40B4-BE49-F238E27FC236}">
+                <a16:creationId xmlns:a16="http://schemas.microsoft.com/office/drawing/2014/main" id="{E658F397-22DD-4F2D-B5E4-1A721BB254D2}"/>
+              </a:ext>
+            </a:extLst>
+          </p:cNvPr>
+          <p:cNvSpPr>
+            <a:spLocks xmlns:a="http://schemas.openxmlformats.org/drawingml/2006/main" noGrp="1"/>
+          </p:cNvSpPr>
+          <p:nvPr/>
+        </p:nvSpPr>
+        <p:spPr>
+          <a:xfrm xmlns:a="http://schemas.openxmlformats.org/drawingml/2006/main">
+            <a:off x="1743075" y="4762500"/>
+            <a:ext cx="8686800" cy="19050"/>
+          </a:xfrm>
+          <a:prstGeom xmlns:a="http://schemas.openxmlformats.org/drawingml/2006/main" prst="rect">
+            <a:avLst/>
+          </a:prstGeom>
+          <a:solidFill xmlns:a="http://schemas.openxmlformats.org/drawingml/2006/main">
+            <a:srgbClr val="285563"/>
+          </a:solidFill>
+          <a:ln xmlns:a="http://schemas.openxmlformats.org/drawingml/2006/main" w="0">
+            <a:solidFill>
+              <a:srgbClr val="285563"/>
+            </a:solidFill>
+            <a:prstDash val="solid"/>
+          </a:ln>
+        </p:spPr>
+      </p:sp>
+      <p:sp>
+        <p:nvSpPr>
+          <p:cNvPr id="26" name="">
+            <a:extLst xmlns:a="http://schemas.openxmlformats.org/drawingml/2006/main">
+              <a:ext uri="{FF2B5EF4-FFF2-40B4-BE49-F238E27FC236}">
+                <a16:creationId xmlns:a16="http://schemas.microsoft.com/office/drawing/2014/main" id="{60D68458-5681-4F37-A7AF-3BE3338262E1}"/>
               </a:ext>
             </a:extLst>
           </p:cNvPr>
@@ -14137,10 +14234,10 @@
       </p:sp>
       <p:sp>
         <p:nvSpPr>
-          <p:cNvPr id="25" name="">
-            <a:extLst xmlns:a="http://schemas.openxmlformats.org/drawingml/2006/main">
-              <a:ext uri="{FF2B5EF4-FFF2-40B4-BE49-F238E27FC236}">
-                <a16:creationId xmlns:a16="http://schemas.microsoft.com/office/drawing/2014/main" id="{6B814175-3765-4A8A-A80A-3F9A5A32DD7E}"/>
+          <p:cNvPr id="27" name="">
+            <a:extLst xmlns:a="http://schemas.openxmlformats.org/drawingml/2006/main">
+              <a:ext uri="{FF2B5EF4-FFF2-40B4-BE49-F238E27FC236}">
+                <a16:creationId xmlns:a16="http://schemas.microsoft.com/office/drawing/2014/main" id="{6F571C89-EB45-4416-8502-5EC3768022EA}"/>
               </a:ext>
             </a:extLst>
           </p:cNvPr>
@@ -14170,10 +14267,10 @@
       </p:sp>
       <p:sp>
         <p:nvSpPr>
-          <p:cNvPr id="26" name="">
-            <a:extLst xmlns:a="http://schemas.openxmlformats.org/drawingml/2006/main">
-              <a:ext uri="{FF2B5EF4-FFF2-40B4-BE49-F238E27FC236}">
-                <a16:creationId xmlns:a16="http://schemas.microsoft.com/office/drawing/2014/main" id="{DFBCE43D-72BE-4E7E-B757-50180672CD7A}"/>
+          <p:cNvPr id="28" name="">
+            <a:extLst xmlns:a="http://schemas.openxmlformats.org/drawingml/2006/main">
+              <a:ext uri="{FF2B5EF4-FFF2-40B4-BE49-F238E27FC236}">
+                <a16:creationId xmlns:a16="http://schemas.microsoft.com/office/drawing/2014/main" id="{716DFF6B-9AC3-4ED5-8DC4-6A86166D31F4}"/>
               </a:ext>
             </a:extLst>
           </p:cNvPr>
@@ -14234,10 +14331,10 @@
       </p:sp>
       <p:sp>
         <p:nvSpPr>
-          <p:cNvPr id="27" name="">
-            <a:extLst xmlns:a="http://schemas.openxmlformats.org/drawingml/2006/main">
-              <a:ext uri="{FF2B5EF4-FFF2-40B4-BE49-F238E27FC236}">
-                <a16:creationId xmlns:a16="http://schemas.microsoft.com/office/drawing/2014/main" id="{839C1E00-BC47-4B24-979D-E120AE88F365}"/>
+          <p:cNvPr id="29" name="">
+            <a:extLst xmlns:a="http://schemas.openxmlformats.org/drawingml/2006/main">
+              <a:ext uri="{FF2B5EF4-FFF2-40B4-BE49-F238E27FC236}">
+                <a16:creationId xmlns:a16="http://schemas.microsoft.com/office/drawing/2014/main" id="{08A63711-ED23-4178-A14C-E7CE1BB86778}"/>
               </a:ext>
             </a:extLst>
           </p:cNvPr>
@@ -14299,7 +14396,7 @@
     </p:spTree>
     <p:extLst>
       <p:ext uri="{BB962C8B-B14F-4D97-AF65-F5344CB8AC3E}">
-        <p14:creationId xmlns:p14="http://schemas.microsoft.com/office/powerpoint/2010/main" val="908168039"/>
+        <p14:creationId xmlns:p14="http://schemas.microsoft.com/office/powerpoint/2010/main" val="1081538512"/>
       </p:ext>
     </p:extLst>
   </p:cSld>
@@ -14327,7 +14424,7 @@
           <p:nvPr/>
         </p:nvPicPr>
         <p:blipFill>
-          <a:blip xmlns:r="http://schemas.openxmlformats.org/officeDocument/2006/relationships" xmlns:a="http://schemas.openxmlformats.org/drawingml/2006/main" r:embed="R475533e31b1247b6"/>
+          <a:blip xmlns:r="http://schemas.openxmlformats.org/officeDocument/2006/relationships" xmlns:a="http://schemas.openxmlformats.org/drawingml/2006/main" r:embed="Rc80014b47d6947aa"/>
           <a:srcRect xmlns:a="http://schemas.openxmlformats.org/drawingml/2006/main" l="0" t="27" r="0" b="27"/>
           <a:stretch xmlns:a="http://schemas.openxmlformats.org/drawingml/2006/main">
             <a:fillRect l="0" t="0" r="0" b="0"/>
@@ -14348,7 +14445,7 @@
           <p:cNvPr id="2" name="">
             <a:extLst xmlns:a="http://schemas.openxmlformats.org/drawingml/2006/main">
               <a:ext uri="{FF2B5EF4-FFF2-40B4-BE49-F238E27FC236}">
-                <a16:creationId xmlns:a16="http://schemas.microsoft.com/office/drawing/2014/main" id="{DFB92E48-5217-48D2-8F56-BD3AE7DD1068}"/>
+                <a16:creationId xmlns:a16="http://schemas.microsoft.com/office/drawing/2014/main" id="{F670DF6C-DD2D-4F8D-92CA-F54EC605AA75}"/>
               </a:ext>
             </a:extLst>
           </p:cNvPr>
@@ -14385,7 +14482,7 @@
           <p:cNvPr id="3" name="">
             <a:extLst xmlns:a="http://schemas.openxmlformats.org/drawingml/2006/main">
               <a:ext uri="{FF2B5EF4-FFF2-40B4-BE49-F238E27FC236}">
-                <a16:creationId xmlns:a16="http://schemas.microsoft.com/office/drawing/2014/main" id="{4A1FF4BF-9ED4-4AB5-A80D-A55E2489326B}"/>
+                <a16:creationId xmlns:a16="http://schemas.microsoft.com/office/drawing/2014/main" id="{BC931BA2-4131-4B71-9F48-75F5AA45BA79}"/>
               </a:ext>
             </a:extLst>
           </p:cNvPr>
@@ -14422,7 +14519,7 @@
           <p:cNvPr id="4" name="">
             <a:extLst xmlns:a="http://schemas.openxmlformats.org/drawingml/2006/main">
               <a:ext uri="{FF2B5EF4-FFF2-40B4-BE49-F238E27FC236}">
-                <a16:creationId xmlns:a16="http://schemas.microsoft.com/office/drawing/2014/main" id="{43925172-AD10-449F-A0D1-D19DDFEB204D}"/>
+                <a16:creationId xmlns:a16="http://schemas.microsoft.com/office/drawing/2014/main" id="{C1F206CD-F5C2-47ED-9AB9-6BCD1B94A072}"/>
               </a:ext>
             </a:extLst>
           </p:cNvPr>
@@ -14486,7 +14583,7 @@
           <p:cNvPr id="5" name="">
             <a:extLst xmlns:a="http://schemas.openxmlformats.org/drawingml/2006/main">
               <a:ext uri="{FF2B5EF4-FFF2-40B4-BE49-F238E27FC236}">
-                <a16:creationId xmlns:a16="http://schemas.microsoft.com/office/drawing/2014/main" id="{13D610BD-4CC8-47AD-9B6B-A3937A3518B1}"/>
+                <a16:creationId xmlns:a16="http://schemas.microsoft.com/office/drawing/2014/main" id="{73737014-86F7-4FB2-907F-DE2556A7A2DB}"/>
               </a:ext>
             </a:extLst>
           </p:cNvPr>
@@ -14550,7 +14647,7 @@
           <p:cNvPr id="6" name="">
             <a:extLst xmlns:a="http://schemas.openxmlformats.org/drawingml/2006/main">
               <a:ext uri="{FF2B5EF4-FFF2-40B4-BE49-F238E27FC236}">
-                <a16:creationId xmlns:a16="http://schemas.microsoft.com/office/drawing/2014/main" id="{9BF541EC-055C-4C74-8562-0D292A8B1472}"/>
+                <a16:creationId xmlns:a16="http://schemas.microsoft.com/office/drawing/2014/main" id="{AE4EFBDB-F930-47F0-954B-7D9BD8218024}"/>
               </a:ext>
             </a:extLst>
           </p:cNvPr>
@@ -14614,7 +14711,7 @@
           <p:cNvPr id="7" name="">
             <a:extLst xmlns:a="http://schemas.openxmlformats.org/drawingml/2006/main">
               <a:ext uri="{FF2B5EF4-FFF2-40B4-BE49-F238E27FC236}">
-                <a16:creationId xmlns:a16="http://schemas.microsoft.com/office/drawing/2014/main" id="{A5784308-CEB4-4F98-BE65-90809AD03077}"/>
+                <a16:creationId xmlns:a16="http://schemas.microsoft.com/office/drawing/2014/main" id="{381E9CF2-86FD-4EA9-9555-1870D5A70E75}"/>
               </a:ext>
             </a:extLst>
           </p:cNvPr>
@@ -14649,7 +14746,7 @@
           <p:cNvPr id="8" name="">
             <a:extLst xmlns:a="http://schemas.openxmlformats.org/drawingml/2006/main">
               <a:ext uri="{FF2B5EF4-FFF2-40B4-BE49-F238E27FC236}">
-                <a16:creationId xmlns:a16="http://schemas.microsoft.com/office/drawing/2014/main" id="{3E02AA0E-A96B-4271-AFA9-FBDBF1FF858E}"/>
+                <a16:creationId xmlns:a16="http://schemas.microsoft.com/office/drawing/2014/main" id="{A8674C65-C6EC-418F-998E-9C9899AC61D7}"/>
               </a:ext>
             </a:extLst>
           </p:cNvPr>
@@ -14713,7 +14810,7 @@
           <p:cNvPr id="9" name="">
             <a:extLst xmlns:a="http://schemas.openxmlformats.org/drawingml/2006/main">
               <a:ext uri="{FF2B5EF4-FFF2-40B4-BE49-F238E27FC236}">
-                <a16:creationId xmlns:a16="http://schemas.microsoft.com/office/drawing/2014/main" id="{C892300E-34D5-4222-B4E6-9AEA36663D01}"/>
+                <a16:creationId xmlns:a16="http://schemas.microsoft.com/office/drawing/2014/main" id="{40208CFF-7CEA-400B-B45B-CA024C536448}"/>
               </a:ext>
             </a:extLst>
           </p:cNvPr>
@@ -14777,7 +14874,7 @@
           <p:cNvPr id="10" name="">
             <a:extLst xmlns:a="http://schemas.openxmlformats.org/drawingml/2006/main">
               <a:ext uri="{FF2B5EF4-FFF2-40B4-BE49-F238E27FC236}">
-                <a16:creationId xmlns:a16="http://schemas.microsoft.com/office/drawing/2014/main" id="{ECCC6396-A28B-4036-B175-0BE7044EB4CE}"/>
+                <a16:creationId xmlns:a16="http://schemas.microsoft.com/office/drawing/2014/main" id="{2A1D3CEB-A013-4D17-B315-868BD570CE62}"/>
               </a:ext>
             </a:extLst>
           </p:cNvPr>
@@ -14810,7 +14907,7 @@
           <p:cNvPr id="11" name="">
             <a:extLst xmlns:a="http://schemas.openxmlformats.org/drawingml/2006/main">
               <a:ext uri="{FF2B5EF4-FFF2-40B4-BE49-F238E27FC236}">
-                <a16:creationId xmlns:a16="http://schemas.microsoft.com/office/drawing/2014/main" id="{5379ACC2-0590-44B1-8E28-24F1AF43E118}"/>
+                <a16:creationId xmlns:a16="http://schemas.microsoft.com/office/drawing/2014/main" id="{6285327F-83AD-4705-B88C-186FB5661373}"/>
               </a:ext>
             </a:extLst>
           </p:cNvPr>
@@ -14845,7 +14942,7 @@
           <p:cNvPr id="12" name="">
             <a:extLst xmlns:a="http://schemas.openxmlformats.org/drawingml/2006/main">
               <a:ext uri="{FF2B5EF4-FFF2-40B4-BE49-F238E27FC236}">
-                <a16:creationId xmlns:a16="http://schemas.microsoft.com/office/drawing/2014/main" id="{460AE5F1-109D-4450-8A37-7D89B826AA32}"/>
+                <a16:creationId xmlns:a16="http://schemas.microsoft.com/office/drawing/2014/main" id="{CBE31391-B28E-479C-96AE-1DAF63C6E5A2}"/>
               </a:ext>
             </a:extLst>
           </p:cNvPr>
@@ -14909,7 +15006,7 @@
           <p:cNvPr id="13" name="">
             <a:extLst xmlns:a="http://schemas.openxmlformats.org/drawingml/2006/main">
               <a:ext uri="{FF2B5EF4-FFF2-40B4-BE49-F238E27FC236}">
-                <a16:creationId xmlns:a16="http://schemas.microsoft.com/office/drawing/2014/main" id="{C82A722B-CBE3-4C07-A630-49F88F0522C5}"/>
+                <a16:creationId xmlns:a16="http://schemas.microsoft.com/office/drawing/2014/main" id="{41171E62-CD1F-441F-BB04-F0EF5707023A}"/>
               </a:ext>
             </a:extLst>
           </p:cNvPr>
@@ -14973,7 +15070,7 @@
           <p:cNvPr id="14" name="">
             <a:extLst xmlns:a="http://schemas.openxmlformats.org/drawingml/2006/main">
               <a:ext uri="{FF2B5EF4-FFF2-40B4-BE49-F238E27FC236}">
-                <a16:creationId xmlns:a16="http://schemas.microsoft.com/office/drawing/2014/main" id="{77E776FB-C5C9-462A-A40C-EE0C1FD1D925}"/>
+                <a16:creationId xmlns:a16="http://schemas.microsoft.com/office/drawing/2014/main" id="{A9F0BC1B-F361-413C-992B-EE12D7052596}"/>
               </a:ext>
             </a:extLst>
           </p:cNvPr>
@@ -15006,7 +15103,7 @@
           <p:cNvPr id="15" name="">
             <a:extLst xmlns:a="http://schemas.openxmlformats.org/drawingml/2006/main">
               <a:ext uri="{FF2B5EF4-FFF2-40B4-BE49-F238E27FC236}">
-                <a16:creationId xmlns:a16="http://schemas.microsoft.com/office/drawing/2014/main" id="{CBBE0F90-558E-4D5D-A81F-3E14FC0D3840}"/>
+                <a16:creationId xmlns:a16="http://schemas.microsoft.com/office/drawing/2014/main" id="{1DADC01B-66ED-41A6-AA77-CA83F0CF1BA5}"/>
               </a:ext>
             </a:extLst>
           </p:cNvPr>
@@ -15041,7 +15138,7 @@
           <p:cNvPr id="16" name="">
             <a:extLst xmlns:a="http://schemas.openxmlformats.org/drawingml/2006/main">
               <a:ext uri="{FF2B5EF4-FFF2-40B4-BE49-F238E27FC236}">
-                <a16:creationId xmlns:a16="http://schemas.microsoft.com/office/drawing/2014/main" id="{B2C417EB-DF13-4BC4-B709-E153333838E1}"/>
+                <a16:creationId xmlns:a16="http://schemas.microsoft.com/office/drawing/2014/main" id="{C22550F1-138F-46B0-82A7-6193E8960BBA}"/>
               </a:ext>
             </a:extLst>
           </p:cNvPr>
@@ -15105,7 +15202,7 @@
           <p:cNvPr id="17" name="">
             <a:extLst xmlns:a="http://schemas.openxmlformats.org/drawingml/2006/main">
               <a:ext uri="{FF2B5EF4-FFF2-40B4-BE49-F238E27FC236}">
-                <a16:creationId xmlns:a16="http://schemas.microsoft.com/office/drawing/2014/main" id="{73C94B15-3F0D-4F48-A75C-C3C9DD61DC2A}"/>
+                <a16:creationId xmlns:a16="http://schemas.microsoft.com/office/drawing/2014/main" id="{648AF937-C5AE-44BD-9A43-6AE44D49DA32}"/>
               </a:ext>
             </a:extLst>
           </p:cNvPr>
@@ -15169,7 +15266,7 @@
           <p:cNvPr id="18" name="">
             <a:extLst xmlns:a="http://schemas.openxmlformats.org/drawingml/2006/main">
               <a:ext uri="{FF2B5EF4-FFF2-40B4-BE49-F238E27FC236}">
-                <a16:creationId xmlns:a16="http://schemas.microsoft.com/office/drawing/2014/main" id="{3BEAA112-3BB6-4802-A4A9-B4AE394C62E4}"/>
+                <a16:creationId xmlns:a16="http://schemas.microsoft.com/office/drawing/2014/main" id="{CBC28CA9-4078-43F4-9826-929C195A8D0B}"/>
               </a:ext>
             </a:extLst>
           </p:cNvPr>
@@ -15202,7 +15299,7 @@
           <p:cNvPr id="19" name="">
             <a:extLst xmlns:a="http://schemas.openxmlformats.org/drawingml/2006/main">
               <a:ext uri="{FF2B5EF4-FFF2-40B4-BE49-F238E27FC236}">
-                <a16:creationId xmlns:a16="http://schemas.microsoft.com/office/drawing/2014/main" id="{BA3DCAF2-EDB6-4CDF-8495-6747BD8252F6}"/>
+                <a16:creationId xmlns:a16="http://schemas.microsoft.com/office/drawing/2014/main" id="{AD96DCEE-B438-4001-8E98-ED1A4A2E70AA}"/>
               </a:ext>
             </a:extLst>
           </p:cNvPr>
@@ -15237,7 +15334,7 @@
           <p:cNvPr id="20" name="">
             <a:extLst xmlns:a="http://schemas.openxmlformats.org/drawingml/2006/main">
               <a:ext uri="{FF2B5EF4-FFF2-40B4-BE49-F238E27FC236}">
-                <a16:creationId xmlns:a16="http://schemas.microsoft.com/office/drawing/2014/main" id="{0ED7B47C-3F80-4F43-B1B5-6CAC18572716}"/>
+                <a16:creationId xmlns:a16="http://schemas.microsoft.com/office/drawing/2014/main" id="{6F5D7080-548E-46C9-8CDC-B2975EE9E6B2}"/>
               </a:ext>
             </a:extLst>
           </p:cNvPr>
@@ -15301,7 +15398,7 @@
           <p:cNvPr id="21" name="">
             <a:extLst xmlns:a="http://schemas.openxmlformats.org/drawingml/2006/main">
               <a:ext uri="{FF2B5EF4-FFF2-40B4-BE49-F238E27FC236}">
-                <a16:creationId xmlns:a16="http://schemas.microsoft.com/office/drawing/2014/main" id="{8264F577-721D-46C8-8718-A94AAFF4393D}"/>
+                <a16:creationId xmlns:a16="http://schemas.microsoft.com/office/drawing/2014/main" id="{DA374386-24B0-480E-A9E5-12DFBD8E027B}"/>
               </a:ext>
             </a:extLst>
           </p:cNvPr>
@@ -15365,7 +15462,7 @@
           <p:cNvPr id="22" name="">
             <a:extLst xmlns:a="http://schemas.openxmlformats.org/drawingml/2006/main">
               <a:ext uri="{FF2B5EF4-FFF2-40B4-BE49-F238E27FC236}">
-                <a16:creationId xmlns:a16="http://schemas.microsoft.com/office/drawing/2014/main" id="{B20DE36F-3F48-4C54-98A7-313D0D982A5C}"/>
+                <a16:creationId xmlns:a16="http://schemas.microsoft.com/office/drawing/2014/main" id="{9AF20CFA-1B0E-4BE8-9513-E22709B52837}"/>
               </a:ext>
             </a:extLst>
           </p:cNvPr>
@@ -15429,7 +15526,7 @@
           <p:cNvPr id="23" name="">
             <a:extLst xmlns:a="http://schemas.openxmlformats.org/drawingml/2006/main">
               <a:ext uri="{FF2B5EF4-FFF2-40B4-BE49-F238E27FC236}">
-                <a16:creationId xmlns:a16="http://schemas.microsoft.com/office/drawing/2014/main" id="{89856957-EC8C-464B-95F6-B68C12311602}"/>
+                <a16:creationId xmlns:a16="http://schemas.microsoft.com/office/drawing/2014/main" id="{59B620F1-2952-4AF9-873C-C9C8461E8AD9}"/>
               </a:ext>
             </a:extLst>
           </p:cNvPr>
@@ -15493,7 +15590,7 @@
           <p:cNvPr id="24" name="">
             <a:extLst xmlns:a="http://schemas.openxmlformats.org/drawingml/2006/main">
               <a:ext uri="{FF2B5EF4-FFF2-40B4-BE49-F238E27FC236}">
-                <a16:creationId xmlns:a16="http://schemas.microsoft.com/office/drawing/2014/main" id="{AF217576-5B18-4581-BC05-47634290EF8C}"/>
+                <a16:creationId xmlns:a16="http://schemas.microsoft.com/office/drawing/2014/main" id="{D4BC3ADC-EC2C-471F-96D3-A88C509B3D98}"/>
               </a:ext>
             </a:extLst>
           </p:cNvPr>
@@ -15526,7 +15623,7 @@
           <p:cNvPr id="25" name="">
             <a:extLst xmlns:a="http://schemas.openxmlformats.org/drawingml/2006/main">
               <a:ext uri="{FF2B5EF4-FFF2-40B4-BE49-F238E27FC236}">
-                <a16:creationId xmlns:a16="http://schemas.microsoft.com/office/drawing/2014/main" id="{B732F317-F76B-4E9B-8B36-F08E5FA03F45}"/>
+                <a16:creationId xmlns:a16="http://schemas.microsoft.com/office/drawing/2014/main" id="{ACFA7818-78A6-409D-A60D-07C5989F244E}"/>
               </a:ext>
             </a:extLst>
           </p:cNvPr>
@@ -15590,7 +15687,7 @@
           <p:cNvPr id="26" name="">
             <a:extLst xmlns:a="http://schemas.openxmlformats.org/drawingml/2006/main">
               <a:ext uri="{FF2B5EF4-FFF2-40B4-BE49-F238E27FC236}">
-                <a16:creationId xmlns:a16="http://schemas.microsoft.com/office/drawing/2014/main" id="{B2EEAC0E-6E56-4550-8068-D11A3DD3B29E}"/>
+                <a16:creationId xmlns:a16="http://schemas.microsoft.com/office/drawing/2014/main" id="{A16BBDDF-3DB4-4966-AA1E-84F73C421A53}"/>
               </a:ext>
             </a:extLst>
           </p:cNvPr>
@@ -15652,7 +15749,7 @@
     </p:spTree>
     <p:extLst>
       <p:ext uri="{BB962C8B-B14F-4D97-AF65-F5344CB8AC3E}">
-        <p14:creationId xmlns:p14="http://schemas.microsoft.com/office/powerpoint/2010/main" val="557341211"/>
+        <p14:creationId xmlns:p14="http://schemas.microsoft.com/office/powerpoint/2010/main" val="209083579"/>
       </p:ext>
     </p:extLst>
   </p:cSld>
@@ -15680,7 +15777,7 @@
           <p:nvPr/>
         </p:nvPicPr>
         <p:blipFill>
-          <a:blip xmlns:r="http://schemas.openxmlformats.org/officeDocument/2006/relationships" xmlns:a="http://schemas.openxmlformats.org/drawingml/2006/main" r:embed="R6bd8aaefe4fc41ec"/>
+          <a:blip xmlns:r="http://schemas.openxmlformats.org/officeDocument/2006/relationships" xmlns:a="http://schemas.openxmlformats.org/drawingml/2006/main" r:embed="Ra1f4be029d034555"/>
           <a:srcRect xmlns:a="http://schemas.openxmlformats.org/drawingml/2006/main" l="0" t="7813" r="0" b="7813"/>
           <a:stretch xmlns:a="http://schemas.openxmlformats.org/drawingml/2006/main">
             <a:fillRect l="0" t="0" r="0" b="0"/>
@@ -15701,7 +15798,7 @@
           <p:cNvPr id="2" name="">
             <a:extLst xmlns:a="http://schemas.openxmlformats.org/drawingml/2006/main">
               <a:ext uri="{FF2B5EF4-FFF2-40B4-BE49-F238E27FC236}">
-                <a16:creationId xmlns:a16="http://schemas.microsoft.com/office/drawing/2014/main" id="{25B308B4-DF2F-4DFE-87AE-5DE3FD3CFD93}"/>
+                <a16:creationId xmlns:a16="http://schemas.microsoft.com/office/drawing/2014/main" id="{C9BC407E-F5D9-4214-8B35-00FADDA6FA63}"/>
               </a:ext>
             </a:extLst>
           </p:cNvPr>
@@ -15738,7 +15835,7 @@
           <p:cNvPr id="3" name="">
             <a:extLst xmlns:a="http://schemas.openxmlformats.org/drawingml/2006/main">
               <a:ext uri="{FF2B5EF4-FFF2-40B4-BE49-F238E27FC236}">
-                <a16:creationId xmlns:a16="http://schemas.microsoft.com/office/drawing/2014/main" id="{06E7804C-E707-4F17-8ECC-94290AC55424}"/>
+                <a16:creationId xmlns:a16="http://schemas.microsoft.com/office/drawing/2014/main" id="{7EE530CF-F426-493E-849A-F206FEE021B9}"/>
               </a:ext>
             </a:extLst>
           </p:cNvPr>
@@ -15775,7 +15872,7 @@
           <p:cNvPr id="4" name="">
             <a:extLst xmlns:a="http://schemas.openxmlformats.org/drawingml/2006/main">
               <a:ext uri="{FF2B5EF4-FFF2-40B4-BE49-F238E27FC236}">
-                <a16:creationId xmlns:a16="http://schemas.microsoft.com/office/drawing/2014/main" id="{2834B8AB-6241-4657-9FCE-B348DD75C5BD}"/>
+                <a16:creationId xmlns:a16="http://schemas.microsoft.com/office/drawing/2014/main" id="{391F375E-7BD3-470A-932F-77E7FDB503B9}"/>
               </a:ext>
             </a:extLst>
           </p:cNvPr>
@@ -15839,7 +15936,7 @@
           <p:cNvPr id="5" name="">
             <a:extLst xmlns:a="http://schemas.openxmlformats.org/drawingml/2006/main">
               <a:ext uri="{FF2B5EF4-FFF2-40B4-BE49-F238E27FC236}">
-                <a16:creationId xmlns:a16="http://schemas.microsoft.com/office/drawing/2014/main" id="{D0801913-7680-4ACB-84B8-E10FC1FC138B}"/>
+                <a16:creationId xmlns:a16="http://schemas.microsoft.com/office/drawing/2014/main" id="{E8034C3C-41A3-4EEB-A343-564B72A4A9F1}"/>
               </a:ext>
             </a:extLst>
           </p:cNvPr>
@@ -15903,7 +16000,7 @@
           <p:cNvPr id="6" name="">
             <a:extLst xmlns:a="http://schemas.openxmlformats.org/drawingml/2006/main">
               <a:ext uri="{FF2B5EF4-FFF2-40B4-BE49-F238E27FC236}">
-                <a16:creationId xmlns:a16="http://schemas.microsoft.com/office/drawing/2014/main" id="{BF1416E5-BDA0-4240-92F6-80964B6E602E}"/>
+                <a16:creationId xmlns:a16="http://schemas.microsoft.com/office/drawing/2014/main" id="{04294DC5-4A9A-4E61-9887-F8C0939734EE}"/>
               </a:ext>
             </a:extLst>
           </p:cNvPr>
@@ -15967,7 +16064,7 @@
           <p:cNvPr id="7" name="">
             <a:extLst xmlns:a="http://schemas.openxmlformats.org/drawingml/2006/main">
               <a:ext uri="{FF2B5EF4-FFF2-40B4-BE49-F238E27FC236}">
-                <a16:creationId xmlns:a16="http://schemas.microsoft.com/office/drawing/2014/main" id="{48C2C84B-3DAC-42D7-8225-F67403F9A23A}"/>
+                <a16:creationId xmlns:a16="http://schemas.microsoft.com/office/drawing/2014/main" id="{3626670E-6D80-44D0-9135-35577DCEB98C}"/>
               </a:ext>
             </a:extLst>
           </p:cNvPr>
@@ -16002,7 +16099,7 @@
           <p:cNvPr id="8" name="">
             <a:extLst xmlns:a="http://schemas.openxmlformats.org/drawingml/2006/main">
               <a:ext uri="{FF2B5EF4-FFF2-40B4-BE49-F238E27FC236}">
-                <a16:creationId xmlns:a16="http://schemas.microsoft.com/office/drawing/2014/main" id="{ABAAEBF9-F335-44D8-8F70-599D9C1600B5}"/>
+                <a16:creationId xmlns:a16="http://schemas.microsoft.com/office/drawing/2014/main" id="{0B9D3CA8-3B4D-4905-A855-0BAE6E3938C1}"/>
               </a:ext>
             </a:extLst>
           </p:cNvPr>
@@ -16066,7 +16163,7 @@
           <p:cNvPr id="9" name="">
             <a:extLst xmlns:a="http://schemas.openxmlformats.org/drawingml/2006/main">
               <a:ext uri="{FF2B5EF4-FFF2-40B4-BE49-F238E27FC236}">
-                <a16:creationId xmlns:a16="http://schemas.microsoft.com/office/drawing/2014/main" id="{C9174D1F-FFD5-49DB-A48B-C2193EE4BA2C}"/>
+                <a16:creationId xmlns:a16="http://schemas.microsoft.com/office/drawing/2014/main" id="{590645C9-26E3-400E-9A90-44C3B51CEBCA}"/>
               </a:ext>
             </a:extLst>
           </p:cNvPr>
@@ -16130,7 +16227,7 @@
           <p:cNvPr id="10" name="">
             <a:extLst xmlns:a="http://schemas.openxmlformats.org/drawingml/2006/main">
               <a:ext uri="{FF2B5EF4-FFF2-40B4-BE49-F238E27FC236}">
-                <a16:creationId xmlns:a16="http://schemas.microsoft.com/office/drawing/2014/main" id="{778F6E75-B872-4B83-B8E8-ED847834BBA2}"/>
+                <a16:creationId xmlns:a16="http://schemas.microsoft.com/office/drawing/2014/main" id="{00A78F2A-BF25-4453-B215-51966C0B004A}"/>
               </a:ext>
             </a:extLst>
           </p:cNvPr>
@@ -16165,7 +16262,7 @@
           <p:cNvPr id="11" name="">
             <a:extLst xmlns:a="http://schemas.openxmlformats.org/drawingml/2006/main">
               <a:ext uri="{FF2B5EF4-FFF2-40B4-BE49-F238E27FC236}">
-                <a16:creationId xmlns:a16="http://schemas.microsoft.com/office/drawing/2014/main" id="{8C05149C-B7D8-41D8-9EC8-30CB4AA0F955}"/>
+                <a16:creationId xmlns:a16="http://schemas.microsoft.com/office/drawing/2014/main" id="{ABEFBB5B-9B7D-45BB-8D4B-DCB1E94CA1D7}"/>
               </a:ext>
             </a:extLst>
           </p:cNvPr>
@@ -16229,7 +16326,7 @@
           <p:cNvPr id="12" name="">
             <a:extLst xmlns:a="http://schemas.openxmlformats.org/drawingml/2006/main">
               <a:ext uri="{FF2B5EF4-FFF2-40B4-BE49-F238E27FC236}">
-                <a16:creationId xmlns:a16="http://schemas.microsoft.com/office/drawing/2014/main" id="{411880DC-6017-4449-AF44-E0DEECBF806C}"/>
+                <a16:creationId xmlns:a16="http://schemas.microsoft.com/office/drawing/2014/main" id="{566080D3-D2B2-4275-BFC5-45233C3A8F2C}"/>
               </a:ext>
             </a:extLst>
           </p:cNvPr>
@@ -16293,7 +16390,7 @@
           <p:cNvPr id="13" name="">
             <a:extLst xmlns:a="http://schemas.openxmlformats.org/drawingml/2006/main">
               <a:ext uri="{FF2B5EF4-FFF2-40B4-BE49-F238E27FC236}">
-                <a16:creationId xmlns:a16="http://schemas.microsoft.com/office/drawing/2014/main" id="{0FF24CF7-F0B5-4F4E-BBAC-3277E1D29FBB}"/>
+                <a16:creationId xmlns:a16="http://schemas.microsoft.com/office/drawing/2014/main" id="{363013BA-26DC-48C8-B6CA-932700566CA1}"/>
               </a:ext>
             </a:extLst>
           </p:cNvPr>
@@ -16328,7 +16425,7 @@
           <p:cNvPr id="14" name="">
             <a:extLst xmlns:a="http://schemas.openxmlformats.org/drawingml/2006/main">
               <a:ext uri="{FF2B5EF4-FFF2-40B4-BE49-F238E27FC236}">
-                <a16:creationId xmlns:a16="http://schemas.microsoft.com/office/drawing/2014/main" id="{744CDD10-3907-4319-A9B8-2A317A6E28F3}"/>
+                <a16:creationId xmlns:a16="http://schemas.microsoft.com/office/drawing/2014/main" id="{BAF862BF-3092-4A5E-B649-752929F75A33}"/>
               </a:ext>
             </a:extLst>
           </p:cNvPr>
@@ -16392,7 +16489,7 @@
           <p:cNvPr id="15" name="">
             <a:extLst xmlns:a="http://schemas.openxmlformats.org/drawingml/2006/main">
               <a:ext uri="{FF2B5EF4-FFF2-40B4-BE49-F238E27FC236}">
-                <a16:creationId xmlns:a16="http://schemas.microsoft.com/office/drawing/2014/main" id="{57AF794D-96B9-4930-BDEF-A708C1D716D8}"/>
+                <a16:creationId xmlns:a16="http://schemas.microsoft.com/office/drawing/2014/main" id="{6E73C1C5-CF9B-4DB4-A8E7-D2169B6FC360}"/>
               </a:ext>
             </a:extLst>
           </p:cNvPr>
@@ -16456,7 +16553,7 @@
           <p:cNvPr id="16" name="">
             <a:extLst xmlns:a="http://schemas.openxmlformats.org/drawingml/2006/main">
               <a:ext uri="{FF2B5EF4-FFF2-40B4-BE49-F238E27FC236}">
-                <a16:creationId xmlns:a16="http://schemas.microsoft.com/office/drawing/2014/main" id="{FB4C926A-173D-4A6E-A63E-5025E209EC08}"/>
+                <a16:creationId xmlns:a16="http://schemas.microsoft.com/office/drawing/2014/main" id="{F5566D7F-D520-4485-945A-0AD2127611F0}"/>
               </a:ext>
             </a:extLst>
           </p:cNvPr>
@@ -16491,7 +16588,7 @@
           <p:cNvPr id="17" name="">
             <a:extLst xmlns:a="http://schemas.openxmlformats.org/drawingml/2006/main">
               <a:ext uri="{FF2B5EF4-FFF2-40B4-BE49-F238E27FC236}">
-                <a16:creationId xmlns:a16="http://schemas.microsoft.com/office/drawing/2014/main" id="{3B2E3744-EB59-40D1-AD48-21D55C190A04}"/>
+                <a16:creationId xmlns:a16="http://schemas.microsoft.com/office/drawing/2014/main" id="{3C758DBC-28C6-408A-9927-394DF8A72AE5}"/>
               </a:ext>
             </a:extLst>
           </p:cNvPr>
@@ -16555,7 +16652,7 @@
           <p:cNvPr id="18" name="">
             <a:extLst xmlns:a="http://schemas.openxmlformats.org/drawingml/2006/main">
               <a:ext uri="{FF2B5EF4-FFF2-40B4-BE49-F238E27FC236}">
-                <a16:creationId xmlns:a16="http://schemas.microsoft.com/office/drawing/2014/main" id="{FB256AA1-14E5-4AF2-989C-B19800193F86}"/>
+                <a16:creationId xmlns:a16="http://schemas.microsoft.com/office/drawing/2014/main" id="{393E0844-648B-4DA8-84A4-71E7DD67C14D}"/>
               </a:ext>
             </a:extLst>
           </p:cNvPr>
@@ -16619,7 +16716,7 @@
           <p:cNvPr id="19" name="">
             <a:extLst xmlns:a="http://schemas.openxmlformats.org/drawingml/2006/main">
               <a:ext uri="{FF2B5EF4-FFF2-40B4-BE49-F238E27FC236}">
-                <a16:creationId xmlns:a16="http://schemas.microsoft.com/office/drawing/2014/main" id="{ACE69EDA-83C5-4820-8456-3A9A6A65501C}"/>
+                <a16:creationId xmlns:a16="http://schemas.microsoft.com/office/drawing/2014/main" id="{FCFB9EA2-EC5F-43EA-8A18-593B055DBE33}"/>
               </a:ext>
             </a:extLst>
           </p:cNvPr>
@@ -16654,7 +16751,7 @@
           <p:cNvPr id="20" name="">
             <a:extLst xmlns:a="http://schemas.openxmlformats.org/drawingml/2006/main">
               <a:ext uri="{FF2B5EF4-FFF2-40B4-BE49-F238E27FC236}">
-                <a16:creationId xmlns:a16="http://schemas.microsoft.com/office/drawing/2014/main" id="{414522F4-BF61-48B7-B8A0-781401540F8E}"/>
+                <a16:creationId xmlns:a16="http://schemas.microsoft.com/office/drawing/2014/main" id="{9A777FBF-54A8-454C-BCA4-CB9E5EF486FD}"/>
               </a:ext>
             </a:extLst>
           </p:cNvPr>
@@ -16718,7 +16815,7 @@
           <p:cNvPr id="21" name="">
             <a:extLst xmlns:a="http://schemas.openxmlformats.org/drawingml/2006/main">
               <a:ext uri="{FF2B5EF4-FFF2-40B4-BE49-F238E27FC236}">
-                <a16:creationId xmlns:a16="http://schemas.microsoft.com/office/drawing/2014/main" id="{FE560B33-1D17-4E47-81FC-EE419048FCCB}"/>
+                <a16:creationId xmlns:a16="http://schemas.microsoft.com/office/drawing/2014/main" id="{81DCA417-C931-4545-A4D1-88A5C4DDF561}"/>
               </a:ext>
             </a:extLst>
           </p:cNvPr>
@@ -16782,7 +16879,7 @@
           <p:cNvPr id="22" name="">
             <a:extLst xmlns:a="http://schemas.openxmlformats.org/drawingml/2006/main">
               <a:ext uri="{FF2B5EF4-FFF2-40B4-BE49-F238E27FC236}">
-                <a16:creationId xmlns:a16="http://schemas.microsoft.com/office/drawing/2014/main" id="{0BF39F23-D887-4640-B149-6815909BADFF}"/>
+                <a16:creationId xmlns:a16="http://schemas.microsoft.com/office/drawing/2014/main" id="{4DD4B995-6605-4832-B800-7E9B9BB599A8}"/>
               </a:ext>
             </a:extLst>
           </p:cNvPr>
@@ -16815,7 +16912,7 @@
           <p:cNvPr id="23" name="">
             <a:extLst xmlns:a="http://schemas.openxmlformats.org/drawingml/2006/main">
               <a:ext uri="{FF2B5EF4-FFF2-40B4-BE49-F238E27FC236}">
-                <a16:creationId xmlns:a16="http://schemas.microsoft.com/office/drawing/2014/main" id="{0C7B00A6-69DA-4D39-BDF7-3528A995F53D}"/>
+                <a16:creationId xmlns:a16="http://schemas.microsoft.com/office/drawing/2014/main" id="{CE8497AA-8DAB-496C-98D6-44714B81DC4D}"/>
               </a:ext>
             </a:extLst>
           </p:cNvPr>
@@ -16850,7 +16947,7 @@
           <p:cNvPr id="24" name="">
             <a:extLst xmlns:a="http://schemas.openxmlformats.org/drawingml/2006/main">
               <a:ext uri="{FF2B5EF4-FFF2-40B4-BE49-F238E27FC236}">
-                <a16:creationId xmlns:a16="http://schemas.microsoft.com/office/drawing/2014/main" id="{414E7BB8-8D54-47D2-AC7E-74ED019F957A}"/>
+                <a16:creationId xmlns:a16="http://schemas.microsoft.com/office/drawing/2014/main" id="{634B1DC7-394C-422A-9030-C8F87337A20F}"/>
               </a:ext>
             </a:extLst>
           </p:cNvPr>
@@ -16914,7 +17011,7 @@
           <p:cNvPr id="25" name="">
             <a:extLst xmlns:a="http://schemas.openxmlformats.org/drawingml/2006/main">
               <a:ext uri="{FF2B5EF4-FFF2-40B4-BE49-F238E27FC236}">
-                <a16:creationId xmlns:a16="http://schemas.microsoft.com/office/drawing/2014/main" id="{0C250EA4-CAAA-451C-8255-03D3BA77706F}"/>
+                <a16:creationId xmlns:a16="http://schemas.microsoft.com/office/drawing/2014/main" id="{A789B5A5-B559-4E5C-BD99-980D304B867A}"/>
               </a:ext>
             </a:extLst>
           </p:cNvPr>
@@ -16978,7 +17075,7 @@
           <p:cNvPr id="26" name="">
             <a:extLst xmlns:a="http://schemas.openxmlformats.org/drawingml/2006/main">
               <a:ext uri="{FF2B5EF4-FFF2-40B4-BE49-F238E27FC236}">
-                <a16:creationId xmlns:a16="http://schemas.microsoft.com/office/drawing/2014/main" id="{1DBD6374-5F13-4F66-92A8-5C98516797A6}"/>
+                <a16:creationId xmlns:a16="http://schemas.microsoft.com/office/drawing/2014/main" id="{4CAC7B7E-CD64-43DC-8C4F-A26AF6767060}"/>
               </a:ext>
             </a:extLst>
           </p:cNvPr>
@@ -17011,7 +17108,7 @@
           <p:cNvPr id="27" name="">
             <a:extLst xmlns:a="http://schemas.openxmlformats.org/drawingml/2006/main">
               <a:ext uri="{FF2B5EF4-FFF2-40B4-BE49-F238E27FC236}">
-                <a16:creationId xmlns:a16="http://schemas.microsoft.com/office/drawing/2014/main" id="{F5114A84-4741-4F71-8026-11E4C96B99F4}"/>
+                <a16:creationId xmlns:a16="http://schemas.microsoft.com/office/drawing/2014/main" id="{6E6B907D-6C90-4287-BF52-D411BCF64797}"/>
               </a:ext>
             </a:extLst>
           </p:cNvPr>
@@ -17046,7 +17143,7 @@
           <p:cNvPr id="28" name="">
             <a:extLst xmlns:a="http://schemas.openxmlformats.org/drawingml/2006/main">
               <a:ext uri="{FF2B5EF4-FFF2-40B4-BE49-F238E27FC236}">
-                <a16:creationId xmlns:a16="http://schemas.microsoft.com/office/drawing/2014/main" id="{9F2E86A8-15F4-4FF6-A05E-BE7235CBD89C}"/>
+                <a16:creationId xmlns:a16="http://schemas.microsoft.com/office/drawing/2014/main" id="{1438B108-5D9A-4281-A73B-F52B89B346B1}"/>
               </a:ext>
             </a:extLst>
           </p:cNvPr>
@@ -17110,7 +17207,7 @@
           <p:cNvPr id="29" name="">
             <a:extLst xmlns:a="http://schemas.openxmlformats.org/drawingml/2006/main">
               <a:ext uri="{FF2B5EF4-FFF2-40B4-BE49-F238E27FC236}">
-                <a16:creationId xmlns:a16="http://schemas.microsoft.com/office/drawing/2014/main" id="{3045BB9A-41A7-471B-9BD6-C6C116F1F7EC}"/>
+                <a16:creationId xmlns:a16="http://schemas.microsoft.com/office/drawing/2014/main" id="{2E9BFBA9-D0EC-46C4-B5DD-464F615E4E11}"/>
               </a:ext>
             </a:extLst>
           </p:cNvPr>
@@ -17174,7 +17271,7 @@
           <p:cNvPr id="30" name="">
             <a:extLst xmlns:a="http://schemas.openxmlformats.org/drawingml/2006/main">
               <a:ext uri="{FF2B5EF4-FFF2-40B4-BE49-F238E27FC236}">
-                <a16:creationId xmlns:a16="http://schemas.microsoft.com/office/drawing/2014/main" id="{976E61B4-A062-432B-B74C-2FC128AECD13}"/>
+                <a16:creationId xmlns:a16="http://schemas.microsoft.com/office/drawing/2014/main" id="{8F042512-8920-45B2-8B08-90A5893F73F1}"/>
               </a:ext>
             </a:extLst>
           </p:cNvPr>
@@ -17207,7 +17304,7 @@
           <p:cNvPr id="31" name="">
             <a:extLst xmlns:a="http://schemas.openxmlformats.org/drawingml/2006/main">
               <a:ext uri="{FF2B5EF4-FFF2-40B4-BE49-F238E27FC236}">
-                <a16:creationId xmlns:a16="http://schemas.microsoft.com/office/drawing/2014/main" id="{DE08D078-6BAE-43A0-AEDD-3361745CFB77}"/>
+                <a16:creationId xmlns:a16="http://schemas.microsoft.com/office/drawing/2014/main" id="{84C9322D-A53B-4F87-A968-BE67A922AD00}"/>
               </a:ext>
             </a:extLst>
           </p:cNvPr>
@@ -17242,7 +17339,7 @@
           <p:cNvPr id="32" name="">
             <a:extLst xmlns:a="http://schemas.openxmlformats.org/drawingml/2006/main">
               <a:ext uri="{FF2B5EF4-FFF2-40B4-BE49-F238E27FC236}">
-                <a16:creationId xmlns:a16="http://schemas.microsoft.com/office/drawing/2014/main" id="{FF4006CE-6D22-49D8-97CF-90DD395444F7}"/>
+                <a16:creationId xmlns:a16="http://schemas.microsoft.com/office/drawing/2014/main" id="{6D0CA58F-442E-4A8F-AE09-3BC97B0DED1A}"/>
               </a:ext>
             </a:extLst>
           </p:cNvPr>
@@ -17306,7 +17403,7 @@
           <p:cNvPr id="33" name="">
             <a:extLst xmlns:a="http://schemas.openxmlformats.org/drawingml/2006/main">
               <a:ext uri="{FF2B5EF4-FFF2-40B4-BE49-F238E27FC236}">
-                <a16:creationId xmlns:a16="http://schemas.microsoft.com/office/drawing/2014/main" id="{B59124B8-1AD3-4F53-AEAE-2B93429C0376}"/>
+                <a16:creationId xmlns:a16="http://schemas.microsoft.com/office/drawing/2014/main" id="{924D7415-DB08-483D-AA05-C589A6E494AF}"/>
               </a:ext>
             </a:extLst>
           </p:cNvPr>
@@ -17370,7 +17467,7 @@
           <p:cNvPr id="34" name="">
             <a:extLst xmlns:a="http://schemas.openxmlformats.org/drawingml/2006/main">
               <a:ext uri="{FF2B5EF4-FFF2-40B4-BE49-F238E27FC236}">
-                <a16:creationId xmlns:a16="http://schemas.microsoft.com/office/drawing/2014/main" id="{BA10F1B9-223D-4A41-91F9-CF3395AC38E1}"/>
+                <a16:creationId xmlns:a16="http://schemas.microsoft.com/office/drawing/2014/main" id="{D14B09C1-03DF-4DCE-BE5F-1DEC2667FCF2}"/>
               </a:ext>
             </a:extLst>
           </p:cNvPr>
@@ -17434,7 +17531,7 @@
           <p:cNvPr id="35" name="">
             <a:extLst xmlns:a="http://schemas.openxmlformats.org/drawingml/2006/main">
               <a:ext uri="{FF2B5EF4-FFF2-40B4-BE49-F238E27FC236}">
-                <a16:creationId xmlns:a16="http://schemas.microsoft.com/office/drawing/2014/main" id="{93DC0BA6-4956-4717-8B3C-C982A6148EBC}"/>
+                <a16:creationId xmlns:a16="http://schemas.microsoft.com/office/drawing/2014/main" id="{90F69CF6-00F1-41C8-BACE-23FD5C04E2DD}"/>
               </a:ext>
             </a:extLst>
           </p:cNvPr>
@@ -17467,7 +17564,7 @@
           <p:cNvPr id="36" name="">
             <a:extLst xmlns:a="http://schemas.openxmlformats.org/drawingml/2006/main">
               <a:ext uri="{FF2B5EF4-FFF2-40B4-BE49-F238E27FC236}">
-                <a16:creationId xmlns:a16="http://schemas.microsoft.com/office/drawing/2014/main" id="{0377F2C7-3F74-4A33-9BC7-E1C9F0ED834E}"/>
+                <a16:creationId xmlns:a16="http://schemas.microsoft.com/office/drawing/2014/main" id="{1B9A33C1-5584-4F36-836B-CBB791AB9157}"/>
               </a:ext>
             </a:extLst>
           </p:cNvPr>
@@ -17531,7 +17628,7 @@
           <p:cNvPr id="37" name="">
             <a:extLst xmlns:a="http://schemas.openxmlformats.org/drawingml/2006/main">
               <a:ext uri="{FF2B5EF4-FFF2-40B4-BE49-F238E27FC236}">
-                <a16:creationId xmlns:a16="http://schemas.microsoft.com/office/drawing/2014/main" id="{A8F52B79-89F2-49A1-901F-0CAF4F27360F}"/>
+                <a16:creationId xmlns:a16="http://schemas.microsoft.com/office/drawing/2014/main" id="{9E8A27AB-1698-4F41-8197-ECD2132243C8}"/>
               </a:ext>
             </a:extLst>
           </p:cNvPr>
@@ -17593,7 +17690,7 @@
     </p:spTree>
     <p:extLst>
       <p:ext uri="{BB962C8B-B14F-4D97-AF65-F5344CB8AC3E}">
-        <p14:creationId xmlns:p14="http://schemas.microsoft.com/office/powerpoint/2010/main" val="1251463354"/>
+        <p14:creationId xmlns:p14="http://schemas.microsoft.com/office/powerpoint/2010/main" val="125754774"/>
       </p:ext>
     </p:extLst>
   </p:cSld>

--- a/assets/investor-deck/Tecnotitan-Investor-Deck-ZH.pptx
+++ b/assets/investor-deck/Tecnotitan-Investor-Deck-ZH.pptx
@@ -2,24 +2,24 @@
 <file path=ppt/presentation.xml><?xml version="1.0" encoding="utf-8"?>
 <p:presentation xmlns:p="http://schemas.openxmlformats.org/presentationml/2006/main">
   <p:sldMasterIdLst>
-    <p:sldMasterId xmlns:r="http://schemas.openxmlformats.org/officeDocument/2006/relationships" id="2147483648" r:id="R8c5c47d434d74c9e"/>
+    <p:sldMasterId xmlns:r="http://schemas.openxmlformats.org/officeDocument/2006/relationships" id="2147483648" r:id="Ra780545947254a91"/>
   </p:sldMasterIdLst>
   <p:notesMasterIdLst>
-    <p:notesMasterId xmlns:r="http://schemas.openxmlformats.org/officeDocument/2006/relationships" r:id="Rf5fab816c1c146ee"/>
+    <p:notesMasterId xmlns:r="http://schemas.openxmlformats.org/officeDocument/2006/relationships" r:id="Reca783ce790e474c"/>
   </p:notesMasterIdLst>
   <p:sldIdLst>
-    <p:sldId xmlns:r="http://schemas.openxmlformats.org/officeDocument/2006/relationships" id="256" r:id="R5eb8786656e146d8"/>
-    <p:sldId xmlns:r="http://schemas.openxmlformats.org/officeDocument/2006/relationships" id="257" r:id="R9596b89312a54ffe"/>
-    <p:sldId xmlns:r="http://schemas.openxmlformats.org/officeDocument/2006/relationships" id="258" r:id="R7df9f5caf9004a8e"/>
-    <p:sldId xmlns:r="http://schemas.openxmlformats.org/officeDocument/2006/relationships" id="259" r:id="Re895913e9053485a"/>
-    <p:sldId xmlns:r="http://schemas.openxmlformats.org/officeDocument/2006/relationships" id="260" r:id="R898ddcf65881475c"/>
-    <p:sldId xmlns:r="http://schemas.openxmlformats.org/officeDocument/2006/relationships" id="261" r:id="R5cd12e45a4ec4d6c"/>
-    <p:sldId xmlns:r="http://schemas.openxmlformats.org/officeDocument/2006/relationships" id="262" r:id="R58cb2ba1748a4352"/>
-    <p:sldId xmlns:r="http://schemas.openxmlformats.org/officeDocument/2006/relationships" id="263" r:id="R3cdbc4bc400840fa"/>
-    <p:sldId xmlns:r="http://schemas.openxmlformats.org/officeDocument/2006/relationships" id="264" r:id="Re71c2028bc05418d"/>
-    <p:sldId xmlns:r="http://schemas.openxmlformats.org/officeDocument/2006/relationships" id="265" r:id="R37c75e6bde7e4a23"/>
-    <p:sldId xmlns:r="http://schemas.openxmlformats.org/officeDocument/2006/relationships" id="266" r:id="R27bce12dd7b14099"/>
-    <p:sldId xmlns:r="http://schemas.openxmlformats.org/officeDocument/2006/relationships" id="267" r:id="Rf6a87fb185fc455a"/>
+    <p:sldId xmlns:r="http://schemas.openxmlformats.org/officeDocument/2006/relationships" id="256" r:id="Re1947ccac8c041e2"/>
+    <p:sldId xmlns:r="http://schemas.openxmlformats.org/officeDocument/2006/relationships" id="257" r:id="Ref399b24308c49e9"/>
+    <p:sldId xmlns:r="http://schemas.openxmlformats.org/officeDocument/2006/relationships" id="258" r:id="Rf575d8263ba94f15"/>
+    <p:sldId xmlns:r="http://schemas.openxmlformats.org/officeDocument/2006/relationships" id="259" r:id="Ra2bec2d5a26d4b91"/>
+    <p:sldId xmlns:r="http://schemas.openxmlformats.org/officeDocument/2006/relationships" id="260" r:id="Re3c09a839bcd4188"/>
+    <p:sldId xmlns:r="http://schemas.openxmlformats.org/officeDocument/2006/relationships" id="261" r:id="R7201dd77bfb343d2"/>
+    <p:sldId xmlns:r="http://schemas.openxmlformats.org/officeDocument/2006/relationships" id="262" r:id="Rc70785bf8d66458d"/>
+    <p:sldId xmlns:r="http://schemas.openxmlformats.org/officeDocument/2006/relationships" id="263" r:id="Rf9afd228a5a84e46"/>
+    <p:sldId xmlns:r="http://schemas.openxmlformats.org/officeDocument/2006/relationships" id="264" r:id="Rdf5f88e53ba84757"/>
+    <p:sldId xmlns:r="http://schemas.openxmlformats.org/officeDocument/2006/relationships" id="265" r:id="Rec15288b44304996"/>
+    <p:sldId xmlns:r="http://schemas.openxmlformats.org/officeDocument/2006/relationships" id="266" r:id="R4ab488a763504003"/>
+    <p:sldId xmlns:r="http://schemas.openxmlformats.org/officeDocument/2006/relationships" id="267" r:id="Rb87bf02c9f684c2b"/>
   </p:sldIdLst>
   <p:sldSz cx="12192000" cy="6858000"/>
   <p:notesSz cx="6858000" cy="9144000"/>
@@ -1292,7 +1292,7 @@
   </p:cSld>
   <p:clrMap bg1="lt1" tx1="dk1" bg2="lt2" tx2="dk2" accent1="accent1" accent2="accent2" accent3="accent3" accent4="accent4" accent5="accent5" accent6="accent6" hlink="hlink" folHlink="folHlink"/>
   <p:sldLayoutIdLst>
-    <p:sldLayoutId xmlns:r="http://schemas.openxmlformats.org/officeDocument/2006/relationships" id="2147483649" r:id="R81f4918c28cc444b"/>
+    <p:sldLayoutId xmlns:r="http://schemas.openxmlformats.org/officeDocument/2006/relationships" id="2147483649" r:id="R3439caa784c4420f"/>
   </p:sldLayoutIdLst>
   <p:txStyles>
     <p:titleStyle>
@@ -1794,7 +1794,7 @@
           <p:nvPr/>
         </p:nvPicPr>
         <p:blipFill>
-          <a:blip xmlns:r="http://schemas.openxmlformats.org/officeDocument/2006/relationships" xmlns:a="http://schemas.openxmlformats.org/drawingml/2006/main" r:embed="R9b8b3e2f0ff54cdc"/>
+          <a:blip xmlns:r="http://schemas.openxmlformats.org/officeDocument/2006/relationships" xmlns:a="http://schemas.openxmlformats.org/drawingml/2006/main" r:embed="Rf8720dae921340fe"/>
           <a:srcRect xmlns:a="http://schemas.openxmlformats.org/drawingml/2006/main" l="0" t="7813" r="0" b="7813"/>
           <a:stretch xmlns:a="http://schemas.openxmlformats.org/drawingml/2006/main">
             <a:fillRect l="0" t="0" r="0" b="0"/>
@@ -1815,7 +1815,7 @@
           <p:cNvPr id="2" name="">
             <a:extLst xmlns:a="http://schemas.openxmlformats.org/drawingml/2006/main">
               <a:ext uri="{FF2B5EF4-FFF2-40B4-BE49-F238E27FC236}">
-                <a16:creationId xmlns:a16="http://schemas.microsoft.com/office/drawing/2014/main" id="{CC764D2A-D6E3-4C77-B395-5B50F58D3632}"/>
+                <a16:creationId xmlns:a16="http://schemas.microsoft.com/office/drawing/2014/main" id="{8FFB2087-838F-4A1C-A8A7-3179D09B0D69}"/>
               </a:ext>
             </a:extLst>
           </p:cNvPr>
@@ -1852,7 +1852,7 @@
           <p:cNvPr id="3" name="">
             <a:extLst xmlns:a="http://schemas.openxmlformats.org/drawingml/2006/main">
               <a:ext uri="{FF2B5EF4-FFF2-40B4-BE49-F238E27FC236}">
-                <a16:creationId xmlns:a16="http://schemas.microsoft.com/office/drawing/2014/main" id="{AEB576D2-FB98-4F4B-A967-432BE14A139B}"/>
+                <a16:creationId xmlns:a16="http://schemas.microsoft.com/office/drawing/2014/main" id="{24CDEC8A-64D4-4C70-ACC2-88918713F237}"/>
               </a:ext>
             </a:extLst>
           </p:cNvPr>
@@ -1889,7 +1889,7 @@
           <p:cNvPr id="4" name="">
             <a:extLst xmlns:a="http://schemas.openxmlformats.org/drawingml/2006/main">
               <a:ext uri="{FF2B5EF4-FFF2-40B4-BE49-F238E27FC236}">
-                <a16:creationId xmlns:a16="http://schemas.microsoft.com/office/drawing/2014/main" id="{63093148-58A7-45BA-A90F-985717F40B8B}"/>
+                <a16:creationId xmlns:a16="http://schemas.microsoft.com/office/drawing/2014/main" id="{517702E4-64D0-4FD1-9E9C-C965BC31897B}"/>
               </a:ext>
             </a:extLst>
           </p:cNvPr>
@@ -1953,7 +1953,7 @@
           <p:cNvPr id="5" name="">
             <a:extLst xmlns:a="http://schemas.openxmlformats.org/drawingml/2006/main">
               <a:ext uri="{FF2B5EF4-FFF2-40B4-BE49-F238E27FC236}">
-                <a16:creationId xmlns:a16="http://schemas.microsoft.com/office/drawing/2014/main" id="{0B599094-FC40-4089-80F4-D4AAC2B70A21}"/>
+                <a16:creationId xmlns:a16="http://schemas.microsoft.com/office/drawing/2014/main" id="{4109CF7F-590D-4E56-B82C-E6EB02C413C3}"/>
               </a:ext>
             </a:extLst>
           </p:cNvPr>
@@ -2017,7 +2017,7 @@
           <p:cNvPr id="6" name="">
             <a:extLst xmlns:a="http://schemas.openxmlformats.org/drawingml/2006/main">
               <a:ext uri="{FF2B5EF4-FFF2-40B4-BE49-F238E27FC236}">
-                <a16:creationId xmlns:a16="http://schemas.microsoft.com/office/drawing/2014/main" id="{A5BDF34A-2F8D-4734-99E7-975D720D6F06}"/>
+                <a16:creationId xmlns:a16="http://schemas.microsoft.com/office/drawing/2014/main" id="{9C3E1C0E-464A-4BC5-A7BC-47EEFEC8917B}"/>
               </a:ext>
             </a:extLst>
           </p:cNvPr>
@@ -2050,7 +2050,7 @@
           <p:cNvPr id="7" name="">
             <a:extLst xmlns:a="http://schemas.openxmlformats.org/drawingml/2006/main">
               <a:ext uri="{FF2B5EF4-FFF2-40B4-BE49-F238E27FC236}">
-                <a16:creationId xmlns:a16="http://schemas.microsoft.com/office/drawing/2014/main" id="{6C2D5EFE-8641-4739-A0F9-138A86172C32}"/>
+                <a16:creationId xmlns:a16="http://schemas.microsoft.com/office/drawing/2014/main" id="{515AC371-3B64-4827-9302-371D337B8CFF}"/>
               </a:ext>
             </a:extLst>
           </p:cNvPr>
@@ -2114,7 +2114,7 @@
           <p:cNvPr id="8" name="">
             <a:extLst xmlns:a="http://schemas.openxmlformats.org/drawingml/2006/main">
               <a:ext uri="{FF2B5EF4-FFF2-40B4-BE49-F238E27FC236}">
-                <a16:creationId xmlns:a16="http://schemas.microsoft.com/office/drawing/2014/main" id="{8628CB69-5D23-4243-8878-04794C953E41}"/>
+                <a16:creationId xmlns:a16="http://schemas.microsoft.com/office/drawing/2014/main" id="{7E3501A1-9B85-462C-8580-54A5BEA3E884}"/>
               </a:ext>
             </a:extLst>
           </p:cNvPr>
@@ -2178,7 +2178,7 @@
           <p:cNvPr id="9" name="">
             <a:extLst xmlns:a="http://schemas.openxmlformats.org/drawingml/2006/main">
               <a:ext uri="{FF2B5EF4-FFF2-40B4-BE49-F238E27FC236}">
-                <a16:creationId xmlns:a16="http://schemas.microsoft.com/office/drawing/2014/main" id="{31A0329E-DC81-4F9A-A742-B89390A7FAF3}"/>
+                <a16:creationId xmlns:a16="http://schemas.microsoft.com/office/drawing/2014/main" id="{4DA3AFC0-79E7-4070-BC65-73C28C1E510D}"/>
               </a:ext>
             </a:extLst>
           </p:cNvPr>
@@ -2213,7 +2213,7 @@
           <p:cNvPr id="10" name="">
             <a:extLst xmlns:a="http://schemas.openxmlformats.org/drawingml/2006/main">
               <a:ext uri="{FF2B5EF4-FFF2-40B4-BE49-F238E27FC236}">
-                <a16:creationId xmlns:a16="http://schemas.microsoft.com/office/drawing/2014/main" id="{43E3961F-76F4-4432-9F63-25FF0282F2A3}"/>
+                <a16:creationId xmlns:a16="http://schemas.microsoft.com/office/drawing/2014/main" id="{4629D3FB-D26C-4C83-9614-284E689000C9}"/>
               </a:ext>
             </a:extLst>
           </p:cNvPr>
@@ -2277,7 +2277,7 @@
           <p:cNvPr id="11" name="">
             <a:extLst xmlns:a="http://schemas.openxmlformats.org/drawingml/2006/main">
               <a:ext uri="{FF2B5EF4-FFF2-40B4-BE49-F238E27FC236}">
-                <a16:creationId xmlns:a16="http://schemas.microsoft.com/office/drawing/2014/main" id="{43694807-6502-42E3-A81D-259BFF6C27E8}"/>
+                <a16:creationId xmlns:a16="http://schemas.microsoft.com/office/drawing/2014/main" id="{44EB4009-5897-43D7-92DB-0E1C24776AB0}"/>
               </a:ext>
             </a:extLst>
           </p:cNvPr>
@@ -2312,7 +2312,7 @@
           <p:cNvPr id="12" name="">
             <a:extLst xmlns:a="http://schemas.openxmlformats.org/drawingml/2006/main">
               <a:ext uri="{FF2B5EF4-FFF2-40B4-BE49-F238E27FC236}">
-                <a16:creationId xmlns:a16="http://schemas.microsoft.com/office/drawing/2014/main" id="{9A176064-22F0-4068-B3FC-2D719D80739E}"/>
+                <a16:creationId xmlns:a16="http://schemas.microsoft.com/office/drawing/2014/main" id="{76581125-9F88-43C2-AB1D-28B050B12145}"/>
               </a:ext>
             </a:extLst>
           </p:cNvPr>
@@ -2376,7 +2376,7 @@
           <p:cNvPr id="13" name="">
             <a:extLst xmlns:a="http://schemas.openxmlformats.org/drawingml/2006/main">
               <a:ext uri="{FF2B5EF4-FFF2-40B4-BE49-F238E27FC236}">
-                <a16:creationId xmlns:a16="http://schemas.microsoft.com/office/drawing/2014/main" id="{CA654030-229A-492E-B2C2-875FD99E2C9D}"/>
+                <a16:creationId xmlns:a16="http://schemas.microsoft.com/office/drawing/2014/main" id="{D7FA38D4-AA2D-44C7-8D2C-824E653D4313}"/>
               </a:ext>
             </a:extLst>
           </p:cNvPr>
@@ -2411,7 +2411,7 @@
           <p:cNvPr id="14" name="">
             <a:extLst xmlns:a="http://schemas.openxmlformats.org/drawingml/2006/main">
               <a:ext uri="{FF2B5EF4-FFF2-40B4-BE49-F238E27FC236}">
-                <a16:creationId xmlns:a16="http://schemas.microsoft.com/office/drawing/2014/main" id="{378C1912-B6F0-4D35-B1A0-58F310AE3104}"/>
+                <a16:creationId xmlns:a16="http://schemas.microsoft.com/office/drawing/2014/main" id="{D96D82CC-9312-4D7C-85AD-4BB7DA9ABA58}"/>
               </a:ext>
             </a:extLst>
           </p:cNvPr>
@@ -2475,7 +2475,7 @@
           <p:cNvPr id="15" name="">
             <a:extLst xmlns:a="http://schemas.openxmlformats.org/drawingml/2006/main">
               <a:ext uri="{FF2B5EF4-FFF2-40B4-BE49-F238E27FC236}">
-                <a16:creationId xmlns:a16="http://schemas.microsoft.com/office/drawing/2014/main" id="{36685C08-B4DA-492E-B0F4-B90D4F5F83A6}"/>
+                <a16:creationId xmlns:a16="http://schemas.microsoft.com/office/drawing/2014/main" id="{596D29CF-E4C3-44AF-943A-FA87BA35E23E}"/>
               </a:ext>
             </a:extLst>
           </p:cNvPr>
@@ -2529,7 +2529,7 @@
                 <a:ea typeface="Aptos"/>
                 <a:cs typeface="Aptos"/>
               </a:rPr>
-              <a:t>6 条产品线</a:t>
+              <a:t>US$500K pre-seed</a:t>
             </a:r>
           </a:p>
         </p:txBody>
@@ -2539,7 +2539,7 @@
           <p:cNvPr id="16" name="">
             <a:extLst xmlns:a="http://schemas.openxmlformats.org/drawingml/2006/main">
               <a:ext uri="{FF2B5EF4-FFF2-40B4-BE49-F238E27FC236}">
-                <a16:creationId xmlns:a16="http://schemas.microsoft.com/office/drawing/2014/main" id="{3AD3A142-137C-42A7-B562-4D6766CAC479}"/>
+                <a16:creationId xmlns:a16="http://schemas.microsoft.com/office/drawing/2014/main" id="{FA89A299-BCC8-4CCF-B5D1-6C2D3E2379A0}"/>
               </a:ext>
             </a:extLst>
           </p:cNvPr>
@@ -2574,7 +2574,7 @@
           <p:cNvPr id="17" name="">
             <a:extLst xmlns:a="http://schemas.openxmlformats.org/drawingml/2006/main">
               <a:ext uri="{FF2B5EF4-FFF2-40B4-BE49-F238E27FC236}">
-                <a16:creationId xmlns:a16="http://schemas.microsoft.com/office/drawing/2014/main" id="{3F83B0C8-04AF-49EC-A294-250993DC6AD3}"/>
+                <a16:creationId xmlns:a16="http://schemas.microsoft.com/office/drawing/2014/main" id="{F64CB9BA-8F58-489D-A72C-38D261192E7C}"/>
               </a:ext>
             </a:extLst>
           </p:cNvPr>
@@ -2638,7 +2638,7 @@
           <p:cNvPr id="18" name="">
             <a:extLst xmlns:a="http://schemas.openxmlformats.org/drawingml/2006/main">
               <a:ext uri="{FF2B5EF4-FFF2-40B4-BE49-F238E27FC236}">
-                <a16:creationId xmlns:a16="http://schemas.microsoft.com/office/drawing/2014/main" id="{E8338A50-E396-4BCC-89D2-614223634496}"/>
+                <a16:creationId xmlns:a16="http://schemas.microsoft.com/office/drawing/2014/main" id="{0F21B384-1E68-4597-935D-3BEE663D1845}"/>
               </a:ext>
             </a:extLst>
           </p:cNvPr>
@@ -2692,7 +2692,7 @@
                 <a:ea typeface="Aptos"/>
                 <a:cs typeface="Aptos"/>
               </a:rPr>
-              <a:t>5 个技术事业部</a:t>
+              <a:t>18 个月 runway</a:t>
             </a:r>
           </a:p>
         </p:txBody>
@@ -2702,7 +2702,7 @@
           <p:cNvPr id="19" name="">
             <a:extLst xmlns:a="http://schemas.openxmlformats.org/drawingml/2006/main">
               <a:ext uri="{FF2B5EF4-FFF2-40B4-BE49-F238E27FC236}">
-                <a16:creationId xmlns:a16="http://schemas.microsoft.com/office/drawing/2014/main" id="{31BCD30F-FC79-4A82-8FBF-DE9C271FD4DE}"/>
+                <a16:creationId xmlns:a16="http://schemas.microsoft.com/office/drawing/2014/main" id="{56CC02C7-92C1-4014-A261-73791EF9FC7C}"/>
               </a:ext>
             </a:extLst>
           </p:cNvPr>
@@ -2737,7 +2737,7 @@
           <p:cNvPr id="20" name="">
             <a:extLst xmlns:a="http://schemas.openxmlformats.org/drawingml/2006/main">
               <a:ext uri="{FF2B5EF4-FFF2-40B4-BE49-F238E27FC236}">
-                <a16:creationId xmlns:a16="http://schemas.microsoft.com/office/drawing/2014/main" id="{C67AE603-437E-413E-AB5A-A8218CE153CD}"/>
+                <a16:creationId xmlns:a16="http://schemas.microsoft.com/office/drawing/2014/main" id="{1B501726-DC9E-4A54-B3EA-8A6FB181DEE6}"/>
               </a:ext>
             </a:extLst>
           </p:cNvPr>
@@ -2801,7 +2801,7 @@
           <p:cNvPr id="21" name="">
             <a:extLst xmlns:a="http://schemas.openxmlformats.org/drawingml/2006/main">
               <a:ext uri="{FF2B5EF4-FFF2-40B4-BE49-F238E27FC236}">
-                <a16:creationId xmlns:a16="http://schemas.microsoft.com/office/drawing/2014/main" id="{044E0C37-5AE7-48F8-A296-0B24E9042C86}"/>
+                <a16:creationId xmlns:a16="http://schemas.microsoft.com/office/drawing/2014/main" id="{A2EF6C08-336A-4009-A06D-B29FFB4B628E}"/>
               </a:ext>
             </a:extLst>
           </p:cNvPr>
@@ -2855,7 +2855,7 @@
                 <a:ea typeface="Aptos"/>
                 <a:cs typeface="Aptos"/>
               </a:rPr>
-              <a:t>精简执行团队</a:t>
+              <a:t>6 条产品线</a:t>
             </a:r>
           </a:p>
         </p:txBody>
@@ -2865,7 +2865,7 @@
           <p:cNvPr id="22" name="">
             <a:extLst xmlns:a="http://schemas.openxmlformats.org/drawingml/2006/main">
               <a:ext uri="{FF2B5EF4-FFF2-40B4-BE49-F238E27FC236}">
-                <a16:creationId xmlns:a16="http://schemas.microsoft.com/office/drawing/2014/main" id="{417AEB66-CE51-415D-8826-A3A17B05C84A}"/>
+                <a16:creationId xmlns:a16="http://schemas.microsoft.com/office/drawing/2014/main" id="{73D59071-4317-446C-AA7B-4BF4DF842100}"/>
               </a:ext>
             </a:extLst>
           </p:cNvPr>
@@ -2929,7 +2929,7 @@
           <p:cNvPr id="23" name="">
             <a:extLst xmlns:a="http://schemas.openxmlformats.org/drawingml/2006/main">
               <a:ext uri="{FF2B5EF4-FFF2-40B4-BE49-F238E27FC236}">
-                <a16:creationId xmlns:a16="http://schemas.microsoft.com/office/drawing/2014/main" id="{1729CF04-FFB9-4761-8732-E7F8CEA3E35C}"/>
+                <a16:creationId xmlns:a16="http://schemas.microsoft.com/office/drawing/2014/main" id="{0B6B05AC-6495-4D86-B389-222060830F5E}"/>
               </a:ext>
             </a:extLst>
           </p:cNvPr>
@@ -2962,7 +2962,7 @@
           <p:cNvPr id="24" name="">
             <a:extLst xmlns:a="http://schemas.openxmlformats.org/drawingml/2006/main">
               <a:ext uri="{FF2B5EF4-FFF2-40B4-BE49-F238E27FC236}">
-                <a16:creationId xmlns:a16="http://schemas.microsoft.com/office/drawing/2014/main" id="{E03211CD-C4B6-4462-B91C-82F1E8A5F80C}"/>
+                <a16:creationId xmlns:a16="http://schemas.microsoft.com/office/drawing/2014/main" id="{6C5F302F-B2F8-460F-AE8E-88104411D1D3}"/>
               </a:ext>
             </a:extLst>
           </p:cNvPr>
@@ -3026,7 +3026,7 @@
           <p:cNvPr id="25" name="">
             <a:extLst xmlns:a="http://schemas.openxmlformats.org/drawingml/2006/main">
               <a:ext uri="{FF2B5EF4-FFF2-40B4-BE49-F238E27FC236}">
-                <a16:creationId xmlns:a16="http://schemas.microsoft.com/office/drawing/2014/main" id="{3AD666F0-D224-407E-923F-85BF8DE6C36C}"/>
+                <a16:creationId xmlns:a16="http://schemas.microsoft.com/office/drawing/2014/main" id="{88458591-90CE-4FAE-8FC2-694AC8BCA0DC}"/>
               </a:ext>
             </a:extLst>
           </p:cNvPr>
@@ -3088,7 +3088,7 @@
     </p:spTree>
     <p:extLst>
       <p:ext uri="{BB962C8B-B14F-4D97-AF65-F5344CB8AC3E}">
-        <p14:creationId xmlns:p14="http://schemas.microsoft.com/office/powerpoint/2010/main" val="1681968601"/>
+        <p14:creationId xmlns:p14="http://schemas.microsoft.com/office/powerpoint/2010/main" val="600063790"/>
       </p:ext>
     </p:extLst>
   </p:cSld>
@@ -3116,7 +3116,7 @@
           <p:nvPr/>
         </p:nvPicPr>
         <p:blipFill>
-          <a:blip xmlns:r="http://schemas.openxmlformats.org/officeDocument/2006/relationships" xmlns:a="http://schemas.openxmlformats.org/drawingml/2006/main" r:embed="R84b986a3009e40b5"/>
+          <a:blip xmlns:r="http://schemas.openxmlformats.org/officeDocument/2006/relationships" xmlns:a="http://schemas.openxmlformats.org/drawingml/2006/main" r:embed="R19ca9da802a44e13"/>
           <a:srcRect xmlns:a="http://schemas.openxmlformats.org/drawingml/2006/main" l="0" t="27" r="0" b="27"/>
           <a:stretch xmlns:a="http://schemas.openxmlformats.org/drawingml/2006/main">
             <a:fillRect l="0" t="0" r="0" b="0"/>
@@ -3137,7 +3137,7 @@
           <p:cNvPr id="2" name="">
             <a:extLst xmlns:a="http://schemas.openxmlformats.org/drawingml/2006/main">
               <a:ext uri="{FF2B5EF4-FFF2-40B4-BE49-F238E27FC236}">
-                <a16:creationId xmlns:a16="http://schemas.microsoft.com/office/drawing/2014/main" id="{09DE5A61-300C-414F-9C7A-42176A2FDF94}"/>
+                <a16:creationId xmlns:a16="http://schemas.microsoft.com/office/drawing/2014/main" id="{674694AC-BAA9-4D47-8666-81C8EC32FE03}"/>
               </a:ext>
             </a:extLst>
           </p:cNvPr>
@@ -3174,7 +3174,7 @@
           <p:cNvPr id="3" name="">
             <a:extLst xmlns:a="http://schemas.openxmlformats.org/drawingml/2006/main">
               <a:ext uri="{FF2B5EF4-FFF2-40B4-BE49-F238E27FC236}">
-                <a16:creationId xmlns:a16="http://schemas.microsoft.com/office/drawing/2014/main" id="{389BD18D-B784-4A7D-BD18-D5A76902268D}"/>
+                <a16:creationId xmlns:a16="http://schemas.microsoft.com/office/drawing/2014/main" id="{A40ECB86-A2D0-4AF3-AF5B-E0294BA4FDB0}"/>
               </a:ext>
             </a:extLst>
           </p:cNvPr>
@@ -3211,7 +3211,7 @@
           <p:cNvPr id="4" name="">
             <a:extLst xmlns:a="http://schemas.openxmlformats.org/drawingml/2006/main">
               <a:ext uri="{FF2B5EF4-FFF2-40B4-BE49-F238E27FC236}">
-                <a16:creationId xmlns:a16="http://schemas.microsoft.com/office/drawing/2014/main" id="{5CFD07EE-19F2-4ACE-BC0A-43BDA92A4804}"/>
+                <a16:creationId xmlns:a16="http://schemas.microsoft.com/office/drawing/2014/main" id="{CDBF387B-D69C-41AC-915A-D07519D7927E}"/>
               </a:ext>
             </a:extLst>
           </p:cNvPr>
@@ -3275,7 +3275,7 @@
           <p:cNvPr id="5" name="">
             <a:extLst xmlns:a="http://schemas.openxmlformats.org/drawingml/2006/main">
               <a:ext uri="{FF2B5EF4-FFF2-40B4-BE49-F238E27FC236}">
-                <a16:creationId xmlns:a16="http://schemas.microsoft.com/office/drawing/2014/main" id="{D306A3D9-BB13-419A-9D3C-D49BEE65E6C2}"/>
+                <a16:creationId xmlns:a16="http://schemas.microsoft.com/office/drawing/2014/main" id="{DD77EC97-ED7D-48A8-A75C-0B9C207129B4}"/>
               </a:ext>
             </a:extLst>
           </p:cNvPr>
@@ -3339,7 +3339,7 @@
           <p:cNvPr id="6" name="">
             <a:extLst xmlns:a="http://schemas.openxmlformats.org/drawingml/2006/main">
               <a:ext uri="{FF2B5EF4-FFF2-40B4-BE49-F238E27FC236}">
-                <a16:creationId xmlns:a16="http://schemas.microsoft.com/office/drawing/2014/main" id="{3DD1762E-117B-4E50-B306-434F052B3EC9}"/>
+                <a16:creationId xmlns:a16="http://schemas.microsoft.com/office/drawing/2014/main" id="{E9E8DE5B-81A4-43B2-8BCA-3BDEC2D5DA6F}"/>
               </a:ext>
             </a:extLst>
           </p:cNvPr>
@@ -3403,7 +3403,7 @@
           <p:cNvPr id="7" name="">
             <a:extLst xmlns:a="http://schemas.openxmlformats.org/drawingml/2006/main">
               <a:ext uri="{FF2B5EF4-FFF2-40B4-BE49-F238E27FC236}">
-                <a16:creationId xmlns:a16="http://schemas.microsoft.com/office/drawing/2014/main" id="{7243A6AF-2FEF-4A53-B5F2-CC53FD6E6DBA}"/>
+                <a16:creationId xmlns:a16="http://schemas.microsoft.com/office/drawing/2014/main" id="{1D6DE3B3-36E1-48BB-B2BB-7562DF9F89A9}"/>
               </a:ext>
             </a:extLst>
           </p:cNvPr>
@@ -3438,7 +3438,7 @@
           <p:cNvPr id="8" name="">
             <a:extLst xmlns:a="http://schemas.openxmlformats.org/drawingml/2006/main">
               <a:ext uri="{FF2B5EF4-FFF2-40B4-BE49-F238E27FC236}">
-                <a16:creationId xmlns:a16="http://schemas.microsoft.com/office/drawing/2014/main" id="{EC57C894-092B-4754-936B-B64ED9318CC5}"/>
+                <a16:creationId xmlns:a16="http://schemas.microsoft.com/office/drawing/2014/main" id="{DFC5DF7D-D2D3-442D-B565-F2401992879D}"/>
               </a:ext>
             </a:extLst>
           </p:cNvPr>
@@ -3502,7 +3502,7 @@
           <p:cNvPr id="9" name="">
             <a:extLst xmlns:a="http://schemas.openxmlformats.org/drawingml/2006/main">
               <a:ext uri="{FF2B5EF4-FFF2-40B4-BE49-F238E27FC236}">
-                <a16:creationId xmlns:a16="http://schemas.microsoft.com/office/drawing/2014/main" id="{B3794B40-899F-4509-9EA4-3BC398701E6C}"/>
+                <a16:creationId xmlns:a16="http://schemas.microsoft.com/office/drawing/2014/main" id="{F93A278F-95DD-45D2-9A40-89420027516D}"/>
               </a:ext>
             </a:extLst>
           </p:cNvPr>
@@ -3537,7 +3537,7 @@
           <p:cNvPr id="10" name="">
             <a:extLst xmlns:a="http://schemas.openxmlformats.org/drawingml/2006/main">
               <a:ext uri="{FF2B5EF4-FFF2-40B4-BE49-F238E27FC236}">
-                <a16:creationId xmlns:a16="http://schemas.microsoft.com/office/drawing/2014/main" id="{822BCAB5-8C21-4798-93C2-217B0D7C1955}"/>
+                <a16:creationId xmlns:a16="http://schemas.microsoft.com/office/drawing/2014/main" id="{4C51CC94-107C-49A9-9A68-1244DBA2CBF9}"/>
               </a:ext>
             </a:extLst>
           </p:cNvPr>
@@ -3601,7 +3601,7 @@
           <p:cNvPr id="11" name="">
             <a:extLst xmlns:a="http://schemas.openxmlformats.org/drawingml/2006/main">
               <a:ext uri="{FF2B5EF4-FFF2-40B4-BE49-F238E27FC236}">
-                <a16:creationId xmlns:a16="http://schemas.microsoft.com/office/drawing/2014/main" id="{D5F29665-B7F8-4728-983C-9B43BD530F3D}"/>
+                <a16:creationId xmlns:a16="http://schemas.microsoft.com/office/drawing/2014/main" id="{8277233E-67CD-4A81-93D5-6A798494C1EE}"/>
               </a:ext>
             </a:extLst>
           </p:cNvPr>
@@ -3636,7 +3636,7 @@
           <p:cNvPr id="12" name="">
             <a:extLst xmlns:a="http://schemas.openxmlformats.org/drawingml/2006/main">
               <a:ext uri="{FF2B5EF4-FFF2-40B4-BE49-F238E27FC236}">
-                <a16:creationId xmlns:a16="http://schemas.microsoft.com/office/drawing/2014/main" id="{5C8C4BA3-36CA-4B11-A15F-7AA4F136DB3A}"/>
+                <a16:creationId xmlns:a16="http://schemas.microsoft.com/office/drawing/2014/main" id="{4683C699-AF4E-4F12-BD3E-57607F87A591}"/>
               </a:ext>
             </a:extLst>
           </p:cNvPr>
@@ -3700,7 +3700,7 @@
           <p:cNvPr id="13" name="">
             <a:extLst xmlns:a="http://schemas.openxmlformats.org/drawingml/2006/main">
               <a:ext uri="{FF2B5EF4-FFF2-40B4-BE49-F238E27FC236}">
-                <a16:creationId xmlns:a16="http://schemas.microsoft.com/office/drawing/2014/main" id="{0F6522A7-76EB-457D-A6B9-F56A51F0DFE5}"/>
+                <a16:creationId xmlns:a16="http://schemas.microsoft.com/office/drawing/2014/main" id="{284D4E61-655E-4F2B-8EE7-C1CE41A04C9C}"/>
               </a:ext>
             </a:extLst>
           </p:cNvPr>
@@ -3735,7 +3735,7 @@
           <p:cNvPr id="14" name="">
             <a:extLst xmlns:a="http://schemas.openxmlformats.org/drawingml/2006/main">
               <a:ext uri="{FF2B5EF4-FFF2-40B4-BE49-F238E27FC236}">
-                <a16:creationId xmlns:a16="http://schemas.microsoft.com/office/drawing/2014/main" id="{46203CB1-E528-4BA3-BA91-E5D04940C564}"/>
+                <a16:creationId xmlns:a16="http://schemas.microsoft.com/office/drawing/2014/main" id="{4DA8248A-77F2-4490-B0FA-406C848DD8D7}"/>
               </a:ext>
             </a:extLst>
           </p:cNvPr>
@@ -3799,7 +3799,7 @@
           <p:cNvPr id="15" name="">
             <a:extLst xmlns:a="http://schemas.openxmlformats.org/drawingml/2006/main">
               <a:ext uri="{FF2B5EF4-FFF2-40B4-BE49-F238E27FC236}">
-                <a16:creationId xmlns:a16="http://schemas.microsoft.com/office/drawing/2014/main" id="{DC97EFE3-3647-4A02-8355-8CBFA8ED4795}"/>
+                <a16:creationId xmlns:a16="http://schemas.microsoft.com/office/drawing/2014/main" id="{2AF45F12-E0B6-491E-82F5-7B5504954260}"/>
               </a:ext>
             </a:extLst>
           </p:cNvPr>
@@ -3863,7 +3863,7 @@
           <p:cNvPr id="16" name="">
             <a:extLst xmlns:a="http://schemas.openxmlformats.org/drawingml/2006/main">
               <a:ext uri="{FF2B5EF4-FFF2-40B4-BE49-F238E27FC236}">
-                <a16:creationId xmlns:a16="http://schemas.microsoft.com/office/drawing/2014/main" id="{4C021091-E255-4365-882F-9C7AD3700A09}"/>
+                <a16:creationId xmlns:a16="http://schemas.microsoft.com/office/drawing/2014/main" id="{94033444-F6D6-480B-B948-C73AE4F8A8B8}"/>
               </a:ext>
             </a:extLst>
           </p:cNvPr>
@@ -3927,7 +3927,7 @@
           <p:cNvPr id="17" name="">
             <a:extLst xmlns:a="http://schemas.openxmlformats.org/drawingml/2006/main">
               <a:ext uri="{FF2B5EF4-FFF2-40B4-BE49-F238E27FC236}">
-                <a16:creationId xmlns:a16="http://schemas.microsoft.com/office/drawing/2014/main" id="{30D8613A-1F07-41A4-BF5A-87314FC132FE}"/>
+                <a16:creationId xmlns:a16="http://schemas.microsoft.com/office/drawing/2014/main" id="{96F871C1-967B-48E1-8758-9BD191464107}"/>
               </a:ext>
             </a:extLst>
           </p:cNvPr>
@@ -3960,7 +3960,7 @@
           <p:cNvPr id="18" name="">
             <a:extLst xmlns:a="http://schemas.openxmlformats.org/drawingml/2006/main">
               <a:ext uri="{FF2B5EF4-FFF2-40B4-BE49-F238E27FC236}">
-                <a16:creationId xmlns:a16="http://schemas.microsoft.com/office/drawing/2014/main" id="{1CC8ABEB-9887-4CF8-AA7F-897C6A401A7D}"/>
+                <a16:creationId xmlns:a16="http://schemas.microsoft.com/office/drawing/2014/main" id="{56AEC528-3F68-4C63-A0D5-2A4364C1B435}"/>
               </a:ext>
             </a:extLst>
           </p:cNvPr>
@@ -4024,7 +4024,7 @@
           <p:cNvPr id="19" name="">
             <a:extLst xmlns:a="http://schemas.openxmlformats.org/drawingml/2006/main">
               <a:ext uri="{FF2B5EF4-FFF2-40B4-BE49-F238E27FC236}">
-                <a16:creationId xmlns:a16="http://schemas.microsoft.com/office/drawing/2014/main" id="{A168C3B6-EA1D-4121-8FB6-19E3C9A87494}"/>
+                <a16:creationId xmlns:a16="http://schemas.microsoft.com/office/drawing/2014/main" id="{6E14A703-5884-4115-95F6-1233972EE76A}"/>
               </a:ext>
             </a:extLst>
           </p:cNvPr>
@@ -4086,7 +4086,7 @@
     </p:spTree>
     <p:extLst>
       <p:ext uri="{BB962C8B-B14F-4D97-AF65-F5344CB8AC3E}">
-        <p14:creationId xmlns:p14="http://schemas.microsoft.com/office/powerpoint/2010/main" val="811813494"/>
+        <p14:creationId xmlns:p14="http://schemas.microsoft.com/office/powerpoint/2010/main" val="284277467"/>
       </p:ext>
     </p:extLst>
   </p:cSld>
@@ -4114,7 +4114,7 @@
           <p:nvPr/>
         </p:nvPicPr>
         <p:blipFill>
-          <a:blip xmlns:r="http://schemas.openxmlformats.org/officeDocument/2006/relationships" xmlns:a="http://schemas.openxmlformats.org/drawingml/2006/main" r:embed="R6833d191f0594372"/>
+          <a:blip xmlns:r="http://schemas.openxmlformats.org/officeDocument/2006/relationships" xmlns:a="http://schemas.openxmlformats.org/drawingml/2006/main" r:embed="R3f0a576992334df2"/>
           <a:srcRect xmlns:a="http://schemas.openxmlformats.org/drawingml/2006/main" l="0" t="27" r="0" b="27"/>
           <a:stretch xmlns:a="http://schemas.openxmlformats.org/drawingml/2006/main">
             <a:fillRect l="0" t="0" r="0" b="0"/>
@@ -4135,7 +4135,7 @@
           <p:cNvPr id="2" name="">
             <a:extLst xmlns:a="http://schemas.openxmlformats.org/drawingml/2006/main">
               <a:ext uri="{FF2B5EF4-FFF2-40B4-BE49-F238E27FC236}">
-                <a16:creationId xmlns:a16="http://schemas.microsoft.com/office/drawing/2014/main" id="{5992648B-4930-43F3-8E0E-06B7CF15AE7E}"/>
+                <a16:creationId xmlns:a16="http://schemas.microsoft.com/office/drawing/2014/main" id="{8E06CB85-6705-4B96-928C-D919D7030166}"/>
               </a:ext>
             </a:extLst>
           </p:cNvPr>
@@ -4172,7 +4172,7 @@
           <p:cNvPr id="3" name="">
             <a:extLst xmlns:a="http://schemas.openxmlformats.org/drawingml/2006/main">
               <a:ext uri="{FF2B5EF4-FFF2-40B4-BE49-F238E27FC236}">
-                <a16:creationId xmlns:a16="http://schemas.microsoft.com/office/drawing/2014/main" id="{72278044-5352-4FD2-BBBA-9F97CD9B5624}"/>
+                <a16:creationId xmlns:a16="http://schemas.microsoft.com/office/drawing/2014/main" id="{189A1E22-5C96-4900-A134-FC50FDCF9A04}"/>
               </a:ext>
             </a:extLst>
           </p:cNvPr>
@@ -4209,7 +4209,7 @@
           <p:cNvPr id="4" name="">
             <a:extLst xmlns:a="http://schemas.openxmlformats.org/drawingml/2006/main">
               <a:ext uri="{FF2B5EF4-FFF2-40B4-BE49-F238E27FC236}">
-                <a16:creationId xmlns:a16="http://schemas.microsoft.com/office/drawing/2014/main" id="{E58C232F-D8CA-4253-B786-4D4C3F9D5154}"/>
+                <a16:creationId xmlns:a16="http://schemas.microsoft.com/office/drawing/2014/main" id="{99918470-5E0D-4205-8F8D-540708D5B517}"/>
               </a:ext>
             </a:extLst>
           </p:cNvPr>
@@ -4273,7 +4273,7 @@
           <p:cNvPr id="5" name="">
             <a:extLst xmlns:a="http://schemas.openxmlformats.org/drawingml/2006/main">
               <a:ext uri="{FF2B5EF4-FFF2-40B4-BE49-F238E27FC236}">
-                <a16:creationId xmlns:a16="http://schemas.microsoft.com/office/drawing/2014/main" id="{1D96E4C4-76A9-422E-888D-88283419DF02}"/>
+                <a16:creationId xmlns:a16="http://schemas.microsoft.com/office/drawing/2014/main" id="{C55098E1-DE5E-4623-8864-9C5C953CBBDC}"/>
               </a:ext>
             </a:extLst>
           </p:cNvPr>
@@ -4337,7 +4337,7 @@
           <p:cNvPr id="6" name="">
             <a:extLst xmlns:a="http://schemas.openxmlformats.org/drawingml/2006/main">
               <a:ext uri="{FF2B5EF4-FFF2-40B4-BE49-F238E27FC236}">
-                <a16:creationId xmlns:a16="http://schemas.microsoft.com/office/drawing/2014/main" id="{A7EEFA42-C170-4B85-A1C4-3F6D27705E68}"/>
+                <a16:creationId xmlns:a16="http://schemas.microsoft.com/office/drawing/2014/main" id="{6FB3F1E8-CC06-47D8-ADEC-FAFFF6831B23}"/>
               </a:ext>
             </a:extLst>
           </p:cNvPr>
@@ -4401,7 +4401,7 @@
           <p:cNvPr id="7" name="">
             <a:extLst xmlns:a="http://schemas.openxmlformats.org/drawingml/2006/main">
               <a:ext uri="{FF2B5EF4-FFF2-40B4-BE49-F238E27FC236}">
-                <a16:creationId xmlns:a16="http://schemas.microsoft.com/office/drawing/2014/main" id="{4344C310-EEE7-4A72-8AB6-CE0DB97FD802}"/>
+                <a16:creationId xmlns:a16="http://schemas.microsoft.com/office/drawing/2014/main" id="{84786300-1C28-4AC9-B78F-D86CEEB0BF61}"/>
               </a:ext>
             </a:extLst>
           </p:cNvPr>
@@ -4436,7 +4436,7 @@
           <p:cNvPr id="8" name="">
             <a:extLst xmlns:a="http://schemas.openxmlformats.org/drawingml/2006/main">
               <a:ext uri="{FF2B5EF4-FFF2-40B4-BE49-F238E27FC236}">
-                <a16:creationId xmlns:a16="http://schemas.microsoft.com/office/drawing/2014/main" id="{9DFECBE1-E59D-4AA8-B1AF-BD3DF139F81A}"/>
+                <a16:creationId xmlns:a16="http://schemas.microsoft.com/office/drawing/2014/main" id="{55B8936E-393E-4D9E-B142-48CDECB20098}"/>
               </a:ext>
             </a:extLst>
           </p:cNvPr>
@@ -4500,7 +4500,7 @@
           <p:cNvPr id="9" name="">
             <a:extLst xmlns:a="http://schemas.openxmlformats.org/drawingml/2006/main">
               <a:ext uri="{FF2B5EF4-FFF2-40B4-BE49-F238E27FC236}">
-                <a16:creationId xmlns:a16="http://schemas.microsoft.com/office/drawing/2014/main" id="{B63C93CC-2BB3-4F2C-82BA-B9D0F88CE8B6}"/>
+                <a16:creationId xmlns:a16="http://schemas.microsoft.com/office/drawing/2014/main" id="{9CA71586-F12D-4A73-946E-C46FD10FA286}"/>
               </a:ext>
             </a:extLst>
           </p:cNvPr>
@@ -4564,7 +4564,7 @@
           <p:cNvPr id="10" name="">
             <a:extLst xmlns:a="http://schemas.openxmlformats.org/drawingml/2006/main">
               <a:ext uri="{FF2B5EF4-FFF2-40B4-BE49-F238E27FC236}">
-                <a16:creationId xmlns:a16="http://schemas.microsoft.com/office/drawing/2014/main" id="{7D6F15C7-BB03-4088-B35D-1DFB9A170A7F}"/>
+                <a16:creationId xmlns:a16="http://schemas.microsoft.com/office/drawing/2014/main" id="{463FAF0B-B1F2-4B75-9F03-6F5DB09D9626}"/>
               </a:ext>
             </a:extLst>
           </p:cNvPr>
@@ -4597,7 +4597,7 @@
           <p:cNvPr id="11" name="">
             <a:extLst xmlns:a="http://schemas.openxmlformats.org/drawingml/2006/main">
               <a:ext uri="{FF2B5EF4-FFF2-40B4-BE49-F238E27FC236}">
-                <a16:creationId xmlns:a16="http://schemas.microsoft.com/office/drawing/2014/main" id="{4F10F4C1-0C82-443B-93C9-E83C25BE80A5}"/>
+                <a16:creationId xmlns:a16="http://schemas.microsoft.com/office/drawing/2014/main" id="{B555A90C-A1EF-48B8-A9AF-9F63743F8BB8}"/>
               </a:ext>
             </a:extLst>
           </p:cNvPr>
@@ -4632,7 +4632,7 @@
           <p:cNvPr id="12" name="">
             <a:extLst xmlns:a="http://schemas.openxmlformats.org/drawingml/2006/main">
               <a:ext uri="{FF2B5EF4-FFF2-40B4-BE49-F238E27FC236}">
-                <a16:creationId xmlns:a16="http://schemas.microsoft.com/office/drawing/2014/main" id="{2EBA5AD9-EAFC-4ED8-80A4-B82B49B2E1B9}"/>
+                <a16:creationId xmlns:a16="http://schemas.microsoft.com/office/drawing/2014/main" id="{EF720D6E-C8E0-4561-8E45-7D44D2244915}"/>
               </a:ext>
             </a:extLst>
           </p:cNvPr>
@@ -4696,7 +4696,7 @@
           <p:cNvPr id="13" name="">
             <a:extLst xmlns:a="http://schemas.openxmlformats.org/drawingml/2006/main">
               <a:ext uri="{FF2B5EF4-FFF2-40B4-BE49-F238E27FC236}">
-                <a16:creationId xmlns:a16="http://schemas.microsoft.com/office/drawing/2014/main" id="{FD8F34F7-0BD7-484A-AD62-6E0B2FC2F97F}"/>
+                <a16:creationId xmlns:a16="http://schemas.microsoft.com/office/drawing/2014/main" id="{7BF9AAE7-7394-48D6-88A9-A0635ABB89E0}"/>
               </a:ext>
             </a:extLst>
           </p:cNvPr>
@@ -4760,7 +4760,7 @@
           <p:cNvPr id="14" name="">
             <a:extLst xmlns:a="http://schemas.openxmlformats.org/drawingml/2006/main">
               <a:ext uri="{FF2B5EF4-FFF2-40B4-BE49-F238E27FC236}">
-                <a16:creationId xmlns:a16="http://schemas.microsoft.com/office/drawing/2014/main" id="{61EDCEF5-FC7B-447F-ABAC-DB78845F3A7B}"/>
+                <a16:creationId xmlns:a16="http://schemas.microsoft.com/office/drawing/2014/main" id="{81E4AF73-AD98-4942-AF0E-12920DCF42EE}"/>
               </a:ext>
             </a:extLst>
           </p:cNvPr>
@@ -4793,7 +4793,7 @@
           <p:cNvPr id="15" name="">
             <a:extLst xmlns:a="http://schemas.openxmlformats.org/drawingml/2006/main">
               <a:ext uri="{FF2B5EF4-FFF2-40B4-BE49-F238E27FC236}">
-                <a16:creationId xmlns:a16="http://schemas.microsoft.com/office/drawing/2014/main" id="{C29C6717-34F4-4C33-8F6C-2C240DEDF3F5}"/>
+                <a16:creationId xmlns:a16="http://schemas.microsoft.com/office/drawing/2014/main" id="{C308F874-3E14-4111-879F-E01ECE4CEC58}"/>
               </a:ext>
             </a:extLst>
           </p:cNvPr>
@@ -4828,7 +4828,7 @@
           <p:cNvPr id="16" name="">
             <a:extLst xmlns:a="http://schemas.openxmlformats.org/drawingml/2006/main">
               <a:ext uri="{FF2B5EF4-FFF2-40B4-BE49-F238E27FC236}">
-                <a16:creationId xmlns:a16="http://schemas.microsoft.com/office/drawing/2014/main" id="{1E88B56F-ED45-4C70-9110-48DCB96943FB}"/>
+                <a16:creationId xmlns:a16="http://schemas.microsoft.com/office/drawing/2014/main" id="{99CB3AAA-80C3-4FBF-9D14-B8A44A089475}"/>
               </a:ext>
             </a:extLst>
           </p:cNvPr>
@@ -4892,7 +4892,7 @@
           <p:cNvPr id="17" name="">
             <a:extLst xmlns:a="http://schemas.openxmlformats.org/drawingml/2006/main">
               <a:ext uri="{FF2B5EF4-FFF2-40B4-BE49-F238E27FC236}">
-                <a16:creationId xmlns:a16="http://schemas.microsoft.com/office/drawing/2014/main" id="{B0A5B9FF-92A5-4A3B-B16D-C3DAD7B66BA0}"/>
+                <a16:creationId xmlns:a16="http://schemas.microsoft.com/office/drawing/2014/main" id="{1A385279-6D7E-46CA-A766-FE210C77B544}"/>
               </a:ext>
             </a:extLst>
           </p:cNvPr>
@@ -4956,7 +4956,7 @@
           <p:cNvPr id="18" name="">
             <a:extLst xmlns:a="http://schemas.openxmlformats.org/drawingml/2006/main">
               <a:ext uri="{FF2B5EF4-FFF2-40B4-BE49-F238E27FC236}">
-                <a16:creationId xmlns:a16="http://schemas.microsoft.com/office/drawing/2014/main" id="{3D94CE53-79F8-4A15-A896-AF36AD41D085}"/>
+                <a16:creationId xmlns:a16="http://schemas.microsoft.com/office/drawing/2014/main" id="{B0035715-977E-411A-B58D-EE8A1FA9139A}"/>
               </a:ext>
             </a:extLst>
           </p:cNvPr>
@@ -5020,7 +5020,7 @@
           <p:cNvPr id="19" name="">
             <a:extLst xmlns:a="http://schemas.openxmlformats.org/drawingml/2006/main">
               <a:ext uri="{FF2B5EF4-FFF2-40B4-BE49-F238E27FC236}">
-                <a16:creationId xmlns:a16="http://schemas.microsoft.com/office/drawing/2014/main" id="{3A04CB49-020A-4774-BC4E-19A922808F06}"/>
+                <a16:creationId xmlns:a16="http://schemas.microsoft.com/office/drawing/2014/main" id="{1CECE3F3-F419-4420-AEAF-073DCFBE5433}"/>
               </a:ext>
             </a:extLst>
           </p:cNvPr>
@@ -5053,7 +5053,7 @@
           <p:cNvPr id="20" name="">
             <a:extLst xmlns:a="http://schemas.openxmlformats.org/drawingml/2006/main">
               <a:ext uri="{FF2B5EF4-FFF2-40B4-BE49-F238E27FC236}">
-                <a16:creationId xmlns:a16="http://schemas.microsoft.com/office/drawing/2014/main" id="{31269143-D299-4318-A16B-8A79A765A65B}"/>
+                <a16:creationId xmlns:a16="http://schemas.microsoft.com/office/drawing/2014/main" id="{B3974165-1E45-43CA-A420-11192165FDE6}"/>
               </a:ext>
             </a:extLst>
           </p:cNvPr>
@@ -5117,7 +5117,7 @@
           <p:cNvPr id="21" name="">
             <a:extLst xmlns:a="http://schemas.openxmlformats.org/drawingml/2006/main">
               <a:ext uri="{FF2B5EF4-FFF2-40B4-BE49-F238E27FC236}">
-                <a16:creationId xmlns:a16="http://schemas.microsoft.com/office/drawing/2014/main" id="{27CD11E8-431B-4BF4-98A7-893EB030F20A}"/>
+                <a16:creationId xmlns:a16="http://schemas.microsoft.com/office/drawing/2014/main" id="{14568306-060E-453F-8A05-B93CDF886781}"/>
               </a:ext>
             </a:extLst>
           </p:cNvPr>
@@ -5179,7 +5179,7 @@
     </p:spTree>
     <p:extLst>
       <p:ext uri="{BB962C8B-B14F-4D97-AF65-F5344CB8AC3E}">
-        <p14:creationId xmlns:p14="http://schemas.microsoft.com/office/powerpoint/2010/main" val="1866163119"/>
+        <p14:creationId xmlns:p14="http://schemas.microsoft.com/office/powerpoint/2010/main" val="1840097134"/>
       </p:ext>
     </p:extLst>
   </p:cSld>
@@ -5207,7 +5207,7 @@
           <p:nvPr/>
         </p:nvPicPr>
         <p:blipFill>
-          <a:blip xmlns:r="http://schemas.openxmlformats.org/officeDocument/2006/relationships" xmlns:a="http://schemas.openxmlformats.org/drawingml/2006/main" r:embed="Rbe3faf78a6704fac"/>
+          <a:blip xmlns:r="http://schemas.openxmlformats.org/officeDocument/2006/relationships" xmlns:a="http://schemas.openxmlformats.org/drawingml/2006/main" r:embed="Ra52ab9b2a2194d96"/>
           <a:srcRect xmlns:a="http://schemas.openxmlformats.org/drawingml/2006/main" l="0" t="27" r="0" b="27"/>
           <a:stretch xmlns:a="http://schemas.openxmlformats.org/drawingml/2006/main">
             <a:fillRect l="0" t="0" r="0" b="0"/>
@@ -5228,7 +5228,7 @@
           <p:cNvPr id="2" name="">
             <a:extLst xmlns:a="http://schemas.openxmlformats.org/drawingml/2006/main">
               <a:ext uri="{FF2B5EF4-FFF2-40B4-BE49-F238E27FC236}">
-                <a16:creationId xmlns:a16="http://schemas.microsoft.com/office/drawing/2014/main" id="{A1585C32-DAA8-4104-A571-6ED34EA52A05}"/>
+                <a16:creationId xmlns:a16="http://schemas.microsoft.com/office/drawing/2014/main" id="{23BB7DA8-5D6B-434B-920D-6464142DCE33}"/>
               </a:ext>
             </a:extLst>
           </p:cNvPr>
@@ -5265,7 +5265,7 @@
           <p:cNvPr id="3" name="">
             <a:extLst xmlns:a="http://schemas.openxmlformats.org/drawingml/2006/main">
               <a:ext uri="{FF2B5EF4-FFF2-40B4-BE49-F238E27FC236}">
-                <a16:creationId xmlns:a16="http://schemas.microsoft.com/office/drawing/2014/main" id="{02AD9C62-764F-441C-94AE-C9A167751906}"/>
+                <a16:creationId xmlns:a16="http://schemas.microsoft.com/office/drawing/2014/main" id="{47B8C8DF-612D-459D-A9EE-8FB28CAE3878}"/>
               </a:ext>
             </a:extLst>
           </p:cNvPr>
@@ -5302,7 +5302,7 @@
           <p:cNvPr id="4" name="">
             <a:extLst xmlns:a="http://schemas.openxmlformats.org/drawingml/2006/main">
               <a:ext uri="{FF2B5EF4-FFF2-40B4-BE49-F238E27FC236}">
-                <a16:creationId xmlns:a16="http://schemas.microsoft.com/office/drawing/2014/main" id="{1075B96E-9EE2-4FE7-9B45-D8794CAB1DA5}"/>
+                <a16:creationId xmlns:a16="http://schemas.microsoft.com/office/drawing/2014/main" id="{202212C7-C506-4627-83DC-8680E4243F81}"/>
               </a:ext>
             </a:extLst>
           </p:cNvPr>
@@ -5366,7 +5366,7 @@
           <p:cNvPr id="5" name="">
             <a:extLst xmlns:a="http://schemas.openxmlformats.org/drawingml/2006/main">
               <a:ext uri="{FF2B5EF4-FFF2-40B4-BE49-F238E27FC236}">
-                <a16:creationId xmlns:a16="http://schemas.microsoft.com/office/drawing/2014/main" id="{6A5D76A7-6C18-42FA-A83C-B9983C5DFEB8}"/>
+                <a16:creationId xmlns:a16="http://schemas.microsoft.com/office/drawing/2014/main" id="{7AFC0314-8E07-47F7-8364-9235DD1C23BE}"/>
               </a:ext>
             </a:extLst>
           </p:cNvPr>
@@ -5420,7 +5420,7 @@
                 <a:ea typeface="Aptos Display"/>
                 <a:cs typeface="Aptos Display"/>
               </a:rPr>
-              <a:t>寻求资本与伙伴，加速产品、销售和人才</a:t>
+              <a:t>融资 US$500K pre-seed，用于实现付费试点和可重复产品</a:t>
             </a:r>
           </a:p>
         </p:txBody>
@@ -5430,7 +5430,7 @@
           <p:cNvPr id="6" name="">
             <a:extLst xmlns:a="http://schemas.openxmlformats.org/drawingml/2006/main">
               <a:ext uri="{FF2B5EF4-FFF2-40B4-BE49-F238E27FC236}">
-                <a16:creationId xmlns:a16="http://schemas.microsoft.com/office/drawing/2014/main" id="{7CAE36D6-651B-41F4-8F83-1C8B25B9A92B}"/>
+                <a16:creationId xmlns:a16="http://schemas.microsoft.com/office/drawing/2014/main" id="{4CAA66B8-2375-4588-9D04-1C99739E9D9E}"/>
               </a:ext>
             </a:extLst>
           </p:cNvPr>
@@ -5484,7 +5484,7 @@
                 <a:ea typeface="Aptos"/>
                 <a:cs typeface="Aptos"/>
               </a:rPr>
-              <a:t>Tecnotitan 正在从拉丁美洲打造一家拥有全球雄心的多事业部技术公司。</a:t>
+              <a:t>本轮资金支持 18 个月，将 AI 与软件服务转化为自有产品，获得初始客户、可衡量用例和全球商业基础。</a:t>
             </a:r>
           </a:p>
         </p:txBody>
@@ -5494,7 +5494,7 @@
           <p:cNvPr id="7" name="">
             <a:extLst xmlns:a="http://schemas.openxmlformats.org/drawingml/2006/main">
               <a:ext uri="{FF2B5EF4-FFF2-40B4-BE49-F238E27FC236}">
-                <a16:creationId xmlns:a16="http://schemas.microsoft.com/office/drawing/2014/main" id="{3096151D-F6A8-4929-BEE2-B2DF7FEA62B7}"/>
+                <a16:creationId xmlns:a16="http://schemas.microsoft.com/office/drawing/2014/main" id="{DDD815AD-E36D-490F-93D8-0095395C9118}"/>
               </a:ext>
             </a:extLst>
           </p:cNvPr>
@@ -5529,7 +5529,7 @@
           <p:cNvPr id="8" name="">
             <a:extLst xmlns:a="http://schemas.openxmlformats.org/drawingml/2006/main">
               <a:ext uri="{FF2B5EF4-FFF2-40B4-BE49-F238E27FC236}">
-                <a16:creationId xmlns:a16="http://schemas.microsoft.com/office/drawing/2014/main" id="{8843C8AD-D3B8-45F5-89EB-BC2573607132}"/>
+                <a16:creationId xmlns:a16="http://schemas.microsoft.com/office/drawing/2014/main" id="{C0ED5B7F-77C6-44DF-8B56-70B5568B9F54}"/>
               </a:ext>
             </a:extLst>
           </p:cNvPr>
@@ -5593,7 +5593,7 @@
           <p:cNvPr id="9" name="">
             <a:extLst xmlns:a="http://schemas.openxmlformats.org/drawingml/2006/main">
               <a:ext uri="{FF2B5EF4-FFF2-40B4-BE49-F238E27FC236}">
-                <a16:creationId xmlns:a16="http://schemas.microsoft.com/office/drawing/2014/main" id="{80E5C674-E893-449C-A139-3B2A61EA6FDD}"/>
+                <a16:creationId xmlns:a16="http://schemas.microsoft.com/office/drawing/2014/main" id="{744D0611-EE57-48ED-A224-D0B2B19BA319}"/>
               </a:ext>
             </a:extLst>
           </p:cNvPr>
@@ -5647,7 +5647,7 @@
                 <a:ea typeface="Aptos"/>
                 <a:cs typeface="Aptos"/>
               </a:rPr>
-              <a:t>产品</a:t>
+              <a:t>40% 产品与工程</a:t>
             </a:r>
           </a:p>
         </p:txBody>
@@ -5657,7 +5657,7 @@
           <p:cNvPr id="10" name="">
             <a:extLst xmlns:a="http://schemas.openxmlformats.org/drawingml/2006/main">
               <a:ext uri="{FF2B5EF4-FFF2-40B4-BE49-F238E27FC236}">
-                <a16:creationId xmlns:a16="http://schemas.microsoft.com/office/drawing/2014/main" id="{C83BF38A-1CF8-4F29-B08D-FD741E025A6E}"/>
+                <a16:creationId xmlns:a16="http://schemas.microsoft.com/office/drawing/2014/main" id="{7AD06845-DCE8-42FB-BF14-9F768CDF56AB}"/>
               </a:ext>
             </a:extLst>
           </p:cNvPr>
@@ -5692,7 +5692,7 @@
           <p:cNvPr id="11" name="">
             <a:extLst xmlns:a="http://schemas.openxmlformats.org/drawingml/2006/main">
               <a:ext uri="{FF2B5EF4-FFF2-40B4-BE49-F238E27FC236}">
-                <a16:creationId xmlns:a16="http://schemas.microsoft.com/office/drawing/2014/main" id="{A7B00F52-A72A-4569-9BE6-1713A89F6DEF}"/>
+                <a16:creationId xmlns:a16="http://schemas.microsoft.com/office/drawing/2014/main" id="{8D230147-4B8B-43C0-81C6-64B3C8C89F0F}"/>
               </a:ext>
             </a:extLst>
           </p:cNvPr>
@@ -5756,7 +5756,7 @@
           <p:cNvPr id="12" name="">
             <a:extLst xmlns:a="http://schemas.openxmlformats.org/drawingml/2006/main">
               <a:ext uri="{FF2B5EF4-FFF2-40B4-BE49-F238E27FC236}">
-                <a16:creationId xmlns:a16="http://schemas.microsoft.com/office/drawing/2014/main" id="{AC2F0E2D-ED08-4DAA-8258-699DF4C59EDE}"/>
+                <a16:creationId xmlns:a16="http://schemas.microsoft.com/office/drawing/2014/main" id="{0279EE07-9161-4810-B8DC-59B00947882B}"/>
               </a:ext>
             </a:extLst>
           </p:cNvPr>
@@ -5810,7 +5810,7 @@
                 <a:ea typeface="Aptos"/>
                 <a:cs typeface="Aptos"/>
               </a:rPr>
-              <a:t>销售</a:t>
+              <a:t>25% 销售与试点</a:t>
             </a:r>
           </a:p>
         </p:txBody>
@@ -5820,7 +5820,7 @@
           <p:cNvPr id="13" name="">
             <a:extLst xmlns:a="http://schemas.openxmlformats.org/drawingml/2006/main">
               <a:ext uri="{FF2B5EF4-FFF2-40B4-BE49-F238E27FC236}">
-                <a16:creationId xmlns:a16="http://schemas.microsoft.com/office/drawing/2014/main" id="{7B4BEBEA-0034-4B65-BAB8-8EB46E109092}"/>
+                <a16:creationId xmlns:a16="http://schemas.microsoft.com/office/drawing/2014/main" id="{12FC269F-E63C-495D-8731-36A65481B177}"/>
               </a:ext>
             </a:extLst>
           </p:cNvPr>
@@ -5855,7 +5855,7 @@
           <p:cNvPr id="14" name="">
             <a:extLst xmlns:a="http://schemas.openxmlformats.org/drawingml/2006/main">
               <a:ext uri="{FF2B5EF4-FFF2-40B4-BE49-F238E27FC236}">
-                <a16:creationId xmlns:a16="http://schemas.microsoft.com/office/drawing/2014/main" id="{94374183-5C3F-4ECD-8C24-57E184BBDA14}"/>
+                <a16:creationId xmlns:a16="http://schemas.microsoft.com/office/drawing/2014/main" id="{DD477CAC-7ED4-45BE-8720-13107B811818}"/>
               </a:ext>
             </a:extLst>
           </p:cNvPr>
@@ -5919,7 +5919,7 @@
           <p:cNvPr id="15" name="">
             <a:extLst xmlns:a="http://schemas.openxmlformats.org/drawingml/2006/main">
               <a:ext uri="{FF2B5EF4-FFF2-40B4-BE49-F238E27FC236}">
-                <a16:creationId xmlns:a16="http://schemas.microsoft.com/office/drawing/2014/main" id="{4E645C83-FB02-4038-A64A-A70C8EC02E66}"/>
+                <a16:creationId xmlns:a16="http://schemas.microsoft.com/office/drawing/2014/main" id="{764ED13D-9208-4AA5-819F-78704CDABD40}"/>
               </a:ext>
             </a:extLst>
           </p:cNvPr>
@@ -5973,7 +5973,7 @@
                 <a:ea typeface="Aptos"/>
                 <a:cs typeface="Aptos"/>
               </a:rPr>
-              <a:t>技术人才</a:t>
+              <a:t>20% AI 交付</a:t>
             </a:r>
           </a:p>
         </p:txBody>
@@ -5983,7 +5983,7 @@
           <p:cNvPr id="16" name="">
             <a:extLst xmlns:a="http://schemas.openxmlformats.org/drawingml/2006/main">
               <a:ext uri="{FF2B5EF4-FFF2-40B4-BE49-F238E27FC236}">
-                <a16:creationId xmlns:a16="http://schemas.microsoft.com/office/drawing/2014/main" id="{735435C8-7666-472F-BDDC-46FE50E0E322}"/>
+                <a16:creationId xmlns:a16="http://schemas.microsoft.com/office/drawing/2014/main" id="{858474C1-BF79-4142-82DE-65E60E68B7B7}"/>
               </a:ext>
             </a:extLst>
           </p:cNvPr>
@@ -6018,7 +6018,7 @@
           <p:cNvPr id="17" name="">
             <a:extLst xmlns:a="http://schemas.openxmlformats.org/drawingml/2006/main">
               <a:ext uri="{FF2B5EF4-FFF2-40B4-BE49-F238E27FC236}">
-                <a16:creationId xmlns:a16="http://schemas.microsoft.com/office/drawing/2014/main" id="{A3864F9D-FEEE-49A9-8930-86767ADC13D1}"/>
+                <a16:creationId xmlns:a16="http://schemas.microsoft.com/office/drawing/2014/main" id="{9E14A140-D9C7-479A-BCE7-544BDAFF5238}"/>
               </a:ext>
             </a:extLst>
           </p:cNvPr>
@@ -6082,7 +6082,7 @@
           <p:cNvPr id="18" name="">
             <a:extLst xmlns:a="http://schemas.openxmlformats.org/drawingml/2006/main">
               <a:ext uri="{FF2B5EF4-FFF2-40B4-BE49-F238E27FC236}">
-                <a16:creationId xmlns:a16="http://schemas.microsoft.com/office/drawing/2014/main" id="{26911091-D540-4023-9E7C-E73EC83DDE1B}"/>
+                <a16:creationId xmlns:a16="http://schemas.microsoft.com/office/drawing/2014/main" id="{17612BB2-B047-400F-A5C2-769A1D57A577}"/>
               </a:ext>
             </a:extLst>
           </p:cNvPr>
@@ -6136,7 +6136,7 @@
                 <a:ea typeface="Aptos"/>
                 <a:cs typeface="Aptos"/>
               </a:rPr>
-              <a:t>Data room</a:t>
+              <a:t>15% 运营与 data room</a:t>
             </a:r>
           </a:p>
         </p:txBody>
@@ -6146,7 +6146,7 @@
           <p:cNvPr id="19" name="">
             <a:extLst xmlns:a="http://schemas.openxmlformats.org/drawingml/2006/main">
               <a:ext uri="{FF2B5EF4-FFF2-40B4-BE49-F238E27FC236}">
-                <a16:creationId xmlns:a16="http://schemas.microsoft.com/office/drawing/2014/main" id="{5A1AD85B-693E-469D-93EE-8A78A658E081}"/>
+                <a16:creationId xmlns:a16="http://schemas.microsoft.com/office/drawing/2014/main" id="{497D3D0F-FEE3-4EAD-B40E-BD888054A63D}"/>
               </a:ext>
             </a:extLst>
           </p:cNvPr>
@@ -6181,7 +6181,7 @@
           <p:cNvPr id="20" name="">
             <a:extLst xmlns:a="http://schemas.openxmlformats.org/drawingml/2006/main">
               <a:ext uri="{FF2B5EF4-FFF2-40B4-BE49-F238E27FC236}">
-                <a16:creationId xmlns:a16="http://schemas.microsoft.com/office/drawing/2014/main" id="{578E31BB-6649-495A-B0B9-923FA70CC1E0}"/>
+                <a16:creationId xmlns:a16="http://schemas.microsoft.com/office/drawing/2014/main" id="{52BF4426-B8B1-4C92-AB08-CCB27BEBE225}"/>
               </a:ext>
             </a:extLst>
           </p:cNvPr>
@@ -6245,7 +6245,7 @@
           <p:cNvPr id="21" name="">
             <a:extLst xmlns:a="http://schemas.openxmlformats.org/drawingml/2006/main">
               <a:ext uri="{FF2B5EF4-FFF2-40B4-BE49-F238E27FC236}">
-                <a16:creationId xmlns:a16="http://schemas.microsoft.com/office/drawing/2014/main" id="{601B306B-239F-44BE-BB8C-C156E8F62A9B}"/>
+                <a16:creationId xmlns:a16="http://schemas.microsoft.com/office/drawing/2014/main" id="{5FB7B887-A919-4745-A68D-32DE8E213087}"/>
               </a:ext>
             </a:extLst>
           </p:cNvPr>
@@ -6309,7 +6309,7 @@
           <p:cNvPr id="22" name="">
             <a:extLst xmlns:a="http://schemas.openxmlformats.org/drawingml/2006/main">
               <a:ext uri="{FF2B5EF4-FFF2-40B4-BE49-F238E27FC236}">
-                <a16:creationId xmlns:a16="http://schemas.microsoft.com/office/drawing/2014/main" id="{E549BD04-A873-4043-A52B-3BDD0CAA7E96}"/>
+                <a16:creationId xmlns:a16="http://schemas.microsoft.com/office/drawing/2014/main" id="{11BABB01-EDDA-4027-9570-92C25E3536B5}"/>
               </a:ext>
             </a:extLst>
           </p:cNvPr>
@@ -6342,7 +6342,7 @@
           <p:cNvPr id="23" name="">
             <a:extLst xmlns:a="http://schemas.openxmlformats.org/drawingml/2006/main">
               <a:ext uri="{FF2B5EF4-FFF2-40B4-BE49-F238E27FC236}">
-                <a16:creationId xmlns:a16="http://schemas.microsoft.com/office/drawing/2014/main" id="{43F1A2FC-DC9E-47AE-931F-864AF61FB4FB}"/>
+                <a16:creationId xmlns:a16="http://schemas.microsoft.com/office/drawing/2014/main" id="{2DF2F7BE-CABE-4495-BDB3-2E2B07C2F391}"/>
               </a:ext>
             </a:extLst>
           </p:cNvPr>
@@ -6406,7 +6406,7 @@
           <p:cNvPr id="24" name="">
             <a:extLst xmlns:a="http://schemas.openxmlformats.org/drawingml/2006/main">
               <a:ext uri="{FF2B5EF4-FFF2-40B4-BE49-F238E27FC236}">
-                <a16:creationId xmlns:a16="http://schemas.microsoft.com/office/drawing/2014/main" id="{79D0A2BC-BF87-4661-A762-68DE378BFD1F}"/>
+                <a16:creationId xmlns:a16="http://schemas.microsoft.com/office/drawing/2014/main" id="{BBC8A190-4843-4900-8907-FD8F842ACEE3}"/>
               </a:ext>
             </a:extLst>
           </p:cNvPr>
@@ -6468,7 +6468,7 @@
     </p:spTree>
     <p:extLst>
       <p:ext uri="{BB962C8B-B14F-4D97-AF65-F5344CB8AC3E}">
-        <p14:creationId xmlns:p14="http://schemas.microsoft.com/office/powerpoint/2010/main" val="1883928413"/>
+        <p14:creationId xmlns:p14="http://schemas.microsoft.com/office/powerpoint/2010/main" val="883909011"/>
       </p:ext>
     </p:extLst>
   </p:cSld>
@@ -6496,7 +6496,7 @@
           <p:nvPr/>
         </p:nvPicPr>
         <p:blipFill>
-          <a:blip xmlns:r="http://schemas.openxmlformats.org/officeDocument/2006/relationships" xmlns:a="http://schemas.openxmlformats.org/drawingml/2006/main" r:embed="R02a96a14739b4f6e"/>
+          <a:blip xmlns:r="http://schemas.openxmlformats.org/officeDocument/2006/relationships" xmlns:a="http://schemas.openxmlformats.org/drawingml/2006/main" r:embed="Ra1b69453902745dd"/>
           <a:srcRect xmlns:a="http://schemas.openxmlformats.org/drawingml/2006/main" l="0" t="27" r="0" b="27"/>
           <a:stretch xmlns:a="http://schemas.openxmlformats.org/drawingml/2006/main">
             <a:fillRect l="0" t="0" r="0" b="0"/>
@@ -6517,7 +6517,7 @@
           <p:cNvPr id="2" name="">
             <a:extLst xmlns:a="http://schemas.openxmlformats.org/drawingml/2006/main">
               <a:ext uri="{FF2B5EF4-FFF2-40B4-BE49-F238E27FC236}">
-                <a16:creationId xmlns:a16="http://schemas.microsoft.com/office/drawing/2014/main" id="{BF4E9A67-4E71-491E-A329-BF068116D36A}"/>
+                <a16:creationId xmlns:a16="http://schemas.microsoft.com/office/drawing/2014/main" id="{92664275-B6CC-41FF-816E-98187D0F02FB}"/>
               </a:ext>
             </a:extLst>
           </p:cNvPr>
@@ -6554,7 +6554,7 @@
           <p:cNvPr id="3" name="">
             <a:extLst xmlns:a="http://schemas.openxmlformats.org/drawingml/2006/main">
               <a:ext uri="{FF2B5EF4-FFF2-40B4-BE49-F238E27FC236}">
-                <a16:creationId xmlns:a16="http://schemas.microsoft.com/office/drawing/2014/main" id="{49AFD256-30B5-44E5-AE8D-21FF6061F6ED}"/>
+                <a16:creationId xmlns:a16="http://schemas.microsoft.com/office/drawing/2014/main" id="{FF159063-A933-4776-AD89-F0123CD98549}"/>
               </a:ext>
             </a:extLst>
           </p:cNvPr>
@@ -6591,7 +6591,7 @@
           <p:cNvPr id="4" name="">
             <a:extLst xmlns:a="http://schemas.openxmlformats.org/drawingml/2006/main">
               <a:ext uri="{FF2B5EF4-FFF2-40B4-BE49-F238E27FC236}">
-                <a16:creationId xmlns:a16="http://schemas.microsoft.com/office/drawing/2014/main" id="{CCD0F022-DF92-48D7-806C-A783A9B7A24C}"/>
+                <a16:creationId xmlns:a16="http://schemas.microsoft.com/office/drawing/2014/main" id="{378596FB-357D-4922-91B1-A0EF1D833C63}"/>
               </a:ext>
             </a:extLst>
           </p:cNvPr>
@@ -6645,7 +6645,7 @@
                 <a:ea typeface="Aptos"/>
                 <a:cs typeface="Aptos"/>
               </a:rPr>
-              <a:t>投资论点</a:t>
+              <a:t>为什么是现在</a:t>
             </a:r>
           </a:p>
         </p:txBody>
@@ -6655,7 +6655,7 @@
           <p:cNvPr id="5" name="">
             <a:extLst xmlns:a="http://schemas.openxmlformats.org/drawingml/2006/main">
               <a:ext uri="{FF2B5EF4-FFF2-40B4-BE49-F238E27FC236}">
-                <a16:creationId xmlns:a16="http://schemas.microsoft.com/office/drawing/2014/main" id="{378225C3-8465-4BC0-A83B-A1288789E48A}"/>
+                <a16:creationId xmlns:a16="http://schemas.microsoft.com/office/drawing/2014/main" id="{92943472-B788-4101-967D-6C2486D87D81}"/>
               </a:ext>
             </a:extLst>
           </p:cNvPr>
@@ -6709,7 +6709,7 @@
                 <a:ea typeface="Aptos Display"/>
                 <a:cs typeface="Aptos Display"/>
               </a:rPr>
-              <a:t>企业需要建设者，而不仅是顾问</a:t>
+              <a:t>企业需要 AI 落地，而不是更多演示文稿</a:t>
             </a:r>
           </a:p>
         </p:txBody>
@@ -6719,7 +6719,7 @@
           <p:cNvPr id="6" name="">
             <a:extLst xmlns:a="http://schemas.openxmlformats.org/drawingml/2006/main">
               <a:ext uri="{FF2B5EF4-FFF2-40B4-BE49-F238E27FC236}">
-                <a16:creationId xmlns:a16="http://schemas.microsoft.com/office/drawing/2014/main" id="{741A18BC-026E-4CE1-86D4-E7CFEA2C59E1}"/>
+                <a16:creationId xmlns:a16="http://schemas.microsoft.com/office/drawing/2014/main" id="{3FE2E04A-C67A-424F-923A-8F0EAE577721}"/>
               </a:ext>
             </a:extLst>
           </p:cNvPr>
@@ -6773,7 +6773,7 @@
                 <a:ea typeface="Aptos"/>
                 <a:cs typeface="Aptos"/>
               </a:rPr>
-              <a:t>真正的 AI 落地需要诊断、软件、数据、自动化和运营文化作为一个系统协同工作。</a:t>
+              <a:t>AI 采用压力正在进入仍依赖手工流程、分散数据、且缺少内部构建能力的公司。</a:t>
             </a:r>
           </a:p>
         </p:txBody>
@@ -6783,7 +6783,7 @@
           <p:cNvPr id="7" name="">
             <a:extLst xmlns:a="http://schemas.openxmlformats.org/drawingml/2006/main">
               <a:ext uri="{FF2B5EF4-FFF2-40B4-BE49-F238E27FC236}">
-                <a16:creationId xmlns:a16="http://schemas.microsoft.com/office/drawing/2014/main" id="{7E3559C8-388D-46C6-BAE6-B99872CBAC6D}"/>
+                <a16:creationId xmlns:a16="http://schemas.microsoft.com/office/drawing/2014/main" id="{17FB1AA8-7582-4AA1-939D-A34B188A36A3}"/>
               </a:ext>
             </a:extLst>
           </p:cNvPr>
@@ -6818,7 +6818,7 @@
           <p:cNvPr id="8" name="">
             <a:extLst xmlns:a="http://schemas.openxmlformats.org/drawingml/2006/main">
               <a:ext uri="{FF2B5EF4-FFF2-40B4-BE49-F238E27FC236}">
-                <a16:creationId xmlns:a16="http://schemas.microsoft.com/office/drawing/2014/main" id="{63573A56-BDAF-4363-AD92-7B16DAF8DA8E}"/>
+                <a16:creationId xmlns:a16="http://schemas.microsoft.com/office/drawing/2014/main" id="{388CB569-6E77-4615-BD33-F301E6AFF04B}"/>
               </a:ext>
             </a:extLst>
           </p:cNvPr>
@@ -6882,7 +6882,7 @@
           <p:cNvPr id="9" name="">
             <a:extLst xmlns:a="http://schemas.openxmlformats.org/drawingml/2006/main">
               <a:ext uri="{FF2B5EF4-FFF2-40B4-BE49-F238E27FC236}">
-                <a16:creationId xmlns:a16="http://schemas.microsoft.com/office/drawing/2014/main" id="{E7726C9D-3559-44BE-A606-B51987974148}"/>
+                <a16:creationId xmlns:a16="http://schemas.microsoft.com/office/drawing/2014/main" id="{B4167D2C-F65E-4ECE-9B09-75EFB399FE66}"/>
               </a:ext>
             </a:extLst>
           </p:cNvPr>
@@ -6936,7 +6936,7 @@
                 <a:ea typeface="Aptos"/>
                 <a:cs typeface="Aptos"/>
               </a:rPr>
-              <a:t>AI + 软件核心</a:t>
+              <a:t>明确的运营痛点</a:t>
             </a:r>
           </a:p>
         </p:txBody>
@@ -6946,7 +6946,7 @@
           <p:cNvPr id="10" name="">
             <a:extLst xmlns:a="http://schemas.openxmlformats.org/drawingml/2006/main">
               <a:ext uri="{FF2B5EF4-FFF2-40B4-BE49-F238E27FC236}">
-                <a16:creationId xmlns:a16="http://schemas.microsoft.com/office/drawing/2014/main" id="{3EDA95DD-A9C1-4EE0-A582-A9DA24C40299}"/>
+                <a16:creationId xmlns:a16="http://schemas.microsoft.com/office/drawing/2014/main" id="{D8E496F2-53AE-4483-B4E5-7A064EC6964A}"/>
               </a:ext>
             </a:extLst>
           </p:cNvPr>
@@ -6979,7 +6979,7 @@
           <p:cNvPr id="11" name="">
             <a:extLst xmlns:a="http://schemas.openxmlformats.org/drawingml/2006/main">
               <a:ext uri="{FF2B5EF4-FFF2-40B4-BE49-F238E27FC236}">
-                <a16:creationId xmlns:a16="http://schemas.microsoft.com/office/drawing/2014/main" id="{32561FFD-CED7-4DC8-8570-E7A27A970238}"/>
+                <a16:creationId xmlns:a16="http://schemas.microsoft.com/office/drawing/2014/main" id="{368353ED-5C81-4445-BFF2-1A3E3C555425}"/>
               </a:ext>
             </a:extLst>
           </p:cNvPr>
@@ -7014,7 +7014,7 @@
           <p:cNvPr id="12" name="">
             <a:extLst xmlns:a="http://schemas.openxmlformats.org/drawingml/2006/main">
               <a:ext uri="{FF2B5EF4-FFF2-40B4-BE49-F238E27FC236}">
-                <a16:creationId xmlns:a16="http://schemas.microsoft.com/office/drawing/2014/main" id="{234F0130-A618-441B-98EA-AA34AE48E4D6}"/>
+                <a16:creationId xmlns:a16="http://schemas.microsoft.com/office/drawing/2014/main" id="{B692FB15-EAD9-4C86-AA6D-1CF03C60AD6A}"/>
               </a:ext>
             </a:extLst>
           </p:cNvPr>
@@ -7078,7 +7078,7 @@
           <p:cNvPr id="13" name="">
             <a:extLst xmlns:a="http://schemas.openxmlformats.org/drawingml/2006/main">
               <a:ext uri="{FF2B5EF4-FFF2-40B4-BE49-F238E27FC236}">
-                <a16:creationId xmlns:a16="http://schemas.microsoft.com/office/drawing/2014/main" id="{60D61568-B054-46FA-989C-29092A72CB3D}"/>
+                <a16:creationId xmlns:a16="http://schemas.microsoft.com/office/drawing/2014/main" id="{C1D15EF4-4E0D-48F5-A0B0-A883D522E371}"/>
               </a:ext>
             </a:extLst>
           </p:cNvPr>
@@ -7132,7 +7132,7 @@
                 <a:ea typeface="Aptos"/>
                 <a:cs typeface="Aptos"/>
               </a:rPr>
-              <a:t>交互式采用体验</a:t>
+              <a:t>不断增长的 AI 需求</a:t>
             </a:r>
           </a:p>
         </p:txBody>
@@ -7142,7 +7142,7 @@
           <p:cNvPr id="14" name="">
             <a:extLst xmlns:a="http://schemas.openxmlformats.org/drawingml/2006/main">
               <a:ext uri="{FF2B5EF4-FFF2-40B4-BE49-F238E27FC236}">
-                <a16:creationId xmlns:a16="http://schemas.microsoft.com/office/drawing/2014/main" id="{082CFA4F-A50F-4738-AD8F-3D1EEC17E1C4}"/>
+                <a16:creationId xmlns:a16="http://schemas.microsoft.com/office/drawing/2014/main" id="{F4387FAE-0D80-45D5-83DC-FAA1CBE20566}"/>
               </a:ext>
             </a:extLst>
           </p:cNvPr>
@@ -7175,7 +7175,7 @@
           <p:cNvPr id="15" name="">
             <a:extLst xmlns:a="http://schemas.openxmlformats.org/drawingml/2006/main">
               <a:ext uri="{FF2B5EF4-FFF2-40B4-BE49-F238E27FC236}">
-                <a16:creationId xmlns:a16="http://schemas.microsoft.com/office/drawing/2014/main" id="{03F81A94-DEF8-41E4-B96B-8B638A8ED645}"/>
+                <a16:creationId xmlns:a16="http://schemas.microsoft.com/office/drawing/2014/main" id="{9EC2E24F-2B29-4217-B892-907DBD8F6A48}"/>
               </a:ext>
             </a:extLst>
           </p:cNvPr>
@@ -7210,7 +7210,7 @@
           <p:cNvPr id="16" name="">
             <a:extLst xmlns:a="http://schemas.openxmlformats.org/drawingml/2006/main">
               <a:ext uri="{FF2B5EF4-FFF2-40B4-BE49-F238E27FC236}">
-                <a16:creationId xmlns:a16="http://schemas.microsoft.com/office/drawing/2014/main" id="{F8CA525F-17DD-45B0-A692-4AEA8E8B1328}"/>
+                <a16:creationId xmlns:a16="http://schemas.microsoft.com/office/drawing/2014/main" id="{7D389E0A-AB90-4B26-9326-152AD7695299}"/>
               </a:ext>
             </a:extLst>
           </p:cNvPr>
@@ -7274,7 +7274,7 @@
           <p:cNvPr id="17" name="">
             <a:extLst xmlns:a="http://schemas.openxmlformats.org/drawingml/2006/main">
               <a:ext uri="{FF2B5EF4-FFF2-40B4-BE49-F238E27FC236}">
-                <a16:creationId xmlns:a16="http://schemas.microsoft.com/office/drawing/2014/main" id="{91D40333-F1A9-4213-9B85-74826963DF0E}"/>
+                <a16:creationId xmlns:a16="http://schemas.microsoft.com/office/drawing/2014/main" id="{84338269-8055-441F-ADB6-3D19A06811B4}"/>
               </a:ext>
             </a:extLst>
           </p:cNvPr>
@@ -7328,7 +7328,7 @@
                 <a:ea typeface="Aptos"/>
                 <a:cs typeface="Aptos"/>
               </a:rPr>
-              <a:t>机器人与自动化前沿</a:t>
+              <a:t>需要技术执行力</a:t>
             </a:r>
           </a:p>
         </p:txBody>
@@ -7338,7 +7338,7 @@
           <p:cNvPr id="18" name="">
             <a:extLst xmlns:a="http://schemas.openxmlformats.org/drawingml/2006/main">
               <a:ext uri="{FF2B5EF4-FFF2-40B4-BE49-F238E27FC236}">
-                <a16:creationId xmlns:a16="http://schemas.microsoft.com/office/drawing/2014/main" id="{E5BA4EAF-BFB3-4C48-9461-825DE6BC387D}"/>
+                <a16:creationId xmlns:a16="http://schemas.microsoft.com/office/drawing/2014/main" id="{588C3BC2-A3FA-4DE7-8459-F7CEFEFCD418}"/>
               </a:ext>
             </a:extLst>
           </p:cNvPr>
@@ -7402,7 +7402,7 @@
           <p:cNvPr id="19" name="">
             <a:extLst xmlns:a="http://schemas.openxmlformats.org/drawingml/2006/main">
               <a:ext uri="{FF2B5EF4-FFF2-40B4-BE49-F238E27FC236}">
-                <a16:creationId xmlns:a16="http://schemas.microsoft.com/office/drawing/2014/main" id="{E7DA91B0-8CE0-4ECF-B57B-17165B4EAB6A}"/>
+                <a16:creationId xmlns:a16="http://schemas.microsoft.com/office/drawing/2014/main" id="{A4EB12DC-BA2B-41CD-9AB9-27A608916919}"/>
               </a:ext>
             </a:extLst>
           </p:cNvPr>
@@ -7435,7 +7435,7 @@
           <p:cNvPr id="20" name="">
             <a:extLst xmlns:a="http://schemas.openxmlformats.org/drawingml/2006/main">
               <a:ext uri="{FF2B5EF4-FFF2-40B4-BE49-F238E27FC236}">
-                <a16:creationId xmlns:a16="http://schemas.microsoft.com/office/drawing/2014/main" id="{52DCF72B-7A2A-4CE8-86FF-56868075D335}"/>
+                <a16:creationId xmlns:a16="http://schemas.microsoft.com/office/drawing/2014/main" id="{79CFC95D-49F2-45BB-9A30-6A3625B8FBF7}"/>
               </a:ext>
             </a:extLst>
           </p:cNvPr>
@@ -7499,7 +7499,7 @@
           <p:cNvPr id="21" name="">
             <a:extLst xmlns:a="http://schemas.openxmlformats.org/drawingml/2006/main">
               <a:ext uri="{FF2B5EF4-FFF2-40B4-BE49-F238E27FC236}">
-                <a16:creationId xmlns:a16="http://schemas.microsoft.com/office/drawing/2014/main" id="{3B3AC6A3-42DD-4676-B3E2-BEB0AADEA556}"/>
+                <a16:creationId xmlns:a16="http://schemas.microsoft.com/office/drawing/2014/main" id="{970BF2F3-D59E-4F79-B1C7-2DBEC73E2CA3}"/>
               </a:ext>
             </a:extLst>
           </p:cNvPr>
@@ -7561,7 +7561,7 @@
     </p:spTree>
     <p:extLst>
       <p:ext uri="{BB962C8B-B14F-4D97-AF65-F5344CB8AC3E}">
-        <p14:creationId xmlns:p14="http://schemas.microsoft.com/office/powerpoint/2010/main" val="468822055"/>
+        <p14:creationId xmlns:p14="http://schemas.microsoft.com/office/powerpoint/2010/main" val="1609299533"/>
       </p:ext>
     </p:extLst>
   </p:cSld>
@@ -7589,7 +7589,7 @@
           <p:nvPr/>
         </p:nvPicPr>
         <p:blipFill>
-          <a:blip xmlns:r="http://schemas.openxmlformats.org/officeDocument/2006/relationships" xmlns:a="http://schemas.openxmlformats.org/drawingml/2006/main" r:embed="Rcc46ad17ef1c48be"/>
+          <a:blip xmlns:r="http://schemas.openxmlformats.org/officeDocument/2006/relationships" xmlns:a="http://schemas.openxmlformats.org/drawingml/2006/main" r:embed="Rb30337451b864465"/>
           <a:srcRect xmlns:a="http://schemas.openxmlformats.org/drawingml/2006/main" l="0" t="27" r="0" b="27"/>
           <a:stretch xmlns:a="http://schemas.openxmlformats.org/drawingml/2006/main">
             <a:fillRect l="0" t="0" r="0" b="0"/>
@@ -7610,7 +7610,7 @@
           <p:cNvPr id="2" name="">
             <a:extLst xmlns:a="http://schemas.openxmlformats.org/drawingml/2006/main">
               <a:ext uri="{FF2B5EF4-FFF2-40B4-BE49-F238E27FC236}">
-                <a16:creationId xmlns:a16="http://schemas.microsoft.com/office/drawing/2014/main" id="{6D83F3E7-A53D-44E1-8B4D-648BA5FBBF9E}"/>
+                <a16:creationId xmlns:a16="http://schemas.microsoft.com/office/drawing/2014/main" id="{1D99738F-BE86-4446-B010-311EC9793349}"/>
               </a:ext>
             </a:extLst>
           </p:cNvPr>
@@ -7647,7 +7647,7 @@
           <p:cNvPr id="3" name="">
             <a:extLst xmlns:a="http://schemas.openxmlformats.org/drawingml/2006/main">
               <a:ext uri="{FF2B5EF4-FFF2-40B4-BE49-F238E27FC236}">
-                <a16:creationId xmlns:a16="http://schemas.microsoft.com/office/drawing/2014/main" id="{B44BA814-082E-4755-BFBA-9A841072BED9}"/>
+                <a16:creationId xmlns:a16="http://schemas.microsoft.com/office/drawing/2014/main" id="{6A9B52D4-6F83-4FDF-8BC7-D4AE60CA1770}"/>
               </a:ext>
             </a:extLst>
           </p:cNvPr>
@@ -7684,7 +7684,7 @@
           <p:cNvPr id="4" name="">
             <a:extLst xmlns:a="http://schemas.openxmlformats.org/drawingml/2006/main">
               <a:ext uri="{FF2B5EF4-FFF2-40B4-BE49-F238E27FC236}">
-                <a16:creationId xmlns:a16="http://schemas.microsoft.com/office/drawing/2014/main" id="{C534649E-E014-4FC4-9F02-2541E54D8AEE}"/>
+                <a16:creationId xmlns:a16="http://schemas.microsoft.com/office/drawing/2014/main" id="{5167E695-13BE-439F-9701-CE348D2A61ED}"/>
               </a:ext>
             </a:extLst>
           </p:cNvPr>
@@ -7748,7 +7748,7 @@
           <p:cNvPr id="5" name="">
             <a:extLst xmlns:a="http://schemas.openxmlformats.org/drawingml/2006/main">
               <a:ext uri="{FF2B5EF4-FFF2-40B4-BE49-F238E27FC236}">
-                <a16:creationId xmlns:a16="http://schemas.microsoft.com/office/drawing/2014/main" id="{B3E499AD-6D95-4144-9CD7-31E77D43122D}"/>
+                <a16:creationId xmlns:a16="http://schemas.microsoft.com/office/drawing/2014/main" id="{A83CBA5B-6F29-4DE9-A4E5-9B1218AC080C}"/>
               </a:ext>
             </a:extLst>
           </p:cNvPr>
@@ -7812,7 +7812,7 @@
           <p:cNvPr id="6" name="">
             <a:extLst xmlns:a="http://schemas.openxmlformats.org/drawingml/2006/main">
               <a:ext uri="{FF2B5EF4-FFF2-40B4-BE49-F238E27FC236}">
-                <a16:creationId xmlns:a16="http://schemas.microsoft.com/office/drawing/2014/main" id="{4055EA8F-CACD-4530-9620-8E2007BB6D8B}"/>
+                <a16:creationId xmlns:a16="http://schemas.microsoft.com/office/drawing/2014/main" id="{4BA2B5D4-1472-42D8-92A4-AC94220ECB7E}"/>
               </a:ext>
             </a:extLst>
           </p:cNvPr>
@@ -7876,7 +7876,7 @@
           <p:cNvPr id="7" name="">
             <a:extLst xmlns:a="http://schemas.openxmlformats.org/drawingml/2006/main">
               <a:ext uri="{FF2B5EF4-FFF2-40B4-BE49-F238E27FC236}">
-                <a16:creationId xmlns:a16="http://schemas.microsoft.com/office/drawing/2014/main" id="{22CF626C-2D90-4420-9F91-CFD877915130}"/>
+                <a16:creationId xmlns:a16="http://schemas.microsoft.com/office/drawing/2014/main" id="{B02F427E-A2C4-4F3A-B8B4-491361C3D3A6}"/>
               </a:ext>
             </a:extLst>
           </p:cNvPr>
@@ -7911,7 +7911,7 @@
           <p:cNvPr id="8" name="">
             <a:extLst xmlns:a="http://schemas.openxmlformats.org/drawingml/2006/main">
               <a:ext uri="{FF2B5EF4-FFF2-40B4-BE49-F238E27FC236}">
-                <a16:creationId xmlns:a16="http://schemas.microsoft.com/office/drawing/2014/main" id="{E0FE0079-6578-45D0-B0AB-3A585055473F}"/>
+                <a16:creationId xmlns:a16="http://schemas.microsoft.com/office/drawing/2014/main" id="{9700CF9B-229A-4532-819C-1A3224D6AA56}"/>
               </a:ext>
             </a:extLst>
           </p:cNvPr>
@@ -7975,7 +7975,7 @@
           <p:cNvPr id="9" name="">
             <a:extLst xmlns:a="http://schemas.openxmlformats.org/drawingml/2006/main">
               <a:ext uri="{FF2B5EF4-FFF2-40B4-BE49-F238E27FC236}">
-                <a16:creationId xmlns:a16="http://schemas.microsoft.com/office/drawing/2014/main" id="{AA3C8596-5F05-4FE5-A31E-1DCCB8CDEABE}"/>
+                <a16:creationId xmlns:a16="http://schemas.microsoft.com/office/drawing/2014/main" id="{02A6D01F-3109-4D14-8965-C5E525EDBED1}"/>
               </a:ext>
             </a:extLst>
           </p:cNvPr>
@@ -8039,7 +8039,7 @@
           <p:cNvPr id="10" name="">
             <a:extLst xmlns:a="http://schemas.openxmlformats.org/drawingml/2006/main">
               <a:ext uri="{FF2B5EF4-FFF2-40B4-BE49-F238E27FC236}">
-                <a16:creationId xmlns:a16="http://schemas.microsoft.com/office/drawing/2014/main" id="{C71E9771-D393-4111-B316-E11A6D87FE62}"/>
+                <a16:creationId xmlns:a16="http://schemas.microsoft.com/office/drawing/2014/main" id="{7B3CCC86-2A80-4544-839D-58225DA61902}"/>
               </a:ext>
             </a:extLst>
           </p:cNvPr>
@@ -8074,7 +8074,7 @@
           <p:cNvPr id="11" name="">
             <a:extLst xmlns:a="http://schemas.openxmlformats.org/drawingml/2006/main">
               <a:ext uri="{FF2B5EF4-FFF2-40B4-BE49-F238E27FC236}">
-                <a16:creationId xmlns:a16="http://schemas.microsoft.com/office/drawing/2014/main" id="{629F31EE-6369-4F83-9320-38DA4A91862A}"/>
+                <a16:creationId xmlns:a16="http://schemas.microsoft.com/office/drawing/2014/main" id="{A7671250-0AE1-43E1-85C9-9270BD7830B8}"/>
               </a:ext>
             </a:extLst>
           </p:cNvPr>
@@ -8138,7 +8138,7 @@
           <p:cNvPr id="12" name="">
             <a:extLst xmlns:a="http://schemas.openxmlformats.org/drawingml/2006/main">
               <a:ext uri="{FF2B5EF4-FFF2-40B4-BE49-F238E27FC236}">
-                <a16:creationId xmlns:a16="http://schemas.microsoft.com/office/drawing/2014/main" id="{F99CB238-D2AA-4128-A087-D7747C25D588}"/>
+                <a16:creationId xmlns:a16="http://schemas.microsoft.com/office/drawing/2014/main" id="{5F8C59A7-8206-4D1D-8919-B3E229596EC3}"/>
               </a:ext>
             </a:extLst>
           </p:cNvPr>
@@ -8202,7 +8202,7 @@
           <p:cNvPr id="13" name="">
             <a:extLst xmlns:a="http://schemas.openxmlformats.org/drawingml/2006/main">
               <a:ext uri="{FF2B5EF4-FFF2-40B4-BE49-F238E27FC236}">
-                <a16:creationId xmlns:a16="http://schemas.microsoft.com/office/drawing/2014/main" id="{5AAE83ED-25BA-4908-BC7B-3027B53C7159}"/>
+                <a16:creationId xmlns:a16="http://schemas.microsoft.com/office/drawing/2014/main" id="{F5EA5D4F-9728-4090-811D-E8A3607673E5}"/>
               </a:ext>
             </a:extLst>
           </p:cNvPr>
@@ -8237,7 +8237,7 @@
           <p:cNvPr id="14" name="">
             <a:extLst xmlns:a="http://schemas.openxmlformats.org/drawingml/2006/main">
               <a:ext uri="{FF2B5EF4-FFF2-40B4-BE49-F238E27FC236}">
-                <a16:creationId xmlns:a16="http://schemas.microsoft.com/office/drawing/2014/main" id="{70CDFA1C-CF77-47DB-B7A4-55B487749FCD}"/>
+                <a16:creationId xmlns:a16="http://schemas.microsoft.com/office/drawing/2014/main" id="{F4DC2254-3DA4-4747-BEE7-C5BF0068C063}"/>
               </a:ext>
             </a:extLst>
           </p:cNvPr>
@@ -8301,7 +8301,7 @@
           <p:cNvPr id="15" name="">
             <a:extLst xmlns:a="http://schemas.openxmlformats.org/drawingml/2006/main">
               <a:ext uri="{FF2B5EF4-FFF2-40B4-BE49-F238E27FC236}">
-                <a16:creationId xmlns:a16="http://schemas.microsoft.com/office/drawing/2014/main" id="{73EC9C4E-63AE-4792-AE84-303EC98D2B8C}"/>
+                <a16:creationId xmlns:a16="http://schemas.microsoft.com/office/drawing/2014/main" id="{20AFC391-6A1A-4C6D-9E29-CBC964633D49}"/>
               </a:ext>
             </a:extLst>
           </p:cNvPr>
@@ -8365,7 +8365,7 @@
           <p:cNvPr id="16" name="">
             <a:extLst xmlns:a="http://schemas.openxmlformats.org/drawingml/2006/main">
               <a:ext uri="{FF2B5EF4-FFF2-40B4-BE49-F238E27FC236}">
-                <a16:creationId xmlns:a16="http://schemas.microsoft.com/office/drawing/2014/main" id="{91A8C674-B0C5-4BAB-95B6-4669B84099D6}"/>
+                <a16:creationId xmlns:a16="http://schemas.microsoft.com/office/drawing/2014/main" id="{147022C1-ABA5-4859-8AFF-466BD91F64A1}"/>
               </a:ext>
             </a:extLst>
           </p:cNvPr>
@@ -8400,7 +8400,7 @@
           <p:cNvPr id="17" name="">
             <a:extLst xmlns:a="http://schemas.openxmlformats.org/drawingml/2006/main">
               <a:ext uri="{FF2B5EF4-FFF2-40B4-BE49-F238E27FC236}">
-                <a16:creationId xmlns:a16="http://schemas.microsoft.com/office/drawing/2014/main" id="{6A213A15-F52F-42E1-B3BA-81BE23773513}"/>
+                <a16:creationId xmlns:a16="http://schemas.microsoft.com/office/drawing/2014/main" id="{19BFD090-7E13-4ABD-9295-29E0BFBE68C2}"/>
               </a:ext>
             </a:extLst>
           </p:cNvPr>
@@ -8464,7 +8464,7 @@
           <p:cNvPr id="18" name="">
             <a:extLst xmlns:a="http://schemas.openxmlformats.org/drawingml/2006/main">
               <a:ext uri="{FF2B5EF4-FFF2-40B4-BE49-F238E27FC236}">
-                <a16:creationId xmlns:a16="http://schemas.microsoft.com/office/drawing/2014/main" id="{C7CBC78D-6227-401C-AEB7-780DCBB29849}"/>
+                <a16:creationId xmlns:a16="http://schemas.microsoft.com/office/drawing/2014/main" id="{CD3F4FFF-E936-46F1-A53D-F0DC9A613B43}"/>
               </a:ext>
             </a:extLst>
           </p:cNvPr>
@@ -8528,7 +8528,7 @@
           <p:cNvPr id="19" name="">
             <a:extLst xmlns:a="http://schemas.openxmlformats.org/drawingml/2006/main">
               <a:ext uri="{FF2B5EF4-FFF2-40B4-BE49-F238E27FC236}">
-                <a16:creationId xmlns:a16="http://schemas.microsoft.com/office/drawing/2014/main" id="{C13890FF-D84F-4A8C-9CE5-9EC317F74F62}"/>
+                <a16:creationId xmlns:a16="http://schemas.microsoft.com/office/drawing/2014/main" id="{715D9C1F-1F97-41AC-AA3A-038C853D660D}"/>
               </a:ext>
             </a:extLst>
           </p:cNvPr>
@@ -8592,7 +8592,7 @@
           <p:cNvPr id="20" name="">
             <a:extLst xmlns:a="http://schemas.openxmlformats.org/drawingml/2006/main">
               <a:ext uri="{FF2B5EF4-FFF2-40B4-BE49-F238E27FC236}">
-                <a16:creationId xmlns:a16="http://schemas.microsoft.com/office/drawing/2014/main" id="{B3B04D0E-7781-4D03-9870-3DE18A8205F0}"/>
+                <a16:creationId xmlns:a16="http://schemas.microsoft.com/office/drawing/2014/main" id="{B7394F61-3708-4C29-8A17-C28F8253250B}"/>
               </a:ext>
             </a:extLst>
           </p:cNvPr>
@@ -8625,7 +8625,7 @@
           <p:cNvPr id="21" name="">
             <a:extLst xmlns:a="http://schemas.openxmlformats.org/drawingml/2006/main">
               <a:ext uri="{FF2B5EF4-FFF2-40B4-BE49-F238E27FC236}">
-                <a16:creationId xmlns:a16="http://schemas.microsoft.com/office/drawing/2014/main" id="{9509DC06-C5E6-4422-913E-2A83EE0C8774}"/>
+                <a16:creationId xmlns:a16="http://schemas.microsoft.com/office/drawing/2014/main" id="{6A3BEF5D-2036-4FE1-9D07-8DE51EAFEC6C}"/>
               </a:ext>
             </a:extLst>
           </p:cNvPr>
@@ -8658,7 +8658,7 @@
           <p:cNvPr id="22" name="">
             <a:extLst xmlns:a="http://schemas.openxmlformats.org/drawingml/2006/main">
               <a:ext uri="{FF2B5EF4-FFF2-40B4-BE49-F238E27FC236}">
-                <a16:creationId xmlns:a16="http://schemas.microsoft.com/office/drawing/2014/main" id="{8CFDE55C-5DF2-48BA-917D-036B0D919C94}"/>
+                <a16:creationId xmlns:a16="http://schemas.microsoft.com/office/drawing/2014/main" id="{B581D64E-CBD5-472B-B2BF-9E8C14F05922}"/>
               </a:ext>
             </a:extLst>
           </p:cNvPr>
@@ -8722,7 +8722,7 @@
           <p:cNvPr id="23" name="">
             <a:extLst xmlns:a="http://schemas.openxmlformats.org/drawingml/2006/main">
               <a:ext uri="{FF2B5EF4-FFF2-40B4-BE49-F238E27FC236}">
-                <a16:creationId xmlns:a16="http://schemas.microsoft.com/office/drawing/2014/main" id="{BF677AA6-79DE-4293-BDDF-0FF91B5CA489}"/>
+                <a16:creationId xmlns:a16="http://schemas.microsoft.com/office/drawing/2014/main" id="{990ADDDE-7BD1-401E-9F98-57A2194EC82C}"/>
               </a:ext>
             </a:extLst>
           </p:cNvPr>
@@ -8755,7 +8755,7 @@
           <p:cNvPr id="24" name="">
             <a:extLst xmlns:a="http://schemas.openxmlformats.org/drawingml/2006/main">
               <a:ext uri="{FF2B5EF4-FFF2-40B4-BE49-F238E27FC236}">
-                <a16:creationId xmlns:a16="http://schemas.microsoft.com/office/drawing/2014/main" id="{E8D66326-A3AA-40BB-86F8-C77BEC71D6B8}"/>
+                <a16:creationId xmlns:a16="http://schemas.microsoft.com/office/drawing/2014/main" id="{30D75128-0827-48E9-A16F-24C3BBBB9787}"/>
               </a:ext>
             </a:extLst>
           </p:cNvPr>
@@ -8788,7 +8788,7 @@
           <p:cNvPr id="25" name="">
             <a:extLst xmlns:a="http://schemas.openxmlformats.org/drawingml/2006/main">
               <a:ext uri="{FF2B5EF4-FFF2-40B4-BE49-F238E27FC236}">
-                <a16:creationId xmlns:a16="http://schemas.microsoft.com/office/drawing/2014/main" id="{8D362D8F-6995-4521-B487-E740999D587A}"/>
+                <a16:creationId xmlns:a16="http://schemas.microsoft.com/office/drawing/2014/main" id="{69272004-5F98-4674-A5FF-3731FE85EE96}"/>
               </a:ext>
             </a:extLst>
           </p:cNvPr>
@@ -8852,7 +8852,7 @@
           <p:cNvPr id="26" name="">
             <a:extLst xmlns:a="http://schemas.openxmlformats.org/drawingml/2006/main">
               <a:ext uri="{FF2B5EF4-FFF2-40B4-BE49-F238E27FC236}">
-                <a16:creationId xmlns:a16="http://schemas.microsoft.com/office/drawing/2014/main" id="{832983DD-23C8-4461-AB9B-C73C6B77451C}"/>
+                <a16:creationId xmlns:a16="http://schemas.microsoft.com/office/drawing/2014/main" id="{4442DF6E-C099-4A7B-99DC-4EA42798DA37}"/>
               </a:ext>
             </a:extLst>
           </p:cNvPr>
@@ -8885,7 +8885,7 @@
           <p:cNvPr id="27" name="">
             <a:extLst xmlns:a="http://schemas.openxmlformats.org/drawingml/2006/main">
               <a:ext uri="{FF2B5EF4-FFF2-40B4-BE49-F238E27FC236}">
-                <a16:creationId xmlns:a16="http://schemas.microsoft.com/office/drawing/2014/main" id="{9EE03CF5-75CC-4CC6-844F-BAFDBBD531FA}"/>
+                <a16:creationId xmlns:a16="http://schemas.microsoft.com/office/drawing/2014/main" id="{E87A738D-277B-4D17-8216-0470F88D4479}"/>
               </a:ext>
             </a:extLst>
           </p:cNvPr>
@@ -8918,7 +8918,7 @@
           <p:cNvPr id="28" name="">
             <a:extLst xmlns:a="http://schemas.openxmlformats.org/drawingml/2006/main">
               <a:ext uri="{FF2B5EF4-FFF2-40B4-BE49-F238E27FC236}">
-                <a16:creationId xmlns:a16="http://schemas.microsoft.com/office/drawing/2014/main" id="{3BFB7BAA-51F5-4A9E-890F-1DF61EB51093}"/>
+                <a16:creationId xmlns:a16="http://schemas.microsoft.com/office/drawing/2014/main" id="{8148B6D0-F5E2-42C6-99E1-E6BCD5CCE902}"/>
               </a:ext>
             </a:extLst>
           </p:cNvPr>
@@ -8982,7 +8982,7 @@
           <p:cNvPr id="29" name="">
             <a:extLst xmlns:a="http://schemas.openxmlformats.org/drawingml/2006/main">
               <a:ext uri="{FF2B5EF4-FFF2-40B4-BE49-F238E27FC236}">
-                <a16:creationId xmlns:a16="http://schemas.microsoft.com/office/drawing/2014/main" id="{4109C4DD-3D49-4E2F-9577-197A91425708}"/>
+                <a16:creationId xmlns:a16="http://schemas.microsoft.com/office/drawing/2014/main" id="{29D5C669-ADFC-4EC3-B5F9-CB9D325AFE35}"/>
               </a:ext>
             </a:extLst>
           </p:cNvPr>
@@ -9015,7 +9015,7 @@
           <p:cNvPr id="30" name="">
             <a:extLst xmlns:a="http://schemas.openxmlformats.org/drawingml/2006/main">
               <a:ext uri="{FF2B5EF4-FFF2-40B4-BE49-F238E27FC236}">
-                <a16:creationId xmlns:a16="http://schemas.microsoft.com/office/drawing/2014/main" id="{EEE448F0-5FA8-4623-ABC9-19040344E34C}"/>
+                <a16:creationId xmlns:a16="http://schemas.microsoft.com/office/drawing/2014/main" id="{F80E27A4-4648-4F8B-9906-F3DCEC5205B2}"/>
               </a:ext>
             </a:extLst>
           </p:cNvPr>
@@ -9079,7 +9079,7 @@
           <p:cNvPr id="31" name="">
             <a:extLst xmlns:a="http://schemas.openxmlformats.org/drawingml/2006/main">
               <a:ext uri="{FF2B5EF4-FFF2-40B4-BE49-F238E27FC236}">
-                <a16:creationId xmlns:a16="http://schemas.microsoft.com/office/drawing/2014/main" id="{AD6ED152-A882-4151-9E63-7D729A8B5599}"/>
+                <a16:creationId xmlns:a16="http://schemas.microsoft.com/office/drawing/2014/main" id="{86167A26-E3C5-4034-9C41-AFD61ECEAF9B}"/>
               </a:ext>
             </a:extLst>
           </p:cNvPr>
@@ -9141,7 +9141,7 @@
     </p:spTree>
     <p:extLst>
       <p:ext uri="{BB962C8B-B14F-4D97-AF65-F5344CB8AC3E}">
-        <p14:creationId xmlns:p14="http://schemas.microsoft.com/office/powerpoint/2010/main" val="474468551"/>
+        <p14:creationId xmlns:p14="http://schemas.microsoft.com/office/powerpoint/2010/main" val="1847840803"/>
       </p:ext>
     </p:extLst>
   </p:cSld>
@@ -9169,7 +9169,7 @@
           <p:nvPr/>
         </p:nvPicPr>
         <p:blipFill>
-          <a:blip xmlns:r="http://schemas.openxmlformats.org/officeDocument/2006/relationships" xmlns:a="http://schemas.openxmlformats.org/drawingml/2006/main" r:embed="R00976aee9e944d98"/>
+          <a:blip xmlns:r="http://schemas.openxmlformats.org/officeDocument/2006/relationships" xmlns:a="http://schemas.openxmlformats.org/drawingml/2006/main" r:embed="R96cc66bb094c44c9"/>
           <a:srcRect xmlns:a="http://schemas.openxmlformats.org/drawingml/2006/main" l="0" t="7813" r="0" b="7813"/>
           <a:stretch xmlns:a="http://schemas.openxmlformats.org/drawingml/2006/main">
             <a:fillRect l="0" t="0" r="0" b="0"/>
@@ -9190,7 +9190,7 @@
           <p:cNvPr id="2" name="">
             <a:extLst xmlns:a="http://schemas.openxmlformats.org/drawingml/2006/main">
               <a:ext uri="{FF2B5EF4-FFF2-40B4-BE49-F238E27FC236}">
-                <a16:creationId xmlns:a16="http://schemas.microsoft.com/office/drawing/2014/main" id="{3202F8D8-C97E-4067-B22F-AB58496E92DE}"/>
+                <a16:creationId xmlns:a16="http://schemas.microsoft.com/office/drawing/2014/main" id="{B4B1A225-15D0-4509-BFB8-4DDC58694668}"/>
               </a:ext>
             </a:extLst>
           </p:cNvPr>
@@ -9227,7 +9227,7 @@
           <p:cNvPr id="3" name="">
             <a:extLst xmlns:a="http://schemas.openxmlformats.org/drawingml/2006/main">
               <a:ext uri="{FF2B5EF4-FFF2-40B4-BE49-F238E27FC236}">
-                <a16:creationId xmlns:a16="http://schemas.microsoft.com/office/drawing/2014/main" id="{71D132BD-57DE-4FA4-8083-EB25D1D3D21B}"/>
+                <a16:creationId xmlns:a16="http://schemas.microsoft.com/office/drawing/2014/main" id="{FCA3C08F-550D-4E86-B72F-FA1E6E885371}"/>
               </a:ext>
             </a:extLst>
           </p:cNvPr>
@@ -9264,7 +9264,7 @@
           <p:cNvPr id="4" name="">
             <a:extLst xmlns:a="http://schemas.openxmlformats.org/drawingml/2006/main">
               <a:ext uri="{FF2B5EF4-FFF2-40B4-BE49-F238E27FC236}">
-                <a16:creationId xmlns:a16="http://schemas.microsoft.com/office/drawing/2014/main" id="{A37A91AE-A3EE-469B-80C2-5865626F6976}"/>
+                <a16:creationId xmlns:a16="http://schemas.microsoft.com/office/drawing/2014/main" id="{0E906F26-07FF-42AE-A7CA-DCADD1B65DB8}"/>
               </a:ext>
             </a:extLst>
           </p:cNvPr>
@@ -9328,7 +9328,7 @@
           <p:cNvPr id="5" name="">
             <a:extLst xmlns:a="http://schemas.openxmlformats.org/drawingml/2006/main">
               <a:ext uri="{FF2B5EF4-FFF2-40B4-BE49-F238E27FC236}">
-                <a16:creationId xmlns:a16="http://schemas.microsoft.com/office/drawing/2014/main" id="{04D8BCF4-2256-4634-869E-170D2C684850}"/>
+                <a16:creationId xmlns:a16="http://schemas.microsoft.com/office/drawing/2014/main" id="{1AC09A8B-6EF7-4826-8806-8721AC5E8C93}"/>
               </a:ext>
             </a:extLst>
           </p:cNvPr>
@@ -9392,7 +9392,7 @@
           <p:cNvPr id="6" name="">
             <a:extLst xmlns:a="http://schemas.openxmlformats.org/drawingml/2006/main">
               <a:ext uri="{FF2B5EF4-FFF2-40B4-BE49-F238E27FC236}">
-                <a16:creationId xmlns:a16="http://schemas.microsoft.com/office/drawing/2014/main" id="{AA5EB832-407A-4AC0-9B1A-0A9B3C4431E9}"/>
+                <a16:creationId xmlns:a16="http://schemas.microsoft.com/office/drawing/2014/main" id="{3B460059-61FE-4855-B3AA-07A240EB9E37}"/>
               </a:ext>
             </a:extLst>
           </p:cNvPr>
@@ -9456,7 +9456,7 @@
           <p:cNvPr id="7" name="">
             <a:extLst xmlns:a="http://schemas.openxmlformats.org/drawingml/2006/main">
               <a:ext uri="{FF2B5EF4-FFF2-40B4-BE49-F238E27FC236}">
-                <a16:creationId xmlns:a16="http://schemas.microsoft.com/office/drawing/2014/main" id="{99664391-4266-4B9B-A8E6-6A181D1BE39C}"/>
+                <a16:creationId xmlns:a16="http://schemas.microsoft.com/office/drawing/2014/main" id="{04DF2D9C-EA63-4979-AB5D-882859A34F1C}"/>
               </a:ext>
             </a:extLst>
           </p:cNvPr>
@@ -9491,7 +9491,7 @@
           <p:cNvPr id="8" name="">
             <a:extLst xmlns:a="http://schemas.openxmlformats.org/drawingml/2006/main">
               <a:ext uri="{FF2B5EF4-FFF2-40B4-BE49-F238E27FC236}">
-                <a16:creationId xmlns:a16="http://schemas.microsoft.com/office/drawing/2014/main" id="{9BB366D8-E52A-4AD9-81F1-17599E40DB3D}"/>
+                <a16:creationId xmlns:a16="http://schemas.microsoft.com/office/drawing/2014/main" id="{C1ABF835-E56F-441A-864F-6B8BA7C36B63}"/>
               </a:ext>
             </a:extLst>
           </p:cNvPr>
@@ -9555,7 +9555,7 @@
           <p:cNvPr id="9" name="">
             <a:extLst xmlns:a="http://schemas.openxmlformats.org/drawingml/2006/main">
               <a:ext uri="{FF2B5EF4-FFF2-40B4-BE49-F238E27FC236}">
-                <a16:creationId xmlns:a16="http://schemas.microsoft.com/office/drawing/2014/main" id="{B3A38F80-EFBA-4FAA-8658-4CCB721ECBE3}"/>
+                <a16:creationId xmlns:a16="http://schemas.microsoft.com/office/drawing/2014/main" id="{F084F1EC-67AB-419E-9E39-E5052BBDE22F}"/>
               </a:ext>
             </a:extLst>
           </p:cNvPr>
@@ -9619,7 +9619,7 @@
           <p:cNvPr id="10" name="">
             <a:extLst xmlns:a="http://schemas.openxmlformats.org/drawingml/2006/main">
               <a:ext uri="{FF2B5EF4-FFF2-40B4-BE49-F238E27FC236}">
-                <a16:creationId xmlns:a16="http://schemas.microsoft.com/office/drawing/2014/main" id="{48B5EB0F-6BE1-4BC4-A58B-6180D7985867}"/>
+                <a16:creationId xmlns:a16="http://schemas.microsoft.com/office/drawing/2014/main" id="{22B49E6F-7EFB-41DC-A901-D554BD1CD1C9}"/>
               </a:ext>
             </a:extLst>
           </p:cNvPr>
@@ -9652,7 +9652,7 @@
           <p:cNvPr id="11" name="">
             <a:extLst xmlns:a="http://schemas.openxmlformats.org/drawingml/2006/main">
               <a:ext uri="{FF2B5EF4-FFF2-40B4-BE49-F238E27FC236}">
-                <a16:creationId xmlns:a16="http://schemas.microsoft.com/office/drawing/2014/main" id="{336EC82A-A13A-4C23-9BED-9581F86976E0}"/>
+                <a16:creationId xmlns:a16="http://schemas.microsoft.com/office/drawing/2014/main" id="{0CAFCB6E-2086-4FF0-89E7-C0B90D03BB0A}"/>
               </a:ext>
             </a:extLst>
           </p:cNvPr>
@@ -9687,7 +9687,7 @@
           <p:cNvPr id="12" name="">
             <a:extLst xmlns:a="http://schemas.openxmlformats.org/drawingml/2006/main">
               <a:ext uri="{FF2B5EF4-FFF2-40B4-BE49-F238E27FC236}">
-                <a16:creationId xmlns:a16="http://schemas.microsoft.com/office/drawing/2014/main" id="{9DDC05F8-C9C7-4D30-8B59-94C35A1696FE}"/>
+                <a16:creationId xmlns:a16="http://schemas.microsoft.com/office/drawing/2014/main" id="{2FD52610-6AB9-4F26-90B2-0D473FC3CCFC}"/>
               </a:ext>
             </a:extLst>
           </p:cNvPr>
@@ -9751,7 +9751,7 @@
           <p:cNvPr id="13" name="">
             <a:extLst xmlns:a="http://schemas.openxmlformats.org/drawingml/2006/main">
               <a:ext uri="{FF2B5EF4-FFF2-40B4-BE49-F238E27FC236}">
-                <a16:creationId xmlns:a16="http://schemas.microsoft.com/office/drawing/2014/main" id="{B50E603E-D8FA-4BA4-A2BD-EF3D6CDF8EEF}"/>
+                <a16:creationId xmlns:a16="http://schemas.microsoft.com/office/drawing/2014/main" id="{960C1866-52B7-4E22-B08B-5487121B0727}"/>
               </a:ext>
             </a:extLst>
           </p:cNvPr>
@@ -9815,7 +9815,7 @@
           <p:cNvPr id="14" name="">
             <a:extLst xmlns:a="http://schemas.openxmlformats.org/drawingml/2006/main">
               <a:ext uri="{FF2B5EF4-FFF2-40B4-BE49-F238E27FC236}">
-                <a16:creationId xmlns:a16="http://schemas.microsoft.com/office/drawing/2014/main" id="{C9E9D1DB-6202-4885-BEFE-112317C7600B}"/>
+                <a16:creationId xmlns:a16="http://schemas.microsoft.com/office/drawing/2014/main" id="{81CDCA0A-A43A-439E-BC8E-508AFF5BA07E}"/>
               </a:ext>
             </a:extLst>
           </p:cNvPr>
@@ -9848,7 +9848,7 @@
           <p:cNvPr id="15" name="">
             <a:extLst xmlns:a="http://schemas.openxmlformats.org/drawingml/2006/main">
               <a:ext uri="{FF2B5EF4-FFF2-40B4-BE49-F238E27FC236}">
-                <a16:creationId xmlns:a16="http://schemas.microsoft.com/office/drawing/2014/main" id="{4BC7802C-8F77-4234-8E7E-2F1376720475}"/>
+                <a16:creationId xmlns:a16="http://schemas.microsoft.com/office/drawing/2014/main" id="{7FB00F92-C3D9-46DE-A594-799AA729ECA8}"/>
               </a:ext>
             </a:extLst>
           </p:cNvPr>
@@ -9883,7 +9883,7 @@
           <p:cNvPr id="16" name="">
             <a:extLst xmlns:a="http://schemas.openxmlformats.org/drawingml/2006/main">
               <a:ext uri="{FF2B5EF4-FFF2-40B4-BE49-F238E27FC236}">
-                <a16:creationId xmlns:a16="http://schemas.microsoft.com/office/drawing/2014/main" id="{0D644EF4-6E40-4FCA-881F-E3D331ADFDC5}"/>
+                <a16:creationId xmlns:a16="http://schemas.microsoft.com/office/drawing/2014/main" id="{33C99339-A5AB-46ED-BB44-4D96F338529E}"/>
               </a:ext>
             </a:extLst>
           </p:cNvPr>
@@ -9947,7 +9947,7 @@
           <p:cNvPr id="17" name="">
             <a:extLst xmlns:a="http://schemas.openxmlformats.org/drawingml/2006/main">
               <a:ext uri="{FF2B5EF4-FFF2-40B4-BE49-F238E27FC236}">
-                <a16:creationId xmlns:a16="http://schemas.microsoft.com/office/drawing/2014/main" id="{49B21BAD-221D-4048-ACB2-0E0F7511F9E5}"/>
+                <a16:creationId xmlns:a16="http://schemas.microsoft.com/office/drawing/2014/main" id="{C78E58F4-A1C1-4978-83AE-FB07754F9EB4}"/>
               </a:ext>
             </a:extLst>
           </p:cNvPr>
@@ -10011,7 +10011,7 @@
           <p:cNvPr id="18" name="">
             <a:extLst xmlns:a="http://schemas.openxmlformats.org/drawingml/2006/main">
               <a:ext uri="{FF2B5EF4-FFF2-40B4-BE49-F238E27FC236}">
-                <a16:creationId xmlns:a16="http://schemas.microsoft.com/office/drawing/2014/main" id="{E49190D1-0A55-41CB-AEF6-D6F2CF19ED4E}"/>
+                <a16:creationId xmlns:a16="http://schemas.microsoft.com/office/drawing/2014/main" id="{2AD53B78-9275-4AEA-8FDB-C3100B4E4B92}"/>
               </a:ext>
             </a:extLst>
           </p:cNvPr>
@@ -10044,7 +10044,7 @@
           <p:cNvPr id="19" name="">
             <a:extLst xmlns:a="http://schemas.openxmlformats.org/drawingml/2006/main">
               <a:ext uri="{FF2B5EF4-FFF2-40B4-BE49-F238E27FC236}">
-                <a16:creationId xmlns:a16="http://schemas.microsoft.com/office/drawing/2014/main" id="{05A1BD54-4F86-4C06-BFA9-4D69CC2E483B}"/>
+                <a16:creationId xmlns:a16="http://schemas.microsoft.com/office/drawing/2014/main" id="{1EF62E1D-C7EE-497D-9712-02503372DECB}"/>
               </a:ext>
             </a:extLst>
           </p:cNvPr>
@@ -10079,7 +10079,7 @@
           <p:cNvPr id="20" name="">
             <a:extLst xmlns:a="http://schemas.openxmlformats.org/drawingml/2006/main">
               <a:ext uri="{FF2B5EF4-FFF2-40B4-BE49-F238E27FC236}">
-                <a16:creationId xmlns:a16="http://schemas.microsoft.com/office/drawing/2014/main" id="{BFD1A300-DE85-4F2A-B7AF-56765A315FC3}"/>
+                <a16:creationId xmlns:a16="http://schemas.microsoft.com/office/drawing/2014/main" id="{EDBAC93F-413C-4C2A-8422-FE7399B258C3}"/>
               </a:ext>
             </a:extLst>
           </p:cNvPr>
@@ -10143,7 +10143,7 @@
           <p:cNvPr id="21" name="">
             <a:extLst xmlns:a="http://schemas.openxmlformats.org/drawingml/2006/main">
               <a:ext uri="{FF2B5EF4-FFF2-40B4-BE49-F238E27FC236}">
-                <a16:creationId xmlns:a16="http://schemas.microsoft.com/office/drawing/2014/main" id="{DB0117F8-7E65-46D3-A569-D4EAE1AB6414}"/>
+                <a16:creationId xmlns:a16="http://schemas.microsoft.com/office/drawing/2014/main" id="{C447DAB4-2700-4C26-9320-B9350925FF49}"/>
               </a:ext>
             </a:extLst>
           </p:cNvPr>
@@ -10207,7 +10207,7 @@
           <p:cNvPr id="22" name="">
             <a:extLst xmlns:a="http://schemas.openxmlformats.org/drawingml/2006/main">
               <a:ext uri="{FF2B5EF4-FFF2-40B4-BE49-F238E27FC236}">
-                <a16:creationId xmlns:a16="http://schemas.microsoft.com/office/drawing/2014/main" id="{517C848A-2AF2-4439-B8FD-7325BB5B965D}"/>
+                <a16:creationId xmlns:a16="http://schemas.microsoft.com/office/drawing/2014/main" id="{EE37A744-A69B-4B99-8B30-FB253829E021}"/>
               </a:ext>
             </a:extLst>
           </p:cNvPr>
@@ -10271,7 +10271,7 @@
           <p:cNvPr id="23" name="">
             <a:extLst xmlns:a="http://schemas.openxmlformats.org/drawingml/2006/main">
               <a:ext uri="{FF2B5EF4-FFF2-40B4-BE49-F238E27FC236}">
-                <a16:creationId xmlns:a16="http://schemas.microsoft.com/office/drawing/2014/main" id="{0B909933-92A8-4557-92AE-C6CEC920F73C}"/>
+                <a16:creationId xmlns:a16="http://schemas.microsoft.com/office/drawing/2014/main" id="{D2175915-9FA3-4F39-A03D-CFAC0CFC5852}"/>
               </a:ext>
             </a:extLst>
           </p:cNvPr>
@@ -10335,7 +10335,7 @@
           <p:cNvPr id="24" name="">
             <a:extLst xmlns:a="http://schemas.openxmlformats.org/drawingml/2006/main">
               <a:ext uri="{FF2B5EF4-FFF2-40B4-BE49-F238E27FC236}">
-                <a16:creationId xmlns:a16="http://schemas.microsoft.com/office/drawing/2014/main" id="{6A775A63-37B3-4C7B-AF2E-496D339605C3}"/>
+                <a16:creationId xmlns:a16="http://schemas.microsoft.com/office/drawing/2014/main" id="{3B4DCB10-7CAE-436B-A974-AD09E5DE068F}"/>
               </a:ext>
             </a:extLst>
           </p:cNvPr>
@@ -10368,7 +10368,7 @@
           <p:cNvPr id="25" name="">
             <a:extLst xmlns:a="http://schemas.openxmlformats.org/drawingml/2006/main">
               <a:ext uri="{FF2B5EF4-FFF2-40B4-BE49-F238E27FC236}">
-                <a16:creationId xmlns:a16="http://schemas.microsoft.com/office/drawing/2014/main" id="{A3F537F9-4C02-4AD4-B0C0-82A3BE8EED57}"/>
+                <a16:creationId xmlns:a16="http://schemas.microsoft.com/office/drawing/2014/main" id="{CB13B3D6-A324-4283-8854-E17755475821}"/>
               </a:ext>
             </a:extLst>
           </p:cNvPr>
@@ -10432,7 +10432,7 @@
           <p:cNvPr id="26" name="">
             <a:extLst xmlns:a="http://schemas.openxmlformats.org/drawingml/2006/main">
               <a:ext uri="{FF2B5EF4-FFF2-40B4-BE49-F238E27FC236}">
-                <a16:creationId xmlns:a16="http://schemas.microsoft.com/office/drawing/2014/main" id="{EB9C805A-FC05-48FD-BDE8-EB5255823191}"/>
+                <a16:creationId xmlns:a16="http://schemas.microsoft.com/office/drawing/2014/main" id="{8D08A45C-5241-4824-8AA0-B13CBEC095E7}"/>
               </a:ext>
             </a:extLst>
           </p:cNvPr>
@@ -10494,7 +10494,7 @@
     </p:spTree>
     <p:extLst>
       <p:ext uri="{BB962C8B-B14F-4D97-AF65-F5344CB8AC3E}">
-        <p14:creationId xmlns:p14="http://schemas.microsoft.com/office/powerpoint/2010/main" val="770465108"/>
+        <p14:creationId xmlns:p14="http://schemas.microsoft.com/office/powerpoint/2010/main" val="1610096091"/>
       </p:ext>
     </p:extLst>
   </p:cSld>
@@ -10522,7 +10522,7 @@
           <p:nvPr/>
         </p:nvPicPr>
         <p:blipFill>
-          <a:blip xmlns:r="http://schemas.openxmlformats.org/officeDocument/2006/relationships" xmlns:a="http://schemas.openxmlformats.org/drawingml/2006/main" r:embed="Rfe15539d40a244de"/>
+          <a:blip xmlns:r="http://schemas.openxmlformats.org/officeDocument/2006/relationships" xmlns:a="http://schemas.openxmlformats.org/drawingml/2006/main" r:embed="Rf416d03ae1424cfe"/>
           <a:srcRect xmlns:a="http://schemas.openxmlformats.org/drawingml/2006/main" l="0" t="7813" r="0" b="7813"/>
           <a:stretch xmlns:a="http://schemas.openxmlformats.org/drawingml/2006/main">
             <a:fillRect l="0" t="0" r="0" b="0"/>
@@ -10543,7 +10543,7 @@
           <p:cNvPr id="2" name="">
             <a:extLst xmlns:a="http://schemas.openxmlformats.org/drawingml/2006/main">
               <a:ext uri="{FF2B5EF4-FFF2-40B4-BE49-F238E27FC236}">
-                <a16:creationId xmlns:a16="http://schemas.microsoft.com/office/drawing/2014/main" id="{82D02393-3B5D-4AE6-9836-BF0E2A2997D3}"/>
+                <a16:creationId xmlns:a16="http://schemas.microsoft.com/office/drawing/2014/main" id="{ABD6B84C-8B5E-49FA-A244-282EC20DA0E5}"/>
               </a:ext>
             </a:extLst>
           </p:cNvPr>
@@ -10580,7 +10580,7 @@
           <p:cNvPr id="3" name="">
             <a:extLst xmlns:a="http://schemas.openxmlformats.org/drawingml/2006/main">
               <a:ext uri="{FF2B5EF4-FFF2-40B4-BE49-F238E27FC236}">
-                <a16:creationId xmlns:a16="http://schemas.microsoft.com/office/drawing/2014/main" id="{5DA9CF9F-03F2-46A4-9F5C-498AF9D7546C}"/>
+                <a16:creationId xmlns:a16="http://schemas.microsoft.com/office/drawing/2014/main" id="{9010CC6B-6C49-4E4F-B0B0-3B3D78E922FA}"/>
               </a:ext>
             </a:extLst>
           </p:cNvPr>
@@ -10617,7 +10617,7 @@
           <p:cNvPr id="4" name="">
             <a:extLst xmlns:a="http://schemas.openxmlformats.org/drawingml/2006/main">
               <a:ext uri="{FF2B5EF4-FFF2-40B4-BE49-F238E27FC236}">
-                <a16:creationId xmlns:a16="http://schemas.microsoft.com/office/drawing/2014/main" id="{3471139A-C325-4E80-A893-345827DE7573}"/>
+                <a16:creationId xmlns:a16="http://schemas.microsoft.com/office/drawing/2014/main" id="{6B07061B-677A-4C4B-B0F2-1ECDB34FADC0}"/>
               </a:ext>
             </a:extLst>
           </p:cNvPr>
@@ -10681,7 +10681,7 @@
           <p:cNvPr id="5" name="">
             <a:extLst xmlns:a="http://schemas.openxmlformats.org/drawingml/2006/main">
               <a:ext uri="{FF2B5EF4-FFF2-40B4-BE49-F238E27FC236}">
-                <a16:creationId xmlns:a16="http://schemas.microsoft.com/office/drawing/2014/main" id="{52B2FE01-3608-42AB-BFEC-C62A88F3E15E}"/>
+                <a16:creationId xmlns:a16="http://schemas.microsoft.com/office/drawing/2014/main" id="{9FA2D994-04D9-442A-9887-8311FD356ABF}"/>
               </a:ext>
             </a:extLst>
           </p:cNvPr>
@@ -10745,7 +10745,7 @@
           <p:cNvPr id="6" name="">
             <a:extLst xmlns:a="http://schemas.openxmlformats.org/drawingml/2006/main">
               <a:ext uri="{FF2B5EF4-FFF2-40B4-BE49-F238E27FC236}">
-                <a16:creationId xmlns:a16="http://schemas.microsoft.com/office/drawing/2014/main" id="{C3ED975D-1057-454A-91C5-FED1244CF44F}"/>
+                <a16:creationId xmlns:a16="http://schemas.microsoft.com/office/drawing/2014/main" id="{D0589BDF-414B-4289-B39D-C4BAD9865A94}"/>
               </a:ext>
             </a:extLst>
           </p:cNvPr>
@@ -10809,7 +10809,7 @@
           <p:cNvPr id="7" name="">
             <a:extLst xmlns:a="http://schemas.openxmlformats.org/drawingml/2006/main">
               <a:ext uri="{FF2B5EF4-FFF2-40B4-BE49-F238E27FC236}">
-                <a16:creationId xmlns:a16="http://schemas.microsoft.com/office/drawing/2014/main" id="{020D02A4-9E7C-40CB-96CA-CEC6AA8A2528}"/>
+                <a16:creationId xmlns:a16="http://schemas.microsoft.com/office/drawing/2014/main" id="{CDA94480-5B11-4E35-9D4A-CE5B978FE39E}"/>
               </a:ext>
             </a:extLst>
           </p:cNvPr>
@@ -10844,7 +10844,7 @@
           <p:cNvPr id="8" name="">
             <a:extLst xmlns:a="http://schemas.openxmlformats.org/drawingml/2006/main">
               <a:ext uri="{FF2B5EF4-FFF2-40B4-BE49-F238E27FC236}">
-                <a16:creationId xmlns:a16="http://schemas.microsoft.com/office/drawing/2014/main" id="{B68289F4-EEDC-45FC-BEAD-B9E9DF8DAA1A}"/>
+                <a16:creationId xmlns:a16="http://schemas.microsoft.com/office/drawing/2014/main" id="{900966F8-82D2-44F1-A40B-681717A88A60}"/>
               </a:ext>
             </a:extLst>
           </p:cNvPr>
@@ -10908,7 +10908,7 @@
           <p:cNvPr id="9" name="">
             <a:extLst xmlns:a="http://schemas.openxmlformats.org/drawingml/2006/main">
               <a:ext uri="{FF2B5EF4-FFF2-40B4-BE49-F238E27FC236}">
-                <a16:creationId xmlns:a16="http://schemas.microsoft.com/office/drawing/2014/main" id="{40F2D0CA-2A6C-463C-8361-E1E7A98EBB76}"/>
+                <a16:creationId xmlns:a16="http://schemas.microsoft.com/office/drawing/2014/main" id="{E6252AC3-176D-470B-A120-10089C98E5AA}"/>
               </a:ext>
             </a:extLst>
           </p:cNvPr>
@@ -10943,7 +10943,7 @@
           <p:cNvPr id="10" name="">
             <a:extLst xmlns:a="http://schemas.openxmlformats.org/drawingml/2006/main">
               <a:ext uri="{FF2B5EF4-FFF2-40B4-BE49-F238E27FC236}">
-                <a16:creationId xmlns:a16="http://schemas.microsoft.com/office/drawing/2014/main" id="{28A12FB9-6E1A-43F8-9111-C641468A0EFD}"/>
+                <a16:creationId xmlns:a16="http://schemas.microsoft.com/office/drawing/2014/main" id="{5BEB0B74-229E-4E19-BE2B-606936C9CC7D}"/>
               </a:ext>
             </a:extLst>
           </p:cNvPr>
@@ -11007,7 +11007,7 @@
           <p:cNvPr id="11" name="">
             <a:extLst xmlns:a="http://schemas.openxmlformats.org/drawingml/2006/main">
               <a:ext uri="{FF2B5EF4-FFF2-40B4-BE49-F238E27FC236}">
-                <a16:creationId xmlns:a16="http://schemas.microsoft.com/office/drawing/2014/main" id="{6A91E77F-84AD-44F9-AA5B-71C2E332582C}"/>
+                <a16:creationId xmlns:a16="http://schemas.microsoft.com/office/drawing/2014/main" id="{4A3FEDE5-8B6E-417E-B301-6BC613D7ECD7}"/>
               </a:ext>
             </a:extLst>
           </p:cNvPr>
@@ -11042,7 +11042,7 @@
           <p:cNvPr id="12" name="">
             <a:extLst xmlns:a="http://schemas.openxmlformats.org/drawingml/2006/main">
               <a:ext uri="{FF2B5EF4-FFF2-40B4-BE49-F238E27FC236}">
-                <a16:creationId xmlns:a16="http://schemas.microsoft.com/office/drawing/2014/main" id="{343A88CE-7BC9-4985-AE49-1293928E7DB2}"/>
+                <a16:creationId xmlns:a16="http://schemas.microsoft.com/office/drawing/2014/main" id="{70E31BE5-3725-4D0C-A744-F2AED9EA5A06}"/>
               </a:ext>
             </a:extLst>
           </p:cNvPr>
@@ -11106,7 +11106,7 @@
           <p:cNvPr id="13" name="">
             <a:extLst xmlns:a="http://schemas.openxmlformats.org/drawingml/2006/main">
               <a:ext uri="{FF2B5EF4-FFF2-40B4-BE49-F238E27FC236}">
-                <a16:creationId xmlns:a16="http://schemas.microsoft.com/office/drawing/2014/main" id="{EFE7F984-1470-4151-843B-F566B25A377B}"/>
+                <a16:creationId xmlns:a16="http://schemas.microsoft.com/office/drawing/2014/main" id="{47BB7CBD-1D11-47DC-BAB7-660A47529259}"/>
               </a:ext>
             </a:extLst>
           </p:cNvPr>
@@ -11141,7 +11141,7 @@
           <p:cNvPr id="14" name="">
             <a:extLst xmlns:a="http://schemas.openxmlformats.org/drawingml/2006/main">
               <a:ext uri="{FF2B5EF4-FFF2-40B4-BE49-F238E27FC236}">
-                <a16:creationId xmlns:a16="http://schemas.microsoft.com/office/drawing/2014/main" id="{BBDB52CD-E914-4D8B-92E3-5C389E9FE853}"/>
+                <a16:creationId xmlns:a16="http://schemas.microsoft.com/office/drawing/2014/main" id="{0E682CC7-FB06-4B4C-94E4-A5D991B79953}"/>
               </a:ext>
             </a:extLst>
           </p:cNvPr>
@@ -11205,7 +11205,7 @@
           <p:cNvPr id="15" name="">
             <a:extLst xmlns:a="http://schemas.openxmlformats.org/drawingml/2006/main">
               <a:ext uri="{FF2B5EF4-FFF2-40B4-BE49-F238E27FC236}">
-                <a16:creationId xmlns:a16="http://schemas.microsoft.com/office/drawing/2014/main" id="{5BB34903-E3B1-48DB-8D0E-F624000C7D24}"/>
+                <a16:creationId xmlns:a16="http://schemas.microsoft.com/office/drawing/2014/main" id="{5262C778-4467-4A2D-AD7B-17A4D58873B7}"/>
               </a:ext>
             </a:extLst>
           </p:cNvPr>
@@ -11240,7 +11240,7 @@
           <p:cNvPr id="16" name="">
             <a:extLst xmlns:a="http://schemas.openxmlformats.org/drawingml/2006/main">
               <a:ext uri="{FF2B5EF4-FFF2-40B4-BE49-F238E27FC236}">
-                <a16:creationId xmlns:a16="http://schemas.microsoft.com/office/drawing/2014/main" id="{C39A8198-6FAB-4C69-98D3-353FE74A53C0}"/>
+                <a16:creationId xmlns:a16="http://schemas.microsoft.com/office/drawing/2014/main" id="{C151885F-1DD9-46DF-A055-37BF1C111C9F}"/>
               </a:ext>
             </a:extLst>
           </p:cNvPr>
@@ -11304,7 +11304,7 @@
           <p:cNvPr id="17" name="">
             <a:extLst xmlns:a="http://schemas.openxmlformats.org/drawingml/2006/main">
               <a:ext uri="{FF2B5EF4-FFF2-40B4-BE49-F238E27FC236}">
-                <a16:creationId xmlns:a16="http://schemas.microsoft.com/office/drawing/2014/main" id="{0A0AD93D-5D99-46B4-A8B8-62517BC484F1}"/>
+                <a16:creationId xmlns:a16="http://schemas.microsoft.com/office/drawing/2014/main" id="{1E4044BA-7DDC-4603-BF8F-6CE1971561C5}"/>
               </a:ext>
             </a:extLst>
           </p:cNvPr>
@@ -11339,7 +11339,7 @@
           <p:cNvPr id="18" name="">
             <a:extLst xmlns:a="http://schemas.openxmlformats.org/drawingml/2006/main">
               <a:ext uri="{FF2B5EF4-FFF2-40B4-BE49-F238E27FC236}">
-                <a16:creationId xmlns:a16="http://schemas.microsoft.com/office/drawing/2014/main" id="{E02EF24D-F2E7-4BFD-9114-54F31E5E1409}"/>
+                <a16:creationId xmlns:a16="http://schemas.microsoft.com/office/drawing/2014/main" id="{D1C95E65-2EAC-40F2-98A2-AD84A091DCE0}"/>
               </a:ext>
             </a:extLst>
           </p:cNvPr>
@@ -11403,7 +11403,7 @@
           <p:cNvPr id="19" name="">
             <a:extLst xmlns:a="http://schemas.openxmlformats.org/drawingml/2006/main">
               <a:ext uri="{FF2B5EF4-FFF2-40B4-BE49-F238E27FC236}">
-                <a16:creationId xmlns:a16="http://schemas.microsoft.com/office/drawing/2014/main" id="{A7795AFF-5B51-43A3-8AD2-6C3EB846B0C8}"/>
+                <a16:creationId xmlns:a16="http://schemas.microsoft.com/office/drawing/2014/main" id="{EFDA72C0-AE1B-4A4B-BF18-59B18CD80DC1}"/>
               </a:ext>
             </a:extLst>
           </p:cNvPr>
@@ -11467,7 +11467,7 @@
           <p:cNvPr id="20" name="">
             <a:extLst xmlns:a="http://schemas.openxmlformats.org/drawingml/2006/main">
               <a:ext uri="{FF2B5EF4-FFF2-40B4-BE49-F238E27FC236}">
-                <a16:creationId xmlns:a16="http://schemas.microsoft.com/office/drawing/2014/main" id="{1E2BB3C2-0413-4F29-B3BE-2C2AD630AFB3}"/>
+                <a16:creationId xmlns:a16="http://schemas.microsoft.com/office/drawing/2014/main" id="{89EE912C-0331-484F-9C95-D290F9CA2F5F}"/>
               </a:ext>
             </a:extLst>
           </p:cNvPr>
@@ -11500,7 +11500,7 @@
           <p:cNvPr id="21" name="">
             <a:extLst xmlns:a="http://schemas.openxmlformats.org/drawingml/2006/main">
               <a:ext uri="{FF2B5EF4-FFF2-40B4-BE49-F238E27FC236}">
-                <a16:creationId xmlns:a16="http://schemas.microsoft.com/office/drawing/2014/main" id="{BF00351C-BF7B-4A55-AA79-947C17A70BAB}"/>
+                <a16:creationId xmlns:a16="http://schemas.microsoft.com/office/drawing/2014/main" id="{9BC44917-94D5-47F6-B29B-ED1B3E3D96F9}"/>
               </a:ext>
             </a:extLst>
           </p:cNvPr>
@@ -11564,7 +11564,7 @@
           <p:cNvPr id="22" name="">
             <a:extLst xmlns:a="http://schemas.openxmlformats.org/drawingml/2006/main">
               <a:ext uri="{FF2B5EF4-FFF2-40B4-BE49-F238E27FC236}">
-                <a16:creationId xmlns:a16="http://schemas.microsoft.com/office/drawing/2014/main" id="{6A941424-752C-497D-89EC-952A06A10571}"/>
+                <a16:creationId xmlns:a16="http://schemas.microsoft.com/office/drawing/2014/main" id="{89497126-F032-4B7B-8E99-8076D7C45348}"/>
               </a:ext>
             </a:extLst>
           </p:cNvPr>
@@ -11626,7 +11626,7 @@
     </p:spTree>
     <p:extLst>
       <p:ext uri="{BB962C8B-B14F-4D97-AF65-F5344CB8AC3E}">
-        <p14:creationId xmlns:p14="http://schemas.microsoft.com/office/powerpoint/2010/main" val="960102672"/>
+        <p14:creationId xmlns:p14="http://schemas.microsoft.com/office/powerpoint/2010/main" val="645124655"/>
       </p:ext>
     </p:extLst>
   </p:cSld>
@@ -11654,7 +11654,7 @@
           <p:nvPr/>
         </p:nvPicPr>
         <p:blipFill>
-          <a:blip xmlns:r="http://schemas.openxmlformats.org/officeDocument/2006/relationships" xmlns:a="http://schemas.openxmlformats.org/drawingml/2006/main" r:embed="Re45dddc6a0fb4feb"/>
+          <a:blip xmlns:r="http://schemas.openxmlformats.org/officeDocument/2006/relationships" xmlns:a="http://schemas.openxmlformats.org/drawingml/2006/main" r:embed="Reed15a35ac87471f"/>
           <a:srcRect xmlns:a="http://schemas.openxmlformats.org/drawingml/2006/main" l="0" t="27" r="0" b="27"/>
           <a:stretch xmlns:a="http://schemas.openxmlformats.org/drawingml/2006/main">
             <a:fillRect l="0" t="0" r="0" b="0"/>
@@ -11675,7 +11675,7 @@
           <p:cNvPr id="2" name="">
             <a:extLst xmlns:a="http://schemas.openxmlformats.org/drawingml/2006/main">
               <a:ext uri="{FF2B5EF4-FFF2-40B4-BE49-F238E27FC236}">
-                <a16:creationId xmlns:a16="http://schemas.microsoft.com/office/drawing/2014/main" id="{F52CB1C6-9E73-4AA5-888E-CCECF61C5817}"/>
+                <a16:creationId xmlns:a16="http://schemas.microsoft.com/office/drawing/2014/main" id="{38BF9BF7-8609-491E-B2EA-ADFEC6ECB0ED}"/>
               </a:ext>
             </a:extLst>
           </p:cNvPr>
@@ -11712,7 +11712,7 @@
           <p:cNvPr id="3" name="">
             <a:extLst xmlns:a="http://schemas.openxmlformats.org/drawingml/2006/main">
               <a:ext uri="{FF2B5EF4-FFF2-40B4-BE49-F238E27FC236}">
-                <a16:creationId xmlns:a16="http://schemas.microsoft.com/office/drawing/2014/main" id="{7565AE01-00C9-4735-87F0-D3829AFD1199}"/>
+                <a16:creationId xmlns:a16="http://schemas.microsoft.com/office/drawing/2014/main" id="{02315084-624D-454F-B4E6-B55C1550BE43}"/>
               </a:ext>
             </a:extLst>
           </p:cNvPr>
@@ -11749,7 +11749,7 @@
           <p:cNvPr id="4" name="">
             <a:extLst xmlns:a="http://schemas.openxmlformats.org/drawingml/2006/main">
               <a:ext uri="{FF2B5EF4-FFF2-40B4-BE49-F238E27FC236}">
-                <a16:creationId xmlns:a16="http://schemas.microsoft.com/office/drawing/2014/main" id="{4EA1902B-596C-4305-B9CA-AE1B79CFD68F}"/>
+                <a16:creationId xmlns:a16="http://schemas.microsoft.com/office/drawing/2014/main" id="{89E5100E-F548-479B-917C-B43FCC5421FC}"/>
               </a:ext>
             </a:extLst>
           </p:cNvPr>
@@ -11813,7 +11813,7 @@
           <p:cNvPr id="5" name="">
             <a:extLst xmlns:a="http://schemas.openxmlformats.org/drawingml/2006/main">
               <a:ext uri="{FF2B5EF4-FFF2-40B4-BE49-F238E27FC236}">
-                <a16:creationId xmlns:a16="http://schemas.microsoft.com/office/drawing/2014/main" id="{8F2CB12D-6DA2-406D-BFEC-5CD594EAD928}"/>
+                <a16:creationId xmlns:a16="http://schemas.microsoft.com/office/drawing/2014/main" id="{3E43847E-541D-43D2-A75D-E4D78B4E17AA}"/>
               </a:ext>
             </a:extLst>
           </p:cNvPr>
@@ -11877,7 +11877,7 @@
           <p:cNvPr id="6" name="">
             <a:extLst xmlns:a="http://schemas.openxmlformats.org/drawingml/2006/main">
               <a:ext uri="{FF2B5EF4-FFF2-40B4-BE49-F238E27FC236}">
-                <a16:creationId xmlns:a16="http://schemas.microsoft.com/office/drawing/2014/main" id="{979233C0-2C37-4736-AD81-694201E302CD}"/>
+                <a16:creationId xmlns:a16="http://schemas.microsoft.com/office/drawing/2014/main" id="{FC429CDA-A2E0-4307-907E-4A46661982EF}"/>
               </a:ext>
             </a:extLst>
           </p:cNvPr>
@@ -11941,7 +11941,7 @@
           <p:cNvPr id="7" name="">
             <a:extLst xmlns:a="http://schemas.openxmlformats.org/drawingml/2006/main">
               <a:ext uri="{FF2B5EF4-FFF2-40B4-BE49-F238E27FC236}">
-                <a16:creationId xmlns:a16="http://schemas.microsoft.com/office/drawing/2014/main" id="{FCA8966A-88F0-4E3E-BF60-0B0619FA8291}"/>
+                <a16:creationId xmlns:a16="http://schemas.microsoft.com/office/drawing/2014/main" id="{28D797B1-35B1-4281-A2D3-93E40BC08B43}"/>
               </a:ext>
             </a:extLst>
           </p:cNvPr>
@@ -11976,7 +11976,7 @@
           <p:cNvPr id="8" name="">
             <a:extLst xmlns:a="http://schemas.openxmlformats.org/drawingml/2006/main">
               <a:ext uri="{FF2B5EF4-FFF2-40B4-BE49-F238E27FC236}">
-                <a16:creationId xmlns:a16="http://schemas.microsoft.com/office/drawing/2014/main" id="{993E0B1D-C5E3-45A6-9CD1-C41A056E31B4}"/>
+                <a16:creationId xmlns:a16="http://schemas.microsoft.com/office/drawing/2014/main" id="{8DE1299D-CA22-4790-9535-CA4B3E505760}"/>
               </a:ext>
             </a:extLst>
           </p:cNvPr>
@@ -12040,7 +12040,7 @@
           <p:cNvPr id="9" name="">
             <a:extLst xmlns:a="http://schemas.openxmlformats.org/drawingml/2006/main">
               <a:ext uri="{FF2B5EF4-FFF2-40B4-BE49-F238E27FC236}">
-                <a16:creationId xmlns:a16="http://schemas.microsoft.com/office/drawing/2014/main" id="{899604DA-8F34-4F56-A9F4-D6790D0B5835}"/>
+                <a16:creationId xmlns:a16="http://schemas.microsoft.com/office/drawing/2014/main" id="{725F2993-38CC-4ACE-BE38-27673CCBFC09}"/>
               </a:ext>
             </a:extLst>
           </p:cNvPr>
@@ -12104,7 +12104,7 @@
           <p:cNvPr id="10" name="">
             <a:extLst xmlns:a="http://schemas.openxmlformats.org/drawingml/2006/main">
               <a:ext uri="{FF2B5EF4-FFF2-40B4-BE49-F238E27FC236}">
-                <a16:creationId xmlns:a16="http://schemas.microsoft.com/office/drawing/2014/main" id="{3B2820C1-EDA5-4050-A518-C38DBD6B52D6}"/>
+                <a16:creationId xmlns:a16="http://schemas.microsoft.com/office/drawing/2014/main" id="{BC906EDC-F4C4-4C3C-9D07-452D71F1FAD2}"/>
               </a:ext>
             </a:extLst>
           </p:cNvPr>
@@ -12137,7 +12137,7 @@
           <p:cNvPr id="11" name="">
             <a:extLst xmlns:a="http://schemas.openxmlformats.org/drawingml/2006/main">
               <a:ext uri="{FF2B5EF4-FFF2-40B4-BE49-F238E27FC236}">
-                <a16:creationId xmlns:a16="http://schemas.microsoft.com/office/drawing/2014/main" id="{93786B24-70E4-462F-8BBB-C7B83868EE73}"/>
+                <a16:creationId xmlns:a16="http://schemas.microsoft.com/office/drawing/2014/main" id="{6E2D00E7-72F2-48C4-98D8-ADACA596C0AE}"/>
               </a:ext>
             </a:extLst>
           </p:cNvPr>
@@ -12172,7 +12172,7 @@
           <p:cNvPr id="12" name="">
             <a:extLst xmlns:a="http://schemas.openxmlformats.org/drawingml/2006/main">
               <a:ext uri="{FF2B5EF4-FFF2-40B4-BE49-F238E27FC236}">
-                <a16:creationId xmlns:a16="http://schemas.microsoft.com/office/drawing/2014/main" id="{65C0D269-5AD9-47C9-8337-29366003D570}"/>
+                <a16:creationId xmlns:a16="http://schemas.microsoft.com/office/drawing/2014/main" id="{284E8D7D-FF5E-48DD-A452-DE08B0D74614}"/>
               </a:ext>
             </a:extLst>
           </p:cNvPr>
@@ -12236,7 +12236,7 @@
           <p:cNvPr id="13" name="">
             <a:extLst xmlns:a="http://schemas.openxmlformats.org/drawingml/2006/main">
               <a:ext uri="{FF2B5EF4-FFF2-40B4-BE49-F238E27FC236}">
-                <a16:creationId xmlns:a16="http://schemas.microsoft.com/office/drawing/2014/main" id="{07F0180D-152F-4DFA-AAFB-88DBA40908B7}"/>
+                <a16:creationId xmlns:a16="http://schemas.microsoft.com/office/drawing/2014/main" id="{60C2FDE5-317C-486A-9EE7-E15F49241AA1}"/>
               </a:ext>
             </a:extLst>
           </p:cNvPr>
@@ -12300,7 +12300,7 @@
           <p:cNvPr id="14" name="">
             <a:extLst xmlns:a="http://schemas.openxmlformats.org/drawingml/2006/main">
               <a:ext uri="{FF2B5EF4-FFF2-40B4-BE49-F238E27FC236}">
-                <a16:creationId xmlns:a16="http://schemas.microsoft.com/office/drawing/2014/main" id="{10FA502A-8B2C-4770-AA6F-E01961389A6B}"/>
+                <a16:creationId xmlns:a16="http://schemas.microsoft.com/office/drawing/2014/main" id="{0972A75D-8AED-4010-89BB-1B4ADD97835B}"/>
               </a:ext>
             </a:extLst>
           </p:cNvPr>
@@ -12333,7 +12333,7 @@
           <p:cNvPr id="15" name="">
             <a:extLst xmlns:a="http://schemas.openxmlformats.org/drawingml/2006/main">
               <a:ext uri="{FF2B5EF4-FFF2-40B4-BE49-F238E27FC236}">
-                <a16:creationId xmlns:a16="http://schemas.microsoft.com/office/drawing/2014/main" id="{B2849BED-F7C4-43E5-9814-81FAF45D9978}"/>
+                <a16:creationId xmlns:a16="http://schemas.microsoft.com/office/drawing/2014/main" id="{A8913F1D-E31B-4007-9060-519D218B150D}"/>
               </a:ext>
             </a:extLst>
           </p:cNvPr>
@@ -12368,7 +12368,7 @@
           <p:cNvPr id="16" name="">
             <a:extLst xmlns:a="http://schemas.openxmlformats.org/drawingml/2006/main">
               <a:ext uri="{FF2B5EF4-FFF2-40B4-BE49-F238E27FC236}">
-                <a16:creationId xmlns:a16="http://schemas.microsoft.com/office/drawing/2014/main" id="{868AFDA4-191C-4718-A9E9-C21E8442F26C}"/>
+                <a16:creationId xmlns:a16="http://schemas.microsoft.com/office/drawing/2014/main" id="{96135CA3-777C-4D89-8179-3F2AB763FB22}"/>
               </a:ext>
             </a:extLst>
           </p:cNvPr>
@@ -12432,7 +12432,7 @@
           <p:cNvPr id="17" name="">
             <a:extLst xmlns:a="http://schemas.openxmlformats.org/drawingml/2006/main">
               <a:ext uri="{FF2B5EF4-FFF2-40B4-BE49-F238E27FC236}">
-                <a16:creationId xmlns:a16="http://schemas.microsoft.com/office/drawing/2014/main" id="{78B77EB7-72A6-48B7-BBA7-CD37232E4E54}"/>
+                <a16:creationId xmlns:a16="http://schemas.microsoft.com/office/drawing/2014/main" id="{5C2B3B40-CB18-4DB7-B550-F0107FD9DCE3}"/>
               </a:ext>
             </a:extLst>
           </p:cNvPr>
@@ -12496,7 +12496,7 @@
           <p:cNvPr id="18" name="">
             <a:extLst xmlns:a="http://schemas.openxmlformats.org/drawingml/2006/main">
               <a:ext uri="{FF2B5EF4-FFF2-40B4-BE49-F238E27FC236}">
-                <a16:creationId xmlns:a16="http://schemas.microsoft.com/office/drawing/2014/main" id="{99D1BB70-EB5D-4734-AB91-2743617A09A0}"/>
+                <a16:creationId xmlns:a16="http://schemas.microsoft.com/office/drawing/2014/main" id="{B6252B91-D3E4-49B0-B87D-6AA3D3D4513D}"/>
               </a:ext>
             </a:extLst>
           </p:cNvPr>
@@ -12529,7 +12529,7 @@
           <p:cNvPr id="19" name="">
             <a:extLst xmlns:a="http://schemas.openxmlformats.org/drawingml/2006/main">
               <a:ext uri="{FF2B5EF4-FFF2-40B4-BE49-F238E27FC236}">
-                <a16:creationId xmlns:a16="http://schemas.microsoft.com/office/drawing/2014/main" id="{8C7386F9-97ED-4335-B3BC-A8D553F273DB}"/>
+                <a16:creationId xmlns:a16="http://schemas.microsoft.com/office/drawing/2014/main" id="{320A2250-DC9A-4E2C-AA57-57B59603C33E}"/>
               </a:ext>
             </a:extLst>
           </p:cNvPr>
@@ -12564,7 +12564,7 @@
           <p:cNvPr id="20" name="">
             <a:extLst xmlns:a="http://schemas.openxmlformats.org/drawingml/2006/main">
               <a:ext uri="{FF2B5EF4-FFF2-40B4-BE49-F238E27FC236}">
-                <a16:creationId xmlns:a16="http://schemas.microsoft.com/office/drawing/2014/main" id="{D9DA1BC0-44B5-4BF8-9A5D-0BC65AADC39C}"/>
+                <a16:creationId xmlns:a16="http://schemas.microsoft.com/office/drawing/2014/main" id="{65D19527-5368-49E6-AD3E-13A2D69F17CC}"/>
               </a:ext>
             </a:extLst>
           </p:cNvPr>
@@ -12628,7 +12628,7 @@
           <p:cNvPr id="21" name="">
             <a:extLst xmlns:a="http://schemas.openxmlformats.org/drawingml/2006/main">
               <a:ext uri="{FF2B5EF4-FFF2-40B4-BE49-F238E27FC236}">
-                <a16:creationId xmlns:a16="http://schemas.microsoft.com/office/drawing/2014/main" id="{697A86C5-305E-464F-BE0F-636456365285}"/>
+                <a16:creationId xmlns:a16="http://schemas.microsoft.com/office/drawing/2014/main" id="{E1F58A22-C9AD-4AE6-96EF-448EC78C1CE3}"/>
               </a:ext>
             </a:extLst>
           </p:cNvPr>
@@ -12692,7 +12692,7 @@
           <p:cNvPr id="22" name="">
             <a:extLst xmlns:a="http://schemas.openxmlformats.org/drawingml/2006/main">
               <a:ext uri="{FF2B5EF4-FFF2-40B4-BE49-F238E27FC236}">
-                <a16:creationId xmlns:a16="http://schemas.microsoft.com/office/drawing/2014/main" id="{28E3C9B1-BC6F-4124-8F9C-D432FE78FAD6}"/>
+                <a16:creationId xmlns:a16="http://schemas.microsoft.com/office/drawing/2014/main" id="{C929BD58-738D-4AE0-8BDE-0EA4C5EAFF8F}"/>
               </a:ext>
             </a:extLst>
           </p:cNvPr>
@@ -12756,7 +12756,7 @@
           <p:cNvPr id="23" name="">
             <a:extLst xmlns:a="http://schemas.openxmlformats.org/drawingml/2006/main">
               <a:ext uri="{FF2B5EF4-FFF2-40B4-BE49-F238E27FC236}">
-                <a16:creationId xmlns:a16="http://schemas.microsoft.com/office/drawing/2014/main" id="{EA00DA88-F72F-4946-BF92-0D214BE6B9CD}"/>
+                <a16:creationId xmlns:a16="http://schemas.microsoft.com/office/drawing/2014/main" id="{4F66DB60-6C8F-47D7-A7C9-1817F162F975}"/>
               </a:ext>
             </a:extLst>
           </p:cNvPr>
@@ -12820,7 +12820,7 @@
           <p:cNvPr id="24" name="">
             <a:extLst xmlns:a="http://schemas.openxmlformats.org/drawingml/2006/main">
               <a:ext uri="{FF2B5EF4-FFF2-40B4-BE49-F238E27FC236}">
-                <a16:creationId xmlns:a16="http://schemas.microsoft.com/office/drawing/2014/main" id="{0B1F58D3-2949-42F7-A9D4-34806DF66CCC}"/>
+                <a16:creationId xmlns:a16="http://schemas.microsoft.com/office/drawing/2014/main" id="{2314A293-1ECC-40D4-8950-5FE0E66842F5}"/>
               </a:ext>
             </a:extLst>
           </p:cNvPr>
@@ -12853,7 +12853,7 @@
           <p:cNvPr id="25" name="">
             <a:extLst xmlns:a="http://schemas.openxmlformats.org/drawingml/2006/main">
               <a:ext uri="{FF2B5EF4-FFF2-40B4-BE49-F238E27FC236}">
-                <a16:creationId xmlns:a16="http://schemas.microsoft.com/office/drawing/2014/main" id="{5FB1102C-D63D-46DC-A128-EE5E1FDA69C4}"/>
+                <a16:creationId xmlns:a16="http://schemas.microsoft.com/office/drawing/2014/main" id="{2501E337-BF17-4EFB-BA7F-84D74FA074DB}"/>
               </a:ext>
             </a:extLst>
           </p:cNvPr>
@@ -12917,7 +12917,7 @@
           <p:cNvPr id="26" name="">
             <a:extLst xmlns:a="http://schemas.openxmlformats.org/drawingml/2006/main">
               <a:ext uri="{FF2B5EF4-FFF2-40B4-BE49-F238E27FC236}">
-                <a16:creationId xmlns:a16="http://schemas.microsoft.com/office/drawing/2014/main" id="{D60DCF34-6D0B-474E-98EA-D5BABBC6CD8E}"/>
+                <a16:creationId xmlns:a16="http://schemas.microsoft.com/office/drawing/2014/main" id="{67AF2D33-C31D-46BA-A45A-BBEF24CF188E}"/>
               </a:ext>
             </a:extLst>
           </p:cNvPr>
@@ -12979,7 +12979,7 @@
     </p:spTree>
     <p:extLst>
       <p:ext uri="{BB962C8B-B14F-4D97-AF65-F5344CB8AC3E}">
-        <p14:creationId xmlns:p14="http://schemas.microsoft.com/office/powerpoint/2010/main" val="298765322"/>
+        <p14:creationId xmlns:p14="http://schemas.microsoft.com/office/powerpoint/2010/main" val="502383304"/>
       </p:ext>
     </p:extLst>
   </p:cSld>
@@ -13007,7 +13007,7 @@
           <p:nvPr/>
         </p:nvPicPr>
         <p:blipFill>
-          <a:blip xmlns:r="http://schemas.openxmlformats.org/officeDocument/2006/relationships" xmlns:a="http://schemas.openxmlformats.org/drawingml/2006/main" r:embed="R32ab13b23dc34d43"/>
+          <a:blip xmlns:r="http://schemas.openxmlformats.org/officeDocument/2006/relationships" xmlns:a="http://schemas.openxmlformats.org/drawingml/2006/main" r:embed="R9e8034cf3ef544fb"/>
           <a:srcRect xmlns:a="http://schemas.openxmlformats.org/drawingml/2006/main" l="0" t="27" r="0" b="27"/>
           <a:stretch xmlns:a="http://schemas.openxmlformats.org/drawingml/2006/main">
             <a:fillRect l="0" t="0" r="0" b="0"/>
@@ -13028,7 +13028,7 @@
           <p:cNvPr id="2" name="">
             <a:extLst xmlns:a="http://schemas.openxmlformats.org/drawingml/2006/main">
               <a:ext uri="{FF2B5EF4-FFF2-40B4-BE49-F238E27FC236}">
-                <a16:creationId xmlns:a16="http://schemas.microsoft.com/office/drawing/2014/main" id="{6847B571-2D1C-4F36-9793-48FF55183643}"/>
+                <a16:creationId xmlns:a16="http://schemas.microsoft.com/office/drawing/2014/main" id="{3B32C847-0FE7-4FC4-9B29-960208E14BFA}"/>
               </a:ext>
             </a:extLst>
           </p:cNvPr>
@@ -13065,7 +13065,7 @@
           <p:cNvPr id="3" name="">
             <a:extLst xmlns:a="http://schemas.openxmlformats.org/drawingml/2006/main">
               <a:ext uri="{FF2B5EF4-FFF2-40B4-BE49-F238E27FC236}">
-                <a16:creationId xmlns:a16="http://schemas.microsoft.com/office/drawing/2014/main" id="{65B03620-C009-4C24-BAE5-3DB5F56447D6}"/>
+                <a16:creationId xmlns:a16="http://schemas.microsoft.com/office/drawing/2014/main" id="{DC45CF59-C9E1-4AA8-B4A1-EA872BDB4D9A}"/>
               </a:ext>
             </a:extLst>
           </p:cNvPr>
@@ -13102,7 +13102,7 @@
           <p:cNvPr id="4" name="">
             <a:extLst xmlns:a="http://schemas.openxmlformats.org/drawingml/2006/main">
               <a:ext uri="{FF2B5EF4-FFF2-40B4-BE49-F238E27FC236}">
-                <a16:creationId xmlns:a16="http://schemas.microsoft.com/office/drawing/2014/main" id="{F103F9BE-96C1-4426-BE16-163BDD56314C}"/>
+                <a16:creationId xmlns:a16="http://schemas.microsoft.com/office/drawing/2014/main" id="{47CE6A47-D8B2-45B7-83D0-8BE6BF5BEF3B}"/>
               </a:ext>
             </a:extLst>
           </p:cNvPr>
@@ -13166,7 +13166,7 @@
           <p:cNvPr id="5" name="">
             <a:extLst xmlns:a="http://schemas.openxmlformats.org/drawingml/2006/main">
               <a:ext uri="{FF2B5EF4-FFF2-40B4-BE49-F238E27FC236}">
-                <a16:creationId xmlns:a16="http://schemas.microsoft.com/office/drawing/2014/main" id="{987D70A6-2EA7-4FBB-9A6D-E9B5AE5E1687}"/>
+                <a16:creationId xmlns:a16="http://schemas.microsoft.com/office/drawing/2014/main" id="{79AA45CB-3BB3-4FF9-ABA3-E4EE789CB880}"/>
               </a:ext>
             </a:extLst>
           </p:cNvPr>
@@ -13230,7 +13230,7 @@
           <p:cNvPr id="6" name="">
             <a:extLst xmlns:a="http://schemas.openxmlformats.org/drawingml/2006/main">
               <a:ext uri="{FF2B5EF4-FFF2-40B4-BE49-F238E27FC236}">
-                <a16:creationId xmlns:a16="http://schemas.microsoft.com/office/drawing/2014/main" id="{A2F5EC2A-3B41-45FD-92BF-366AAD06E1F8}"/>
+                <a16:creationId xmlns:a16="http://schemas.microsoft.com/office/drawing/2014/main" id="{AB9642A9-A7E9-40D8-953D-FCE5001641B0}"/>
               </a:ext>
             </a:extLst>
           </p:cNvPr>
@@ -13294,7 +13294,7 @@
           <p:cNvPr id="7" name="">
             <a:extLst xmlns:a="http://schemas.openxmlformats.org/drawingml/2006/main">
               <a:ext uri="{FF2B5EF4-FFF2-40B4-BE49-F238E27FC236}">
-                <a16:creationId xmlns:a16="http://schemas.microsoft.com/office/drawing/2014/main" id="{C048BF90-414D-4044-8D52-D7136BE19BC7}"/>
+                <a16:creationId xmlns:a16="http://schemas.microsoft.com/office/drawing/2014/main" id="{17B2C829-0667-4F34-A2A1-5C19B141DA60}"/>
               </a:ext>
             </a:extLst>
           </p:cNvPr>
@@ -13329,7 +13329,7 @@
           <p:cNvPr id="8" name="">
             <a:extLst xmlns:a="http://schemas.openxmlformats.org/drawingml/2006/main">
               <a:ext uri="{FF2B5EF4-FFF2-40B4-BE49-F238E27FC236}">
-                <a16:creationId xmlns:a16="http://schemas.microsoft.com/office/drawing/2014/main" id="{6BE9DB6D-53A7-4C73-B400-A4DF8578D5DF}"/>
+                <a16:creationId xmlns:a16="http://schemas.microsoft.com/office/drawing/2014/main" id="{B0302E2A-CDE2-4090-93F2-93D51A81EA28}"/>
               </a:ext>
             </a:extLst>
           </p:cNvPr>
@@ -13416,7 +13416,7 @@
           <p:cNvPr id="9" name="">
             <a:extLst xmlns:a="http://schemas.openxmlformats.org/drawingml/2006/main">
               <a:ext uri="{FF2B5EF4-FFF2-40B4-BE49-F238E27FC236}">
-                <a16:creationId xmlns:a16="http://schemas.microsoft.com/office/drawing/2014/main" id="{F17C74CB-25D2-471D-93B8-1CD6618AF7C4}"/>
+                <a16:creationId xmlns:a16="http://schemas.microsoft.com/office/drawing/2014/main" id="{4BDAF9C4-E77D-4811-B424-9893F9BBDECE}"/>
               </a:ext>
             </a:extLst>
           </p:cNvPr>
@@ -13480,7 +13480,7 @@
           <p:cNvPr id="10" name="">
             <a:extLst xmlns:a="http://schemas.openxmlformats.org/drawingml/2006/main">
               <a:ext uri="{FF2B5EF4-FFF2-40B4-BE49-F238E27FC236}">
-                <a16:creationId xmlns:a16="http://schemas.microsoft.com/office/drawing/2014/main" id="{6E05543A-2D09-4239-85BD-CA4721B93928}"/>
+                <a16:creationId xmlns:a16="http://schemas.microsoft.com/office/drawing/2014/main" id="{CF1BD341-0CBF-4F6A-81EF-73A4B4F7625C}"/>
               </a:ext>
             </a:extLst>
           </p:cNvPr>
@@ -13515,7 +13515,7 @@
           <p:cNvPr id="11" name="">
             <a:extLst xmlns:a="http://schemas.openxmlformats.org/drawingml/2006/main">
               <a:ext uri="{FF2B5EF4-FFF2-40B4-BE49-F238E27FC236}">
-                <a16:creationId xmlns:a16="http://schemas.microsoft.com/office/drawing/2014/main" id="{CB7BC243-5C64-432B-BBFD-278F0502FF9B}"/>
+                <a16:creationId xmlns:a16="http://schemas.microsoft.com/office/drawing/2014/main" id="{9B43111D-2048-41FE-A922-44B267D6A9E0}"/>
               </a:ext>
             </a:extLst>
           </p:cNvPr>
@@ -13579,7 +13579,7 @@
           <p:cNvPr id="12" name="">
             <a:extLst xmlns:a="http://schemas.openxmlformats.org/drawingml/2006/main">
               <a:ext uri="{FF2B5EF4-FFF2-40B4-BE49-F238E27FC236}">
-                <a16:creationId xmlns:a16="http://schemas.microsoft.com/office/drawing/2014/main" id="{9BBE62B3-5E0F-44EB-B775-322AE0E88FA5}"/>
+                <a16:creationId xmlns:a16="http://schemas.microsoft.com/office/drawing/2014/main" id="{28A6A06B-C917-4493-B454-010384645E62}"/>
               </a:ext>
             </a:extLst>
           </p:cNvPr>
@@ -13612,7 +13612,7 @@
           <p:cNvPr id="13" name="">
             <a:extLst xmlns:a="http://schemas.openxmlformats.org/drawingml/2006/main">
               <a:ext uri="{FF2B5EF4-FFF2-40B4-BE49-F238E27FC236}">
-                <a16:creationId xmlns:a16="http://schemas.microsoft.com/office/drawing/2014/main" id="{E408E9FD-9790-4D75-9881-F5FFF69DC597}"/>
+                <a16:creationId xmlns:a16="http://schemas.microsoft.com/office/drawing/2014/main" id="{81D8F81B-81C4-4783-95D5-0880BC976CCC}"/>
               </a:ext>
             </a:extLst>
           </p:cNvPr>
@@ -13647,7 +13647,7 @@
           <p:cNvPr id="14" name="">
             <a:extLst xmlns:a="http://schemas.openxmlformats.org/drawingml/2006/main">
               <a:ext uri="{FF2B5EF4-FFF2-40B4-BE49-F238E27FC236}">
-                <a16:creationId xmlns:a16="http://schemas.microsoft.com/office/drawing/2014/main" id="{C8A4C12F-F87E-4AB9-8D0C-ADD4555108EB}"/>
+                <a16:creationId xmlns:a16="http://schemas.microsoft.com/office/drawing/2014/main" id="{9B61DD26-84BA-4A47-8E26-AAADF7792D22}"/>
               </a:ext>
             </a:extLst>
           </p:cNvPr>
@@ -13711,7 +13711,7 @@
           <p:cNvPr id="15" name="">
             <a:extLst xmlns:a="http://schemas.openxmlformats.org/drawingml/2006/main">
               <a:ext uri="{FF2B5EF4-FFF2-40B4-BE49-F238E27FC236}">
-                <a16:creationId xmlns:a16="http://schemas.microsoft.com/office/drawing/2014/main" id="{26770352-1AF1-41D6-8955-5A126C8379B5}"/>
+                <a16:creationId xmlns:a16="http://schemas.microsoft.com/office/drawing/2014/main" id="{3A8FA59B-900C-4D35-963C-7D91C9798A33}"/>
               </a:ext>
             </a:extLst>
           </p:cNvPr>
@@ -13744,7 +13744,7 @@
           <p:cNvPr id="16" name="">
             <a:extLst xmlns:a="http://schemas.openxmlformats.org/drawingml/2006/main">
               <a:ext uri="{FF2B5EF4-FFF2-40B4-BE49-F238E27FC236}">
-                <a16:creationId xmlns:a16="http://schemas.microsoft.com/office/drawing/2014/main" id="{6A321B44-40FB-48E8-8643-50DAF36EAD18}"/>
+                <a16:creationId xmlns:a16="http://schemas.microsoft.com/office/drawing/2014/main" id="{63968713-40E8-461D-9E7B-E8055FBC3170}"/>
               </a:ext>
             </a:extLst>
           </p:cNvPr>
@@ -13779,7 +13779,7 @@
           <p:cNvPr id="17" name="">
             <a:extLst xmlns:a="http://schemas.openxmlformats.org/drawingml/2006/main">
               <a:ext uri="{FF2B5EF4-FFF2-40B4-BE49-F238E27FC236}">
-                <a16:creationId xmlns:a16="http://schemas.microsoft.com/office/drawing/2014/main" id="{BC109D90-7C7B-4C16-A529-FCE47096BB50}"/>
+                <a16:creationId xmlns:a16="http://schemas.microsoft.com/office/drawing/2014/main" id="{7F620272-90DA-4505-90A8-C27C6B6A36B3}"/>
               </a:ext>
             </a:extLst>
           </p:cNvPr>
@@ -13843,7 +13843,7 @@
           <p:cNvPr id="18" name="">
             <a:extLst xmlns:a="http://schemas.openxmlformats.org/drawingml/2006/main">
               <a:ext uri="{FF2B5EF4-FFF2-40B4-BE49-F238E27FC236}">
-                <a16:creationId xmlns:a16="http://schemas.microsoft.com/office/drawing/2014/main" id="{7D88DB34-D1D4-425C-B858-E49E57E471C2}"/>
+                <a16:creationId xmlns:a16="http://schemas.microsoft.com/office/drawing/2014/main" id="{FDFBB119-E8C4-4735-96E6-7F75E01C9BD9}"/>
               </a:ext>
             </a:extLst>
           </p:cNvPr>
@@ -13876,7 +13876,7 @@
           <p:cNvPr id="19" name="">
             <a:extLst xmlns:a="http://schemas.openxmlformats.org/drawingml/2006/main">
               <a:ext uri="{FF2B5EF4-FFF2-40B4-BE49-F238E27FC236}">
-                <a16:creationId xmlns:a16="http://schemas.microsoft.com/office/drawing/2014/main" id="{A3D2399E-8215-4C01-A3D2-6C5081410D0F}"/>
+                <a16:creationId xmlns:a16="http://schemas.microsoft.com/office/drawing/2014/main" id="{DD328915-E74A-40AF-9881-DF2E23D4BCF6}"/>
               </a:ext>
             </a:extLst>
           </p:cNvPr>
@@ -13911,7 +13911,7 @@
           <p:cNvPr id="20" name="">
             <a:extLst xmlns:a="http://schemas.openxmlformats.org/drawingml/2006/main">
               <a:ext uri="{FF2B5EF4-FFF2-40B4-BE49-F238E27FC236}">
-                <a16:creationId xmlns:a16="http://schemas.microsoft.com/office/drawing/2014/main" id="{FEE6477E-283A-4283-8473-C6CF828666D4}"/>
+                <a16:creationId xmlns:a16="http://schemas.microsoft.com/office/drawing/2014/main" id="{CB25FE79-CEF9-45CF-AE8E-16B6AAB0B33B}"/>
               </a:ext>
             </a:extLst>
           </p:cNvPr>
@@ -13975,7 +13975,7 @@
           <p:cNvPr id="21" name="">
             <a:extLst xmlns:a="http://schemas.openxmlformats.org/drawingml/2006/main">
               <a:ext uri="{FF2B5EF4-FFF2-40B4-BE49-F238E27FC236}">
-                <a16:creationId xmlns:a16="http://schemas.microsoft.com/office/drawing/2014/main" id="{59B68694-C1F6-4A71-8BF9-51A009A58469}"/>
+                <a16:creationId xmlns:a16="http://schemas.microsoft.com/office/drawing/2014/main" id="{BDC57EBB-20DF-4084-83D5-8AD35C0BF57B}"/>
               </a:ext>
             </a:extLst>
           </p:cNvPr>
@@ -14008,7 +14008,7 @@
           <p:cNvPr id="22" name="">
             <a:extLst xmlns:a="http://schemas.openxmlformats.org/drawingml/2006/main">
               <a:ext uri="{FF2B5EF4-FFF2-40B4-BE49-F238E27FC236}">
-                <a16:creationId xmlns:a16="http://schemas.microsoft.com/office/drawing/2014/main" id="{A3E2BE0D-CF48-4D4E-B8E2-2255AC5759B1}"/>
+                <a16:creationId xmlns:a16="http://schemas.microsoft.com/office/drawing/2014/main" id="{ED2A78F7-E0CD-4332-A46C-7894C328FD40}"/>
               </a:ext>
             </a:extLst>
           </p:cNvPr>
@@ -14043,7 +14043,7 @@
           <p:cNvPr id="23" name="">
             <a:extLst xmlns:a="http://schemas.openxmlformats.org/drawingml/2006/main">
               <a:ext uri="{FF2B5EF4-FFF2-40B4-BE49-F238E27FC236}">
-                <a16:creationId xmlns:a16="http://schemas.microsoft.com/office/drawing/2014/main" id="{11CED9D2-CA2B-41D5-8E76-94FB78DF83B2}"/>
+                <a16:creationId xmlns:a16="http://schemas.microsoft.com/office/drawing/2014/main" id="{FB7D3E73-2E1C-477E-B246-FEBDAC8A2309}"/>
               </a:ext>
             </a:extLst>
           </p:cNvPr>
@@ -14107,7 +14107,7 @@
           <p:cNvPr id="24" name="">
             <a:extLst xmlns:a="http://schemas.openxmlformats.org/drawingml/2006/main">
               <a:ext uri="{FF2B5EF4-FFF2-40B4-BE49-F238E27FC236}">
-                <a16:creationId xmlns:a16="http://schemas.microsoft.com/office/drawing/2014/main" id="{038EA601-0A2E-4C5D-AF84-E3878843DD99}"/>
+                <a16:creationId xmlns:a16="http://schemas.microsoft.com/office/drawing/2014/main" id="{E353E436-5E53-4DEE-933A-5307E544D888}"/>
               </a:ext>
             </a:extLst>
           </p:cNvPr>
@@ -14140,7 +14140,7 @@
           <p:cNvPr id="25" name="">
             <a:extLst xmlns:a="http://schemas.openxmlformats.org/drawingml/2006/main">
               <a:ext uri="{FF2B5EF4-FFF2-40B4-BE49-F238E27FC236}">
-                <a16:creationId xmlns:a16="http://schemas.microsoft.com/office/drawing/2014/main" id="{E658F397-22DD-4F2D-B5E4-1A721BB254D2}"/>
+                <a16:creationId xmlns:a16="http://schemas.microsoft.com/office/drawing/2014/main" id="{8B1E69ED-FC94-411C-A0A0-BC5C26C8789F}"/>
               </a:ext>
             </a:extLst>
           </p:cNvPr>
@@ -14173,7 +14173,7 @@
           <p:cNvPr id="26" name="">
             <a:extLst xmlns:a="http://schemas.openxmlformats.org/drawingml/2006/main">
               <a:ext uri="{FF2B5EF4-FFF2-40B4-BE49-F238E27FC236}">
-                <a16:creationId xmlns:a16="http://schemas.microsoft.com/office/drawing/2014/main" id="{60D68458-5681-4F37-A7AF-3BE3338262E1}"/>
+                <a16:creationId xmlns:a16="http://schemas.microsoft.com/office/drawing/2014/main" id="{69405744-62C6-4401-9ADC-2ACE54D59974}"/>
               </a:ext>
             </a:extLst>
           </p:cNvPr>
@@ -14237,7 +14237,7 @@
           <p:cNvPr id="27" name="">
             <a:extLst xmlns:a="http://schemas.openxmlformats.org/drawingml/2006/main">
               <a:ext uri="{FF2B5EF4-FFF2-40B4-BE49-F238E27FC236}">
-                <a16:creationId xmlns:a16="http://schemas.microsoft.com/office/drawing/2014/main" id="{6F571C89-EB45-4416-8502-5EC3768022EA}"/>
+                <a16:creationId xmlns:a16="http://schemas.microsoft.com/office/drawing/2014/main" id="{9081FA76-6921-4F02-A9C6-6CB77CDFF0EF}"/>
               </a:ext>
             </a:extLst>
           </p:cNvPr>
@@ -14270,7 +14270,7 @@
           <p:cNvPr id="28" name="">
             <a:extLst xmlns:a="http://schemas.openxmlformats.org/drawingml/2006/main">
               <a:ext uri="{FF2B5EF4-FFF2-40B4-BE49-F238E27FC236}">
-                <a16:creationId xmlns:a16="http://schemas.microsoft.com/office/drawing/2014/main" id="{716DFF6B-9AC3-4ED5-8DC4-6A86166D31F4}"/>
+                <a16:creationId xmlns:a16="http://schemas.microsoft.com/office/drawing/2014/main" id="{42B02712-FCCA-411E-8485-32B20943D174}"/>
               </a:ext>
             </a:extLst>
           </p:cNvPr>
@@ -14334,7 +14334,7 @@
           <p:cNvPr id="29" name="">
             <a:extLst xmlns:a="http://schemas.openxmlformats.org/drawingml/2006/main">
               <a:ext uri="{FF2B5EF4-FFF2-40B4-BE49-F238E27FC236}">
-                <a16:creationId xmlns:a16="http://schemas.microsoft.com/office/drawing/2014/main" id="{08A63711-ED23-4178-A14C-E7CE1BB86778}"/>
+                <a16:creationId xmlns:a16="http://schemas.microsoft.com/office/drawing/2014/main" id="{00D6B02F-B875-4C01-B157-1973084421C5}"/>
               </a:ext>
             </a:extLst>
           </p:cNvPr>
@@ -14396,7 +14396,7 @@
     </p:spTree>
     <p:extLst>
       <p:ext uri="{BB962C8B-B14F-4D97-AF65-F5344CB8AC3E}">
-        <p14:creationId xmlns:p14="http://schemas.microsoft.com/office/powerpoint/2010/main" val="1081538512"/>
+        <p14:creationId xmlns:p14="http://schemas.microsoft.com/office/powerpoint/2010/main" val="1367165909"/>
       </p:ext>
     </p:extLst>
   </p:cSld>
@@ -14424,7 +14424,7 @@
           <p:nvPr/>
         </p:nvPicPr>
         <p:blipFill>
-          <a:blip xmlns:r="http://schemas.openxmlformats.org/officeDocument/2006/relationships" xmlns:a="http://schemas.openxmlformats.org/drawingml/2006/main" r:embed="Rc80014b47d6947aa"/>
+          <a:blip xmlns:r="http://schemas.openxmlformats.org/officeDocument/2006/relationships" xmlns:a="http://schemas.openxmlformats.org/drawingml/2006/main" r:embed="R0c5b9128bc8b4f46"/>
           <a:srcRect xmlns:a="http://schemas.openxmlformats.org/drawingml/2006/main" l="0" t="27" r="0" b="27"/>
           <a:stretch xmlns:a="http://schemas.openxmlformats.org/drawingml/2006/main">
             <a:fillRect l="0" t="0" r="0" b="0"/>
@@ -14445,7 +14445,7 @@
           <p:cNvPr id="2" name="">
             <a:extLst xmlns:a="http://schemas.openxmlformats.org/drawingml/2006/main">
               <a:ext uri="{FF2B5EF4-FFF2-40B4-BE49-F238E27FC236}">
-                <a16:creationId xmlns:a16="http://schemas.microsoft.com/office/drawing/2014/main" id="{F670DF6C-DD2D-4F8D-92CA-F54EC605AA75}"/>
+                <a16:creationId xmlns:a16="http://schemas.microsoft.com/office/drawing/2014/main" id="{B94573E4-8729-4D4E-BA3B-DAC0B05142E7}"/>
               </a:ext>
             </a:extLst>
           </p:cNvPr>
@@ -14482,7 +14482,7 @@
           <p:cNvPr id="3" name="">
             <a:extLst xmlns:a="http://schemas.openxmlformats.org/drawingml/2006/main">
               <a:ext uri="{FF2B5EF4-FFF2-40B4-BE49-F238E27FC236}">
-                <a16:creationId xmlns:a16="http://schemas.microsoft.com/office/drawing/2014/main" id="{BC931BA2-4131-4B71-9F48-75F5AA45BA79}"/>
+                <a16:creationId xmlns:a16="http://schemas.microsoft.com/office/drawing/2014/main" id="{8E1B9197-92AA-4302-981D-8C9AD2E6410E}"/>
               </a:ext>
             </a:extLst>
           </p:cNvPr>
@@ -14519,7 +14519,7 @@
           <p:cNvPr id="4" name="">
             <a:extLst xmlns:a="http://schemas.openxmlformats.org/drawingml/2006/main">
               <a:ext uri="{FF2B5EF4-FFF2-40B4-BE49-F238E27FC236}">
-                <a16:creationId xmlns:a16="http://schemas.microsoft.com/office/drawing/2014/main" id="{C1F206CD-F5C2-47ED-9AB9-6BCD1B94A072}"/>
+                <a16:creationId xmlns:a16="http://schemas.microsoft.com/office/drawing/2014/main" id="{08168B7C-6030-48FA-A84E-D6F187784265}"/>
               </a:ext>
             </a:extLst>
           </p:cNvPr>
@@ -14583,7 +14583,7 @@
           <p:cNvPr id="5" name="">
             <a:extLst xmlns:a="http://schemas.openxmlformats.org/drawingml/2006/main">
               <a:ext uri="{FF2B5EF4-FFF2-40B4-BE49-F238E27FC236}">
-                <a16:creationId xmlns:a16="http://schemas.microsoft.com/office/drawing/2014/main" id="{73737014-86F7-4FB2-907F-DE2556A7A2DB}"/>
+                <a16:creationId xmlns:a16="http://schemas.microsoft.com/office/drawing/2014/main" id="{BAAAAB19-070C-4532-A88F-52A4587CEEAE}"/>
               </a:ext>
             </a:extLst>
           </p:cNvPr>
@@ -14647,7 +14647,7 @@
           <p:cNvPr id="6" name="">
             <a:extLst xmlns:a="http://schemas.openxmlformats.org/drawingml/2006/main">
               <a:ext uri="{FF2B5EF4-FFF2-40B4-BE49-F238E27FC236}">
-                <a16:creationId xmlns:a16="http://schemas.microsoft.com/office/drawing/2014/main" id="{AE4EFBDB-F930-47F0-954B-7D9BD8218024}"/>
+                <a16:creationId xmlns:a16="http://schemas.microsoft.com/office/drawing/2014/main" id="{6EF7FCAB-287B-41B5-A5E0-23A7E36EC1DA}"/>
               </a:ext>
             </a:extLst>
           </p:cNvPr>
@@ -14711,7 +14711,7 @@
           <p:cNvPr id="7" name="">
             <a:extLst xmlns:a="http://schemas.openxmlformats.org/drawingml/2006/main">
               <a:ext uri="{FF2B5EF4-FFF2-40B4-BE49-F238E27FC236}">
-                <a16:creationId xmlns:a16="http://schemas.microsoft.com/office/drawing/2014/main" id="{381E9CF2-86FD-4EA9-9555-1870D5A70E75}"/>
+                <a16:creationId xmlns:a16="http://schemas.microsoft.com/office/drawing/2014/main" id="{4F6042AC-6837-4113-B171-DD4784362D60}"/>
               </a:ext>
             </a:extLst>
           </p:cNvPr>
@@ -14746,7 +14746,7 @@
           <p:cNvPr id="8" name="">
             <a:extLst xmlns:a="http://schemas.openxmlformats.org/drawingml/2006/main">
               <a:ext uri="{FF2B5EF4-FFF2-40B4-BE49-F238E27FC236}">
-                <a16:creationId xmlns:a16="http://schemas.microsoft.com/office/drawing/2014/main" id="{A8674C65-C6EC-418F-998E-9C9899AC61D7}"/>
+                <a16:creationId xmlns:a16="http://schemas.microsoft.com/office/drawing/2014/main" id="{3BE34959-1675-4993-AAA0-16B641D08D23}"/>
               </a:ext>
             </a:extLst>
           </p:cNvPr>
@@ -14810,7 +14810,7 @@
           <p:cNvPr id="9" name="">
             <a:extLst xmlns:a="http://schemas.openxmlformats.org/drawingml/2006/main">
               <a:ext uri="{FF2B5EF4-FFF2-40B4-BE49-F238E27FC236}">
-                <a16:creationId xmlns:a16="http://schemas.microsoft.com/office/drawing/2014/main" id="{40208CFF-7CEA-400B-B45B-CA024C536448}"/>
+                <a16:creationId xmlns:a16="http://schemas.microsoft.com/office/drawing/2014/main" id="{4BF958FF-95F3-4D1B-AF74-8EF27D1F30D0}"/>
               </a:ext>
             </a:extLst>
           </p:cNvPr>
@@ -14874,7 +14874,7 @@
           <p:cNvPr id="10" name="">
             <a:extLst xmlns:a="http://schemas.openxmlformats.org/drawingml/2006/main">
               <a:ext uri="{FF2B5EF4-FFF2-40B4-BE49-F238E27FC236}">
-                <a16:creationId xmlns:a16="http://schemas.microsoft.com/office/drawing/2014/main" id="{2A1D3CEB-A013-4D17-B315-868BD570CE62}"/>
+                <a16:creationId xmlns:a16="http://schemas.microsoft.com/office/drawing/2014/main" id="{5A3ABF05-0DBB-42E7-9A82-0AB39D75DE3B}"/>
               </a:ext>
             </a:extLst>
           </p:cNvPr>
@@ -14907,7 +14907,7 @@
           <p:cNvPr id="11" name="">
             <a:extLst xmlns:a="http://schemas.openxmlformats.org/drawingml/2006/main">
               <a:ext uri="{FF2B5EF4-FFF2-40B4-BE49-F238E27FC236}">
-                <a16:creationId xmlns:a16="http://schemas.microsoft.com/office/drawing/2014/main" id="{6285327F-83AD-4705-B88C-186FB5661373}"/>
+                <a16:creationId xmlns:a16="http://schemas.microsoft.com/office/drawing/2014/main" id="{2C46B0A6-229D-4970-8ECA-B8C4D3C28343}"/>
               </a:ext>
             </a:extLst>
           </p:cNvPr>
@@ -14942,7 +14942,7 @@
           <p:cNvPr id="12" name="">
             <a:extLst xmlns:a="http://schemas.openxmlformats.org/drawingml/2006/main">
               <a:ext uri="{FF2B5EF4-FFF2-40B4-BE49-F238E27FC236}">
-                <a16:creationId xmlns:a16="http://schemas.microsoft.com/office/drawing/2014/main" id="{CBE31391-B28E-479C-96AE-1DAF63C6E5A2}"/>
+                <a16:creationId xmlns:a16="http://schemas.microsoft.com/office/drawing/2014/main" id="{8F4BE054-E1D8-4C30-A304-8003DAE63B81}"/>
               </a:ext>
             </a:extLst>
           </p:cNvPr>
@@ -15006,7 +15006,7 @@
           <p:cNvPr id="13" name="">
             <a:extLst xmlns:a="http://schemas.openxmlformats.org/drawingml/2006/main">
               <a:ext uri="{FF2B5EF4-FFF2-40B4-BE49-F238E27FC236}">
-                <a16:creationId xmlns:a16="http://schemas.microsoft.com/office/drawing/2014/main" id="{41171E62-CD1F-441F-BB04-F0EF5707023A}"/>
+                <a16:creationId xmlns:a16="http://schemas.microsoft.com/office/drawing/2014/main" id="{1237D7C3-E107-4D9C-8901-3793170FF81C}"/>
               </a:ext>
             </a:extLst>
           </p:cNvPr>
@@ -15070,7 +15070,7 @@
           <p:cNvPr id="14" name="">
             <a:extLst xmlns:a="http://schemas.openxmlformats.org/drawingml/2006/main">
               <a:ext uri="{FF2B5EF4-FFF2-40B4-BE49-F238E27FC236}">
-                <a16:creationId xmlns:a16="http://schemas.microsoft.com/office/drawing/2014/main" id="{A9F0BC1B-F361-413C-992B-EE12D7052596}"/>
+                <a16:creationId xmlns:a16="http://schemas.microsoft.com/office/drawing/2014/main" id="{AD7D6D91-1495-4F98-B50A-31F5B2A1B0DC}"/>
               </a:ext>
             </a:extLst>
           </p:cNvPr>
@@ -15103,7 +15103,7 @@
           <p:cNvPr id="15" name="">
             <a:extLst xmlns:a="http://schemas.openxmlformats.org/drawingml/2006/main">
               <a:ext uri="{FF2B5EF4-FFF2-40B4-BE49-F238E27FC236}">
-                <a16:creationId xmlns:a16="http://schemas.microsoft.com/office/drawing/2014/main" id="{1DADC01B-66ED-41A6-AA77-CA83F0CF1BA5}"/>
+                <a16:creationId xmlns:a16="http://schemas.microsoft.com/office/drawing/2014/main" id="{85408F63-6C6E-4C1A-8C12-F8E127420F2C}"/>
               </a:ext>
             </a:extLst>
           </p:cNvPr>
@@ -15138,7 +15138,7 @@
           <p:cNvPr id="16" name="">
             <a:extLst xmlns:a="http://schemas.openxmlformats.org/drawingml/2006/main">
               <a:ext uri="{FF2B5EF4-FFF2-40B4-BE49-F238E27FC236}">
-                <a16:creationId xmlns:a16="http://schemas.microsoft.com/office/drawing/2014/main" id="{C22550F1-138F-46B0-82A7-6193E8960BBA}"/>
+                <a16:creationId xmlns:a16="http://schemas.microsoft.com/office/drawing/2014/main" id="{E88193B7-DBB1-46C8-941E-8078B991DCBA}"/>
               </a:ext>
             </a:extLst>
           </p:cNvPr>
@@ -15202,7 +15202,7 @@
           <p:cNvPr id="17" name="">
             <a:extLst xmlns:a="http://schemas.openxmlformats.org/drawingml/2006/main">
               <a:ext uri="{FF2B5EF4-FFF2-40B4-BE49-F238E27FC236}">
-                <a16:creationId xmlns:a16="http://schemas.microsoft.com/office/drawing/2014/main" id="{648AF937-C5AE-44BD-9A43-6AE44D49DA32}"/>
+                <a16:creationId xmlns:a16="http://schemas.microsoft.com/office/drawing/2014/main" id="{FEE375C1-E886-4D89-9B32-197901EA4344}"/>
               </a:ext>
             </a:extLst>
           </p:cNvPr>
@@ -15266,7 +15266,7 @@
           <p:cNvPr id="18" name="">
             <a:extLst xmlns:a="http://schemas.openxmlformats.org/drawingml/2006/main">
               <a:ext uri="{FF2B5EF4-FFF2-40B4-BE49-F238E27FC236}">
-                <a16:creationId xmlns:a16="http://schemas.microsoft.com/office/drawing/2014/main" id="{CBC28CA9-4078-43F4-9826-929C195A8D0B}"/>
+                <a16:creationId xmlns:a16="http://schemas.microsoft.com/office/drawing/2014/main" id="{E2E864C8-FA16-492D-B793-612CDE0BBF79}"/>
               </a:ext>
             </a:extLst>
           </p:cNvPr>
@@ -15299,7 +15299,7 @@
           <p:cNvPr id="19" name="">
             <a:extLst xmlns:a="http://schemas.openxmlformats.org/drawingml/2006/main">
               <a:ext uri="{FF2B5EF4-FFF2-40B4-BE49-F238E27FC236}">
-                <a16:creationId xmlns:a16="http://schemas.microsoft.com/office/drawing/2014/main" id="{AD96DCEE-B438-4001-8E98-ED1A4A2E70AA}"/>
+                <a16:creationId xmlns:a16="http://schemas.microsoft.com/office/drawing/2014/main" id="{8ABEB0D6-E84B-42A2-841D-DF0ED9FEA049}"/>
               </a:ext>
             </a:extLst>
           </p:cNvPr>
@@ -15334,7 +15334,7 @@
           <p:cNvPr id="20" name="">
             <a:extLst xmlns:a="http://schemas.openxmlformats.org/drawingml/2006/main">
               <a:ext uri="{FF2B5EF4-FFF2-40B4-BE49-F238E27FC236}">
-                <a16:creationId xmlns:a16="http://schemas.microsoft.com/office/drawing/2014/main" id="{6F5D7080-548E-46C9-8CDC-B2975EE9E6B2}"/>
+                <a16:creationId xmlns:a16="http://schemas.microsoft.com/office/drawing/2014/main" id="{036A3F59-7913-43E1-8348-904A74B43FAC}"/>
               </a:ext>
             </a:extLst>
           </p:cNvPr>
@@ -15398,7 +15398,7 @@
           <p:cNvPr id="21" name="">
             <a:extLst xmlns:a="http://schemas.openxmlformats.org/drawingml/2006/main">
               <a:ext uri="{FF2B5EF4-FFF2-40B4-BE49-F238E27FC236}">
-                <a16:creationId xmlns:a16="http://schemas.microsoft.com/office/drawing/2014/main" id="{DA374386-24B0-480E-A9E5-12DFBD8E027B}"/>
+                <a16:creationId xmlns:a16="http://schemas.microsoft.com/office/drawing/2014/main" id="{FBC499EC-E13F-4264-8B34-80D14E519534}"/>
               </a:ext>
             </a:extLst>
           </p:cNvPr>
@@ -15462,7 +15462,7 @@
           <p:cNvPr id="22" name="">
             <a:extLst xmlns:a="http://schemas.openxmlformats.org/drawingml/2006/main">
               <a:ext uri="{FF2B5EF4-FFF2-40B4-BE49-F238E27FC236}">
-                <a16:creationId xmlns:a16="http://schemas.microsoft.com/office/drawing/2014/main" id="{9AF20CFA-1B0E-4BE8-9513-E22709B52837}"/>
+                <a16:creationId xmlns:a16="http://schemas.microsoft.com/office/drawing/2014/main" id="{BE8C2C96-AC78-42EF-9994-94B87E7E0555}"/>
               </a:ext>
             </a:extLst>
           </p:cNvPr>
@@ -15526,7 +15526,7 @@
           <p:cNvPr id="23" name="">
             <a:extLst xmlns:a="http://schemas.openxmlformats.org/drawingml/2006/main">
               <a:ext uri="{FF2B5EF4-FFF2-40B4-BE49-F238E27FC236}">
-                <a16:creationId xmlns:a16="http://schemas.microsoft.com/office/drawing/2014/main" id="{59B620F1-2952-4AF9-873C-C9C8461E8AD9}"/>
+                <a16:creationId xmlns:a16="http://schemas.microsoft.com/office/drawing/2014/main" id="{7BAF8AE5-40AF-44F0-BE3C-44A65A819524}"/>
               </a:ext>
             </a:extLst>
           </p:cNvPr>
@@ -15590,7 +15590,7 @@
           <p:cNvPr id="24" name="">
             <a:extLst xmlns:a="http://schemas.openxmlformats.org/drawingml/2006/main">
               <a:ext uri="{FF2B5EF4-FFF2-40B4-BE49-F238E27FC236}">
-                <a16:creationId xmlns:a16="http://schemas.microsoft.com/office/drawing/2014/main" id="{D4BC3ADC-EC2C-471F-96D3-A88C509B3D98}"/>
+                <a16:creationId xmlns:a16="http://schemas.microsoft.com/office/drawing/2014/main" id="{D957C960-79FC-43B4-9396-A5B6C56DC6F3}"/>
               </a:ext>
             </a:extLst>
           </p:cNvPr>
@@ -15623,7 +15623,7 @@
           <p:cNvPr id="25" name="">
             <a:extLst xmlns:a="http://schemas.openxmlformats.org/drawingml/2006/main">
               <a:ext uri="{FF2B5EF4-FFF2-40B4-BE49-F238E27FC236}">
-                <a16:creationId xmlns:a16="http://schemas.microsoft.com/office/drawing/2014/main" id="{ACFA7818-78A6-409D-A60D-07C5989F244E}"/>
+                <a16:creationId xmlns:a16="http://schemas.microsoft.com/office/drawing/2014/main" id="{1E6E1D03-C935-4A12-9184-078568C946F4}"/>
               </a:ext>
             </a:extLst>
           </p:cNvPr>
@@ -15687,7 +15687,7 @@
           <p:cNvPr id="26" name="">
             <a:extLst xmlns:a="http://schemas.openxmlformats.org/drawingml/2006/main">
               <a:ext uri="{FF2B5EF4-FFF2-40B4-BE49-F238E27FC236}">
-                <a16:creationId xmlns:a16="http://schemas.microsoft.com/office/drawing/2014/main" id="{A16BBDDF-3DB4-4966-AA1E-84F73C421A53}"/>
+                <a16:creationId xmlns:a16="http://schemas.microsoft.com/office/drawing/2014/main" id="{54B45B1B-9224-4F7A-8781-24A61FD7ED47}"/>
               </a:ext>
             </a:extLst>
           </p:cNvPr>
@@ -15749,7 +15749,7 @@
     </p:spTree>
     <p:extLst>
       <p:ext uri="{BB962C8B-B14F-4D97-AF65-F5344CB8AC3E}">
-        <p14:creationId xmlns:p14="http://schemas.microsoft.com/office/powerpoint/2010/main" val="209083579"/>
+        <p14:creationId xmlns:p14="http://schemas.microsoft.com/office/powerpoint/2010/main" val="936477430"/>
       </p:ext>
     </p:extLst>
   </p:cSld>
@@ -15777,7 +15777,7 @@
           <p:nvPr/>
         </p:nvPicPr>
         <p:blipFill>
-          <a:blip xmlns:r="http://schemas.openxmlformats.org/officeDocument/2006/relationships" xmlns:a="http://schemas.openxmlformats.org/drawingml/2006/main" r:embed="Ra1f4be029d034555"/>
+          <a:blip xmlns:r="http://schemas.openxmlformats.org/officeDocument/2006/relationships" xmlns:a="http://schemas.openxmlformats.org/drawingml/2006/main" r:embed="R8ee19474141c4056"/>
           <a:srcRect xmlns:a="http://schemas.openxmlformats.org/drawingml/2006/main" l="0" t="7813" r="0" b="7813"/>
           <a:stretch xmlns:a="http://schemas.openxmlformats.org/drawingml/2006/main">
             <a:fillRect l="0" t="0" r="0" b="0"/>
@@ -15798,7 +15798,7 @@
           <p:cNvPr id="2" name="">
             <a:extLst xmlns:a="http://schemas.openxmlformats.org/drawingml/2006/main">
               <a:ext uri="{FF2B5EF4-FFF2-40B4-BE49-F238E27FC236}">
-                <a16:creationId xmlns:a16="http://schemas.microsoft.com/office/drawing/2014/main" id="{C9BC407E-F5D9-4214-8B35-00FADDA6FA63}"/>
+                <a16:creationId xmlns:a16="http://schemas.microsoft.com/office/drawing/2014/main" id="{AF290E89-B9C0-4035-A86A-8D4C38DF5C07}"/>
               </a:ext>
             </a:extLst>
           </p:cNvPr>
@@ -15835,7 +15835,7 @@
           <p:cNvPr id="3" name="">
             <a:extLst xmlns:a="http://schemas.openxmlformats.org/drawingml/2006/main">
               <a:ext uri="{FF2B5EF4-FFF2-40B4-BE49-F238E27FC236}">
-                <a16:creationId xmlns:a16="http://schemas.microsoft.com/office/drawing/2014/main" id="{7EE530CF-F426-493E-849A-F206FEE021B9}"/>
+                <a16:creationId xmlns:a16="http://schemas.microsoft.com/office/drawing/2014/main" id="{8EE4C180-3B1D-4D63-AA04-30CF8B68DFF7}"/>
               </a:ext>
             </a:extLst>
           </p:cNvPr>
@@ -15872,7 +15872,7 @@
           <p:cNvPr id="4" name="">
             <a:extLst xmlns:a="http://schemas.openxmlformats.org/drawingml/2006/main">
               <a:ext uri="{FF2B5EF4-FFF2-40B4-BE49-F238E27FC236}">
-                <a16:creationId xmlns:a16="http://schemas.microsoft.com/office/drawing/2014/main" id="{391F375E-7BD3-470A-932F-77E7FDB503B9}"/>
+                <a16:creationId xmlns:a16="http://schemas.microsoft.com/office/drawing/2014/main" id="{00F0F8BC-D33C-4DB3-A949-6B5C869F89FF}"/>
               </a:ext>
             </a:extLst>
           </p:cNvPr>
@@ -15936,7 +15936,7 @@
           <p:cNvPr id="5" name="">
             <a:extLst xmlns:a="http://schemas.openxmlformats.org/drawingml/2006/main">
               <a:ext uri="{FF2B5EF4-FFF2-40B4-BE49-F238E27FC236}">
-                <a16:creationId xmlns:a16="http://schemas.microsoft.com/office/drawing/2014/main" id="{E8034C3C-41A3-4EEB-A343-564B72A4A9F1}"/>
+                <a16:creationId xmlns:a16="http://schemas.microsoft.com/office/drawing/2014/main" id="{D6C475F5-4789-4E57-BCE3-3092AFBBD8A2}"/>
               </a:ext>
             </a:extLst>
           </p:cNvPr>
@@ -16000,7 +16000,7 @@
           <p:cNvPr id="6" name="">
             <a:extLst xmlns:a="http://schemas.openxmlformats.org/drawingml/2006/main">
               <a:ext uri="{FF2B5EF4-FFF2-40B4-BE49-F238E27FC236}">
-                <a16:creationId xmlns:a16="http://schemas.microsoft.com/office/drawing/2014/main" id="{04294DC5-4A9A-4E61-9887-F8C0939734EE}"/>
+                <a16:creationId xmlns:a16="http://schemas.microsoft.com/office/drawing/2014/main" id="{E3D84876-65DD-4E61-82AB-2F6F3DEA1A1D}"/>
               </a:ext>
             </a:extLst>
           </p:cNvPr>
@@ -16064,7 +16064,7 @@
           <p:cNvPr id="7" name="">
             <a:extLst xmlns:a="http://schemas.openxmlformats.org/drawingml/2006/main">
               <a:ext uri="{FF2B5EF4-FFF2-40B4-BE49-F238E27FC236}">
-                <a16:creationId xmlns:a16="http://schemas.microsoft.com/office/drawing/2014/main" id="{3626670E-6D80-44D0-9135-35577DCEB98C}"/>
+                <a16:creationId xmlns:a16="http://schemas.microsoft.com/office/drawing/2014/main" id="{CD52C75A-DAF3-462B-8E2B-8FEC70F3BB9E}"/>
               </a:ext>
             </a:extLst>
           </p:cNvPr>
@@ -16099,7 +16099,7 @@
           <p:cNvPr id="8" name="">
             <a:extLst xmlns:a="http://schemas.openxmlformats.org/drawingml/2006/main">
               <a:ext uri="{FF2B5EF4-FFF2-40B4-BE49-F238E27FC236}">
-                <a16:creationId xmlns:a16="http://schemas.microsoft.com/office/drawing/2014/main" id="{0B9D3CA8-3B4D-4905-A855-0BAE6E3938C1}"/>
+                <a16:creationId xmlns:a16="http://schemas.microsoft.com/office/drawing/2014/main" id="{7D1642C9-0090-4D3E-81A7-F193C926B20B}"/>
               </a:ext>
             </a:extLst>
           </p:cNvPr>
@@ -16163,7 +16163,7 @@
           <p:cNvPr id="9" name="">
             <a:extLst xmlns:a="http://schemas.openxmlformats.org/drawingml/2006/main">
               <a:ext uri="{FF2B5EF4-FFF2-40B4-BE49-F238E27FC236}">
-                <a16:creationId xmlns:a16="http://schemas.microsoft.com/office/drawing/2014/main" id="{590645C9-26E3-400E-9A90-44C3B51CEBCA}"/>
+                <a16:creationId xmlns:a16="http://schemas.microsoft.com/office/drawing/2014/main" id="{00CE5351-7CFA-4700-A7AE-B4AE925A8BC4}"/>
               </a:ext>
             </a:extLst>
           </p:cNvPr>
@@ -16227,7 +16227,7 @@
           <p:cNvPr id="10" name="">
             <a:extLst xmlns:a="http://schemas.openxmlformats.org/drawingml/2006/main">
               <a:ext uri="{FF2B5EF4-FFF2-40B4-BE49-F238E27FC236}">
-                <a16:creationId xmlns:a16="http://schemas.microsoft.com/office/drawing/2014/main" id="{00A78F2A-BF25-4453-B215-51966C0B004A}"/>
+                <a16:creationId xmlns:a16="http://schemas.microsoft.com/office/drawing/2014/main" id="{E0E84DC2-73E2-460F-8CAC-DAA610396220}"/>
               </a:ext>
             </a:extLst>
           </p:cNvPr>
@@ -16262,7 +16262,7 @@
           <p:cNvPr id="11" name="">
             <a:extLst xmlns:a="http://schemas.openxmlformats.org/drawingml/2006/main">
               <a:ext uri="{FF2B5EF4-FFF2-40B4-BE49-F238E27FC236}">
-                <a16:creationId xmlns:a16="http://schemas.microsoft.com/office/drawing/2014/main" id="{ABEFBB5B-9B7D-45BB-8D4B-DCB1E94CA1D7}"/>
+                <a16:creationId xmlns:a16="http://schemas.microsoft.com/office/drawing/2014/main" id="{7E480433-8F8A-4CD9-A379-8DB72191AC9B}"/>
               </a:ext>
             </a:extLst>
           </p:cNvPr>
@@ -16326,7 +16326,7 @@
           <p:cNvPr id="12" name="">
             <a:extLst xmlns:a="http://schemas.openxmlformats.org/drawingml/2006/main">
               <a:ext uri="{FF2B5EF4-FFF2-40B4-BE49-F238E27FC236}">
-                <a16:creationId xmlns:a16="http://schemas.microsoft.com/office/drawing/2014/main" id="{566080D3-D2B2-4275-BFC5-45233C3A8F2C}"/>
+                <a16:creationId xmlns:a16="http://schemas.microsoft.com/office/drawing/2014/main" id="{1C1617DC-F31F-468A-82B4-110D4F7BED9C}"/>
               </a:ext>
             </a:extLst>
           </p:cNvPr>
@@ -16390,7 +16390,7 @@
           <p:cNvPr id="13" name="">
             <a:extLst xmlns:a="http://schemas.openxmlformats.org/drawingml/2006/main">
               <a:ext uri="{FF2B5EF4-FFF2-40B4-BE49-F238E27FC236}">
-                <a16:creationId xmlns:a16="http://schemas.microsoft.com/office/drawing/2014/main" id="{363013BA-26DC-48C8-B6CA-932700566CA1}"/>
+                <a16:creationId xmlns:a16="http://schemas.microsoft.com/office/drawing/2014/main" id="{BA2546D5-F562-4635-AEB7-3EB60962376A}"/>
               </a:ext>
             </a:extLst>
           </p:cNvPr>
@@ -16425,7 +16425,7 @@
           <p:cNvPr id="14" name="">
             <a:extLst xmlns:a="http://schemas.openxmlformats.org/drawingml/2006/main">
               <a:ext uri="{FF2B5EF4-FFF2-40B4-BE49-F238E27FC236}">
-                <a16:creationId xmlns:a16="http://schemas.microsoft.com/office/drawing/2014/main" id="{BAF862BF-3092-4A5E-B649-752929F75A33}"/>
+                <a16:creationId xmlns:a16="http://schemas.microsoft.com/office/drawing/2014/main" id="{B0402788-4978-47EE-8EB5-F369635ADE02}"/>
               </a:ext>
             </a:extLst>
           </p:cNvPr>
@@ -16489,7 +16489,7 @@
           <p:cNvPr id="15" name="">
             <a:extLst xmlns:a="http://schemas.openxmlformats.org/drawingml/2006/main">
               <a:ext uri="{FF2B5EF4-FFF2-40B4-BE49-F238E27FC236}">
-                <a16:creationId xmlns:a16="http://schemas.microsoft.com/office/drawing/2014/main" id="{6E73C1C5-CF9B-4DB4-A8E7-D2169B6FC360}"/>
+                <a16:creationId xmlns:a16="http://schemas.microsoft.com/office/drawing/2014/main" id="{464BE412-1B3F-4B3A-9C1E-DCC2E5D1417E}"/>
               </a:ext>
             </a:extLst>
           </p:cNvPr>
@@ -16553,7 +16553,7 @@
           <p:cNvPr id="16" name="">
             <a:extLst xmlns:a="http://schemas.openxmlformats.org/drawingml/2006/main">
               <a:ext uri="{FF2B5EF4-FFF2-40B4-BE49-F238E27FC236}">
-                <a16:creationId xmlns:a16="http://schemas.microsoft.com/office/drawing/2014/main" id="{F5566D7F-D520-4485-945A-0AD2127611F0}"/>
+                <a16:creationId xmlns:a16="http://schemas.microsoft.com/office/drawing/2014/main" id="{1968600E-4207-4EA5-8987-B2794D8619A4}"/>
               </a:ext>
             </a:extLst>
           </p:cNvPr>
@@ -16588,7 +16588,7 @@
           <p:cNvPr id="17" name="">
             <a:extLst xmlns:a="http://schemas.openxmlformats.org/drawingml/2006/main">
               <a:ext uri="{FF2B5EF4-FFF2-40B4-BE49-F238E27FC236}">
-                <a16:creationId xmlns:a16="http://schemas.microsoft.com/office/drawing/2014/main" id="{3C758DBC-28C6-408A-9927-394DF8A72AE5}"/>
+                <a16:creationId xmlns:a16="http://schemas.microsoft.com/office/drawing/2014/main" id="{143D0C53-B20B-42D0-940B-0DEA14AAAF2C}"/>
               </a:ext>
             </a:extLst>
           </p:cNvPr>
@@ -16652,7 +16652,7 @@
           <p:cNvPr id="18" name="">
             <a:extLst xmlns:a="http://schemas.openxmlformats.org/drawingml/2006/main">
               <a:ext uri="{FF2B5EF4-FFF2-40B4-BE49-F238E27FC236}">
-                <a16:creationId xmlns:a16="http://schemas.microsoft.com/office/drawing/2014/main" id="{393E0844-648B-4DA8-84A4-71E7DD67C14D}"/>
+                <a16:creationId xmlns:a16="http://schemas.microsoft.com/office/drawing/2014/main" id="{8128821C-B9EB-41AA-A080-75AE250B2C47}"/>
               </a:ext>
             </a:extLst>
           </p:cNvPr>
@@ -16716,7 +16716,7 @@
           <p:cNvPr id="19" name="">
             <a:extLst xmlns:a="http://schemas.openxmlformats.org/drawingml/2006/main">
               <a:ext uri="{FF2B5EF4-FFF2-40B4-BE49-F238E27FC236}">
-                <a16:creationId xmlns:a16="http://schemas.microsoft.com/office/drawing/2014/main" id="{FCFB9EA2-EC5F-43EA-8A18-593B055DBE33}"/>
+                <a16:creationId xmlns:a16="http://schemas.microsoft.com/office/drawing/2014/main" id="{B1779EF2-B9D7-49C4-8869-07F7C0263910}"/>
               </a:ext>
             </a:extLst>
           </p:cNvPr>
@@ -16751,7 +16751,7 @@
           <p:cNvPr id="20" name="">
             <a:extLst xmlns:a="http://schemas.openxmlformats.org/drawingml/2006/main">
               <a:ext uri="{FF2B5EF4-FFF2-40B4-BE49-F238E27FC236}">
-                <a16:creationId xmlns:a16="http://schemas.microsoft.com/office/drawing/2014/main" id="{9A777FBF-54A8-454C-BCA4-CB9E5EF486FD}"/>
+                <a16:creationId xmlns:a16="http://schemas.microsoft.com/office/drawing/2014/main" id="{50300F6A-F66A-48BA-B6CE-B8822004D0B5}"/>
               </a:ext>
             </a:extLst>
           </p:cNvPr>
@@ -16815,7 +16815,7 @@
           <p:cNvPr id="21" name="">
             <a:extLst xmlns:a="http://schemas.openxmlformats.org/drawingml/2006/main">
               <a:ext uri="{FF2B5EF4-FFF2-40B4-BE49-F238E27FC236}">
-                <a16:creationId xmlns:a16="http://schemas.microsoft.com/office/drawing/2014/main" id="{81DCA417-C931-4545-A4D1-88A5C4DDF561}"/>
+                <a16:creationId xmlns:a16="http://schemas.microsoft.com/office/drawing/2014/main" id="{C1ED4AD9-7976-49F1-83E9-844F8DF7C847}"/>
               </a:ext>
             </a:extLst>
           </p:cNvPr>
@@ -16879,7 +16879,7 @@
           <p:cNvPr id="22" name="">
             <a:extLst xmlns:a="http://schemas.openxmlformats.org/drawingml/2006/main">
               <a:ext uri="{FF2B5EF4-FFF2-40B4-BE49-F238E27FC236}">
-                <a16:creationId xmlns:a16="http://schemas.microsoft.com/office/drawing/2014/main" id="{4DD4B995-6605-4832-B800-7E9B9BB599A8}"/>
+                <a16:creationId xmlns:a16="http://schemas.microsoft.com/office/drawing/2014/main" id="{892778B1-B5E8-4A54-BCA8-48E82C2BB24F}"/>
               </a:ext>
             </a:extLst>
           </p:cNvPr>
@@ -16912,7 +16912,7 @@
           <p:cNvPr id="23" name="">
             <a:extLst xmlns:a="http://schemas.openxmlformats.org/drawingml/2006/main">
               <a:ext uri="{FF2B5EF4-FFF2-40B4-BE49-F238E27FC236}">
-                <a16:creationId xmlns:a16="http://schemas.microsoft.com/office/drawing/2014/main" id="{CE8497AA-8DAB-496C-98D6-44714B81DC4D}"/>
+                <a16:creationId xmlns:a16="http://schemas.microsoft.com/office/drawing/2014/main" id="{6A2B2D05-BCEB-4B90-BEAA-8B72F02941DB}"/>
               </a:ext>
             </a:extLst>
           </p:cNvPr>
@@ -16947,7 +16947,7 @@
           <p:cNvPr id="24" name="">
             <a:extLst xmlns:a="http://schemas.openxmlformats.org/drawingml/2006/main">
               <a:ext uri="{FF2B5EF4-FFF2-40B4-BE49-F238E27FC236}">
-                <a16:creationId xmlns:a16="http://schemas.microsoft.com/office/drawing/2014/main" id="{634B1DC7-394C-422A-9030-C8F87337A20F}"/>
+                <a16:creationId xmlns:a16="http://schemas.microsoft.com/office/drawing/2014/main" id="{B63D3543-6810-45EA-B5CB-F41B9AFC8404}"/>
               </a:ext>
             </a:extLst>
           </p:cNvPr>
@@ -17011,7 +17011,7 @@
           <p:cNvPr id="25" name="">
             <a:extLst xmlns:a="http://schemas.openxmlformats.org/drawingml/2006/main">
               <a:ext uri="{FF2B5EF4-FFF2-40B4-BE49-F238E27FC236}">
-                <a16:creationId xmlns:a16="http://schemas.microsoft.com/office/drawing/2014/main" id="{A789B5A5-B559-4E5C-BD99-980D304B867A}"/>
+                <a16:creationId xmlns:a16="http://schemas.microsoft.com/office/drawing/2014/main" id="{63BD5C93-79F3-41DF-8E09-0A0000219505}"/>
               </a:ext>
             </a:extLst>
           </p:cNvPr>
@@ -17075,7 +17075,7 @@
           <p:cNvPr id="26" name="">
             <a:extLst xmlns:a="http://schemas.openxmlformats.org/drawingml/2006/main">
               <a:ext uri="{FF2B5EF4-FFF2-40B4-BE49-F238E27FC236}">
-                <a16:creationId xmlns:a16="http://schemas.microsoft.com/office/drawing/2014/main" id="{4CAC7B7E-CD64-43DC-8C4F-A26AF6767060}"/>
+                <a16:creationId xmlns:a16="http://schemas.microsoft.com/office/drawing/2014/main" id="{652939BC-8274-49D8-A2D9-FF856DE7FF69}"/>
               </a:ext>
             </a:extLst>
           </p:cNvPr>
@@ -17108,7 +17108,7 @@
           <p:cNvPr id="27" name="">
             <a:extLst xmlns:a="http://schemas.openxmlformats.org/drawingml/2006/main">
               <a:ext uri="{FF2B5EF4-FFF2-40B4-BE49-F238E27FC236}">
-                <a16:creationId xmlns:a16="http://schemas.microsoft.com/office/drawing/2014/main" id="{6E6B907D-6C90-4287-BF52-D411BCF64797}"/>
+                <a16:creationId xmlns:a16="http://schemas.microsoft.com/office/drawing/2014/main" id="{EDDDCA8C-6AE5-4C2A-986D-2C31E4EFC441}"/>
               </a:ext>
             </a:extLst>
           </p:cNvPr>
@@ -17143,7 +17143,7 @@
           <p:cNvPr id="28" name="">
             <a:extLst xmlns:a="http://schemas.openxmlformats.org/drawingml/2006/main">
               <a:ext uri="{FF2B5EF4-FFF2-40B4-BE49-F238E27FC236}">
-                <a16:creationId xmlns:a16="http://schemas.microsoft.com/office/drawing/2014/main" id="{1438B108-5D9A-4281-A73B-F52B89B346B1}"/>
+                <a16:creationId xmlns:a16="http://schemas.microsoft.com/office/drawing/2014/main" id="{D0A08A85-607D-4C2F-8188-D345F585AFB2}"/>
               </a:ext>
             </a:extLst>
           </p:cNvPr>
@@ -17207,7 +17207,7 @@
           <p:cNvPr id="29" name="">
             <a:extLst xmlns:a="http://schemas.openxmlformats.org/drawingml/2006/main">
               <a:ext uri="{FF2B5EF4-FFF2-40B4-BE49-F238E27FC236}">
-                <a16:creationId xmlns:a16="http://schemas.microsoft.com/office/drawing/2014/main" id="{2E9BFBA9-D0EC-46C4-B5DD-464F615E4E11}"/>
+                <a16:creationId xmlns:a16="http://schemas.microsoft.com/office/drawing/2014/main" id="{A5600B9D-24AC-4570-9314-5E7D6310642D}"/>
               </a:ext>
             </a:extLst>
           </p:cNvPr>
@@ -17271,7 +17271,7 @@
           <p:cNvPr id="30" name="">
             <a:extLst xmlns:a="http://schemas.openxmlformats.org/drawingml/2006/main">
               <a:ext uri="{FF2B5EF4-FFF2-40B4-BE49-F238E27FC236}">
-                <a16:creationId xmlns:a16="http://schemas.microsoft.com/office/drawing/2014/main" id="{8F042512-8920-45B2-8B08-90A5893F73F1}"/>
+                <a16:creationId xmlns:a16="http://schemas.microsoft.com/office/drawing/2014/main" id="{B33621CB-69AC-4DC2-8C4E-58EA5A00C9C8}"/>
               </a:ext>
             </a:extLst>
           </p:cNvPr>
@@ -17304,7 +17304,7 @@
           <p:cNvPr id="31" name="">
             <a:extLst xmlns:a="http://schemas.openxmlformats.org/drawingml/2006/main">
               <a:ext uri="{FF2B5EF4-FFF2-40B4-BE49-F238E27FC236}">
-                <a16:creationId xmlns:a16="http://schemas.microsoft.com/office/drawing/2014/main" id="{84C9322D-A53B-4F87-A968-BE67A922AD00}"/>
+                <a16:creationId xmlns:a16="http://schemas.microsoft.com/office/drawing/2014/main" id="{66475D72-8535-486B-B245-9170D28EC464}"/>
               </a:ext>
             </a:extLst>
           </p:cNvPr>
@@ -17339,7 +17339,7 @@
           <p:cNvPr id="32" name="">
             <a:extLst xmlns:a="http://schemas.openxmlformats.org/drawingml/2006/main">
               <a:ext uri="{FF2B5EF4-FFF2-40B4-BE49-F238E27FC236}">
-                <a16:creationId xmlns:a16="http://schemas.microsoft.com/office/drawing/2014/main" id="{6D0CA58F-442E-4A8F-AE09-3BC97B0DED1A}"/>
+                <a16:creationId xmlns:a16="http://schemas.microsoft.com/office/drawing/2014/main" id="{0C267FF8-539C-40D1-A939-4F34EA92889F}"/>
               </a:ext>
             </a:extLst>
           </p:cNvPr>
@@ -17403,7 +17403,7 @@
           <p:cNvPr id="33" name="">
             <a:extLst xmlns:a="http://schemas.openxmlformats.org/drawingml/2006/main">
               <a:ext uri="{FF2B5EF4-FFF2-40B4-BE49-F238E27FC236}">
-                <a16:creationId xmlns:a16="http://schemas.microsoft.com/office/drawing/2014/main" id="{924D7415-DB08-483D-AA05-C589A6E494AF}"/>
+                <a16:creationId xmlns:a16="http://schemas.microsoft.com/office/drawing/2014/main" id="{AAA3A856-588A-41E6-B371-477ECFA5C47D}"/>
               </a:ext>
             </a:extLst>
           </p:cNvPr>
@@ -17467,7 +17467,7 @@
           <p:cNvPr id="34" name="">
             <a:extLst xmlns:a="http://schemas.openxmlformats.org/drawingml/2006/main">
               <a:ext uri="{FF2B5EF4-FFF2-40B4-BE49-F238E27FC236}">
-                <a16:creationId xmlns:a16="http://schemas.microsoft.com/office/drawing/2014/main" id="{D14B09C1-03DF-4DCE-BE5F-1DEC2667FCF2}"/>
+                <a16:creationId xmlns:a16="http://schemas.microsoft.com/office/drawing/2014/main" id="{836CBAD7-2422-491B-91FC-271C4C346781}"/>
               </a:ext>
             </a:extLst>
           </p:cNvPr>
@@ -17531,7 +17531,7 @@
           <p:cNvPr id="35" name="">
             <a:extLst xmlns:a="http://schemas.openxmlformats.org/drawingml/2006/main">
               <a:ext uri="{FF2B5EF4-FFF2-40B4-BE49-F238E27FC236}">
-                <a16:creationId xmlns:a16="http://schemas.microsoft.com/office/drawing/2014/main" id="{90F69CF6-00F1-41C8-BACE-23FD5C04E2DD}"/>
+                <a16:creationId xmlns:a16="http://schemas.microsoft.com/office/drawing/2014/main" id="{AB7A45D9-5721-48B9-969F-2EFA001B2515}"/>
               </a:ext>
             </a:extLst>
           </p:cNvPr>
@@ -17564,7 +17564,7 @@
           <p:cNvPr id="36" name="">
             <a:extLst xmlns:a="http://schemas.openxmlformats.org/drawingml/2006/main">
               <a:ext uri="{FF2B5EF4-FFF2-40B4-BE49-F238E27FC236}">
-                <a16:creationId xmlns:a16="http://schemas.microsoft.com/office/drawing/2014/main" id="{1B9A33C1-5584-4F36-836B-CBB791AB9157}"/>
+                <a16:creationId xmlns:a16="http://schemas.microsoft.com/office/drawing/2014/main" id="{2D0BAC26-7692-47F9-93DF-C3A99E7DF277}"/>
               </a:ext>
             </a:extLst>
           </p:cNvPr>
@@ -17628,7 +17628,7 @@
           <p:cNvPr id="37" name="">
             <a:extLst xmlns:a="http://schemas.openxmlformats.org/drawingml/2006/main">
               <a:ext uri="{FF2B5EF4-FFF2-40B4-BE49-F238E27FC236}">
-                <a16:creationId xmlns:a16="http://schemas.microsoft.com/office/drawing/2014/main" id="{9E8A27AB-1698-4F41-8197-ECD2132243C8}"/>
+                <a16:creationId xmlns:a16="http://schemas.microsoft.com/office/drawing/2014/main" id="{E9EC2983-3B6E-44E5-8B9E-C818E00B1AE8}"/>
               </a:ext>
             </a:extLst>
           </p:cNvPr>
@@ -17690,7 +17690,7 @@
     </p:spTree>
     <p:extLst>
       <p:ext uri="{BB962C8B-B14F-4D97-AF65-F5344CB8AC3E}">
-        <p14:creationId xmlns:p14="http://schemas.microsoft.com/office/powerpoint/2010/main" val="125754774"/>
+        <p14:creationId xmlns:p14="http://schemas.microsoft.com/office/powerpoint/2010/main" val="1255997272"/>
       </p:ext>
     </p:extLst>
   </p:cSld>
